--- a/template_thuanhoa.pptx
+++ b/template_thuanhoa.pptx
@@ -7,6 +7,12 @@
   <p:sldIdLst>
     <p:sldId id="256" r:id="rId7"/>
     <p:sldId id="257" r:id="rId8"/>
+    <p:sldId id="258" r:id="rId9"/>
+    <p:sldId id="259" r:id="rId10"/>
+    <p:sldId id="260" r:id="rId11"/>
+    <p:sldId id="261" r:id="rId12"/>
+    <p:sldId id="262" r:id="rId13"/>
+    <p:sldId id="263" r:id="rId14"/>
   </p:sldIdLst>
   <p:sldSz cx="12191695" cy="6858000" type="screen4x3"/>
   <p:notesSz cx="6858000" cy="9144000"/>
@@ -3727,6 +3733,2690 @@
             </a:pPr>
             <a:r>
               <a:t>Trường THPT Thuận Hoá — ĐHSP Huế | GV: Mai Xuân Văn</a:t>
+            </a:r>
+          </a:p>
+        </p:txBody>
+      </p:sp>
+    </p:spTree>
+  </p:cSld>
+  <p:clrMapOvr>
+    <a:masterClrMapping/>
+  </p:clrMapOvr>
+</p:sld>
+</file>
+
+<file path=ppt/slides/slide3.xml><?xml version="1.0" encoding="utf-8"?>
+<p:sld xmlns:a="http://schemas.openxmlformats.org/drawingml/2006/main" xmlns:p="http://schemas.openxmlformats.org/presentationml/2006/main" xmlns:r="http://schemas.openxmlformats.org/officeDocument/2006/relationships">
+  <p:cSld>
+    <p:spTree>
+      <p:nvGrpSpPr>
+        <p:cNvPr id="1" name=""/>
+        <p:cNvGrpSpPr/>
+        <p:nvPr/>
+      </p:nvGrpSpPr>
+      <p:grpSpPr/>
+      <p:sp>
+        <p:nvSpPr>
+          <p:cNvPr id="2" name="Rectangle 1"/>
+          <p:cNvSpPr/>
+          <p:nvPr/>
+        </p:nvSpPr>
+        <p:spPr>
+          <a:xfrm>
+            <a:off x="0" y="0"/>
+            <a:ext cx="12191695" cy="731520"/>
+          </a:xfrm>
+          <a:prstGeom prst="rect">
+            <a:avLst/>
+          </a:prstGeom>
+          <a:solidFill>
+            <a:srgbClr val="0078D7"/>
+          </a:solidFill>
+          <a:ln>
+            <a:noFill/>
+          </a:ln>
+        </p:spPr>
+        <p:style>
+          <a:lnRef idx="1">
+            <a:schemeClr val="accent1"/>
+          </a:lnRef>
+          <a:fillRef idx="3">
+            <a:schemeClr val="accent1"/>
+          </a:fillRef>
+          <a:effectRef idx="2">
+            <a:schemeClr val="accent1"/>
+          </a:effectRef>
+          <a:fontRef idx="minor">
+            <a:schemeClr val="lt1"/>
+          </a:fontRef>
+        </p:style>
+        <p:txBody>
+          <a:bodyPr rtlCol="0" anchor="ctr"/>
+          <a:lstStyle/>
+          <a:p>
+            <a:pPr algn="ctr"/>
+          </a:p>
+        </p:txBody>
+      </p:sp>
+      <p:sp>
+        <p:nvSpPr>
+          <p:cNvPr id="3" name="Oval 2"/>
+          <p:cNvSpPr/>
+          <p:nvPr/>
+        </p:nvSpPr>
+        <p:spPr>
+          <a:xfrm>
+            <a:off x="274320" y="137160"/>
+            <a:ext cx="457200" cy="457200"/>
+          </a:xfrm>
+          <a:prstGeom prst="ellipse">
+            <a:avLst/>
+          </a:prstGeom>
+          <a:solidFill>
+            <a:srgbClr val="F0F0F0"/>
+          </a:solidFill>
+          <a:ln w="25400">
+            <a:solidFill>
+              <a:srgbClr val="C8C8C8"/>
+            </a:solidFill>
+          </a:ln>
+        </p:spPr>
+        <p:style>
+          <a:lnRef idx="1">
+            <a:schemeClr val="accent1"/>
+          </a:lnRef>
+          <a:fillRef idx="3">
+            <a:schemeClr val="accent1"/>
+          </a:fillRef>
+          <a:effectRef idx="2">
+            <a:schemeClr val="accent1"/>
+          </a:effectRef>
+          <a:fontRef idx="minor">
+            <a:schemeClr val="lt1"/>
+          </a:fontRef>
+        </p:style>
+        <p:txBody>
+          <a:bodyPr rtlCol="0" anchor="ctr" wrap="square"/>
+          <a:lstStyle/>
+          <a:p>
+            <a:pPr algn="ctr">
+              <a:defRPr sz="1000" b="1">
+                <a:solidFill>
+                  <a:srgbClr val="C8C8C8"/>
+                </a:solidFill>
+              </a:defRPr>
+            </a:pPr>
+            <a:r>
+              <a:t>ĐHSP</a:t>
+            </a:r>
+          </a:p>
+        </p:txBody>
+      </p:sp>
+      <p:sp>
+        <p:nvSpPr>
+          <p:cNvPr id="4" name="Oval 3"/>
+          <p:cNvSpPr/>
+          <p:nvPr/>
+        </p:nvSpPr>
+        <p:spPr>
+          <a:xfrm>
+            <a:off x="822960" y="137160"/>
+            <a:ext cx="457200" cy="457200"/>
+          </a:xfrm>
+          <a:prstGeom prst="ellipse">
+            <a:avLst/>
+          </a:prstGeom>
+          <a:solidFill>
+            <a:srgbClr val="F0F0F0"/>
+          </a:solidFill>
+          <a:ln w="25400">
+            <a:solidFill>
+              <a:srgbClr val="C8C8C8"/>
+            </a:solidFill>
+          </a:ln>
+        </p:spPr>
+        <p:style>
+          <a:lnRef idx="1">
+            <a:schemeClr val="accent1"/>
+          </a:lnRef>
+          <a:fillRef idx="3">
+            <a:schemeClr val="accent1"/>
+          </a:fillRef>
+          <a:effectRef idx="2">
+            <a:schemeClr val="accent1"/>
+          </a:effectRef>
+          <a:fontRef idx="minor">
+            <a:schemeClr val="lt1"/>
+          </a:fontRef>
+        </p:style>
+        <p:txBody>
+          <a:bodyPr rtlCol="0" anchor="ctr" wrap="square"/>
+          <a:lstStyle/>
+          <a:p>
+            <a:pPr algn="ctr">
+              <a:defRPr sz="1000" b="1">
+                <a:solidFill>
+                  <a:srgbClr val="C8C8C8"/>
+                </a:solidFill>
+              </a:defRPr>
+            </a:pPr>
+            <a:r>
+              <a:t>THPT</a:t>
+            </a:r>
+          </a:p>
+        </p:txBody>
+      </p:sp>
+      <p:sp>
+        <p:nvSpPr>
+          <p:cNvPr id="5" name="TextBox 4"/>
+          <p:cNvSpPr txBox="1"/>
+          <p:nvPr/>
+        </p:nvSpPr>
+        <p:spPr>
+          <a:xfrm>
+            <a:off x="1463040" y="137160"/>
+            <a:ext cx="9144000" cy="457200"/>
+          </a:xfrm>
+          <a:prstGeom prst="rect">
+            <a:avLst/>
+          </a:prstGeom>
+          <a:noFill/>
+        </p:spPr>
+        <p:txBody>
+          <a:bodyPr wrap="none">
+            <a:spAutoFit/>
+          </a:bodyPr>
+          <a:lstStyle/>
+          <a:p>
+            <a:pPr>
+              <a:defRPr sz="1800" b="1">
+                <a:solidFill>
+                  <a:srgbClr val="FFFFFF"/>
+                </a:solidFill>
+              </a:defRPr>
+            </a:pPr>
+            <a:r>
+              <a:t>AInatomy — Phòng thực hành AI</a:t>
+            </a:r>
+          </a:p>
+        </p:txBody>
+      </p:sp>
+      <p:sp>
+        <p:nvSpPr>
+          <p:cNvPr id="6" name="TextBox 5"/>
+          <p:cNvSpPr txBox="1"/>
+          <p:nvPr/>
+        </p:nvSpPr>
+        <p:spPr>
+          <a:xfrm>
+            <a:off x="457200" y="1097280"/>
+            <a:ext cx="10972800" cy="731520"/>
+          </a:xfrm>
+          <a:prstGeom prst="rect">
+            <a:avLst/>
+          </a:prstGeom>
+          <a:noFill/>
+        </p:spPr>
+        <p:txBody>
+          <a:bodyPr wrap="none">
+            <a:spAutoFit/>
+          </a:bodyPr>
+          <a:lstStyle/>
+          <a:p>
+            <a:pPr>
+              <a:defRPr sz="3600" b="1">
+                <a:solidFill>
+                  <a:srgbClr val="333333"/>
+                </a:solidFill>
+              </a:defRPr>
+            </a:pPr>
+            <a:r>
+              <a:t>Mục lục</a:t>
+            </a:r>
+          </a:p>
+        </p:txBody>
+      </p:sp>
+      <p:sp>
+        <p:nvSpPr>
+          <p:cNvPr id="7" name="TextBox 6"/>
+          <p:cNvSpPr txBox="1"/>
+          <p:nvPr/>
+        </p:nvSpPr>
+        <p:spPr>
+          <a:xfrm>
+            <a:off x="457200" y="6217920"/>
+            <a:ext cx="10972800" cy="457200"/>
+          </a:xfrm>
+          <a:prstGeom prst="rect">
+            <a:avLst/>
+          </a:prstGeom>
+          <a:noFill/>
+        </p:spPr>
+        <p:txBody>
+          <a:bodyPr wrap="none">
+            <a:spAutoFit/>
+          </a:bodyPr>
+          <a:lstStyle/>
+          <a:p>
+            <a:pPr algn="ctr">
+              <a:defRPr sz="1100">
+                <a:solidFill>
+                  <a:srgbClr val="C8C8C8"/>
+                </a:solidFill>
+              </a:defRPr>
+            </a:pPr>
+            <a:r>
+              <a:t>Trường THPT Thuận Hoá — ĐHSP Huế | GV: Mai Xuân Văn</a:t>
+            </a:r>
+          </a:p>
+        </p:txBody>
+      </p:sp>
+      <p:sp>
+        <p:nvSpPr>
+          <p:cNvPr id="8" name="TextBox 7"/>
+          <p:cNvSpPr txBox="1"/>
+          <p:nvPr/>
+        </p:nvSpPr>
+        <p:spPr>
+          <a:xfrm>
+            <a:off x="457200" y="2011680"/>
+            <a:ext cx="10972800" cy="4114800"/>
+          </a:xfrm>
+          <a:prstGeom prst="rect">
+            <a:avLst/>
+          </a:prstGeom>
+          <a:noFill/>
+        </p:spPr>
+        <p:txBody>
+          <a:bodyPr wrap="square">
+            <a:spAutoFit/>
+          </a:bodyPr>
+          <a:lstStyle/>
+          <a:p>
+            <a:pPr>
+              <a:spcBef>
+                <a:spcPts val="1600"/>
+              </a:spcBef>
+              <a:defRPr sz="2400">
+                <a:solidFill>
+                  <a:srgbClr val="333333"/>
+                </a:solidFill>
+              </a:defRPr>
+            </a:pPr>
+            <a:r>
+              <a:t>1. Giới thiệu về AInatomy</a:t>
+            </a:r>
+          </a:p>
+          <a:p>
+            <a:pPr>
+              <a:spcBef>
+                <a:spcPts val="1600"/>
+              </a:spcBef>
+              <a:defRPr sz="2400">
+                <a:solidFill>
+                  <a:srgbClr val="333333"/>
+                </a:solidFill>
+              </a:defRPr>
+            </a:pPr>
+            <a:r>
+              <a:t>2. Cấu trúc chương trình Tin học 10</a:t>
+            </a:r>
+          </a:p>
+          <a:p>
+            <a:pPr>
+              <a:spcBef>
+                <a:spcPts val="1600"/>
+              </a:spcBef>
+              <a:defRPr sz="2400">
+                <a:solidFill>
+                  <a:srgbClr val="333333"/>
+                </a:solidFill>
+              </a:defRPr>
+            </a:pPr>
+            <a:r>
+              <a:t>3. Tích hợp vào các chủ đề A-F</a:t>
+            </a:r>
+          </a:p>
+          <a:p>
+            <a:pPr>
+              <a:spcBef>
+                <a:spcPts val="1600"/>
+              </a:spcBef>
+              <a:defRPr sz="2400">
+                <a:solidFill>
+                  <a:srgbClr val="333333"/>
+                </a:solidFill>
+              </a:defRPr>
+            </a:pPr>
+            <a:r>
+              <a:t>4. Phân phối 12 tiết đề xuất</a:t>
+            </a:r>
+          </a:p>
+          <a:p>
+            <a:pPr>
+              <a:spcBef>
+                <a:spcPts val="1600"/>
+              </a:spcBef>
+              <a:defRPr sz="2400">
+                <a:solidFill>
+                  <a:srgbClr val="333333"/>
+                </a:solidFill>
+              </a:defRPr>
+            </a:pPr>
+            <a:r>
+              <a:t>5. Hướng dẫn sử dụng</a:t>
+            </a:r>
+          </a:p>
+          <a:p>
+            <a:pPr>
+              <a:spcBef>
+                <a:spcPts val="1600"/>
+              </a:spcBef>
+              <a:defRPr sz="2400">
+                <a:solidFill>
+                  <a:srgbClr val="333333"/>
+                </a:solidFill>
+              </a:defRPr>
+            </a:pPr>
+            <a:r>
+              <a:t>6. Tài liệu tham khảo</a:t>
+            </a:r>
+          </a:p>
+        </p:txBody>
+      </p:sp>
+    </p:spTree>
+  </p:cSld>
+  <p:clrMapOvr>
+    <a:masterClrMapping/>
+  </p:clrMapOvr>
+</p:sld>
+</file>
+
+<file path=ppt/slides/slide4.xml><?xml version="1.0" encoding="utf-8"?>
+<p:sld xmlns:a="http://schemas.openxmlformats.org/drawingml/2006/main" xmlns:p="http://schemas.openxmlformats.org/presentationml/2006/main" xmlns:r="http://schemas.openxmlformats.org/officeDocument/2006/relationships">
+  <p:cSld>
+    <p:spTree>
+      <p:nvGrpSpPr>
+        <p:cNvPr id="1" name=""/>
+        <p:cNvGrpSpPr/>
+        <p:nvPr/>
+      </p:nvGrpSpPr>
+      <p:grpSpPr/>
+      <p:sp>
+        <p:nvSpPr>
+          <p:cNvPr id="2" name="Rectangle 1"/>
+          <p:cNvSpPr/>
+          <p:nvPr/>
+        </p:nvSpPr>
+        <p:spPr>
+          <a:xfrm>
+            <a:off x="0" y="0"/>
+            <a:ext cx="12191695" cy="731520"/>
+          </a:xfrm>
+          <a:prstGeom prst="rect">
+            <a:avLst/>
+          </a:prstGeom>
+          <a:solidFill>
+            <a:srgbClr val="0078D7"/>
+          </a:solidFill>
+          <a:ln>
+            <a:noFill/>
+          </a:ln>
+        </p:spPr>
+        <p:style>
+          <a:lnRef idx="1">
+            <a:schemeClr val="accent1"/>
+          </a:lnRef>
+          <a:fillRef idx="3">
+            <a:schemeClr val="accent1"/>
+          </a:fillRef>
+          <a:effectRef idx="2">
+            <a:schemeClr val="accent1"/>
+          </a:effectRef>
+          <a:fontRef idx="minor">
+            <a:schemeClr val="lt1"/>
+          </a:fontRef>
+        </p:style>
+        <p:txBody>
+          <a:bodyPr rtlCol="0" anchor="ctr"/>
+          <a:lstStyle/>
+          <a:p>
+            <a:pPr algn="ctr"/>
+          </a:p>
+        </p:txBody>
+      </p:sp>
+      <p:sp>
+        <p:nvSpPr>
+          <p:cNvPr id="3" name="Oval 2"/>
+          <p:cNvSpPr/>
+          <p:nvPr/>
+        </p:nvSpPr>
+        <p:spPr>
+          <a:xfrm>
+            <a:off x="274320" y="137160"/>
+            <a:ext cx="457200" cy="457200"/>
+          </a:xfrm>
+          <a:prstGeom prst="ellipse">
+            <a:avLst/>
+          </a:prstGeom>
+          <a:solidFill>
+            <a:srgbClr val="F0F0F0"/>
+          </a:solidFill>
+          <a:ln w="25400">
+            <a:solidFill>
+              <a:srgbClr val="C8C8C8"/>
+            </a:solidFill>
+          </a:ln>
+        </p:spPr>
+        <p:style>
+          <a:lnRef idx="1">
+            <a:schemeClr val="accent1"/>
+          </a:lnRef>
+          <a:fillRef idx="3">
+            <a:schemeClr val="accent1"/>
+          </a:fillRef>
+          <a:effectRef idx="2">
+            <a:schemeClr val="accent1"/>
+          </a:effectRef>
+          <a:fontRef idx="minor">
+            <a:schemeClr val="lt1"/>
+          </a:fontRef>
+        </p:style>
+        <p:txBody>
+          <a:bodyPr rtlCol="0" anchor="ctr" wrap="square"/>
+          <a:lstStyle/>
+          <a:p>
+            <a:pPr algn="ctr">
+              <a:defRPr sz="1000" b="1">
+                <a:solidFill>
+                  <a:srgbClr val="C8C8C8"/>
+                </a:solidFill>
+              </a:defRPr>
+            </a:pPr>
+            <a:r>
+              <a:t>ĐHSP</a:t>
+            </a:r>
+          </a:p>
+        </p:txBody>
+      </p:sp>
+      <p:sp>
+        <p:nvSpPr>
+          <p:cNvPr id="4" name="Oval 3"/>
+          <p:cNvSpPr/>
+          <p:nvPr/>
+        </p:nvSpPr>
+        <p:spPr>
+          <a:xfrm>
+            <a:off x="822960" y="137160"/>
+            <a:ext cx="457200" cy="457200"/>
+          </a:xfrm>
+          <a:prstGeom prst="ellipse">
+            <a:avLst/>
+          </a:prstGeom>
+          <a:solidFill>
+            <a:srgbClr val="F0F0F0"/>
+          </a:solidFill>
+          <a:ln w="25400">
+            <a:solidFill>
+              <a:srgbClr val="C8C8C8"/>
+            </a:solidFill>
+          </a:ln>
+        </p:spPr>
+        <p:style>
+          <a:lnRef idx="1">
+            <a:schemeClr val="accent1"/>
+          </a:lnRef>
+          <a:fillRef idx="3">
+            <a:schemeClr val="accent1"/>
+          </a:fillRef>
+          <a:effectRef idx="2">
+            <a:schemeClr val="accent1"/>
+          </a:effectRef>
+          <a:fontRef idx="minor">
+            <a:schemeClr val="lt1"/>
+          </a:fontRef>
+        </p:style>
+        <p:txBody>
+          <a:bodyPr rtlCol="0" anchor="ctr" wrap="square"/>
+          <a:lstStyle/>
+          <a:p>
+            <a:pPr algn="ctr">
+              <a:defRPr sz="1000" b="1">
+                <a:solidFill>
+                  <a:srgbClr val="C8C8C8"/>
+                </a:solidFill>
+              </a:defRPr>
+            </a:pPr>
+            <a:r>
+              <a:t>THPT</a:t>
+            </a:r>
+          </a:p>
+        </p:txBody>
+      </p:sp>
+      <p:sp>
+        <p:nvSpPr>
+          <p:cNvPr id="5" name="TextBox 4"/>
+          <p:cNvSpPr txBox="1"/>
+          <p:nvPr/>
+        </p:nvSpPr>
+        <p:spPr>
+          <a:xfrm>
+            <a:off x="1463040" y="137160"/>
+            <a:ext cx="9144000" cy="457200"/>
+          </a:xfrm>
+          <a:prstGeom prst="rect">
+            <a:avLst/>
+          </a:prstGeom>
+          <a:noFill/>
+        </p:spPr>
+        <p:txBody>
+          <a:bodyPr wrap="none">
+            <a:spAutoFit/>
+          </a:bodyPr>
+          <a:lstStyle/>
+          <a:p>
+            <a:pPr>
+              <a:defRPr sz="1800" b="1">
+                <a:solidFill>
+                  <a:srgbClr val="FFFFFF"/>
+                </a:solidFill>
+              </a:defRPr>
+            </a:pPr>
+            <a:r>
+              <a:t>AInatomy — Phòng thực hành AI</a:t>
+            </a:r>
+          </a:p>
+        </p:txBody>
+      </p:sp>
+      <p:sp>
+        <p:nvSpPr>
+          <p:cNvPr id="6" name="TextBox 5"/>
+          <p:cNvSpPr txBox="1"/>
+          <p:nvPr/>
+        </p:nvSpPr>
+        <p:spPr>
+          <a:xfrm>
+            <a:off x="457200" y="1097280"/>
+            <a:ext cx="10972800" cy="731520"/>
+          </a:xfrm>
+          <a:prstGeom prst="rect">
+            <a:avLst/>
+          </a:prstGeom>
+          <a:noFill/>
+        </p:spPr>
+        <p:txBody>
+          <a:bodyPr wrap="none">
+            <a:spAutoFit/>
+          </a:bodyPr>
+          <a:lstStyle/>
+          <a:p>
+            <a:pPr>
+              <a:defRPr sz="3600" b="1">
+                <a:solidFill>
+                  <a:srgbClr val="333333"/>
+                </a:solidFill>
+              </a:defRPr>
+            </a:pPr>
+            <a:r>
+              <a:t>Tích hợp vào chương trình</a:t>
+            </a:r>
+          </a:p>
+        </p:txBody>
+      </p:sp>
+      <p:sp>
+        <p:nvSpPr>
+          <p:cNvPr id="7" name="TextBox 6"/>
+          <p:cNvSpPr txBox="1"/>
+          <p:nvPr/>
+        </p:nvSpPr>
+        <p:spPr>
+          <a:xfrm>
+            <a:off x="457200" y="6217920"/>
+            <a:ext cx="10972800" cy="457200"/>
+          </a:xfrm>
+          <a:prstGeom prst="rect">
+            <a:avLst/>
+          </a:prstGeom>
+          <a:noFill/>
+        </p:spPr>
+        <p:txBody>
+          <a:bodyPr wrap="none">
+            <a:spAutoFit/>
+          </a:bodyPr>
+          <a:lstStyle/>
+          <a:p>
+            <a:pPr algn="ctr">
+              <a:defRPr sz="1100">
+                <a:solidFill>
+                  <a:srgbClr val="C8C8C8"/>
+                </a:solidFill>
+              </a:defRPr>
+            </a:pPr>
+            <a:r>
+              <a:t>Trường THPT Thuận Hoá — ĐHSP Huế | GV: Mai Xuân Văn</a:t>
+            </a:r>
+          </a:p>
+        </p:txBody>
+      </p:sp>
+      <p:sp>
+        <p:nvSpPr>
+          <p:cNvPr id="8" name="TextBox 7"/>
+          <p:cNvSpPr txBox="1"/>
+          <p:nvPr/>
+        </p:nvSpPr>
+        <p:spPr>
+          <a:xfrm>
+            <a:off x="457200" y="2011680"/>
+            <a:ext cx="5029200" cy="3657600"/>
+          </a:xfrm>
+          <a:prstGeom prst="rect">
+            <a:avLst/>
+          </a:prstGeom>
+          <a:noFill/>
+        </p:spPr>
+        <p:txBody>
+          <a:bodyPr wrap="square">
+            <a:spAutoFit/>
+          </a:bodyPr>
+          <a:lstStyle/>
+          <a:p>
+            <a:pPr>
+              <a:spcAft>
+                <a:spcPts val="1200"/>
+              </a:spcAft>
+              <a:defRPr sz="2800" b="1">
+                <a:solidFill>
+                  <a:srgbClr val="0078D7"/>
+                </a:solidFill>
+              </a:defRPr>
+            </a:pPr>
+            <a:r>
+              <a:t>Chủ đề A-B-D</a:t>
+            </a:r>
+          </a:p>
+          <a:p>
+            <a:pPr>
+              <a:spcBef>
+                <a:spcPts val="600"/>
+              </a:spcBef>
+              <a:defRPr sz="1800">
+                <a:solidFill>
+                  <a:srgbClr val="333333"/>
+                </a:solidFill>
+              </a:defRPr>
+            </a:pPr>
+            <a:r>
+              <a:t>A: Máy tính và xã hội tri thức</a:t>
+            </a:r>
+          </a:p>
+          <a:p>
+            <a:pPr>
+              <a:spcBef>
+                <a:spcPts val="600"/>
+              </a:spcBef>
+              <a:defRPr sz="1800">
+                <a:solidFill>
+                  <a:srgbClr val="333333"/>
+                </a:solidFill>
+              </a:defRPr>
+            </a:pPr>
+            <a:r>
+              <a:t>B: Mạng máy tính và Internet</a:t>
+            </a:r>
+          </a:p>
+          <a:p>
+            <a:pPr>
+              <a:spcBef>
+                <a:spcPts val="600"/>
+              </a:spcBef>
+              <a:defRPr sz="1800">
+                <a:solidFill>
+                  <a:srgbClr val="333333"/>
+                </a:solidFill>
+              </a:defRPr>
+            </a:pPr>
+            <a:r>
+              <a:t>D: Đạo đức, pháp luật số</a:t>
+            </a:r>
+          </a:p>
+          <a:p>
+            <a:pPr>
+              <a:spcBef>
+                <a:spcPts val="600"/>
+              </a:spcBef>
+              <a:defRPr sz="1800">
+                <a:solidFill>
+                  <a:srgbClr val="333333"/>
+                </a:solidFill>
+              </a:defRPr>
+            </a:pPr>
+          </a:p>
+          <a:p>
+            <a:pPr>
+              <a:spcBef>
+                <a:spcPts val="600"/>
+              </a:spcBef>
+              <a:defRPr sz="1800">
+                <a:solidFill>
+                  <a:srgbClr val="333333"/>
+                </a:solidFill>
+              </a:defRPr>
+            </a:pPr>
+            <a:r>
+              <a:t>Hoạt động chính:</a:t>
+            </a:r>
+          </a:p>
+          <a:p>
+            <a:pPr>
+              <a:spcBef>
+                <a:spcPts val="600"/>
+              </a:spcBef>
+              <a:defRPr sz="1800">
+                <a:solidFill>
+                  <a:srgbClr val="333333"/>
+                </a:solidFill>
+              </a:defRPr>
+            </a:pPr>
+            <a:r>
+              <a:t>• Kịch bản 9 cảnh</a:t>
+            </a:r>
+          </a:p>
+          <a:p>
+            <a:pPr>
+              <a:spcBef>
+                <a:spcPts val="600"/>
+              </a:spcBef>
+              <a:defRPr sz="1800">
+                <a:solidFill>
+                  <a:srgbClr val="333333"/>
+                </a:solidFill>
+              </a:defRPr>
+            </a:pPr>
+            <a:r>
+              <a:t>• Đấu trường bắt lỗi AI</a:t>
+            </a:r>
+          </a:p>
+          <a:p>
+            <a:pPr>
+              <a:spcBef>
+                <a:spcPts val="600"/>
+              </a:spcBef>
+              <a:defRPr sz="1800">
+                <a:solidFill>
+                  <a:srgbClr val="333333"/>
+                </a:solidFill>
+              </a:defRPr>
+            </a:pPr>
+            <a:r>
+              <a:t>• Tình huống &amp; trách nhiệm</a:t>
+            </a:r>
+          </a:p>
+        </p:txBody>
+      </p:sp>
+      <p:sp>
+        <p:nvSpPr>
+          <p:cNvPr id="9" name="TextBox 8"/>
+          <p:cNvSpPr txBox="1"/>
+          <p:nvPr/>
+        </p:nvSpPr>
+        <p:spPr>
+          <a:xfrm>
+            <a:off x="5943600" y="2011680"/>
+            <a:ext cx="5029200" cy="3657600"/>
+          </a:xfrm>
+          <a:prstGeom prst="rect">
+            <a:avLst/>
+          </a:prstGeom>
+          <a:noFill/>
+        </p:spPr>
+        <p:txBody>
+          <a:bodyPr wrap="square">
+            <a:spAutoFit/>
+          </a:bodyPr>
+          <a:lstStyle/>
+          <a:p>
+            <a:pPr>
+              <a:spcAft>
+                <a:spcPts val="1200"/>
+              </a:spcAft>
+              <a:defRPr sz="2800" b="1">
+                <a:solidFill>
+                  <a:srgbClr val="0078D7"/>
+                </a:solidFill>
+              </a:defRPr>
+            </a:pPr>
+            <a:r>
+              <a:t>Chủ đề E-F-G</a:t>
+            </a:r>
+          </a:p>
+          <a:p>
+            <a:pPr>
+              <a:spcBef>
+                <a:spcPts val="600"/>
+              </a:spcBef>
+              <a:defRPr sz="1800">
+                <a:solidFill>
+                  <a:srgbClr val="333333"/>
+                </a:solidFill>
+              </a:defRPr>
+            </a:pPr>
+            <a:r>
+              <a:t>E: Thiết kế đồ họa (ICT)</a:t>
+            </a:r>
+          </a:p>
+          <a:p>
+            <a:pPr>
+              <a:spcBef>
+                <a:spcPts val="600"/>
+              </a:spcBef>
+              <a:defRPr sz="1800">
+                <a:solidFill>
+                  <a:srgbClr val="333333"/>
+                </a:solidFill>
+              </a:defRPr>
+            </a:pPr>
+            <a:r>
+              <a:t>F: Giải quyết vấn đề với máy tính</a:t>
+            </a:r>
+          </a:p>
+          <a:p>
+            <a:pPr>
+              <a:spcBef>
+                <a:spcPts val="600"/>
+              </a:spcBef>
+              <a:defRPr sz="1800">
+                <a:solidFill>
+                  <a:srgbClr val="333333"/>
+                </a:solidFill>
+              </a:defRPr>
+            </a:pPr>
+            <a:r>
+              <a:t>G: Hướng nghiệp (CS)</a:t>
+            </a:r>
+          </a:p>
+          <a:p>
+            <a:pPr>
+              <a:spcBef>
+                <a:spcPts val="600"/>
+              </a:spcBef>
+              <a:defRPr sz="1800">
+                <a:solidFill>
+                  <a:srgbClr val="333333"/>
+                </a:solidFill>
+              </a:defRPr>
+            </a:pPr>
+          </a:p>
+          <a:p>
+            <a:pPr>
+              <a:spcBef>
+                <a:spcPts val="600"/>
+              </a:spcBef>
+              <a:defRPr sz="1800">
+                <a:solidFill>
+                  <a:srgbClr val="333333"/>
+                </a:solidFill>
+              </a:defRPr>
+            </a:pPr>
+            <a:r>
+              <a:t>Hoạt động chính:</a:t>
+            </a:r>
+          </a:p>
+          <a:p>
+            <a:pPr>
+              <a:spcBef>
+                <a:spcPts val="600"/>
+              </a:spcBef>
+              <a:defRPr sz="1800">
+                <a:solidFill>
+                  <a:srgbClr val="333333"/>
+                </a:solidFill>
+              </a:defRPr>
+            </a:pPr>
+            <a:r>
+              <a:t>• Tầng 1 - Xưởng huấn luyện</a:t>
+            </a:r>
+          </a:p>
+          <a:p>
+            <a:pPr>
+              <a:spcBef>
+                <a:spcPts val="600"/>
+              </a:spcBef>
+              <a:defRPr sz="1800">
+                <a:solidFill>
+                  <a:srgbClr val="333333"/>
+                </a:solidFill>
+              </a:defRPr>
+            </a:pPr>
+            <a:r>
+              <a:t>• Nhà máy AI 7 trạm</a:t>
+            </a:r>
+          </a:p>
+          <a:p>
+            <a:pPr>
+              <a:spcBef>
+                <a:spcPts val="600"/>
+              </a:spcBef>
+              <a:defRPr sz="1800">
+                <a:solidFill>
+                  <a:srgbClr val="333333"/>
+                </a:solidFill>
+              </a:defRPr>
+            </a:pPr>
+            <a:r>
+              <a:t>• Kiến thức Tin học</a:t>
+            </a:r>
+          </a:p>
+        </p:txBody>
+      </p:sp>
+    </p:spTree>
+  </p:cSld>
+  <p:clrMapOvr>
+    <a:masterClrMapping/>
+  </p:clrMapOvr>
+</p:sld>
+</file>
+
+<file path=ppt/slides/slide5.xml><?xml version="1.0" encoding="utf-8"?>
+<p:sld xmlns:a="http://schemas.openxmlformats.org/drawingml/2006/main" xmlns:p="http://schemas.openxmlformats.org/presentationml/2006/main" xmlns:r="http://schemas.openxmlformats.org/officeDocument/2006/relationships">
+  <p:cSld>
+    <p:spTree>
+      <p:nvGrpSpPr>
+        <p:cNvPr id="1" name=""/>
+        <p:cNvGrpSpPr/>
+        <p:nvPr/>
+      </p:nvGrpSpPr>
+      <p:grpSpPr/>
+      <p:sp>
+        <p:nvSpPr>
+          <p:cNvPr id="2" name="Rectangle 1"/>
+          <p:cNvSpPr/>
+          <p:nvPr/>
+        </p:nvSpPr>
+        <p:spPr>
+          <a:xfrm>
+            <a:off x="0" y="0"/>
+            <a:ext cx="12191695" cy="1097280"/>
+          </a:xfrm>
+          <a:prstGeom prst="rect">
+            <a:avLst/>
+          </a:prstGeom>
+          <a:solidFill>
+            <a:srgbClr val="0078D7"/>
+          </a:solidFill>
+          <a:ln>
+            <a:noFill/>
+          </a:ln>
+        </p:spPr>
+        <p:style>
+          <a:lnRef idx="1">
+            <a:schemeClr val="accent1"/>
+          </a:lnRef>
+          <a:fillRef idx="3">
+            <a:schemeClr val="accent1"/>
+          </a:fillRef>
+          <a:effectRef idx="2">
+            <a:schemeClr val="accent1"/>
+          </a:effectRef>
+          <a:fontRef idx="minor">
+            <a:schemeClr val="lt1"/>
+          </a:fontRef>
+        </p:style>
+        <p:txBody>
+          <a:bodyPr rtlCol="0" anchor="ctr"/>
+          <a:lstStyle/>
+          <a:p>
+            <a:pPr algn="ctr"/>
+          </a:p>
+        </p:txBody>
+      </p:sp>
+      <p:sp>
+        <p:nvSpPr>
+          <p:cNvPr id="3" name="Oval 2"/>
+          <p:cNvSpPr/>
+          <p:nvPr/>
+        </p:nvSpPr>
+        <p:spPr>
+          <a:xfrm>
+            <a:off x="365760" y="182880"/>
+            <a:ext cx="731520" cy="731520"/>
+          </a:xfrm>
+          <a:prstGeom prst="ellipse">
+            <a:avLst/>
+          </a:prstGeom>
+          <a:solidFill>
+            <a:srgbClr val="F0F0F0"/>
+          </a:solidFill>
+          <a:ln w="25400">
+            <a:solidFill>
+              <a:srgbClr val="C8C8C8"/>
+            </a:solidFill>
+          </a:ln>
+        </p:spPr>
+        <p:style>
+          <a:lnRef idx="1">
+            <a:schemeClr val="accent1"/>
+          </a:lnRef>
+          <a:fillRef idx="3">
+            <a:schemeClr val="accent1"/>
+          </a:fillRef>
+          <a:effectRef idx="2">
+            <a:schemeClr val="accent1"/>
+          </a:effectRef>
+          <a:fontRef idx="minor">
+            <a:schemeClr val="lt1"/>
+          </a:fontRef>
+        </p:style>
+        <p:txBody>
+          <a:bodyPr rtlCol="0" anchor="ctr" wrap="square"/>
+          <a:lstStyle/>
+          <a:p>
+            <a:pPr algn="ctr">
+              <a:defRPr sz="1000" b="1">
+                <a:solidFill>
+                  <a:srgbClr val="C8C8C8"/>
+                </a:solidFill>
+              </a:defRPr>
+            </a:pPr>
+            <a:r>
+              <a:t>LOGO</a:t>
+            </a:r>
+          </a:p>
+          <a:p>
+            <a:r>
+              <a:t>ĐHSP</a:t>
+            </a:r>
+          </a:p>
+        </p:txBody>
+      </p:sp>
+      <p:sp>
+        <p:nvSpPr>
+          <p:cNvPr id="4" name="Oval 3"/>
+          <p:cNvSpPr/>
+          <p:nvPr/>
+        </p:nvSpPr>
+        <p:spPr>
+          <a:xfrm>
+            <a:off x="1280160" y="182880"/>
+            <a:ext cx="731520" cy="731520"/>
+          </a:xfrm>
+          <a:prstGeom prst="ellipse">
+            <a:avLst/>
+          </a:prstGeom>
+          <a:solidFill>
+            <a:srgbClr val="F0F0F0"/>
+          </a:solidFill>
+          <a:ln w="25400">
+            <a:solidFill>
+              <a:srgbClr val="C8C8C8"/>
+            </a:solidFill>
+          </a:ln>
+        </p:spPr>
+        <p:style>
+          <a:lnRef idx="1">
+            <a:schemeClr val="accent1"/>
+          </a:lnRef>
+          <a:fillRef idx="3">
+            <a:schemeClr val="accent1"/>
+          </a:fillRef>
+          <a:effectRef idx="2">
+            <a:schemeClr val="accent1"/>
+          </a:effectRef>
+          <a:fontRef idx="minor">
+            <a:schemeClr val="lt1"/>
+          </a:fontRef>
+        </p:style>
+        <p:txBody>
+          <a:bodyPr rtlCol="0" anchor="ctr" wrap="square"/>
+          <a:lstStyle/>
+          <a:p>
+            <a:pPr algn="ctr">
+              <a:defRPr sz="1000" b="1">
+                <a:solidFill>
+                  <a:srgbClr val="C8C8C8"/>
+                </a:solidFill>
+              </a:defRPr>
+            </a:pPr>
+            <a:r>
+              <a:t>LOGO</a:t>
+            </a:r>
+          </a:p>
+          <a:p>
+            <a:r>
+              <a:t>THPT</a:t>
+            </a:r>
+          </a:p>
+        </p:txBody>
+      </p:sp>
+      <p:sp>
+        <p:nvSpPr>
+          <p:cNvPr id="5" name="TextBox 4"/>
+          <p:cNvSpPr txBox="1"/>
+          <p:nvPr/>
+        </p:nvSpPr>
+        <p:spPr>
+          <a:xfrm>
+            <a:off x="1371600" y="2560320"/>
+            <a:ext cx="9144000" cy="1371600"/>
+          </a:xfrm>
+          <a:prstGeom prst="rect">
+            <a:avLst/>
+          </a:prstGeom>
+          <a:noFill/>
+        </p:spPr>
+        <p:txBody>
+          <a:bodyPr wrap="square">
+            <a:spAutoFit/>
+          </a:bodyPr>
+          <a:lstStyle/>
+          <a:p>
+            <a:pPr algn="ctr">
+              <a:defRPr sz="5400" b="1">
+                <a:solidFill>
+                  <a:srgbClr val="333333"/>
+                </a:solidFill>
+              </a:defRPr>
+            </a:pPr>
+            <a:r>
+              <a:t>Cảm ơn</a:t>
+            </a:r>
+          </a:p>
+        </p:txBody>
+      </p:sp>
+      <p:sp>
+        <p:nvSpPr>
+          <p:cNvPr id="6" name="TextBox 5"/>
+          <p:cNvSpPr txBox="1"/>
+          <p:nvPr/>
+        </p:nvSpPr>
+        <p:spPr>
+          <a:xfrm>
+            <a:off x="1371600" y="4114800"/>
+            <a:ext cx="9144000" cy="1371600"/>
+          </a:xfrm>
+          <a:prstGeom prst="rect">
+            <a:avLst/>
+          </a:prstGeom>
+          <a:noFill/>
+        </p:spPr>
+        <p:txBody>
+          <a:bodyPr wrap="square">
+            <a:spAutoFit/>
+          </a:bodyPr>
+          <a:lstStyle/>
+          <a:p>
+            <a:pPr algn="ctr">
+              <a:defRPr sz="2000">
+                <a:solidFill>
+                  <a:srgbClr val="333333"/>
+                </a:solidFill>
+              </a:defRPr>
+            </a:pPr>
+            <a:r>
+              <a:t>Trường THPT Thuận Hoá</a:t>
+            </a:r>
+            <a:br/>
+            <a:r>
+              <a:t>Đại học Sư Phạm, Đại học Huế</a:t>
+            </a:r>
+            <a:br/>
+            <a:r>
+              <a:t>GV: Mai Xuân Văn</a:t>
+            </a:r>
+          </a:p>
+        </p:txBody>
+      </p:sp>
+      <p:sp>
+        <p:nvSpPr>
+          <p:cNvPr id="7" name="TextBox 6"/>
+          <p:cNvSpPr txBox="1"/>
+          <p:nvPr/>
+        </p:nvSpPr>
+        <p:spPr>
+          <a:xfrm>
+            <a:off x="457200" y="5943600"/>
+            <a:ext cx="10972800" cy="731520"/>
+          </a:xfrm>
+          <a:prstGeom prst="rect">
+            <a:avLst/>
+          </a:prstGeom>
+          <a:noFill/>
+        </p:spPr>
+        <p:txBody>
+          <a:bodyPr wrap="none">
+            <a:spAutoFit/>
+          </a:bodyPr>
+          <a:lstStyle/>
+          <a:p>
+            <a:pPr algn="ctr">
+              <a:defRPr sz="1400">
+                <a:solidFill>
+                  <a:srgbClr val="C8C8C8"/>
+                </a:solidFill>
+              </a:defRPr>
+            </a:pPr>
+            <a:r>
+              <a:t>AInatomy — Phòng thực hành Trí tuệ nhân tạo</a:t>
+            </a:r>
+          </a:p>
+        </p:txBody>
+      </p:sp>
+    </p:spTree>
+  </p:cSld>
+  <p:clrMapOvr>
+    <a:masterClrMapping/>
+  </p:clrMapOvr>
+</p:sld>
+</file>
+
+<file path=ppt/slides/slide6.xml><?xml version="1.0" encoding="utf-8"?>
+<p:sld xmlns:a="http://schemas.openxmlformats.org/drawingml/2006/main" xmlns:p="http://schemas.openxmlformats.org/presentationml/2006/main" xmlns:r="http://schemas.openxmlformats.org/officeDocument/2006/relationships">
+  <p:cSld>
+    <p:spTree>
+      <p:nvGrpSpPr>
+        <p:cNvPr id="1" name=""/>
+        <p:cNvGrpSpPr/>
+        <p:nvPr/>
+      </p:nvGrpSpPr>
+      <p:grpSpPr/>
+      <p:sp>
+        <p:nvSpPr>
+          <p:cNvPr id="2" name="Rectangle 1"/>
+          <p:cNvSpPr/>
+          <p:nvPr/>
+        </p:nvSpPr>
+        <p:spPr>
+          <a:xfrm>
+            <a:off x="0" y="0"/>
+            <a:ext cx="12191695" cy="731520"/>
+          </a:xfrm>
+          <a:prstGeom prst="rect">
+            <a:avLst/>
+          </a:prstGeom>
+          <a:solidFill>
+            <a:srgbClr val="0078D7"/>
+          </a:solidFill>
+          <a:ln>
+            <a:noFill/>
+          </a:ln>
+        </p:spPr>
+        <p:style>
+          <a:lnRef idx="1">
+            <a:schemeClr val="accent1"/>
+          </a:lnRef>
+          <a:fillRef idx="3">
+            <a:schemeClr val="accent1"/>
+          </a:fillRef>
+          <a:effectRef idx="2">
+            <a:schemeClr val="accent1"/>
+          </a:effectRef>
+          <a:fontRef idx="minor">
+            <a:schemeClr val="lt1"/>
+          </a:fontRef>
+        </p:style>
+        <p:txBody>
+          <a:bodyPr rtlCol="0" anchor="ctr"/>
+          <a:lstStyle/>
+          <a:p>
+            <a:pPr algn="ctr"/>
+          </a:p>
+        </p:txBody>
+      </p:sp>
+      <p:sp>
+        <p:nvSpPr>
+          <p:cNvPr id="3" name="Oval 2"/>
+          <p:cNvSpPr/>
+          <p:nvPr/>
+        </p:nvSpPr>
+        <p:spPr>
+          <a:xfrm>
+            <a:off x="274320" y="137160"/>
+            <a:ext cx="457200" cy="457200"/>
+          </a:xfrm>
+          <a:prstGeom prst="ellipse">
+            <a:avLst/>
+          </a:prstGeom>
+          <a:solidFill>
+            <a:srgbClr val="F0F0F0"/>
+          </a:solidFill>
+          <a:ln w="25400">
+            <a:solidFill>
+              <a:srgbClr val="C8C8C8"/>
+            </a:solidFill>
+          </a:ln>
+        </p:spPr>
+        <p:style>
+          <a:lnRef idx="1">
+            <a:schemeClr val="accent1"/>
+          </a:lnRef>
+          <a:fillRef idx="3">
+            <a:schemeClr val="accent1"/>
+          </a:fillRef>
+          <a:effectRef idx="2">
+            <a:schemeClr val="accent1"/>
+          </a:effectRef>
+          <a:fontRef idx="minor">
+            <a:schemeClr val="lt1"/>
+          </a:fontRef>
+        </p:style>
+        <p:txBody>
+          <a:bodyPr rtlCol="0" anchor="ctr" wrap="square"/>
+          <a:lstStyle/>
+          <a:p>
+            <a:pPr algn="ctr">
+              <a:defRPr sz="1000" b="1">
+                <a:solidFill>
+                  <a:srgbClr val="C8C8C8"/>
+                </a:solidFill>
+              </a:defRPr>
+            </a:pPr>
+            <a:r>
+              <a:t>ĐHSP</a:t>
+            </a:r>
+          </a:p>
+        </p:txBody>
+      </p:sp>
+      <p:sp>
+        <p:nvSpPr>
+          <p:cNvPr id="4" name="Oval 3"/>
+          <p:cNvSpPr/>
+          <p:nvPr/>
+        </p:nvSpPr>
+        <p:spPr>
+          <a:xfrm>
+            <a:off x="822960" y="137160"/>
+            <a:ext cx="457200" cy="457200"/>
+          </a:xfrm>
+          <a:prstGeom prst="ellipse">
+            <a:avLst/>
+          </a:prstGeom>
+          <a:solidFill>
+            <a:srgbClr val="F0F0F0"/>
+          </a:solidFill>
+          <a:ln w="25400">
+            <a:solidFill>
+              <a:srgbClr val="C8C8C8"/>
+            </a:solidFill>
+          </a:ln>
+        </p:spPr>
+        <p:style>
+          <a:lnRef idx="1">
+            <a:schemeClr val="accent1"/>
+          </a:lnRef>
+          <a:fillRef idx="3">
+            <a:schemeClr val="accent1"/>
+          </a:fillRef>
+          <a:effectRef idx="2">
+            <a:schemeClr val="accent1"/>
+          </a:effectRef>
+          <a:fontRef idx="minor">
+            <a:schemeClr val="lt1"/>
+          </a:fontRef>
+        </p:style>
+        <p:txBody>
+          <a:bodyPr rtlCol="0" anchor="ctr" wrap="square"/>
+          <a:lstStyle/>
+          <a:p>
+            <a:pPr algn="ctr">
+              <a:defRPr sz="1000" b="1">
+                <a:solidFill>
+                  <a:srgbClr val="C8C8C8"/>
+                </a:solidFill>
+              </a:defRPr>
+            </a:pPr>
+            <a:r>
+              <a:t>THPT</a:t>
+            </a:r>
+          </a:p>
+        </p:txBody>
+      </p:sp>
+      <p:sp>
+        <p:nvSpPr>
+          <p:cNvPr id="5" name="TextBox 4"/>
+          <p:cNvSpPr txBox="1"/>
+          <p:nvPr/>
+        </p:nvSpPr>
+        <p:spPr>
+          <a:xfrm>
+            <a:off x="1463040" y="137160"/>
+            <a:ext cx="9144000" cy="457200"/>
+          </a:xfrm>
+          <a:prstGeom prst="rect">
+            <a:avLst/>
+          </a:prstGeom>
+          <a:noFill/>
+        </p:spPr>
+        <p:txBody>
+          <a:bodyPr wrap="none">
+            <a:spAutoFit/>
+          </a:bodyPr>
+          <a:lstStyle/>
+          <a:p>
+            <a:pPr>
+              <a:defRPr sz="1800" b="1">
+                <a:solidFill>
+                  <a:srgbClr val="FFFFFF"/>
+                </a:solidFill>
+              </a:defRPr>
+            </a:pPr>
+            <a:r>
+              <a:t>AInatomy — Phòng thực hành AI</a:t>
+            </a:r>
+          </a:p>
+        </p:txBody>
+      </p:sp>
+      <p:sp>
+        <p:nvSpPr>
+          <p:cNvPr id="6" name="TextBox 5"/>
+          <p:cNvSpPr txBox="1"/>
+          <p:nvPr/>
+        </p:nvSpPr>
+        <p:spPr>
+          <a:xfrm>
+            <a:off x="457200" y="1097280"/>
+            <a:ext cx="10972800" cy="731520"/>
+          </a:xfrm>
+          <a:prstGeom prst="rect">
+            <a:avLst/>
+          </a:prstGeom>
+          <a:noFill/>
+        </p:spPr>
+        <p:txBody>
+          <a:bodyPr wrap="none">
+            <a:spAutoFit/>
+          </a:bodyPr>
+          <a:lstStyle/>
+          <a:p>
+            <a:pPr>
+              <a:defRPr sz="3600" b="1">
+                <a:solidFill>
+                  <a:srgbClr val="333333"/>
+                </a:solidFill>
+              </a:defRPr>
+            </a:pPr>
+            <a:r>
+              <a:t>AInatomy - Phòng thực hành AI</a:t>
+            </a:r>
+          </a:p>
+        </p:txBody>
+      </p:sp>
+      <p:sp>
+        <p:nvSpPr>
+          <p:cNvPr id="7" name="TextBox 6"/>
+          <p:cNvSpPr txBox="1"/>
+          <p:nvPr/>
+        </p:nvSpPr>
+        <p:spPr>
+          <a:xfrm>
+            <a:off x="457200" y="6217920"/>
+            <a:ext cx="10972800" cy="457200"/>
+          </a:xfrm>
+          <a:prstGeom prst="rect">
+            <a:avLst/>
+          </a:prstGeom>
+          <a:noFill/>
+        </p:spPr>
+        <p:txBody>
+          <a:bodyPr wrap="none">
+            <a:spAutoFit/>
+          </a:bodyPr>
+          <a:lstStyle/>
+          <a:p>
+            <a:pPr algn="ctr">
+              <a:defRPr sz="1100">
+                <a:solidFill>
+                  <a:srgbClr val="C8C8C8"/>
+                </a:solidFill>
+              </a:defRPr>
+            </a:pPr>
+            <a:r>
+              <a:t>Trường THPT Thuận Hoá — ĐHSP Huế | GV: Mai Xuân Văn</a:t>
+            </a:r>
+          </a:p>
+        </p:txBody>
+      </p:sp>
+      <p:sp>
+        <p:nvSpPr>
+          <p:cNvPr id="8" name="TextBox 7"/>
+          <p:cNvSpPr txBox="1"/>
+          <p:nvPr/>
+        </p:nvSpPr>
+        <p:spPr>
+          <a:xfrm>
+            <a:off x="457200" y="2011680"/>
+            <a:ext cx="10972800" cy="1371600"/>
+          </a:xfrm>
+          <a:prstGeom prst="rect">
+            <a:avLst/>
+          </a:prstGeom>
+          <a:noFill/>
+        </p:spPr>
+        <p:txBody>
+          <a:bodyPr wrap="square">
+            <a:spAutoFit/>
+          </a:bodyPr>
+          <a:lstStyle/>
+          <a:p>
+            <a:pPr>
+              <a:spcAft>
+                <a:spcPts val="1200"/>
+              </a:spcAft>
+              <a:defRPr sz="2000">
+                <a:solidFill>
+                  <a:srgbClr val="333333"/>
+                </a:solidFill>
+              </a:defRPr>
+            </a:pPr>
+            <a:r>
+              <a:t>Hệ thống học về AI thông qua việc bắt lỗi AI, phủ 22/22 YCCĐ lớp 10 theo QĐ 2422/QĐ-BGDĐT</a:t>
+            </a:r>
+          </a:p>
+        </p:txBody>
+      </p:sp>
+      <p:sp>
+        <p:nvSpPr>
+          <p:cNvPr id="9" name="TextBox 8"/>
+          <p:cNvSpPr txBox="1"/>
+          <p:nvPr/>
+        </p:nvSpPr>
+        <p:spPr>
+          <a:xfrm>
+            <a:off x="457200" y="3474720"/>
+            <a:ext cx="10972800" cy="2560320"/>
+          </a:xfrm>
+          <a:prstGeom prst="rect">
+            <a:avLst/>
+          </a:prstGeom>
+          <a:noFill/>
+        </p:spPr>
+        <p:txBody>
+          <a:bodyPr wrap="square">
+            <a:spAutoFit/>
+          </a:bodyPr>
+          <a:lstStyle/>
+          <a:p/>
+          <a:p>
+            <a:pPr>
+              <a:spcBef>
+                <a:spcPts val="800"/>
+              </a:spcBef>
+              <a:defRPr sz="2000" b="1">
+                <a:solidFill>
+                  <a:srgbClr val="0078D7"/>
+                </a:solidFill>
+              </a:defRPr>
+            </a:pPr>
+            <a:r>
+              <a:t>1. Kịch bản 9 cảnh</a:t>
+            </a:r>
+          </a:p>
+          <a:p>
+            <a:pPr>
+              <a:spcBef>
+                <a:spcPts val="200"/>
+              </a:spcBef>
+              <a:defRPr sz="1600">
+                <a:solidFill>
+                  <a:srgbClr val="333333"/>
+                </a:solidFill>
+              </a:defRPr>
+            </a:pPr>
+            <a:r>
+              <a:t>   Hành trình của bức ảnh từ đầu vào đến đầu ra</a:t>
+            </a:r>
+          </a:p>
+          <a:p>
+            <a:pPr>
+              <a:spcBef>
+                <a:spcPts val="800"/>
+              </a:spcBef>
+              <a:defRPr sz="2000" b="1">
+                <a:solidFill>
+                  <a:srgbClr val="0078D7"/>
+                </a:solidFill>
+              </a:defRPr>
+            </a:pPr>
+            <a:r>
+              <a:t>2. Đấu trường bắt lỗi AI</a:t>
+            </a:r>
+          </a:p>
+          <a:p>
+            <a:pPr>
+              <a:spcBef>
+                <a:spcPts val="200"/>
+              </a:spcBef>
+              <a:defRPr sz="1600">
+                <a:solidFill>
+                  <a:srgbClr val="333333"/>
+                </a:solidFill>
+              </a:defRPr>
+            </a:pPr>
+            <a:r>
+              <a:t>   12 tình huống, 5 loại lỗi AI</a:t>
+            </a:r>
+          </a:p>
+          <a:p>
+            <a:pPr>
+              <a:spcBef>
+                <a:spcPts val="800"/>
+              </a:spcBef>
+              <a:defRPr sz="2000" b="1">
+                <a:solidFill>
+                  <a:srgbClr val="0078D7"/>
+                </a:solidFill>
+              </a:defRPr>
+            </a:pPr>
+            <a:r>
+              <a:t>3. Nhà máy AI 7 trạm</a:t>
+            </a:r>
+          </a:p>
+          <a:p>
+            <a:pPr>
+              <a:spcBef>
+                <a:spcPts val="200"/>
+              </a:spcBef>
+              <a:defRPr sz="1600">
+                <a:solidFill>
+                  <a:srgbClr val="333333"/>
+                </a:solidFill>
+              </a:defRPr>
+            </a:pPr>
+            <a:r>
+              <a:t>   Từ nhập liệu đến ứng dụng</a:t>
+            </a:r>
+          </a:p>
+          <a:p>
+            <a:pPr>
+              <a:spcBef>
+                <a:spcPts val="800"/>
+              </a:spcBef>
+              <a:defRPr sz="2000" b="1">
+                <a:solidFill>
+                  <a:srgbClr val="0078D7"/>
+                </a:solidFill>
+              </a:defRPr>
+            </a:pPr>
+            <a:r>
+              <a:t>4. Tầng 1 - Xưởng huấn luyện</a:t>
+            </a:r>
+          </a:p>
+          <a:p>
+            <a:pPr>
+              <a:spcBef>
+                <a:spcPts val="200"/>
+              </a:spcBef>
+              <a:defRPr sz="1600">
+                <a:solidFill>
+                  <a:srgbClr val="333333"/>
+                </a:solidFill>
+              </a:defRPr>
+            </a:pPr>
+            <a:r>
+              <a:t>   Tự huấn luyện mô hình, thấy thiên kiến</a:t>
+            </a:r>
+          </a:p>
+          <a:p>
+            <a:pPr>
+              <a:spcBef>
+                <a:spcPts val="800"/>
+              </a:spcBef>
+              <a:defRPr sz="2000" b="1">
+                <a:solidFill>
+                  <a:srgbClr val="0078D7"/>
+                </a:solidFill>
+              </a:defRPr>
+            </a:pPr>
+            <a:r>
+              <a:t>5. Bản đồ năng lực</a:t>
+            </a:r>
+          </a:p>
+          <a:p>
+            <a:pPr>
+              <a:spcBef>
+                <a:spcPts val="200"/>
+              </a:spcBef>
+              <a:defRPr sz="1600">
+                <a:solidFill>
+                  <a:srgbClr val="333333"/>
+                </a:solidFill>
+              </a:defRPr>
+            </a:pPr>
+            <a:r>
+              <a:t>   Theo dõi tiến bộ theo 12 khối UNESCO</a:t>
+            </a:r>
+          </a:p>
+        </p:txBody>
+      </p:sp>
+    </p:spTree>
+  </p:cSld>
+  <p:clrMapOvr>
+    <a:masterClrMapping/>
+  </p:clrMapOvr>
+</p:sld>
+</file>
+
+<file path=ppt/slides/slide7.xml><?xml version="1.0" encoding="utf-8"?>
+<p:sld xmlns:a="http://schemas.openxmlformats.org/drawingml/2006/main" xmlns:p="http://schemas.openxmlformats.org/presentationml/2006/main" xmlns:r="http://schemas.openxmlformats.org/officeDocument/2006/relationships">
+  <p:cSld>
+    <p:spTree>
+      <p:nvGrpSpPr>
+        <p:cNvPr id="1" name=""/>
+        <p:cNvGrpSpPr/>
+        <p:nvPr/>
+      </p:nvGrpSpPr>
+      <p:grpSpPr/>
+      <p:sp>
+        <p:nvSpPr>
+          <p:cNvPr id="2" name="Rectangle 1"/>
+          <p:cNvSpPr/>
+          <p:nvPr/>
+        </p:nvSpPr>
+        <p:spPr>
+          <a:xfrm>
+            <a:off x="0" y="0"/>
+            <a:ext cx="12191695" cy="731520"/>
+          </a:xfrm>
+          <a:prstGeom prst="rect">
+            <a:avLst/>
+          </a:prstGeom>
+          <a:solidFill>
+            <a:srgbClr val="0078D7"/>
+          </a:solidFill>
+          <a:ln>
+            <a:noFill/>
+          </a:ln>
+        </p:spPr>
+        <p:style>
+          <a:lnRef idx="1">
+            <a:schemeClr val="accent1"/>
+          </a:lnRef>
+          <a:fillRef idx="3">
+            <a:schemeClr val="accent1"/>
+          </a:fillRef>
+          <a:effectRef idx="2">
+            <a:schemeClr val="accent1"/>
+          </a:effectRef>
+          <a:fontRef idx="minor">
+            <a:schemeClr val="lt1"/>
+          </a:fontRef>
+        </p:style>
+        <p:txBody>
+          <a:bodyPr rtlCol="0" anchor="ctr"/>
+          <a:lstStyle/>
+          <a:p>
+            <a:pPr algn="ctr"/>
+          </a:p>
+        </p:txBody>
+      </p:sp>
+      <p:sp>
+        <p:nvSpPr>
+          <p:cNvPr id="3" name="Oval 2"/>
+          <p:cNvSpPr/>
+          <p:nvPr/>
+        </p:nvSpPr>
+        <p:spPr>
+          <a:xfrm>
+            <a:off x="274320" y="137160"/>
+            <a:ext cx="457200" cy="457200"/>
+          </a:xfrm>
+          <a:prstGeom prst="ellipse">
+            <a:avLst/>
+          </a:prstGeom>
+          <a:solidFill>
+            <a:srgbClr val="F0F0F0"/>
+          </a:solidFill>
+          <a:ln w="25400">
+            <a:solidFill>
+              <a:srgbClr val="C8C8C8"/>
+            </a:solidFill>
+          </a:ln>
+        </p:spPr>
+        <p:style>
+          <a:lnRef idx="1">
+            <a:schemeClr val="accent1"/>
+          </a:lnRef>
+          <a:fillRef idx="3">
+            <a:schemeClr val="accent1"/>
+          </a:fillRef>
+          <a:effectRef idx="2">
+            <a:schemeClr val="accent1"/>
+          </a:effectRef>
+          <a:fontRef idx="minor">
+            <a:schemeClr val="lt1"/>
+          </a:fontRef>
+        </p:style>
+        <p:txBody>
+          <a:bodyPr rtlCol="0" anchor="ctr" wrap="square"/>
+          <a:lstStyle/>
+          <a:p>
+            <a:pPr algn="ctr">
+              <a:defRPr sz="1000" b="1">
+                <a:solidFill>
+                  <a:srgbClr val="C8C8C8"/>
+                </a:solidFill>
+              </a:defRPr>
+            </a:pPr>
+            <a:r>
+              <a:t>ĐHSP</a:t>
+            </a:r>
+          </a:p>
+        </p:txBody>
+      </p:sp>
+      <p:sp>
+        <p:nvSpPr>
+          <p:cNvPr id="4" name="Oval 3"/>
+          <p:cNvSpPr/>
+          <p:nvPr/>
+        </p:nvSpPr>
+        <p:spPr>
+          <a:xfrm>
+            <a:off x="822960" y="137160"/>
+            <a:ext cx="457200" cy="457200"/>
+          </a:xfrm>
+          <a:prstGeom prst="ellipse">
+            <a:avLst/>
+          </a:prstGeom>
+          <a:solidFill>
+            <a:srgbClr val="F0F0F0"/>
+          </a:solidFill>
+          <a:ln w="25400">
+            <a:solidFill>
+              <a:srgbClr val="C8C8C8"/>
+            </a:solidFill>
+          </a:ln>
+        </p:spPr>
+        <p:style>
+          <a:lnRef idx="1">
+            <a:schemeClr val="accent1"/>
+          </a:lnRef>
+          <a:fillRef idx="3">
+            <a:schemeClr val="accent1"/>
+          </a:fillRef>
+          <a:effectRef idx="2">
+            <a:schemeClr val="accent1"/>
+          </a:effectRef>
+          <a:fontRef idx="minor">
+            <a:schemeClr val="lt1"/>
+          </a:fontRef>
+        </p:style>
+        <p:txBody>
+          <a:bodyPr rtlCol="0" anchor="ctr" wrap="square"/>
+          <a:lstStyle/>
+          <a:p>
+            <a:pPr algn="ctr">
+              <a:defRPr sz="1000" b="1">
+                <a:solidFill>
+                  <a:srgbClr val="C8C8C8"/>
+                </a:solidFill>
+              </a:defRPr>
+            </a:pPr>
+            <a:r>
+              <a:t>THPT</a:t>
+            </a:r>
+          </a:p>
+        </p:txBody>
+      </p:sp>
+      <p:sp>
+        <p:nvSpPr>
+          <p:cNvPr id="5" name="TextBox 4"/>
+          <p:cNvSpPr txBox="1"/>
+          <p:nvPr/>
+        </p:nvSpPr>
+        <p:spPr>
+          <a:xfrm>
+            <a:off x="1463040" y="137160"/>
+            <a:ext cx="9144000" cy="457200"/>
+          </a:xfrm>
+          <a:prstGeom prst="rect">
+            <a:avLst/>
+          </a:prstGeom>
+          <a:noFill/>
+        </p:spPr>
+        <p:txBody>
+          <a:bodyPr wrap="none">
+            <a:spAutoFit/>
+          </a:bodyPr>
+          <a:lstStyle/>
+          <a:p>
+            <a:pPr>
+              <a:defRPr sz="1800" b="1">
+                <a:solidFill>
+                  <a:srgbClr val="FFFFFF"/>
+                </a:solidFill>
+              </a:defRPr>
+            </a:pPr>
+            <a:r>
+              <a:t>AInatomy — Phòng thực hành AI</a:t>
+            </a:r>
+          </a:p>
+        </p:txBody>
+      </p:sp>
+      <p:sp>
+        <p:nvSpPr>
+          <p:cNvPr id="6" name="TextBox 5"/>
+          <p:cNvSpPr txBox="1"/>
+          <p:nvPr/>
+        </p:nvSpPr>
+        <p:spPr>
+          <a:xfrm>
+            <a:off x="457200" y="1097280"/>
+            <a:ext cx="10972800" cy="731520"/>
+          </a:xfrm>
+          <a:prstGeom prst="rect">
+            <a:avLst/>
+          </a:prstGeom>
+          <a:noFill/>
+        </p:spPr>
+        <p:txBody>
+          <a:bodyPr wrap="none">
+            <a:spAutoFit/>
+          </a:bodyPr>
+          <a:lstStyle/>
+          <a:p>
+            <a:pPr>
+              <a:defRPr sz="3600" b="1">
+                <a:solidFill>
+                  <a:srgbClr val="333333"/>
+                </a:solidFill>
+              </a:defRPr>
+            </a:pPr>
+            <a:r>
+              <a:t>Tích hợp chương trình Tin học 10</a:t>
+            </a:r>
+          </a:p>
+        </p:txBody>
+      </p:sp>
+      <p:sp>
+        <p:nvSpPr>
+          <p:cNvPr id="7" name="TextBox 6"/>
+          <p:cNvSpPr txBox="1"/>
+          <p:nvPr/>
+        </p:nvSpPr>
+        <p:spPr>
+          <a:xfrm>
+            <a:off x="457200" y="6217920"/>
+            <a:ext cx="10972800" cy="457200"/>
+          </a:xfrm>
+          <a:prstGeom prst="rect">
+            <a:avLst/>
+          </a:prstGeom>
+          <a:noFill/>
+        </p:spPr>
+        <p:txBody>
+          <a:bodyPr wrap="none">
+            <a:spAutoFit/>
+          </a:bodyPr>
+          <a:lstStyle/>
+          <a:p>
+            <a:pPr algn="ctr">
+              <a:defRPr sz="1100">
+                <a:solidFill>
+                  <a:srgbClr val="C8C8C8"/>
+                </a:solidFill>
+              </a:defRPr>
+            </a:pPr>
+            <a:r>
+              <a:t>Trường THPT Thuận Hoá — ĐHSP Huế | GV: Mai Xuân Văn</a:t>
+            </a:r>
+          </a:p>
+        </p:txBody>
+      </p:sp>
+      <p:sp>
+        <p:nvSpPr>
+          <p:cNvPr id="8" name="TextBox 7"/>
+          <p:cNvSpPr txBox="1"/>
+          <p:nvPr/>
+        </p:nvSpPr>
+        <p:spPr>
+          <a:xfrm>
+            <a:off x="457200" y="2011680"/>
+            <a:ext cx="10972800" cy="1097280"/>
+          </a:xfrm>
+          <a:prstGeom prst="rect">
+            <a:avLst/>
+          </a:prstGeom>
+          <a:noFill/>
+        </p:spPr>
+        <p:txBody>
+          <a:bodyPr wrap="square">
+            <a:spAutoFit/>
+          </a:bodyPr>
+          <a:lstStyle/>
+          <a:p/>
+          <a:p>
+            <a:pPr>
+              <a:spcBef>
+                <a:spcPts val="800"/>
+              </a:spcBef>
+            </a:pPr>
+            <a:r>
+              <a:rPr sz="2400" b="1">
+                <a:solidFill>
+                  <a:srgbClr val="27AE60"/>
+                </a:solidFill>
+              </a:rPr>
+              <a:t>28 bài </a:t>
+            </a:r>
+            <a:r>
+              <a:rPr sz="2000">
+                <a:solidFill>
+                  <a:srgbClr val="333333"/>
+                </a:solidFill>
+              </a:rPr>
+              <a:t>trong SGK Tin học 10 được hỗ trợ</a:t>
+            </a:r>
+          </a:p>
+          <a:p>
+            <a:pPr>
+              <a:spcBef>
+                <a:spcPts val="800"/>
+              </a:spcBef>
+            </a:pPr>
+            <a:r>
+              <a:rPr sz="2400" b="1">
+                <a:solidFill>
+                  <a:srgbClr val="27AE60"/>
+                </a:solidFill>
+              </a:rPr>
+              <a:t>22/22 YCCĐ </a:t>
+            </a:r>
+            <a:r>
+              <a:rPr sz="2000">
+                <a:solidFill>
+                  <a:srgbClr val="333333"/>
+                </a:solidFill>
+              </a:rPr>
+              <a:t>lớp 10 theo QĐ 2422 đều được phủ</a:t>
+            </a:r>
+          </a:p>
+          <a:p>
+            <a:pPr>
+              <a:spcBef>
+                <a:spcPts val="800"/>
+              </a:spcBef>
+            </a:pPr>
+            <a:r>
+              <a:rPr sz="2400" b="1">
+                <a:solidFill>
+                  <a:srgbClr val="27AE60"/>
+                </a:solidFill>
+              </a:rPr>
+              <a:t>6 chủ đề </a:t>
+            </a:r>
+            <a:r>
+              <a:rPr sz="2000">
+                <a:solidFill>
+                  <a:srgbClr val="333333"/>
+                </a:solidFill>
+              </a:rPr>
+              <a:t>A-F trong chương trình</a:t>
+            </a:r>
+          </a:p>
+        </p:txBody>
+      </p:sp>
+      <p:sp>
+        <p:nvSpPr>
+          <p:cNvPr id="9" name="TextBox 8"/>
+          <p:cNvSpPr txBox="1"/>
+          <p:nvPr/>
+        </p:nvSpPr>
+        <p:spPr>
+          <a:xfrm>
+            <a:off x="457200" y="3474720"/>
+            <a:ext cx="10972800" cy="2560320"/>
+          </a:xfrm>
+          <a:prstGeom prst="rect">
+            <a:avLst/>
+          </a:prstGeom>
+          <a:noFill/>
+        </p:spPr>
+        <p:txBody>
+          <a:bodyPr wrap="square">
+            <a:spAutoFit/>
+          </a:bodyPr>
+          <a:lstStyle/>
+          <a:p>
+            <a:pPr>
+              <a:spcAft>
+                <a:spcPts val="800"/>
+              </a:spcAft>
+              <a:defRPr sz="2200" b="1">
+                <a:solidFill>
+                  <a:srgbClr val="0078D7"/>
+                </a:solidFill>
+              </a:defRPr>
+            </a:pPr>
+            <a:r>
+              <a:t>Ví dụ: Chủ đề A - Máy tính và xã hội tri thức</a:t>
+            </a:r>
+          </a:p>
+          <a:p>
+            <a:pPr>
+              <a:spcBef>
+                <a:spcPts val="600"/>
+              </a:spcBef>
+              <a:defRPr sz="1600">
+                <a:solidFill>
+                  <a:srgbClr val="333333"/>
+                </a:solidFill>
+              </a:defRPr>
+            </a:pPr>
+            <a:r>
+              <a:t>• Bài 1: Dữ liệu, thông tin → Kịch bản 9 cảnh + Trạm 0 (15-20 phút)</a:t>
+            </a:r>
+          </a:p>
+          <a:p>
+            <a:pPr>
+              <a:spcBef>
+                <a:spcPts val="600"/>
+              </a:spcBef>
+              <a:defRPr sz="1600">
+                <a:solidFill>
+                  <a:srgbClr val="333333"/>
+                </a:solidFill>
+              </a:defRPr>
+            </a:pPr>
+            <a:r>
+              <a:t>• Bài 2: Sự ưu việt của máy tính → Đấu trường bắt lỗi AI (20-25 phút)</a:t>
+            </a:r>
+          </a:p>
+          <a:p>
+            <a:pPr>
+              <a:spcBef>
+                <a:spcPts val="600"/>
+              </a:spcBef>
+              <a:defRPr sz="1600">
+                <a:solidFill>
+                  <a:srgbClr val="333333"/>
+                </a:solidFill>
+              </a:defRPr>
+            </a:pPr>
+            <a:r>
+              <a:t>• Bài 3: Thực hành thiết bị số → Tình huống + Kiến thức (10 phút)</a:t>
+            </a:r>
+          </a:p>
+          <a:p>
+            <a:pPr>
+              <a:spcBef>
+                <a:spcPts val="600"/>
+              </a:spcBef>
+              <a:defRPr sz="1600">
+                <a:solidFill>
+                  <a:srgbClr val="333333"/>
+                </a:solidFill>
+              </a:defRPr>
+            </a:pPr>
+            <a:r>
+              <a:t>• Bài 4: Tin học trong kinh tế, xã hội → Nhà máy AI Trạm 0, 5 (15 phút)</a:t>
+            </a:r>
+          </a:p>
+        </p:txBody>
+      </p:sp>
+    </p:spTree>
+  </p:cSld>
+  <p:clrMapOvr>
+    <a:masterClrMapping/>
+  </p:clrMapOvr>
+</p:sld>
+</file>
+
+<file path=ppt/slides/slide8.xml><?xml version="1.0" encoding="utf-8"?>
+<p:sld xmlns:a="http://schemas.openxmlformats.org/drawingml/2006/main" xmlns:p="http://schemas.openxmlformats.org/presentationml/2006/main" xmlns:r="http://schemas.openxmlformats.org/officeDocument/2006/relationships">
+  <p:cSld>
+    <p:spTree>
+      <p:nvGrpSpPr>
+        <p:cNvPr id="1" name=""/>
+        <p:cNvGrpSpPr/>
+        <p:nvPr/>
+      </p:nvGrpSpPr>
+      <p:grpSpPr/>
+      <p:sp>
+        <p:nvSpPr>
+          <p:cNvPr id="2" name="Rectangle 1"/>
+          <p:cNvSpPr/>
+          <p:nvPr/>
+        </p:nvSpPr>
+        <p:spPr>
+          <a:xfrm>
+            <a:off x="0" y="0"/>
+            <a:ext cx="12191695" cy="731520"/>
+          </a:xfrm>
+          <a:prstGeom prst="rect">
+            <a:avLst/>
+          </a:prstGeom>
+          <a:solidFill>
+            <a:srgbClr val="0078D7"/>
+          </a:solidFill>
+          <a:ln>
+            <a:noFill/>
+          </a:ln>
+        </p:spPr>
+        <p:style>
+          <a:lnRef idx="1">
+            <a:schemeClr val="accent1"/>
+          </a:lnRef>
+          <a:fillRef idx="3">
+            <a:schemeClr val="accent1"/>
+          </a:fillRef>
+          <a:effectRef idx="2">
+            <a:schemeClr val="accent1"/>
+          </a:effectRef>
+          <a:fontRef idx="minor">
+            <a:schemeClr val="lt1"/>
+          </a:fontRef>
+        </p:style>
+        <p:txBody>
+          <a:bodyPr rtlCol="0" anchor="ctr"/>
+          <a:lstStyle/>
+          <a:p>
+            <a:pPr algn="ctr"/>
+          </a:p>
+        </p:txBody>
+      </p:sp>
+      <p:sp>
+        <p:nvSpPr>
+          <p:cNvPr id="3" name="Oval 2"/>
+          <p:cNvSpPr/>
+          <p:nvPr/>
+        </p:nvSpPr>
+        <p:spPr>
+          <a:xfrm>
+            <a:off x="274320" y="137160"/>
+            <a:ext cx="457200" cy="457200"/>
+          </a:xfrm>
+          <a:prstGeom prst="ellipse">
+            <a:avLst/>
+          </a:prstGeom>
+          <a:solidFill>
+            <a:srgbClr val="F0F0F0"/>
+          </a:solidFill>
+          <a:ln w="25400">
+            <a:solidFill>
+              <a:srgbClr val="C8C8C8"/>
+            </a:solidFill>
+          </a:ln>
+        </p:spPr>
+        <p:style>
+          <a:lnRef idx="1">
+            <a:schemeClr val="accent1"/>
+          </a:lnRef>
+          <a:fillRef idx="3">
+            <a:schemeClr val="accent1"/>
+          </a:fillRef>
+          <a:effectRef idx="2">
+            <a:schemeClr val="accent1"/>
+          </a:effectRef>
+          <a:fontRef idx="minor">
+            <a:schemeClr val="lt1"/>
+          </a:fontRef>
+        </p:style>
+        <p:txBody>
+          <a:bodyPr rtlCol="0" anchor="ctr" wrap="square"/>
+          <a:lstStyle/>
+          <a:p>
+            <a:pPr algn="ctr">
+              <a:defRPr sz="1000" b="1">
+                <a:solidFill>
+                  <a:srgbClr val="C8C8C8"/>
+                </a:solidFill>
+              </a:defRPr>
+            </a:pPr>
+            <a:r>
+              <a:t>ĐHSP</a:t>
+            </a:r>
+          </a:p>
+        </p:txBody>
+      </p:sp>
+      <p:sp>
+        <p:nvSpPr>
+          <p:cNvPr id="4" name="Oval 3"/>
+          <p:cNvSpPr/>
+          <p:nvPr/>
+        </p:nvSpPr>
+        <p:spPr>
+          <a:xfrm>
+            <a:off x="822960" y="137160"/>
+            <a:ext cx="457200" cy="457200"/>
+          </a:xfrm>
+          <a:prstGeom prst="ellipse">
+            <a:avLst/>
+          </a:prstGeom>
+          <a:solidFill>
+            <a:srgbClr val="F0F0F0"/>
+          </a:solidFill>
+          <a:ln w="25400">
+            <a:solidFill>
+              <a:srgbClr val="C8C8C8"/>
+            </a:solidFill>
+          </a:ln>
+        </p:spPr>
+        <p:style>
+          <a:lnRef idx="1">
+            <a:schemeClr val="accent1"/>
+          </a:lnRef>
+          <a:fillRef idx="3">
+            <a:schemeClr val="accent1"/>
+          </a:fillRef>
+          <a:effectRef idx="2">
+            <a:schemeClr val="accent1"/>
+          </a:effectRef>
+          <a:fontRef idx="minor">
+            <a:schemeClr val="lt1"/>
+          </a:fontRef>
+        </p:style>
+        <p:txBody>
+          <a:bodyPr rtlCol="0" anchor="ctr" wrap="square"/>
+          <a:lstStyle/>
+          <a:p>
+            <a:pPr algn="ctr">
+              <a:defRPr sz="1000" b="1">
+                <a:solidFill>
+                  <a:srgbClr val="C8C8C8"/>
+                </a:solidFill>
+              </a:defRPr>
+            </a:pPr>
+            <a:r>
+              <a:t>THPT</a:t>
+            </a:r>
+          </a:p>
+        </p:txBody>
+      </p:sp>
+      <p:sp>
+        <p:nvSpPr>
+          <p:cNvPr id="5" name="TextBox 4"/>
+          <p:cNvSpPr txBox="1"/>
+          <p:nvPr/>
+        </p:nvSpPr>
+        <p:spPr>
+          <a:xfrm>
+            <a:off x="1463040" y="137160"/>
+            <a:ext cx="9144000" cy="457200"/>
+          </a:xfrm>
+          <a:prstGeom prst="rect">
+            <a:avLst/>
+          </a:prstGeom>
+          <a:noFill/>
+        </p:spPr>
+        <p:txBody>
+          <a:bodyPr wrap="none">
+            <a:spAutoFit/>
+          </a:bodyPr>
+          <a:lstStyle/>
+          <a:p>
+            <a:pPr>
+              <a:defRPr sz="1800" b="1">
+                <a:solidFill>
+                  <a:srgbClr val="FFFFFF"/>
+                </a:solidFill>
+              </a:defRPr>
+            </a:pPr>
+            <a:r>
+              <a:t>AInatomy — Phòng thực hành AI</a:t>
+            </a:r>
+          </a:p>
+        </p:txBody>
+      </p:sp>
+      <p:sp>
+        <p:nvSpPr>
+          <p:cNvPr id="6" name="TextBox 5"/>
+          <p:cNvSpPr txBox="1"/>
+          <p:nvPr/>
+        </p:nvSpPr>
+        <p:spPr>
+          <a:xfrm>
+            <a:off x="457200" y="1097280"/>
+            <a:ext cx="10972800" cy="731520"/>
+          </a:xfrm>
+          <a:prstGeom prst="rect">
+            <a:avLst/>
+          </a:prstGeom>
+          <a:noFill/>
+        </p:spPr>
+        <p:txBody>
+          <a:bodyPr wrap="none">
+            <a:spAutoFit/>
+          </a:bodyPr>
+          <a:lstStyle/>
+          <a:p>
+            <a:pPr>
+              <a:defRPr sz="3600" b="1">
+                <a:solidFill>
+                  <a:srgbClr val="333333"/>
+                </a:solidFill>
+              </a:defRPr>
+            </a:pPr>
+            <a:r>
+              <a:t>Hướng dẫn sử dụng</a:t>
+            </a:r>
+          </a:p>
+        </p:txBody>
+      </p:sp>
+      <p:sp>
+        <p:nvSpPr>
+          <p:cNvPr id="7" name="TextBox 6"/>
+          <p:cNvSpPr txBox="1"/>
+          <p:nvPr/>
+        </p:nvSpPr>
+        <p:spPr>
+          <a:xfrm>
+            <a:off x="457200" y="6217920"/>
+            <a:ext cx="10972800" cy="457200"/>
+          </a:xfrm>
+          <a:prstGeom prst="rect">
+            <a:avLst/>
+          </a:prstGeom>
+          <a:noFill/>
+        </p:spPr>
+        <p:txBody>
+          <a:bodyPr wrap="none">
+            <a:spAutoFit/>
+          </a:bodyPr>
+          <a:lstStyle/>
+          <a:p>
+            <a:pPr algn="ctr">
+              <a:defRPr sz="1100">
+                <a:solidFill>
+                  <a:srgbClr val="C8C8C8"/>
+                </a:solidFill>
+              </a:defRPr>
+            </a:pPr>
+            <a:r>
+              <a:t>Trường THPT Thuận Hoá — ĐHSP Huế | GV: Mai Xuân Văn</a:t>
+            </a:r>
+          </a:p>
+        </p:txBody>
+      </p:sp>
+      <p:sp>
+        <p:nvSpPr>
+          <p:cNvPr id="8" name="TextBox 7"/>
+          <p:cNvSpPr txBox="1"/>
+          <p:nvPr/>
+        </p:nvSpPr>
+        <p:spPr>
+          <a:xfrm>
+            <a:off x="457200" y="2011680"/>
+            <a:ext cx="5029200" cy="3840480"/>
+          </a:xfrm>
+          <a:prstGeom prst="rect">
+            <a:avLst/>
+          </a:prstGeom>
+          <a:noFill/>
+        </p:spPr>
+        <p:txBody>
+          <a:bodyPr wrap="square">
+            <a:spAutoFit/>
+          </a:bodyPr>
+          <a:lstStyle/>
+          <a:p>
+            <a:pPr>
+              <a:spcAft>
+                <a:spcPts val="1000"/>
+              </a:spcAft>
+              <a:defRPr sz="2400" b="1">
+                <a:solidFill>
+                  <a:srgbClr val="0078D7"/>
+                </a:solidFill>
+              </a:defRPr>
+            </a:pPr>
+            <a:r>
+              <a:t>3 cách chạy</a:t>
+            </a:r>
+          </a:p>
+          <a:p>
+            <a:pPr>
+              <a:spcBef>
+                <a:spcPts val="800"/>
+              </a:spcBef>
+              <a:defRPr sz="1600">
+                <a:solidFill>
+                  <a:srgbClr val="333333"/>
+                </a:solidFill>
+              </a:defRPr>
+            </a:pPr>
+            <a:r>
+              <a:t>• USB: Chép thư mục, mở index.html</a:t>
+            </a:r>
+          </a:p>
+          <a:p>
+            <a:pPr>
+              <a:spcBef>
+                <a:spcPts val="800"/>
+              </a:spcBef>
+              <a:defRPr sz="1600">
+                <a:solidFill>
+                  <a:srgbClr val="333333"/>
+                </a:solidFill>
+              </a:defRPr>
+            </a:pPr>
+            <a:r>
+              <a:t>• Máy chủ lớp: Chia sẻ qua mạng LAN</a:t>
+            </a:r>
+          </a:p>
+          <a:p>
+            <a:pPr>
+              <a:spcBef>
+                <a:spcPts val="800"/>
+              </a:spcBef>
+              <a:defRPr sz="1600">
+                <a:solidFill>
+                  <a:srgbClr val="333333"/>
+                </a:solidFill>
+              </a:defRPr>
+            </a:pPr>
+            <a:r>
+              <a:t>• Máy cá nhân: Mở trực tiếp từ thư mục</a:t>
+            </a:r>
+          </a:p>
+        </p:txBody>
+      </p:sp>
+      <p:sp>
+        <p:nvSpPr>
+          <p:cNvPr id="9" name="TextBox 8"/>
+          <p:cNvSpPr txBox="1"/>
+          <p:nvPr/>
+        </p:nvSpPr>
+        <p:spPr>
+          <a:xfrm>
+            <a:off x="5943600" y="2011680"/>
+            <a:ext cx="5029200" cy="3840480"/>
+          </a:xfrm>
+          <a:prstGeom prst="rect">
+            <a:avLst/>
+          </a:prstGeom>
+          <a:noFill/>
+        </p:spPr>
+        <p:txBody>
+          <a:bodyPr wrap="square">
+            <a:spAutoFit/>
+          </a:bodyPr>
+          <a:lstStyle/>
+          <a:p>
+            <a:pPr>
+              <a:spcAft>
+                <a:spcPts val="1000"/>
+              </a:spcAft>
+              <a:defRPr sz="2400" b="1">
+                <a:solidFill>
+                  <a:srgbClr val="0078D7"/>
+                </a:solidFill>
+              </a:defRPr>
+            </a:pPr>
+            <a:r>
+              <a:t>Yêu cầu</a:t>
+            </a:r>
+          </a:p>
+          <a:p>
+            <a:pPr>
+              <a:spcBef>
+                <a:spcPts val="800"/>
+              </a:spcBef>
+              <a:defRPr sz="1600">
+                <a:solidFill>
+                  <a:srgbClr val="333333"/>
+                </a:solidFill>
+              </a:defRPr>
+            </a:pPr>
+            <a:r>
+              <a:t>✓ Không cần Internet</a:t>
+            </a:r>
+          </a:p>
+          <a:p>
+            <a:pPr>
+              <a:spcBef>
+                <a:spcPts val="800"/>
+              </a:spcBef>
+              <a:defRPr sz="1600">
+                <a:solidFill>
+                  <a:srgbClr val="333333"/>
+                </a:solidFill>
+              </a:defRPr>
+            </a:pPr>
+            <a:r>
+              <a:t>✓ Không cần tài khoản</a:t>
+            </a:r>
+          </a:p>
+          <a:p>
+            <a:pPr>
+              <a:spcBef>
+                <a:spcPts val="800"/>
+              </a:spcBef>
+              <a:defRPr sz="1600">
+                <a:solidFill>
+                  <a:srgbClr val="333333"/>
+                </a:solidFill>
+              </a:defRPr>
+            </a:pPr>
+            <a:r>
+              <a:t>✓ Trình duyệt bất kỳ</a:t>
+            </a:r>
+          </a:p>
+          <a:p>
+            <a:pPr>
+              <a:spcBef>
+                <a:spcPts val="800"/>
+              </a:spcBef>
+              <a:defRPr sz="1600">
+                <a:solidFill>
+                  <a:srgbClr val="333333"/>
+                </a:solidFill>
+              </a:defRPr>
+            </a:pPr>
+            <a:r>
+              <a:t>✓ Máy cấu hình yếu vẫn chạy</a:t>
+            </a:r>
+          </a:p>
+          <a:p>
+            <a:pPr>
+              <a:spcBef>
+                <a:spcPts val="800"/>
+              </a:spcBef>
+              <a:defRPr sz="1600">
+                <a:solidFill>
+                  <a:srgbClr val="333333"/>
+                </a:solidFill>
+              </a:defRPr>
+            </a:pPr>
+            <a:r>
+              <a:t>✓ Dữ liệu lưu cục bộ</a:t>
             </a:r>
           </a:p>
         </p:txBody>

--- a/template_thuanhoa.pptx
+++ b/template_thuanhoa.pptx
@@ -12,7 +12,6 @@
     <p:sldId id="260" r:id="rId11"/>
     <p:sldId id="261" r:id="rId12"/>
     <p:sldId id="262" r:id="rId13"/>
-    <p:sldId id="263" r:id="rId14"/>
   </p:sldIdLst>
   <p:sldSz cx="12191695" cy="6858000" type="screen4x3"/>
   <p:notesSz cx="6858000" cy="9144000"/>
@@ -3104,7 +3103,7 @@
         <p:spPr>
           <a:xfrm>
             <a:off x="0" y="0"/>
-            <a:ext cx="12191695" cy="1097280"/>
+            <a:ext cx="12191695" cy="914400"/>
           </a:xfrm>
           <a:prstGeom prst="rect">
             <a:avLst/>
@@ -3138,124 +3137,54 @@
           </a:p>
         </p:txBody>
       </p:sp>
-      <p:sp>
-        <p:nvSpPr>
-          <p:cNvPr id="3" name="Oval 2"/>
-          <p:cNvSpPr/>
+      <p:pic>
+        <p:nvPicPr>
+          <p:cNvPr id="3" name="Picture 2" descr="logo_dhsp_hue.png"/>
+          <p:cNvPicPr>
+            <a:picLocks noChangeAspect="1"/>
+          </p:cNvPicPr>
           <p:nvPr/>
-        </p:nvSpPr>
-        <p:spPr>
-          <a:xfrm>
-            <a:off x="365760" y="182880"/>
-            <a:ext cx="731520" cy="731520"/>
-          </a:xfrm>
-          <a:prstGeom prst="ellipse">
+        </p:nvPicPr>
+        <p:blipFill>
+          <a:blip r:embed="rId2"/>
+          <a:stretch>
+            <a:fillRect/>
+          </a:stretch>
+        </p:blipFill>
+        <p:spPr>
+          <a:xfrm>
+            <a:off x="274320" y="137160"/>
+            <a:ext cx="640080" cy="640080"/>
+          </a:xfrm>
+          <a:prstGeom prst="rect">
             <a:avLst/>
           </a:prstGeom>
-          <a:solidFill>
-            <a:srgbClr val="F0F0F0"/>
-          </a:solidFill>
-          <a:ln w="25400">
-            <a:solidFill>
-              <a:srgbClr val="C8C8C8"/>
-            </a:solidFill>
-          </a:ln>
-        </p:spPr>
-        <p:style>
-          <a:lnRef idx="1">
-            <a:schemeClr val="accent1"/>
-          </a:lnRef>
-          <a:fillRef idx="3">
-            <a:schemeClr val="accent1"/>
-          </a:fillRef>
-          <a:effectRef idx="2">
-            <a:schemeClr val="accent1"/>
-          </a:effectRef>
-          <a:fontRef idx="minor">
-            <a:schemeClr val="lt1"/>
-          </a:fontRef>
-        </p:style>
-        <p:txBody>
-          <a:bodyPr rtlCol="0" anchor="ctr" wrap="square"/>
-          <a:lstStyle/>
-          <a:p>
-            <a:pPr algn="ctr">
-              <a:defRPr sz="1000" b="1">
-                <a:solidFill>
-                  <a:srgbClr val="C8C8C8"/>
-                </a:solidFill>
-              </a:defRPr>
-            </a:pPr>
-            <a:r>
-              <a:t>LOGO</a:t>
-            </a:r>
-          </a:p>
-          <a:p>
-            <a:r>
-              <a:t>ĐHSP</a:t>
-            </a:r>
-          </a:p>
-        </p:txBody>
-      </p:sp>
-      <p:sp>
-        <p:nvSpPr>
-          <p:cNvPr id="4" name="Oval 3"/>
-          <p:cNvSpPr/>
+        </p:spPr>
+      </p:pic>
+      <p:pic>
+        <p:nvPicPr>
+          <p:cNvPr id="4" name="Picture 3" descr="logo_thpt_thuan_hoa.jpg"/>
+          <p:cNvPicPr>
+            <a:picLocks noChangeAspect="1"/>
+          </p:cNvPicPr>
           <p:nvPr/>
-        </p:nvSpPr>
-        <p:spPr>
-          <a:xfrm>
-            <a:off x="1280160" y="182880"/>
-            <a:ext cx="731520" cy="731520"/>
-          </a:xfrm>
-          <a:prstGeom prst="ellipse">
+        </p:nvPicPr>
+        <p:blipFill>
+          <a:blip r:embed="rId3"/>
+          <a:stretch>
+            <a:fillRect/>
+          </a:stretch>
+        </p:blipFill>
+        <p:spPr>
+          <a:xfrm>
+            <a:off x="1051560" y="137160"/>
+            <a:ext cx="640080" cy="640080"/>
+          </a:xfrm>
+          <a:prstGeom prst="rect">
             <a:avLst/>
           </a:prstGeom>
-          <a:solidFill>
-            <a:srgbClr val="F0F0F0"/>
-          </a:solidFill>
-          <a:ln w="25400">
-            <a:solidFill>
-              <a:srgbClr val="C8C8C8"/>
-            </a:solidFill>
-          </a:ln>
-        </p:spPr>
-        <p:style>
-          <a:lnRef idx="1">
-            <a:schemeClr val="accent1"/>
-          </a:lnRef>
-          <a:fillRef idx="3">
-            <a:schemeClr val="accent1"/>
-          </a:fillRef>
-          <a:effectRef idx="2">
-            <a:schemeClr val="accent1"/>
-          </a:effectRef>
-          <a:fontRef idx="minor">
-            <a:schemeClr val="lt1"/>
-          </a:fontRef>
-        </p:style>
-        <p:txBody>
-          <a:bodyPr rtlCol="0" anchor="ctr" wrap="square"/>
-          <a:lstStyle/>
-          <a:p>
-            <a:pPr algn="ctr">
-              <a:defRPr sz="1000" b="1">
-                <a:solidFill>
-                  <a:srgbClr val="C8C8C8"/>
-                </a:solidFill>
-              </a:defRPr>
-            </a:pPr>
-            <a:r>
-              <a:t>LOGO</a:t>
-            </a:r>
-          </a:p>
-          <a:p>
-            <a:r>
-              <a:t>THPT</a:t>
-            </a:r>
-          </a:p>
-        </p:txBody>
-      </p:sp>
+        </p:spPr>
+      </p:pic>
       <p:sp>
         <p:nvSpPr>
           <p:cNvPr id="5" name="TextBox 4"/>
@@ -3264,8 +3193,8 @@
         </p:nvSpPr>
         <p:spPr>
           <a:xfrm>
-            <a:off x="1371600" y="2286000"/>
-            <a:ext cx="9144000" cy="1828800"/>
+            <a:off x="2011680" y="137160"/>
+            <a:ext cx="9144000" cy="457200"/>
           </a:xfrm>
           <a:prstGeom prst="rect">
             <a:avLst/>
@@ -3273,20 +3202,20 @@
           <a:noFill/>
         </p:spPr>
         <p:txBody>
-          <a:bodyPr wrap="square">
+          <a:bodyPr wrap="none">
             <a:spAutoFit/>
           </a:bodyPr>
           <a:lstStyle/>
           <a:p>
-            <a:pPr algn="ctr">
-              <a:defRPr sz="6000" b="1">
-                <a:solidFill>
-                  <a:srgbClr val="333333"/>
+            <a:pPr>
+              <a:defRPr sz="2000" b="1">
+                <a:solidFill>
+                  <a:srgbClr val="FFFFFF"/>
                 </a:solidFill>
               </a:defRPr>
             </a:pPr>
             <a:r>
-              <a:t>AInatomy</a:t>
+              <a:t>AInatomy — Phòng thực hành AI</a:t>
             </a:r>
           </a:p>
         </p:txBody>
@@ -3299,8 +3228,8 @@
         </p:nvSpPr>
         <p:spPr>
           <a:xfrm>
-            <a:off x="1371600" y="4114800"/>
-            <a:ext cx="9144000" cy="914400"/>
+            <a:off x="1371600" y="2286000"/>
+            <a:ext cx="9144000" cy="1371600"/>
           </a:xfrm>
           <a:prstGeom prst="rect">
             <a:avLst/>
@@ -3308,20 +3237,20 @@
           <a:noFill/>
         </p:spPr>
         <p:txBody>
-          <a:bodyPr wrap="square">
+          <a:bodyPr wrap="none">
             <a:spAutoFit/>
           </a:bodyPr>
           <a:lstStyle/>
           <a:p>
             <a:pPr algn="ctr">
-              <a:defRPr sz="2800">
+              <a:defRPr sz="5600" b="1">
                 <a:solidFill>
                   <a:srgbClr val="333333"/>
                 </a:solidFill>
               </a:defRPr>
             </a:pPr>
             <a:r>
-              <a:t>Phòng thực hành Trí tuệ nhân tạo</a:t>
+              <a:t>AInatomy</a:t>
             </a:r>
           </a:p>
         </p:txBody>
@@ -3334,8 +3263,8 @@
         </p:nvSpPr>
         <p:spPr>
           <a:xfrm>
-            <a:off x="457200" y="5943600"/>
-            <a:ext cx="10972800" cy="731520"/>
+            <a:off x="1371600" y="3657600"/>
+            <a:ext cx="9144000" cy="914400"/>
           </a:xfrm>
           <a:prstGeom prst="rect">
             <a:avLst/>
@@ -3343,7 +3272,42 @@
           <a:noFill/>
         </p:spPr>
         <p:txBody>
-          <a:bodyPr wrap="square">
+          <a:bodyPr wrap="none">
+            <a:spAutoFit/>
+          </a:bodyPr>
+          <a:lstStyle/>
+          <a:p>
+            <a:pPr algn="ctr">
+              <a:defRPr sz="2400">
+                <a:solidFill>
+                  <a:srgbClr val="333333"/>
+                </a:solidFill>
+              </a:defRPr>
+            </a:pPr>
+            <a:r>
+              <a:t>Phòng thực hành Trí tuệ nhân tạo — Báo cáo cuộc thi</a:t>
+            </a:r>
+          </a:p>
+        </p:txBody>
+      </p:sp>
+      <p:sp>
+        <p:nvSpPr>
+          <p:cNvPr id="8" name="TextBox 7"/>
+          <p:cNvSpPr txBox="1"/>
+          <p:nvPr/>
+        </p:nvSpPr>
+        <p:spPr>
+          <a:xfrm>
+            <a:off x="457200" y="5303520"/>
+            <a:ext cx="10972800" cy="914400"/>
+          </a:xfrm>
+          <a:prstGeom prst="rect">
+            <a:avLst/>
+          </a:prstGeom>
+          <a:noFill/>
+        </p:spPr>
+        <p:txBody>
+          <a:bodyPr wrap="none">
             <a:spAutoFit/>
           </a:bodyPr>
           <a:lstStyle/>
@@ -3426,114 +3390,54 @@
           </a:p>
         </p:txBody>
       </p:sp>
-      <p:sp>
-        <p:nvSpPr>
-          <p:cNvPr id="3" name="Oval 2"/>
-          <p:cNvSpPr/>
+      <p:pic>
+        <p:nvPicPr>
+          <p:cNvPr id="3" name="Picture 2" descr="logo_dhsp_hue.png"/>
+          <p:cNvPicPr>
+            <a:picLocks noChangeAspect="1"/>
+          </p:cNvPicPr>
           <p:nvPr/>
-        </p:nvSpPr>
+        </p:nvPicPr>
+        <p:blipFill>
+          <a:blip r:embed="rId2"/>
+          <a:stretch>
+            <a:fillRect/>
+          </a:stretch>
+        </p:blipFill>
         <p:spPr>
           <a:xfrm>
             <a:off x="274320" y="137160"/>
             <a:ext cx="457200" cy="457200"/>
           </a:xfrm>
-          <a:prstGeom prst="ellipse">
+          <a:prstGeom prst="rect">
             <a:avLst/>
           </a:prstGeom>
-          <a:solidFill>
-            <a:srgbClr val="F0F0F0"/>
-          </a:solidFill>
-          <a:ln w="25400">
-            <a:solidFill>
-              <a:srgbClr val="C8C8C8"/>
-            </a:solidFill>
-          </a:ln>
-        </p:spPr>
-        <p:style>
-          <a:lnRef idx="1">
-            <a:schemeClr val="accent1"/>
-          </a:lnRef>
-          <a:fillRef idx="3">
-            <a:schemeClr val="accent1"/>
-          </a:fillRef>
-          <a:effectRef idx="2">
-            <a:schemeClr val="accent1"/>
-          </a:effectRef>
-          <a:fontRef idx="minor">
-            <a:schemeClr val="lt1"/>
-          </a:fontRef>
-        </p:style>
-        <p:txBody>
-          <a:bodyPr rtlCol="0" anchor="ctr" wrap="square"/>
-          <a:lstStyle/>
-          <a:p>
-            <a:pPr algn="ctr">
-              <a:defRPr sz="1000" b="1">
-                <a:solidFill>
-                  <a:srgbClr val="C8C8C8"/>
-                </a:solidFill>
-              </a:defRPr>
-            </a:pPr>
-            <a:r>
-              <a:t>ĐHSP</a:t>
-            </a:r>
-          </a:p>
-        </p:txBody>
-      </p:sp>
-      <p:sp>
-        <p:nvSpPr>
-          <p:cNvPr id="4" name="Oval 3"/>
-          <p:cNvSpPr/>
+        </p:spPr>
+      </p:pic>
+      <p:pic>
+        <p:nvPicPr>
+          <p:cNvPr id="4" name="Picture 3" descr="logo_thpt_thuan_hoa.jpg"/>
+          <p:cNvPicPr>
+            <a:picLocks noChangeAspect="1"/>
+          </p:cNvPicPr>
           <p:nvPr/>
-        </p:nvSpPr>
-        <p:spPr>
-          <a:xfrm>
-            <a:off x="822960" y="137160"/>
+        </p:nvPicPr>
+        <p:blipFill>
+          <a:blip r:embed="rId3"/>
+          <a:stretch>
+            <a:fillRect/>
+          </a:stretch>
+        </p:blipFill>
+        <p:spPr>
+          <a:xfrm>
+            <a:off x="868680" y="137160"/>
             <a:ext cx="457200" cy="457200"/>
           </a:xfrm>
-          <a:prstGeom prst="ellipse">
+          <a:prstGeom prst="rect">
             <a:avLst/>
           </a:prstGeom>
-          <a:solidFill>
-            <a:srgbClr val="F0F0F0"/>
-          </a:solidFill>
-          <a:ln w="25400">
-            <a:solidFill>
-              <a:srgbClr val="C8C8C8"/>
-            </a:solidFill>
-          </a:ln>
-        </p:spPr>
-        <p:style>
-          <a:lnRef idx="1">
-            <a:schemeClr val="accent1"/>
-          </a:lnRef>
-          <a:fillRef idx="3">
-            <a:schemeClr val="accent1"/>
-          </a:fillRef>
-          <a:effectRef idx="2">
-            <a:schemeClr val="accent1"/>
-          </a:effectRef>
-          <a:fontRef idx="minor">
-            <a:schemeClr val="lt1"/>
-          </a:fontRef>
-        </p:style>
-        <p:txBody>
-          <a:bodyPr rtlCol="0" anchor="ctr" wrap="square"/>
-          <a:lstStyle/>
-          <a:p>
-            <a:pPr algn="ctr">
-              <a:defRPr sz="1000" b="1">
-                <a:solidFill>
-                  <a:srgbClr val="C8C8C8"/>
-                </a:solidFill>
-              </a:defRPr>
-            </a:pPr>
-            <a:r>
-              <a:t>THPT</a:t>
-            </a:r>
-          </a:p>
-        </p:txBody>
-      </p:sp>
+        </p:spPr>
+      </p:pic>
       <p:sp>
         <p:nvSpPr>
           <p:cNvPr id="5" name="TextBox 4"/>
@@ -3542,7 +3446,7 @@
         </p:nvSpPr>
         <p:spPr>
           <a:xfrm>
-            <a:off x="1463040" y="137160"/>
+            <a:off x="2011680" y="137160"/>
             <a:ext cx="9144000" cy="457200"/>
           </a:xfrm>
           <a:prstGeom prst="rect">
@@ -3557,7 +3461,7 @@
           <a:lstStyle/>
           <a:p>
             <a:pPr>
-              <a:defRPr sz="1800" b="1">
+              <a:defRPr sz="1600" b="1">
                 <a:solidFill>
                   <a:srgbClr val="FFFFFF"/>
                 </a:solidFill>
@@ -3577,8 +3481,8 @@
         </p:nvSpPr>
         <p:spPr>
           <a:xfrm>
-            <a:off x="457200" y="1097280"/>
-            <a:ext cx="10972800" cy="731520"/>
+            <a:off x="457200" y="1005840"/>
+            <a:ext cx="10972800" cy="640080"/>
           </a:xfrm>
           <a:prstGeom prst="rect">
             <a:avLst/>
@@ -3592,14 +3496,14 @@
           <a:lstStyle/>
           <a:p>
             <a:pPr>
-              <a:defRPr sz="3600" b="1">
+              <a:defRPr sz="3200" b="1">
                 <a:solidFill>
                   <a:srgbClr val="333333"/>
                 </a:solidFill>
               </a:defRPr>
             </a:pPr>
             <a:r>
-              <a:t>Giới thiệu về hệ thống</a:t>
+              <a:t>Vấn đề</a:t>
             </a:r>
           </a:p>
         </p:txBody>
@@ -3612,8 +3516,8 @@
         </p:nvSpPr>
         <p:spPr>
           <a:xfrm>
-            <a:off x="457200" y="2011680"/>
-            <a:ext cx="10972800" cy="3657600"/>
+            <a:off x="457200" y="6309360"/>
+            <a:ext cx="10972800" cy="365760"/>
           </a:xfrm>
           <a:prstGeom prst="rect">
             <a:avLst/>
@@ -3621,83 +3525,20 @@
           <a:noFill/>
         </p:spPr>
         <p:txBody>
-          <a:bodyPr wrap="square">
+          <a:bodyPr wrap="none">
             <a:spAutoFit/>
           </a:bodyPr>
           <a:lstStyle/>
           <a:p>
-            <a:pPr>
-              <a:spcBef>
-                <a:spcPts val="1200"/>
-              </a:spcBef>
-              <a:defRPr sz="2000">
-                <a:solidFill>
-                  <a:srgbClr val="333333"/>
+            <a:pPr algn="ctr">
+              <a:defRPr sz="1100">
+                <a:solidFill>
+                  <a:srgbClr val="C8C8C8"/>
                 </a:solidFill>
               </a:defRPr>
             </a:pPr>
             <a:r>
-              <a:t>Phòng thí nghiệm AI offline, tiếng Việt</a:t>
-            </a:r>
-          </a:p>
-          <a:p>
-            <a:pPr>
-              <a:spcBef>
-                <a:spcPts val="1200"/>
-              </a:spcBef>
-              <a:defRPr sz="2000">
-                <a:solidFill>
-                  <a:srgbClr val="333333"/>
-                </a:solidFill>
-              </a:defRPr>
-            </a:pPr>
-            <a:r>
-              <a:t>Không cần tài khoản, không thu phí</a:t>
-            </a:r>
-          </a:p>
-          <a:p>
-            <a:pPr>
-              <a:spcBef>
-                <a:spcPts val="1200"/>
-              </a:spcBef>
-              <a:defRPr sz="2000">
-                <a:solidFill>
-                  <a:srgbClr val="333333"/>
-                </a:solidFill>
-              </a:defRPr>
-            </a:pPr>
-            <a:r>
-              <a:t>Bám sát QĐ 2422/QĐ-BGDĐT</a:t>
-            </a:r>
-          </a:p>
-          <a:p>
-            <a:pPr>
-              <a:spcBef>
-                <a:spcPts val="1200"/>
-              </a:spcBef>
-              <a:defRPr sz="2000">
-                <a:solidFill>
-                  <a:srgbClr val="333333"/>
-                </a:solidFill>
-              </a:defRPr>
-            </a:pPr>
-            <a:r>
-              <a:t>Phủ 22/22 YCCĐ lớp 10</a:t>
-            </a:r>
-          </a:p>
-          <a:p>
-            <a:pPr>
-              <a:spcBef>
-                <a:spcPts val="1200"/>
-              </a:spcBef>
-              <a:defRPr sz="2000">
-                <a:solidFill>
-                  <a:srgbClr val="333333"/>
-                </a:solidFill>
-              </a:defRPr>
-            </a:pPr>
-            <a:r>
-              <a:t>Học sinh bắt lỗi AI thay vì hỏi AI</a:t>
+              <a:t>Trường THPT Thuận Hoá — ĐHSP Huế | GV: Mai Xuân Văn</a:t>
             </a:r>
           </a:p>
         </p:txBody>
@@ -3710,8 +3551,8 @@
         </p:nvSpPr>
         <p:spPr>
           <a:xfrm>
-            <a:off x="457200" y="6217920"/>
-            <a:ext cx="10972800" cy="457200"/>
+            <a:off x="457200" y="1828800"/>
+            <a:ext cx="10972800" cy="4114800"/>
           </a:xfrm>
           <a:prstGeom prst="rect">
             <a:avLst/>
@@ -3719,20 +3560,68 @@
           <a:noFill/>
         </p:spPr>
         <p:txBody>
-          <a:bodyPr wrap="none">
+          <a:bodyPr wrap="square">
             <a:spAutoFit/>
           </a:bodyPr>
           <a:lstStyle/>
           <a:p>
-            <a:pPr algn="ctr">
-              <a:defRPr sz="1100">
-                <a:solidFill>
-                  <a:srgbClr val="C8C8C8"/>
+            <a:pPr>
+              <a:spcBef>
+                <a:spcPts val="1000"/>
+              </a:spcBef>
+              <a:defRPr sz="2200">
+                <a:solidFill>
+                  <a:srgbClr val="333333"/>
                 </a:solidFill>
               </a:defRPr>
             </a:pPr>
             <a:r>
-              <a:t>Trường THPT Thuận Hoá — ĐHSP Huế | GV: Mai Xuân Văn</a:t>
+              <a:t>• Học sinh học AI thụ động: hỏi → nhận đáp án → không hiểu</a:t>
+            </a:r>
+          </a:p>
+          <a:p>
+            <a:pPr>
+              <a:spcBef>
+                <a:spcPts val="1000"/>
+              </a:spcBef>
+              <a:defRPr sz="2200">
+                <a:solidFill>
+                  <a:srgbClr val="333333"/>
+                </a:solidFill>
+              </a:defRPr>
+            </a:pPr>
+            <a:r>
+              <a:t>• Công cụ AI thương mại (ChatGPT, Gemini) cần internet + tài khoản</a:t>
+            </a:r>
+          </a:p>
+          <a:p>
+            <a:pPr>
+              <a:spcBef>
+                <a:spcPts val="1000"/>
+              </a:spcBef>
+              <a:defRPr sz="2200">
+                <a:solidFill>
+                  <a:srgbClr val="333333"/>
+                </a:solidFill>
+              </a:defRPr>
+            </a:pPr>
+            <a:r>
+              <a:t>• Giáo viên thiếu công cụ trực quan để dạy khái niệm AI</a:t>
+            </a:r>
+          </a:p>
+          <a:p>
+            <a:pPr>
+              <a:spcBef>
+                <a:spcPts val="1000"/>
+              </a:spcBef>
+              <a:defRPr sz="2200">
+                <a:solidFill>
+                  <a:srgbClr val="333333"/>
+                </a:solidFill>
+              </a:defRPr>
+            </a:pPr>
+            <a:r>
+              <a:t>• Chương trình QĐ 2422/QĐ-BGDĐT yêu cầu 22 YCCĐ lớp 10 — chưa có công cụ offline phủ đủ</a:t>
             </a:r>
           </a:p>
         </p:txBody>
@@ -3798,114 +3687,54 @@
           </a:p>
         </p:txBody>
       </p:sp>
-      <p:sp>
-        <p:nvSpPr>
-          <p:cNvPr id="3" name="Oval 2"/>
-          <p:cNvSpPr/>
+      <p:pic>
+        <p:nvPicPr>
+          <p:cNvPr id="3" name="Picture 2" descr="logo_dhsp_hue.png"/>
+          <p:cNvPicPr>
+            <a:picLocks noChangeAspect="1"/>
+          </p:cNvPicPr>
           <p:nvPr/>
-        </p:nvSpPr>
+        </p:nvPicPr>
+        <p:blipFill>
+          <a:blip r:embed="rId2"/>
+          <a:stretch>
+            <a:fillRect/>
+          </a:stretch>
+        </p:blipFill>
         <p:spPr>
           <a:xfrm>
             <a:off x="274320" y="137160"/>
             <a:ext cx="457200" cy="457200"/>
           </a:xfrm>
-          <a:prstGeom prst="ellipse">
+          <a:prstGeom prst="rect">
             <a:avLst/>
           </a:prstGeom>
-          <a:solidFill>
-            <a:srgbClr val="F0F0F0"/>
-          </a:solidFill>
-          <a:ln w="25400">
-            <a:solidFill>
-              <a:srgbClr val="C8C8C8"/>
-            </a:solidFill>
-          </a:ln>
-        </p:spPr>
-        <p:style>
-          <a:lnRef idx="1">
-            <a:schemeClr val="accent1"/>
-          </a:lnRef>
-          <a:fillRef idx="3">
-            <a:schemeClr val="accent1"/>
-          </a:fillRef>
-          <a:effectRef idx="2">
-            <a:schemeClr val="accent1"/>
-          </a:effectRef>
-          <a:fontRef idx="minor">
-            <a:schemeClr val="lt1"/>
-          </a:fontRef>
-        </p:style>
-        <p:txBody>
-          <a:bodyPr rtlCol="0" anchor="ctr" wrap="square"/>
-          <a:lstStyle/>
-          <a:p>
-            <a:pPr algn="ctr">
-              <a:defRPr sz="1000" b="1">
-                <a:solidFill>
-                  <a:srgbClr val="C8C8C8"/>
-                </a:solidFill>
-              </a:defRPr>
-            </a:pPr>
-            <a:r>
-              <a:t>ĐHSP</a:t>
-            </a:r>
-          </a:p>
-        </p:txBody>
-      </p:sp>
-      <p:sp>
-        <p:nvSpPr>
-          <p:cNvPr id="4" name="Oval 3"/>
-          <p:cNvSpPr/>
+        </p:spPr>
+      </p:pic>
+      <p:pic>
+        <p:nvPicPr>
+          <p:cNvPr id="4" name="Picture 3" descr="logo_thpt_thuan_hoa.jpg"/>
+          <p:cNvPicPr>
+            <a:picLocks noChangeAspect="1"/>
+          </p:cNvPicPr>
           <p:nvPr/>
-        </p:nvSpPr>
-        <p:spPr>
-          <a:xfrm>
-            <a:off x="822960" y="137160"/>
+        </p:nvPicPr>
+        <p:blipFill>
+          <a:blip r:embed="rId3"/>
+          <a:stretch>
+            <a:fillRect/>
+          </a:stretch>
+        </p:blipFill>
+        <p:spPr>
+          <a:xfrm>
+            <a:off x="868680" y="137160"/>
             <a:ext cx="457200" cy="457200"/>
           </a:xfrm>
-          <a:prstGeom prst="ellipse">
+          <a:prstGeom prst="rect">
             <a:avLst/>
           </a:prstGeom>
-          <a:solidFill>
-            <a:srgbClr val="F0F0F0"/>
-          </a:solidFill>
-          <a:ln w="25400">
-            <a:solidFill>
-              <a:srgbClr val="C8C8C8"/>
-            </a:solidFill>
-          </a:ln>
-        </p:spPr>
-        <p:style>
-          <a:lnRef idx="1">
-            <a:schemeClr val="accent1"/>
-          </a:lnRef>
-          <a:fillRef idx="3">
-            <a:schemeClr val="accent1"/>
-          </a:fillRef>
-          <a:effectRef idx="2">
-            <a:schemeClr val="accent1"/>
-          </a:effectRef>
-          <a:fontRef idx="minor">
-            <a:schemeClr val="lt1"/>
-          </a:fontRef>
-        </p:style>
-        <p:txBody>
-          <a:bodyPr rtlCol="0" anchor="ctr" wrap="square"/>
-          <a:lstStyle/>
-          <a:p>
-            <a:pPr algn="ctr">
-              <a:defRPr sz="1000" b="1">
-                <a:solidFill>
-                  <a:srgbClr val="C8C8C8"/>
-                </a:solidFill>
-              </a:defRPr>
-            </a:pPr>
-            <a:r>
-              <a:t>THPT</a:t>
-            </a:r>
-          </a:p>
-        </p:txBody>
-      </p:sp>
+        </p:spPr>
+      </p:pic>
       <p:sp>
         <p:nvSpPr>
           <p:cNvPr id="5" name="TextBox 4"/>
@@ -3914,7 +3743,7 @@
         </p:nvSpPr>
         <p:spPr>
           <a:xfrm>
-            <a:off x="1463040" y="137160"/>
+            <a:off x="2011680" y="137160"/>
             <a:ext cx="9144000" cy="457200"/>
           </a:xfrm>
           <a:prstGeom prst="rect">
@@ -3929,7 +3758,7 @@
           <a:lstStyle/>
           <a:p>
             <a:pPr>
-              <a:defRPr sz="1800" b="1">
+              <a:defRPr sz="1600" b="1">
                 <a:solidFill>
                   <a:srgbClr val="FFFFFF"/>
                 </a:solidFill>
@@ -3949,8 +3778,8 @@
         </p:nvSpPr>
         <p:spPr>
           <a:xfrm>
-            <a:off x="457200" y="1097280"/>
-            <a:ext cx="10972800" cy="731520"/>
+            <a:off x="457200" y="1005840"/>
+            <a:ext cx="10972800" cy="640080"/>
           </a:xfrm>
           <a:prstGeom prst="rect">
             <a:avLst/>
@@ -3964,14 +3793,14 @@
           <a:lstStyle/>
           <a:p>
             <a:pPr>
-              <a:defRPr sz="3600" b="1">
+              <a:defRPr sz="3200" b="1">
                 <a:solidFill>
                   <a:srgbClr val="333333"/>
                 </a:solidFill>
               </a:defRPr>
             </a:pPr>
             <a:r>
-              <a:t>Mục lục</a:t>
+              <a:t>Giải pháp: AInatomy</a:t>
             </a:r>
           </a:p>
         </p:txBody>
@@ -3984,8 +3813,8 @@
         </p:nvSpPr>
         <p:spPr>
           <a:xfrm>
-            <a:off x="457200" y="6217920"/>
-            <a:ext cx="10972800" cy="457200"/>
+            <a:off x="457200" y="6309360"/>
+            <a:ext cx="10972800" cy="365760"/>
           </a:xfrm>
           <a:prstGeom prst="rect">
             <a:avLst/>
@@ -4019,7 +3848,7 @@
         </p:nvSpPr>
         <p:spPr>
           <a:xfrm>
-            <a:off x="457200" y="2011680"/>
+            <a:off x="457200" y="1828800"/>
             <a:ext cx="10972800" cy="4114800"/>
           </a:xfrm>
           <a:prstGeom prst="rect">
@@ -4035,91 +3864,118 @@
           <a:p>
             <a:pPr>
               <a:spcBef>
-                <a:spcPts val="1600"/>
+                <a:spcPts val="1000"/>
               </a:spcBef>
-              <a:defRPr sz="2400">
+              <a:defRPr sz="1800">
                 <a:solidFill>
                   <a:srgbClr val="333333"/>
                 </a:solidFill>
               </a:defRPr>
             </a:pPr>
             <a:r>
-              <a:t>1. Giới thiệu về AInatomy</a:t>
+              <a:t>Phòng thí nghiệm AI offline, tiếng Việt, không tài khoản</a:t>
             </a:r>
           </a:p>
           <a:p>
             <a:pPr>
               <a:spcBef>
-                <a:spcPts val="1600"/>
+                <a:spcPts val="1000"/>
               </a:spcBef>
-              <a:defRPr sz="2400">
+              <a:defRPr sz="1800">
                 <a:solidFill>
                   <a:srgbClr val="333333"/>
                 </a:solidFill>
               </a:defRPr>
             </a:pPr>
-            <a:r>
-              <a:t>2. Cấu trúc chương trình Tin học 10</a:t>
-            </a:r>
           </a:p>
           <a:p>
             <a:pPr>
               <a:spcBef>
-                <a:spcPts val="1600"/>
+                <a:spcPts val="1000"/>
               </a:spcBef>
-              <a:defRPr sz="2400">
+              <a:defRPr sz="1800">
                 <a:solidFill>
                   <a:srgbClr val="333333"/>
                 </a:solidFill>
               </a:defRPr>
             </a:pPr>
             <a:r>
-              <a:t>3. Tích hợp vào các chủ đề A-F</a:t>
+              <a:t>5 phân hệ chính:</a:t>
             </a:r>
           </a:p>
           <a:p>
             <a:pPr>
               <a:spcBef>
-                <a:spcPts val="1600"/>
+                <a:spcPts val="1000"/>
               </a:spcBef>
-              <a:defRPr sz="2400">
+              <a:defRPr sz="1800">
                 <a:solidFill>
                   <a:srgbClr val="333333"/>
                 </a:solidFill>
               </a:defRPr>
             </a:pPr>
             <a:r>
-              <a:t>4. Phân phối 12 tiết đề xuất</a:t>
+              <a:t>  1. Kịch bản 9 cảnh — hành trình dữ liệu từ đầu vào đến đầu ra</a:t>
             </a:r>
           </a:p>
           <a:p>
             <a:pPr>
               <a:spcBef>
-                <a:spcPts val="1600"/>
+                <a:spcPts val="1000"/>
               </a:spcBef>
-              <a:defRPr sz="2400">
+              <a:defRPr sz="1800">
                 <a:solidFill>
                   <a:srgbClr val="333333"/>
                 </a:solidFill>
               </a:defRPr>
             </a:pPr>
             <a:r>
-              <a:t>5. Hướng dẫn sử dụng</a:t>
+              <a:t>  2. Đấu trường bắt lỗi AI — 12 tình huống, 5 loại lỗi</a:t>
             </a:r>
           </a:p>
           <a:p>
             <a:pPr>
               <a:spcBef>
-                <a:spcPts val="1600"/>
+                <a:spcPts val="1000"/>
               </a:spcBef>
-              <a:defRPr sz="2400">
+              <a:defRPr sz="1800">
                 <a:solidFill>
                   <a:srgbClr val="333333"/>
                 </a:solidFill>
               </a:defRPr>
             </a:pPr>
             <a:r>
-              <a:t>6. Tài liệu tham khảo</a:t>
+              <a:t>  3. Nhà máy AI 7 trạm — từ nhập liệu đến ứng dụng</a:t>
+            </a:r>
+          </a:p>
+          <a:p>
+            <a:pPr>
+              <a:spcBef>
+                <a:spcPts val="1000"/>
+              </a:spcBef>
+              <a:defRPr sz="1800">
+                <a:solidFill>
+                  <a:srgbClr val="333333"/>
+                </a:solidFill>
+              </a:defRPr>
+            </a:pPr>
+            <a:r>
+              <a:t>  4. Xưởng huấn luyện — tự huấn luyện, thấy thiên kiến</a:t>
+            </a:r>
+          </a:p>
+          <a:p>
+            <a:pPr>
+              <a:spcBef>
+                <a:spcPts val="1000"/>
+              </a:spcBef>
+              <a:defRPr sz="1800">
+                <a:solidFill>
+                  <a:srgbClr val="333333"/>
+                </a:solidFill>
+              </a:defRPr>
+            </a:pPr>
+            <a:r>
+              <a:t>  5. Bản đồ năng lực — theo dõi tiến bộ 12 khối UNESCO</a:t>
             </a:r>
           </a:p>
         </p:txBody>
@@ -4185,114 +4041,54 @@
           </a:p>
         </p:txBody>
       </p:sp>
-      <p:sp>
-        <p:nvSpPr>
-          <p:cNvPr id="3" name="Oval 2"/>
-          <p:cNvSpPr/>
+      <p:pic>
+        <p:nvPicPr>
+          <p:cNvPr id="3" name="Picture 2" descr="logo_dhsp_hue.png"/>
+          <p:cNvPicPr>
+            <a:picLocks noChangeAspect="1"/>
+          </p:cNvPicPr>
           <p:nvPr/>
-        </p:nvSpPr>
+        </p:nvPicPr>
+        <p:blipFill>
+          <a:blip r:embed="rId2"/>
+          <a:stretch>
+            <a:fillRect/>
+          </a:stretch>
+        </p:blipFill>
         <p:spPr>
           <a:xfrm>
             <a:off x="274320" y="137160"/>
             <a:ext cx="457200" cy="457200"/>
           </a:xfrm>
-          <a:prstGeom prst="ellipse">
+          <a:prstGeom prst="rect">
             <a:avLst/>
           </a:prstGeom>
-          <a:solidFill>
-            <a:srgbClr val="F0F0F0"/>
-          </a:solidFill>
-          <a:ln w="25400">
-            <a:solidFill>
-              <a:srgbClr val="C8C8C8"/>
-            </a:solidFill>
-          </a:ln>
-        </p:spPr>
-        <p:style>
-          <a:lnRef idx="1">
-            <a:schemeClr val="accent1"/>
-          </a:lnRef>
-          <a:fillRef idx="3">
-            <a:schemeClr val="accent1"/>
-          </a:fillRef>
-          <a:effectRef idx="2">
-            <a:schemeClr val="accent1"/>
-          </a:effectRef>
-          <a:fontRef idx="minor">
-            <a:schemeClr val="lt1"/>
-          </a:fontRef>
-        </p:style>
-        <p:txBody>
-          <a:bodyPr rtlCol="0" anchor="ctr" wrap="square"/>
-          <a:lstStyle/>
-          <a:p>
-            <a:pPr algn="ctr">
-              <a:defRPr sz="1000" b="1">
-                <a:solidFill>
-                  <a:srgbClr val="C8C8C8"/>
-                </a:solidFill>
-              </a:defRPr>
-            </a:pPr>
-            <a:r>
-              <a:t>ĐHSP</a:t>
-            </a:r>
-          </a:p>
-        </p:txBody>
-      </p:sp>
-      <p:sp>
-        <p:nvSpPr>
-          <p:cNvPr id="4" name="Oval 3"/>
-          <p:cNvSpPr/>
+        </p:spPr>
+      </p:pic>
+      <p:pic>
+        <p:nvPicPr>
+          <p:cNvPr id="4" name="Picture 3" descr="logo_thpt_thuan_hoa.jpg"/>
+          <p:cNvPicPr>
+            <a:picLocks noChangeAspect="1"/>
+          </p:cNvPicPr>
           <p:nvPr/>
-        </p:nvSpPr>
-        <p:spPr>
-          <a:xfrm>
-            <a:off x="822960" y="137160"/>
+        </p:nvPicPr>
+        <p:blipFill>
+          <a:blip r:embed="rId3"/>
+          <a:stretch>
+            <a:fillRect/>
+          </a:stretch>
+        </p:blipFill>
+        <p:spPr>
+          <a:xfrm>
+            <a:off x="868680" y="137160"/>
             <a:ext cx="457200" cy="457200"/>
           </a:xfrm>
-          <a:prstGeom prst="ellipse">
+          <a:prstGeom prst="rect">
             <a:avLst/>
           </a:prstGeom>
-          <a:solidFill>
-            <a:srgbClr val="F0F0F0"/>
-          </a:solidFill>
-          <a:ln w="25400">
-            <a:solidFill>
-              <a:srgbClr val="C8C8C8"/>
-            </a:solidFill>
-          </a:ln>
-        </p:spPr>
-        <p:style>
-          <a:lnRef idx="1">
-            <a:schemeClr val="accent1"/>
-          </a:lnRef>
-          <a:fillRef idx="3">
-            <a:schemeClr val="accent1"/>
-          </a:fillRef>
-          <a:effectRef idx="2">
-            <a:schemeClr val="accent1"/>
-          </a:effectRef>
-          <a:fontRef idx="minor">
-            <a:schemeClr val="lt1"/>
-          </a:fontRef>
-        </p:style>
-        <p:txBody>
-          <a:bodyPr rtlCol="0" anchor="ctr" wrap="square"/>
-          <a:lstStyle/>
-          <a:p>
-            <a:pPr algn="ctr">
-              <a:defRPr sz="1000" b="1">
-                <a:solidFill>
-                  <a:srgbClr val="C8C8C8"/>
-                </a:solidFill>
-              </a:defRPr>
-            </a:pPr>
-            <a:r>
-              <a:t>THPT</a:t>
-            </a:r>
-          </a:p>
-        </p:txBody>
-      </p:sp>
+        </p:spPr>
+      </p:pic>
       <p:sp>
         <p:nvSpPr>
           <p:cNvPr id="5" name="TextBox 4"/>
@@ -4301,7 +4097,7 @@
         </p:nvSpPr>
         <p:spPr>
           <a:xfrm>
-            <a:off x="1463040" y="137160"/>
+            <a:off x="2011680" y="137160"/>
             <a:ext cx="9144000" cy="457200"/>
           </a:xfrm>
           <a:prstGeom prst="rect">
@@ -4316,7 +4112,7 @@
           <a:lstStyle/>
           <a:p>
             <a:pPr>
-              <a:defRPr sz="1800" b="1">
+              <a:defRPr sz="1600" b="1">
                 <a:solidFill>
                   <a:srgbClr val="FFFFFF"/>
                 </a:solidFill>
@@ -4336,8 +4132,8 @@
         </p:nvSpPr>
         <p:spPr>
           <a:xfrm>
-            <a:off x="457200" y="1097280"/>
-            <a:ext cx="10972800" cy="731520"/>
+            <a:off x="457200" y="1005840"/>
+            <a:ext cx="10972800" cy="640080"/>
           </a:xfrm>
           <a:prstGeom prst="rect">
             <a:avLst/>
@@ -4351,14 +4147,14 @@
           <a:lstStyle/>
           <a:p>
             <a:pPr>
-              <a:defRPr sz="3600" b="1">
+              <a:defRPr sz="3200" b="1">
                 <a:solidFill>
                   <a:srgbClr val="333333"/>
                 </a:solidFill>
               </a:defRPr>
             </a:pPr>
             <a:r>
-              <a:t>Tích hợp vào chương trình</a:t>
+              <a:t>Tích hợp chương trình Tin học 10</a:t>
             </a:r>
           </a:p>
         </p:txBody>
@@ -4371,8 +4167,8 @@
         </p:nvSpPr>
         <p:spPr>
           <a:xfrm>
-            <a:off x="457200" y="6217920"/>
-            <a:ext cx="10972800" cy="457200"/>
+            <a:off x="457200" y="6309360"/>
+            <a:ext cx="10972800" cy="365760"/>
           </a:xfrm>
           <a:prstGeom prst="rect">
             <a:avLst/>
@@ -4406,8 +4202,8 @@
         </p:nvSpPr>
         <p:spPr>
           <a:xfrm>
-            <a:off x="457200" y="2011680"/>
-            <a:ext cx="5029200" cy="3657600"/>
+            <a:off x="457200" y="1828800"/>
+            <a:ext cx="5029200" cy="4114800"/>
           </a:xfrm>
           <a:prstGeom prst="rect">
             <a:avLst/>
@@ -4421,17 +4217,14 @@
           <a:lstStyle/>
           <a:p>
             <a:pPr>
-              <a:spcAft>
-                <a:spcPts val="1200"/>
-              </a:spcAft>
-              <a:defRPr sz="2800" b="1">
+              <a:defRPr sz="2200" b="1">
                 <a:solidFill>
                   <a:srgbClr val="0078D7"/>
                 </a:solidFill>
               </a:defRPr>
             </a:pPr>
             <a:r>
-              <a:t>Chủ đề A-B-D</a:t>
+              <a:t>28 bài SGK → 22/22 YCCĐ</a:t>
             </a:r>
           </a:p>
           <a:p>
@@ -4439,14 +4232,14 @@
               <a:spcBef>
                 <a:spcPts val="600"/>
               </a:spcBef>
-              <a:defRPr sz="1800">
+              <a:defRPr sz="1600">
                 <a:solidFill>
                   <a:srgbClr val="333333"/>
                 </a:solidFill>
               </a:defRPr>
             </a:pPr>
             <a:r>
-              <a:t>A: Máy tính và xã hội tri thức</a:t>
+              <a:t>• Chủ đề A: Máy tính &amp; xã hội tri thức</a:t>
             </a:r>
           </a:p>
           <a:p>
@@ -4454,14 +4247,14 @@
               <a:spcBef>
                 <a:spcPts val="600"/>
               </a:spcBef>
-              <a:defRPr sz="1800">
+              <a:defRPr sz="1600">
                 <a:solidFill>
                   <a:srgbClr val="333333"/>
                 </a:solidFill>
               </a:defRPr>
             </a:pPr>
             <a:r>
-              <a:t>B: Mạng máy tính và Internet</a:t>
+              <a:t>• Chủ đề B: Mạng máy tính &amp; Internet</a:t>
             </a:r>
           </a:p>
           <a:p>
@@ -4469,14 +4262,14 @@
               <a:spcBef>
                 <a:spcPts val="600"/>
               </a:spcBef>
-              <a:defRPr sz="1800">
+              <a:defRPr sz="1600">
                 <a:solidFill>
                   <a:srgbClr val="333333"/>
                 </a:solidFill>
               </a:defRPr>
             </a:pPr>
             <a:r>
-              <a:t>D: Đạo đức, pháp luật số</a:t>
+              <a:t>• Chủ đề D: Đạo đức, pháp luật số</a:t>
             </a:r>
           </a:p>
           <a:p>
@@ -4484,26 +4277,29 @@
               <a:spcBef>
                 <a:spcPts val="600"/>
               </a:spcBef>
-              <a:defRPr sz="1800">
+              <a:defRPr sz="1600">
                 <a:solidFill>
                   <a:srgbClr val="333333"/>
                 </a:solidFill>
               </a:defRPr>
             </a:pPr>
+            <a:r>
+              <a:t>• Chủ đề E: Thiết kế đồ họa (ICT)</a:t>
+            </a:r>
           </a:p>
           <a:p>
             <a:pPr>
               <a:spcBef>
                 <a:spcPts val="600"/>
               </a:spcBef>
-              <a:defRPr sz="1800">
+              <a:defRPr sz="1600">
                 <a:solidFill>
                   <a:srgbClr val="333333"/>
                 </a:solidFill>
               </a:defRPr>
             </a:pPr>
             <a:r>
-              <a:t>Hoạt động chính:</a:t>
+              <a:t>• Chủ đề F: Giải quyết vấn đề</a:t>
             </a:r>
           </a:p>
           <a:p>
@@ -4511,14 +4307,49 @@
               <a:spcBef>
                 <a:spcPts val="600"/>
               </a:spcBef>
-              <a:defRPr sz="1800">
+              <a:defRPr sz="1600">
                 <a:solidFill>
                   <a:srgbClr val="333333"/>
                 </a:solidFill>
               </a:defRPr>
             </a:pPr>
             <a:r>
-              <a:t>• Kịch bản 9 cảnh</a:t>
+              <a:t>• Chủ đề G: Hướng nghiệp (CS)</a:t>
+            </a:r>
+          </a:p>
+        </p:txBody>
+      </p:sp>
+      <p:sp>
+        <p:nvSpPr>
+          <p:cNvPr id="9" name="TextBox 8"/>
+          <p:cNvSpPr txBox="1"/>
+          <p:nvPr/>
+        </p:nvSpPr>
+        <p:spPr>
+          <a:xfrm>
+            <a:off x="5943600" y="1828800"/>
+            <a:ext cx="5029200" cy="4114800"/>
+          </a:xfrm>
+          <a:prstGeom prst="rect">
+            <a:avLst/>
+          </a:prstGeom>
+          <a:noFill/>
+        </p:spPr>
+        <p:txBody>
+          <a:bodyPr wrap="square">
+            <a:spAutoFit/>
+          </a:bodyPr>
+          <a:lstStyle/>
+          <a:p>
+            <a:pPr>
+              <a:defRPr sz="2200" b="1">
+                <a:solidFill>
+                  <a:srgbClr val="0078D7"/>
+                </a:solidFill>
+              </a:defRPr>
+            </a:pPr>
+            <a:r>
+              <a:t>Căn cứ pháp lý</a:t>
             </a:r>
           </a:p>
           <a:p>
@@ -4526,14 +4357,14 @@
               <a:spcBef>
                 <a:spcPts val="600"/>
               </a:spcBef>
-              <a:defRPr sz="1800">
+              <a:defRPr sz="1600">
                 <a:solidFill>
                   <a:srgbClr val="333333"/>
                 </a:solidFill>
               </a:defRPr>
             </a:pPr>
             <a:r>
-              <a:t>• Đấu trường bắt lỗi AI</a:t>
+              <a:t>• QĐ 2422/QĐ-BGDĐT (18/8/2026)</a:t>
             </a:r>
           </a:p>
           <a:p>
@@ -4541,52 +4372,14 @@
               <a:spcBef>
                 <a:spcPts val="600"/>
               </a:spcBef>
-              <a:defRPr sz="1800">
+              <a:defRPr sz="1600">
                 <a:solidFill>
                   <a:srgbClr val="333333"/>
                 </a:solidFill>
               </a:defRPr>
             </a:pPr>
             <a:r>
-              <a:t>• Tình huống &amp; trách nhiệm</a:t>
-            </a:r>
-          </a:p>
-        </p:txBody>
-      </p:sp>
-      <p:sp>
-        <p:nvSpPr>
-          <p:cNvPr id="9" name="TextBox 8"/>
-          <p:cNvSpPr txBox="1"/>
-          <p:nvPr/>
-        </p:nvSpPr>
-        <p:spPr>
-          <a:xfrm>
-            <a:off x="5943600" y="2011680"/>
-            <a:ext cx="5029200" cy="3657600"/>
-          </a:xfrm>
-          <a:prstGeom prst="rect">
-            <a:avLst/>
-          </a:prstGeom>
-          <a:noFill/>
-        </p:spPr>
-        <p:txBody>
-          <a:bodyPr wrap="square">
-            <a:spAutoFit/>
-          </a:bodyPr>
-          <a:lstStyle/>
-          <a:p>
-            <a:pPr>
-              <a:spcAft>
-                <a:spcPts val="1200"/>
-              </a:spcAft>
-              <a:defRPr sz="2800" b="1">
-                <a:solidFill>
-                  <a:srgbClr val="0078D7"/>
-                </a:solidFill>
-              </a:defRPr>
-            </a:pPr>
-            <a:r>
-              <a:t>Chủ đề E-F-G</a:t>
+              <a:t>• Khung nội dung giáo dục AI</a:t>
             </a:r>
           </a:p>
           <a:p>
@@ -4594,14 +4387,14 @@
               <a:spcBef>
                 <a:spcPts val="600"/>
               </a:spcBef>
-              <a:defRPr sz="1800">
+              <a:defRPr sz="1600">
                 <a:solidFill>
                   <a:srgbClr val="333333"/>
                 </a:solidFill>
               </a:defRPr>
             </a:pPr>
             <a:r>
-              <a:t>E: Thiết kế đồ họa (ICT)</a:t>
+              <a:t>• 4 mạch × 12 khối UNESCO</a:t>
             </a:r>
           </a:p>
           <a:p>
@@ -4609,14 +4402,14 @@
               <a:spcBef>
                 <a:spcPts val="600"/>
               </a:spcBef>
-              <a:defRPr sz="1800">
+              <a:defRPr sz="1600">
                 <a:solidFill>
                   <a:srgbClr val="333333"/>
                 </a:solidFill>
               </a:defRPr>
             </a:pPr>
             <a:r>
-              <a:t>F: Giải quyết vấn đề với máy tính</a:t>
+              <a:t>• CV 5588/BGDĐT-GDTrH</a:t>
             </a:r>
           </a:p>
           <a:p>
@@ -4624,86 +4417,14 @@
               <a:spcBef>
                 <a:spcPts val="600"/>
               </a:spcBef>
-              <a:defRPr sz="1800">
+              <a:defRPr sz="1600">
                 <a:solidFill>
                   <a:srgbClr val="333333"/>
                 </a:solidFill>
               </a:defRPr>
             </a:pPr>
             <a:r>
-              <a:t>G: Hướng nghiệp (CS)</a:t>
-            </a:r>
-          </a:p>
-          <a:p>
-            <a:pPr>
-              <a:spcBef>
-                <a:spcPts val="600"/>
-              </a:spcBef>
-              <a:defRPr sz="1800">
-                <a:solidFill>
-                  <a:srgbClr val="333333"/>
-                </a:solidFill>
-              </a:defRPr>
-            </a:pPr>
-          </a:p>
-          <a:p>
-            <a:pPr>
-              <a:spcBef>
-                <a:spcPts val="600"/>
-              </a:spcBef>
-              <a:defRPr sz="1800">
-                <a:solidFill>
-                  <a:srgbClr val="333333"/>
-                </a:solidFill>
-              </a:defRPr>
-            </a:pPr>
-            <a:r>
-              <a:t>Hoạt động chính:</a:t>
-            </a:r>
-          </a:p>
-          <a:p>
-            <a:pPr>
-              <a:spcBef>
-                <a:spcPts val="600"/>
-              </a:spcBef>
-              <a:defRPr sz="1800">
-                <a:solidFill>
-                  <a:srgbClr val="333333"/>
-                </a:solidFill>
-              </a:defRPr>
-            </a:pPr>
-            <a:r>
-              <a:t>• Tầng 1 - Xưởng huấn luyện</a:t>
-            </a:r>
-          </a:p>
-          <a:p>
-            <a:pPr>
-              <a:spcBef>
-                <a:spcPts val="600"/>
-              </a:spcBef>
-              <a:defRPr sz="1800">
-                <a:solidFill>
-                  <a:srgbClr val="333333"/>
-                </a:solidFill>
-              </a:defRPr>
-            </a:pPr>
-            <a:r>
-              <a:t>• Nhà máy AI 7 trạm</a:t>
-            </a:r>
-          </a:p>
-          <a:p>
-            <a:pPr>
-              <a:spcBef>
-                <a:spcPts val="600"/>
-              </a:spcBef>
-              <a:defRPr sz="1800">
-                <a:solidFill>
-                  <a:srgbClr val="333333"/>
-                </a:solidFill>
-              </a:defRPr>
-            </a:pPr>
-            <a:r>
-              <a:t>• Kiến thức Tin học</a:t>
+              <a:t>• Phân phối 12 tiết đề xuất</a:t>
             </a:r>
           </a:p>
         </p:txBody>
@@ -4735,7 +4456,7 @@
         <p:spPr>
           <a:xfrm>
             <a:off x="0" y="0"/>
-            <a:ext cx="12191695" cy="1097280"/>
+            <a:ext cx="12191695" cy="731520"/>
           </a:xfrm>
           <a:prstGeom prst="rect">
             <a:avLst/>
@@ -4769,124 +4490,54 @@
           </a:p>
         </p:txBody>
       </p:sp>
-      <p:sp>
-        <p:nvSpPr>
-          <p:cNvPr id="3" name="Oval 2"/>
-          <p:cNvSpPr/>
+      <p:pic>
+        <p:nvPicPr>
+          <p:cNvPr id="3" name="Picture 2" descr="logo_dhsp_hue.png"/>
+          <p:cNvPicPr>
+            <a:picLocks noChangeAspect="1"/>
+          </p:cNvPicPr>
           <p:nvPr/>
-        </p:nvSpPr>
-        <p:spPr>
-          <a:xfrm>
-            <a:off x="365760" y="182880"/>
-            <a:ext cx="731520" cy="731520"/>
-          </a:xfrm>
-          <a:prstGeom prst="ellipse">
+        </p:nvPicPr>
+        <p:blipFill>
+          <a:blip r:embed="rId2"/>
+          <a:stretch>
+            <a:fillRect/>
+          </a:stretch>
+        </p:blipFill>
+        <p:spPr>
+          <a:xfrm>
+            <a:off x="274320" y="137160"/>
+            <a:ext cx="457200" cy="457200"/>
+          </a:xfrm>
+          <a:prstGeom prst="rect">
             <a:avLst/>
           </a:prstGeom>
-          <a:solidFill>
-            <a:srgbClr val="F0F0F0"/>
-          </a:solidFill>
-          <a:ln w="25400">
-            <a:solidFill>
-              <a:srgbClr val="C8C8C8"/>
-            </a:solidFill>
-          </a:ln>
-        </p:spPr>
-        <p:style>
-          <a:lnRef idx="1">
-            <a:schemeClr val="accent1"/>
-          </a:lnRef>
-          <a:fillRef idx="3">
-            <a:schemeClr val="accent1"/>
-          </a:fillRef>
-          <a:effectRef idx="2">
-            <a:schemeClr val="accent1"/>
-          </a:effectRef>
-          <a:fontRef idx="minor">
-            <a:schemeClr val="lt1"/>
-          </a:fontRef>
-        </p:style>
-        <p:txBody>
-          <a:bodyPr rtlCol="0" anchor="ctr" wrap="square"/>
-          <a:lstStyle/>
-          <a:p>
-            <a:pPr algn="ctr">
-              <a:defRPr sz="1000" b="1">
-                <a:solidFill>
-                  <a:srgbClr val="C8C8C8"/>
-                </a:solidFill>
-              </a:defRPr>
-            </a:pPr>
-            <a:r>
-              <a:t>LOGO</a:t>
-            </a:r>
-          </a:p>
-          <a:p>
-            <a:r>
-              <a:t>ĐHSP</a:t>
-            </a:r>
-          </a:p>
-        </p:txBody>
-      </p:sp>
-      <p:sp>
-        <p:nvSpPr>
-          <p:cNvPr id="4" name="Oval 3"/>
-          <p:cNvSpPr/>
+        </p:spPr>
+      </p:pic>
+      <p:pic>
+        <p:nvPicPr>
+          <p:cNvPr id="4" name="Picture 3" descr="logo_thpt_thuan_hoa.jpg"/>
+          <p:cNvPicPr>
+            <a:picLocks noChangeAspect="1"/>
+          </p:cNvPicPr>
           <p:nvPr/>
-        </p:nvSpPr>
-        <p:spPr>
-          <a:xfrm>
-            <a:off x="1280160" y="182880"/>
-            <a:ext cx="731520" cy="731520"/>
-          </a:xfrm>
-          <a:prstGeom prst="ellipse">
+        </p:nvPicPr>
+        <p:blipFill>
+          <a:blip r:embed="rId3"/>
+          <a:stretch>
+            <a:fillRect/>
+          </a:stretch>
+        </p:blipFill>
+        <p:spPr>
+          <a:xfrm>
+            <a:off x="868680" y="137160"/>
+            <a:ext cx="457200" cy="457200"/>
+          </a:xfrm>
+          <a:prstGeom prst="rect">
             <a:avLst/>
           </a:prstGeom>
-          <a:solidFill>
-            <a:srgbClr val="F0F0F0"/>
-          </a:solidFill>
-          <a:ln w="25400">
-            <a:solidFill>
-              <a:srgbClr val="C8C8C8"/>
-            </a:solidFill>
-          </a:ln>
-        </p:spPr>
-        <p:style>
-          <a:lnRef idx="1">
-            <a:schemeClr val="accent1"/>
-          </a:lnRef>
-          <a:fillRef idx="3">
-            <a:schemeClr val="accent1"/>
-          </a:fillRef>
-          <a:effectRef idx="2">
-            <a:schemeClr val="accent1"/>
-          </a:effectRef>
-          <a:fontRef idx="minor">
-            <a:schemeClr val="lt1"/>
-          </a:fontRef>
-        </p:style>
-        <p:txBody>
-          <a:bodyPr rtlCol="0" anchor="ctr" wrap="square"/>
-          <a:lstStyle/>
-          <a:p>
-            <a:pPr algn="ctr">
-              <a:defRPr sz="1000" b="1">
-                <a:solidFill>
-                  <a:srgbClr val="C8C8C8"/>
-                </a:solidFill>
-              </a:defRPr>
-            </a:pPr>
-            <a:r>
-              <a:t>LOGO</a:t>
-            </a:r>
-          </a:p>
-          <a:p>
-            <a:r>
-              <a:t>THPT</a:t>
-            </a:r>
-          </a:p>
-        </p:txBody>
-      </p:sp>
+        </p:spPr>
+      </p:pic>
       <p:sp>
         <p:nvSpPr>
           <p:cNvPr id="5" name="TextBox 4"/>
@@ -4895,8 +4546,8 @@
         </p:nvSpPr>
         <p:spPr>
           <a:xfrm>
-            <a:off x="1371600" y="2560320"/>
-            <a:ext cx="9144000" cy="1371600"/>
+            <a:off x="2011680" y="137160"/>
+            <a:ext cx="9144000" cy="457200"/>
           </a:xfrm>
           <a:prstGeom prst="rect">
             <a:avLst/>
@@ -4904,20 +4555,20 @@
           <a:noFill/>
         </p:spPr>
         <p:txBody>
-          <a:bodyPr wrap="square">
+          <a:bodyPr wrap="none">
             <a:spAutoFit/>
           </a:bodyPr>
           <a:lstStyle/>
           <a:p>
-            <a:pPr algn="ctr">
-              <a:defRPr sz="5400" b="1">
-                <a:solidFill>
-                  <a:srgbClr val="333333"/>
+            <a:pPr>
+              <a:defRPr sz="1600" b="1">
+                <a:solidFill>
+                  <a:srgbClr val="FFFFFF"/>
                 </a:solidFill>
               </a:defRPr>
             </a:pPr>
             <a:r>
-              <a:t>Cảm ơn</a:t>
+              <a:t>AInatomy — Phòng thực hành AI</a:t>
             </a:r>
           </a:p>
         </p:txBody>
@@ -4930,8 +4581,8 @@
         </p:nvSpPr>
         <p:spPr>
           <a:xfrm>
-            <a:off x="1371600" y="4114800"/>
-            <a:ext cx="9144000" cy="1371600"/>
+            <a:off x="457200" y="1005840"/>
+            <a:ext cx="10972800" cy="640080"/>
           </a:xfrm>
           <a:prstGeom prst="rect">
             <a:avLst/>
@@ -4939,28 +4590,20 @@
           <a:noFill/>
         </p:spPr>
         <p:txBody>
-          <a:bodyPr wrap="square">
+          <a:bodyPr wrap="none">
             <a:spAutoFit/>
           </a:bodyPr>
           <a:lstStyle/>
           <a:p>
-            <a:pPr algn="ctr">
-              <a:defRPr sz="2000">
+            <a:pPr>
+              <a:defRPr sz="3200" b="1">
                 <a:solidFill>
                   <a:srgbClr val="333333"/>
                 </a:solidFill>
               </a:defRPr>
             </a:pPr>
             <a:r>
-              <a:t>Trường THPT Thuận Hoá</a:t>
-            </a:r>
-            <a:br/>
-            <a:r>
-              <a:t>Đại học Sư Phạm, Đại học Huế</a:t>
-            </a:r>
-            <a:br/>
-            <a:r>
-              <a:t>GV: Mai Xuân Văn</a:t>
+              <a:t>Kết quả</a:t>
             </a:r>
           </a:p>
         </p:txBody>
@@ -4973,8 +4616,8 @@
         </p:nvSpPr>
         <p:spPr>
           <a:xfrm>
-            <a:off x="457200" y="5943600"/>
-            <a:ext cx="10972800" cy="731520"/>
+            <a:off x="457200" y="6309360"/>
+            <a:ext cx="10972800" cy="365760"/>
           </a:xfrm>
           <a:prstGeom prst="rect">
             <a:avLst/>
@@ -4988,14 +4631,127 @@
           <a:lstStyle/>
           <a:p>
             <a:pPr algn="ctr">
-              <a:defRPr sz="1400">
+              <a:defRPr sz="1100">
                 <a:solidFill>
                   <a:srgbClr val="C8C8C8"/>
                 </a:solidFill>
               </a:defRPr>
             </a:pPr>
             <a:r>
-              <a:t>AInatomy — Phòng thực hành Trí tuệ nhân tạo</a:t>
+              <a:t>Trường THPT Thuận Hoá — ĐHSP Huế | GV: Mai Xuân Văn</a:t>
+            </a:r>
+          </a:p>
+        </p:txBody>
+      </p:sp>
+      <p:sp>
+        <p:nvSpPr>
+          <p:cNvPr id="8" name="TextBox 7"/>
+          <p:cNvSpPr txBox="1"/>
+          <p:nvPr/>
+        </p:nvSpPr>
+        <p:spPr>
+          <a:xfrm>
+            <a:off x="457200" y="1828800"/>
+            <a:ext cx="10972800" cy="4114800"/>
+          </a:xfrm>
+          <a:prstGeom prst="rect">
+            <a:avLst/>
+          </a:prstGeom>
+          <a:noFill/>
+        </p:spPr>
+        <p:txBody>
+          <a:bodyPr wrap="square">
+            <a:spAutoFit/>
+          </a:bodyPr>
+          <a:lstStyle/>
+          <a:p>
+            <a:pPr>
+              <a:spcBef>
+                <a:spcPts val="1000"/>
+              </a:spcBef>
+              <a:defRPr sz="2200">
+                <a:solidFill>
+                  <a:srgbClr val="333333"/>
+                </a:solidFill>
+              </a:defRPr>
+            </a:pPr>
+            <a:r>
+              <a:t>✓ 97/97 tiêu chí nghiệm thu tự động</a:t>
+            </a:r>
+          </a:p>
+          <a:p>
+            <a:pPr>
+              <a:spcBef>
+                <a:spcPts val="1000"/>
+              </a:spcBef>
+              <a:defRPr sz="2200">
+                <a:solidFill>
+                  <a:srgbClr val="333333"/>
+                </a:solidFill>
+              </a:defRPr>
+            </a:pPr>
+            <a:r>
+              <a:t>✓ 22/22 YCCĐ lớp 10 được phủ</a:t>
+            </a:r>
+          </a:p>
+          <a:p>
+            <a:pPr>
+              <a:spcBef>
+                <a:spcPts val="1000"/>
+              </a:spcBef>
+              <a:defRPr sz="2200">
+                <a:solidFill>
+                  <a:srgbClr val="333333"/>
+                </a:solidFill>
+              </a:defRPr>
+            </a:pPr>
+            <a:r>
+              <a:t>✓ 28 bài SGK Tin học 10 có hỗ trợ</a:t>
+            </a:r>
+          </a:p>
+          <a:p>
+            <a:pPr>
+              <a:spcBef>
+                <a:spcPts val="1000"/>
+              </a:spcBef>
+              <a:defRPr sz="2200">
+                <a:solidFill>
+                  <a:srgbClr val="333333"/>
+                </a:solidFill>
+              </a:defRPr>
+            </a:pPr>
+            <a:r>
+              <a:t>✓ 133 tệp trong manifest, hash khớp 100%</a:t>
+            </a:r>
+          </a:p>
+          <a:p>
+            <a:pPr>
+              <a:spcBef>
+                <a:spcPts val="1000"/>
+              </a:spcBef>
+              <a:defRPr sz="2200">
+                <a:solidFill>
+                  <a:srgbClr val="333333"/>
+                </a:solidFill>
+              </a:defRPr>
+            </a:pPr>
+            <a:r>
+              <a:t>✓ Chạy offline, không cần internet</a:t>
+            </a:r>
+          </a:p>
+          <a:p>
+            <a:pPr>
+              <a:spcBef>
+                <a:spcPts val="1000"/>
+              </a:spcBef>
+              <a:defRPr sz="2200">
+                <a:solidFill>
+                  <a:srgbClr val="333333"/>
+                </a:solidFill>
+              </a:defRPr>
+            </a:pPr>
+            <a:r>
+              <a:t>✓ Dữ liệu lưu cục bộ, ẩn danh</a:t>
             </a:r>
           </a:p>
         </p:txBody>
@@ -5061,114 +4817,54 @@
           </a:p>
         </p:txBody>
       </p:sp>
-      <p:sp>
-        <p:nvSpPr>
-          <p:cNvPr id="3" name="Oval 2"/>
-          <p:cNvSpPr/>
+      <p:pic>
+        <p:nvPicPr>
+          <p:cNvPr id="3" name="Picture 2" descr="logo_dhsp_hue.png"/>
+          <p:cNvPicPr>
+            <a:picLocks noChangeAspect="1"/>
+          </p:cNvPicPr>
           <p:nvPr/>
-        </p:nvSpPr>
+        </p:nvPicPr>
+        <p:blipFill>
+          <a:blip r:embed="rId2"/>
+          <a:stretch>
+            <a:fillRect/>
+          </a:stretch>
+        </p:blipFill>
         <p:spPr>
           <a:xfrm>
             <a:off x="274320" y="137160"/>
             <a:ext cx="457200" cy="457200"/>
           </a:xfrm>
-          <a:prstGeom prst="ellipse">
+          <a:prstGeom prst="rect">
             <a:avLst/>
           </a:prstGeom>
-          <a:solidFill>
-            <a:srgbClr val="F0F0F0"/>
-          </a:solidFill>
-          <a:ln w="25400">
-            <a:solidFill>
-              <a:srgbClr val="C8C8C8"/>
-            </a:solidFill>
-          </a:ln>
-        </p:spPr>
-        <p:style>
-          <a:lnRef idx="1">
-            <a:schemeClr val="accent1"/>
-          </a:lnRef>
-          <a:fillRef idx="3">
-            <a:schemeClr val="accent1"/>
-          </a:fillRef>
-          <a:effectRef idx="2">
-            <a:schemeClr val="accent1"/>
-          </a:effectRef>
-          <a:fontRef idx="minor">
-            <a:schemeClr val="lt1"/>
-          </a:fontRef>
-        </p:style>
-        <p:txBody>
-          <a:bodyPr rtlCol="0" anchor="ctr" wrap="square"/>
-          <a:lstStyle/>
-          <a:p>
-            <a:pPr algn="ctr">
-              <a:defRPr sz="1000" b="1">
-                <a:solidFill>
-                  <a:srgbClr val="C8C8C8"/>
-                </a:solidFill>
-              </a:defRPr>
-            </a:pPr>
-            <a:r>
-              <a:t>ĐHSP</a:t>
-            </a:r>
-          </a:p>
-        </p:txBody>
-      </p:sp>
-      <p:sp>
-        <p:nvSpPr>
-          <p:cNvPr id="4" name="Oval 3"/>
-          <p:cNvSpPr/>
+        </p:spPr>
+      </p:pic>
+      <p:pic>
+        <p:nvPicPr>
+          <p:cNvPr id="4" name="Picture 3" descr="logo_thpt_thuan_hoa.jpg"/>
+          <p:cNvPicPr>
+            <a:picLocks noChangeAspect="1"/>
+          </p:cNvPicPr>
           <p:nvPr/>
-        </p:nvSpPr>
-        <p:spPr>
-          <a:xfrm>
-            <a:off x="822960" y="137160"/>
+        </p:nvPicPr>
+        <p:blipFill>
+          <a:blip r:embed="rId3"/>
+          <a:stretch>
+            <a:fillRect/>
+          </a:stretch>
+        </p:blipFill>
+        <p:spPr>
+          <a:xfrm>
+            <a:off x="868680" y="137160"/>
             <a:ext cx="457200" cy="457200"/>
           </a:xfrm>
-          <a:prstGeom prst="ellipse">
+          <a:prstGeom prst="rect">
             <a:avLst/>
           </a:prstGeom>
-          <a:solidFill>
-            <a:srgbClr val="F0F0F0"/>
-          </a:solidFill>
-          <a:ln w="25400">
-            <a:solidFill>
-              <a:srgbClr val="C8C8C8"/>
-            </a:solidFill>
-          </a:ln>
-        </p:spPr>
-        <p:style>
-          <a:lnRef idx="1">
-            <a:schemeClr val="accent1"/>
-          </a:lnRef>
-          <a:fillRef idx="3">
-            <a:schemeClr val="accent1"/>
-          </a:fillRef>
-          <a:effectRef idx="2">
-            <a:schemeClr val="accent1"/>
-          </a:effectRef>
-          <a:fontRef idx="minor">
-            <a:schemeClr val="lt1"/>
-          </a:fontRef>
-        </p:style>
-        <p:txBody>
-          <a:bodyPr rtlCol="0" anchor="ctr" wrap="square"/>
-          <a:lstStyle/>
-          <a:p>
-            <a:pPr algn="ctr">
-              <a:defRPr sz="1000" b="1">
-                <a:solidFill>
-                  <a:srgbClr val="C8C8C8"/>
-                </a:solidFill>
-              </a:defRPr>
-            </a:pPr>
-            <a:r>
-              <a:t>THPT</a:t>
-            </a:r>
-          </a:p>
-        </p:txBody>
-      </p:sp>
+        </p:spPr>
+      </p:pic>
       <p:sp>
         <p:nvSpPr>
           <p:cNvPr id="5" name="TextBox 4"/>
@@ -5177,7 +4873,7 @@
         </p:nvSpPr>
         <p:spPr>
           <a:xfrm>
-            <a:off x="1463040" y="137160"/>
+            <a:off x="2011680" y="137160"/>
             <a:ext cx="9144000" cy="457200"/>
           </a:xfrm>
           <a:prstGeom prst="rect">
@@ -5192,7 +4888,7 @@
           <a:lstStyle/>
           <a:p>
             <a:pPr>
-              <a:defRPr sz="1800" b="1">
+              <a:defRPr sz="1600" b="1">
                 <a:solidFill>
                   <a:srgbClr val="FFFFFF"/>
                 </a:solidFill>
@@ -5212,8 +4908,8 @@
         </p:nvSpPr>
         <p:spPr>
           <a:xfrm>
-            <a:off x="457200" y="1097280"/>
-            <a:ext cx="10972800" cy="731520"/>
+            <a:off x="457200" y="1005840"/>
+            <a:ext cx="10972800" cy="640080"/>
           </a:xfrm>
           <a:prstGeom prst="rect">
             <a:avLst/>
@@ -5227,14 +4923,14 @@
           <a:lstStyle/>
           <a:p>
             <a:pPr>
-              <a:defRPr sz="3600" b="1">
+              <a:defRPr sz="3200" b="1">
                 <a:solidFill>
                   <a:srgbClr val="333333"/>
                 </a:solidFill>
               </a:defRPr>
             </a:pPr>
             <a:r>
-              <a:t>AInatomy - Phòng thực hành AI</a:t>
+              <a:t>Demo trực tiếp</a:t>
             </a:r>
           </a:p>
         </p:txBody>
@@ -5247,8 +4943,8 @@
         </p:nvSpPr>
         <p:spPr>
           <a:xfrm>
-            <a:off x="457200" y="6217920"/>
-            <a:ext cx="10972800" cy="457200"/>
+            <a:off x="457200" y="6309360"/>
+            <a:ext cx="10972800" cy="365760"/>
           </a:xfrm>
           <a:prstGeom prst="rect">
             <a:avLst/>
@@ -5282,8 +4978,8 @@
         </p:nvSpPr>
         <p:spPr>
           <a:xfrm>
-            <a:off x="457200" y="2011680"/>
-            <a:ext cx="10972800" cy="1371600"/>
+            <a:off x="914400" y="2286000"/>
+            <a:ext cx="10058400" cy="2743200"/>
           </a:xfrm>
           <a:prstGeom prst="rect">
             <a:avLst/>
@@ -5291,23 +4987,20 @@
           <a:noFill/>
         </p:spPr>
         <p:txBody>
-          <a:bodyPr wrap="square">
+          <a:bodyPr wrap="none">
             <a:spAutoFit/>
           </a:bodyPr>
           <a:lstStyle/>
           <a:p>
-            <a:pPr>
-              <a:spcAft>
-                <a:spcPts val="1200"/>
-              </a:spcAft>
-              <a:defRPr sz="2000">
-                <a:solidFill>
-                  <a:srgbClr val="333333"/>
+            <a:pPr algn="ctr">
+              <a:defRPr sz="2800" b="1">
+                <a:solidFill>
+                  <a:srgbClr val="0078D7"/>
                 </a:solidFill>
               </a:defRPr>
             </a:pPr>
             <a:r>
-              <a:t>Hệ thống học về AI thông qua việc bắt lỗi AI, phủ 22/22 YCCĐ lớp 10 theo QĐ 2422/QĐ-BGDĐT</a:t>
+              <a:t>https://mxuanvan02.github.io/ainatomy/</a:t>
             </a:r>
           </a:p>
         </p:txBody>
@@ -5320,8 +5013,8 @@
         </p:nvSpPr>
         <p:spPr>
           <a:xfrm>
-            <a:off x="457200" y="3474720"/>
-            <a:ext cx="10972800" cy="2560320"/>
+            <a:off x="914400" y="3657600"/>
+            <a:ext cx="10058400" cy="1828800"/>
           </a:xfrm>
           <a:prstGeom prst="rect">
             <a:avLst/>
@@ -5329,159 +5022,20 @@
           <a:noFill/>
         </p:spPr>
         <p:txBody>
-          <a:bodyPr wrap="square">
+          <a:bodyPr wrap="none">
             <a:spAutoFit/>
           </a:bodyPr>
           <a:lstStyle/>
-          <a:p/>
-          <a:p>
-            <a:pPr>
-              <a:spcBef>
-                <a:spcPts val="800"/>
-              </a:spcBef>
-              <a:defRPr sz="2000" b="1">
-                <a:solidFill>
-                  <a:srgbClr val="0078D7"/>
+          <a:p>
+            <a:pPr algn="ctr">
+              <a:defRPr sz="1800">
+                <a:solidFill>
+                  <a:srgbClr val="333333"/>
                 </a:solidFill>
               </a:defRPr>
             </a:pPr>
             <a:r>
-              <a:t>1. Kịch bản 9 cảnh</a:t>
-            </a:r>
-          </a:p>
-          <a:p>
-            <a:pPr>
-              <a:spcBef>
-                <a:spcPts val="200"/>
-              </a:spcBef>
-              <a:defRPr sz="1600">
-                <a:solidFill>
-                  <a:srgbClr val="333333"/>
-                </a:solidFill>
-              </a:defRPr>
-            </a:pPr>
-            <a:r>
-              <a:t>   Hành trình của bức ảnh từ đầu vào đến đầu ra</a:t>
-            </a:r>
-          </a:p>
-          <a:p>
-            <a:pPr>
-              <a:spcBef>
-                <a:spcPts val="800"/>
-              </a:spcBef>
-              <a:defRPr sz="2000" b="1">
-                <a:solidFill>
-                  <a:srgbClr val="0078D7"/>
-                </a:solidFill>
-              </a:defRPr>
-            </a:pPr>
-            <a:r>
-              <a:t>2. Đấu trường bắt lỗi AI</a:t>
-            </a:r>
-          </a:p>
-          <a:p>
-            <a:pPr>
-              <a:spcBef>
-                <a:spcPts val="200"/>
-              </a:spcBef>
-              <a:defRPr sz="1600">
-                <a:solidFill>
-                  <a:srgbClr val="333333"/>
-                </a:solidFill>
-              </a:defRPr>
-            </a:pPr>
-            <a:r>
-              <a:t>   12 tình huống, 5 loại lỗi AI</a:t>
-            </a:r>
-          </a:p>
-          <a:p>
-            <a:pPr>
-              <a:spcBef>
-                <a:spcPts val="800"/>
-              </a:spcBef>
-              <a:defRPr sz="2000" b="1">
-                <a:solidFill>
-                  <a:srgbClr val="0078D7"/>
-                </a:solidFill>
-              </a:defRPr>
-            </a:pPr>
-            <a:r>
-              <a:t>3. Nhà máy AI 7 trạm</a:t>
-            </a:r>
-          </a:p>
-          <a:p>
-            <a:pPr>
-              <a:spcBef>
-                <a:spcPts val="200"/>
-              </a:spcBef>
-              <a:defRPr sz="1600">
-                <a:solidFill>
-                  <a:srgbClr val="333333"/>
-                </a:solidFill>
-              </a:defRPr>
-            </a:pPr>
-            <a:r>
-              <a:t>   Từ nhập liệu đến ứng dụng</a:t>
-            </a:r>
-          </a:p>
-          <a:p>
-            <a:pPr>
-              <a:spcBef>
-                <a:spcPts val="800"/>
-              </a:spcBef>
-              <a:defRPr sz="2000" b="1">
-                <a:solidFill>
-                  <a:srgbClr val="0078D7"/>
-                </a:solidFill>
-              </a:defRPr>
-            </a:pPr>
-            <a:r>
-              <a:t>4. Tầng 1 - Xưởng huấn luyện</a:t>
-            </a:r>
-          </a:p>
-          <a:p>
-            <a:pPr>
-              <a:spcBef>
-                <a:spcPts val="200"/>
-              </a:spcBef>
-              <a:defRPr sz="1600">
-                <a:solidFill>
-                  <a:srgbClr val="333333"/>
-                </a:solidFill>
-              </a:defRPr>
-            </a:pPr>
-            <a:r>
-              <a:t>   Tự huấn luyện mô hình, thấy thiên kiến</a:t>
-            </a:r>
-          </a:p>
-          <a:p>
-            <a:pPr>
-              <a:spcBef>
-                <a:spcPts val="800"/>
-              </a:spcBef>
-              <a:defRPr sz="2000" b="1">
-                <a:solidFill>
-                  <a:srgbClr val="0078D7"/>
-                </a:solidFill>
-              </a:defRPr>
-            </a:pPr>
-            <a:r>
-              <a:t>5. Bản đồ năng lực</a:t>
-            </a:r>
-          </a:p>
-          <a:p>
-            <a:pPr>
-              <a:spcBef>
-                <a:spcPts val="200"/>
-              </a:spcBef>
-              <a:defRPr sz="1600">
-                <a:solidFill>
-                  <a:srgbClr val="333333"/>
-                </a:solidFill>
-              </a:defRPr>
-            </a:pPr>
-            <a:r>
-              <a:t>   Theo dõi tiến bộ theo 12 khối UNESCO</a:t>
+              <a:t>Mở trên trình duyệt — không cần cài đặt</a:t>
             </a:r>
           </a:p>
         </p:txBody>
@@ -5513,7 +5067,7 @@
         <p:spPr>
           <a:xfrm>
             <a:off x="0" y="0"/>
-            <a:ext cx="12191695" cy="731520"/>
+            <a:ext cx="12191695" cy="914400"/>
           </a:xfrm>
           <a:prstGeom prst="rect">
             <a:avLst/>
@@ -5547,114 +5101,54 @@
           </a:p>
         </p:txBody>
       </p:sp>
-      <p:sp>
-        <p:nvSpPr>
-          <p:cNvPr id="3" name="Oval 2"/>
-          <p:cNvSpPr/>
+      <p:pic>
+        <p:nvPicPr>
+          <p:cNvPr id="3" name="Picture 2" descr="logo_dhsp_hue.png"/>
+          <p:cNvPicPr>
+            <a:picLocks noChangeAspect="1"/>
+          </p:cNvPicPr>
           <p:nvPr/>
-        </p:nvSpPr>
+        </p:nvPicPr>
+        <p:blipFill>
+          <a:blip r:embed="rId2"/>
+          <a:stretch>
+            <a:fillRect/>
+          </a:stretch>
+        </p:blipFill>
         <p:spPr>
           <a:xfrm>
             <a:off x="274320" y="137160"/>
-            <a:ext cx="457200" cy="457200"/>
-          </a:xfrm>
-          <a:prstGeom prst="ellipse">
+            <a:ext cx="640080" cy="640080"/>
+          </a:xfrm>
+          <a:prstGeom prst="rect">
             <a:avLst/>
           </a:prstGeom>
-          <a:solidFill>
-            <a:srgbClr val="F0F0F0"/>
-          </a:solidFill>
-          <a:ln w="25400">
-            <a:solidFill>
-              <a:srgbClr val="C8C8C8"/>
-            </a:solidFill>
-          </a:ln>
-        </p:spPr>
-        <p:style>
-          <a:lnRef idx="1">
-            <a:schemeClr val="accent1"/>
-          </a:lnRef>
-          <a:fillRef idx="3">
-            <a:schemeClr val="accent1"/>
-          </a:fillRef>
-          <a:effectRef idx="2">
-            <a:schemeClr val="accent1"/>
-          </a:effectRef>
-          <a:fontRef idx="minor">
-            <a:schemeClr val="lt1"/>
-          </a:fontRef>
-        </p:style>
-        <p:txBody>
-          <a:bodyPr rtlCol="0" anchor="ctr" wrap="square"/>
-          <a:lstStyle/>
-          <a:p>
-            <a:pPr algn="ctr">
-              <a:defRPr sz="1000" b="1">
-                <a:solidFill>
-                  <a:srgbClr val="C8C8C8"/>
-                </a:solidFill>
-              </a:defRPr>
-            </a:pPr>
-            <a:r>
-              <a:t>ĐHSP</a:t>
-            </a:r>
-          </a:p>
-        </p:txBody>
-      </p:sp>
-      <p:sp>
-        <p:nvSpPr>
-          <p:cNvPr id="4" name="Oval 3"/>
-          <p:cNvSpPr/>
+        </p:spPr>
+      </p:pic>
+      <p:pic>
+        <p:nvPicPr>
+          <p:cNvPr id="4" name="Picture 3" descr="logo_thpt_thuan_hoa.jpg"/>
+          <p:cNvPicPr>
+            <a:picLocks noChangeAspect="1"/>
+          </p:cNvPicPr>
           <p:nvPr/>
-        </p:nvSpPr>
-        <p:spPr>
-          <a:xfrm>
-            <a:off x="822960" y="137160"/>
-            <a:ext cx="457200" cy="457200"/>
-          </a:xfrm>
-          <a:prstGeom prst="ellipse">
+        </p:nvPicPr>
+        <p:blipFill>
+          <a:blip r:embed="rId3"/>
+          <a:stretch>
+            <a:fillRect/>
+          </a:stretch>
+        </p:blipFill>
+        <p:spPr>
+          <a:xfrm>
+            <a:off x="1051560" y="137160"/>
+            <a:ext cx="640080" cy="640080"/>
+          </a:xfrm>
+          <a:prstGeom prst="rect">
             <a:avLst/>
           </a:prstGeom>
-          <a:solidFill>
-            <a:srgbClr val="F0F0F0"/>
-          </a:solidFill>
-          <a:ln w="25400">
-            <a:solidFill>
-              <a:srgbClr val="C8C8C8"/>
-            </a:solidFill>
-          </a:ln>
-        </p:spPr>
-        <p:style>
-          <a:lnRef idx="1">
-            <a:schemeClr val="accent1"/>
-          </a:lnRef>
-          <a:fillRef idx="3">
-            <a:schemeClr val="accent1"/>
-          </a:fillRef>
-          <a:effectRef idx="2">
-            <a:schemeClr val="accent1"/>
-          </a:effectRef>
-          <a:fontRef idx="minor">
-            <a:schemeClr val="lt1"/>
-          </a:fontRef>
-        </p:style>
-        <p:txBody>
-          <a:bodyPr rtlCol="0" anchor="ctr" wrap="square"/>
-          <a:lstStyle/>
-          <a:p>
-            <a:pPr algn="ctr">
-              <a:defRPr sz="1000" b="1">
-                <a:solidFill>
-                  <a:srgbClr val="C8C8C8"/>
-                </a:solidFill>
-              </a:defRPr>
-            </a:pPr>
-            <a:r>
-              <a:t>THPT</a:t>
-            </a:r>
-          </a:p>
-        </p:txBody>
-      </p:sp>
+        </p:spPr>
+      </p:pic>
       <p:sp>
         <p:nvSpPr>
           <p:cNvPr id="5" name="TextBox 4"/>
@@ -5663,7 +5157,7 @@
         </p:nvSpPr>
         <p:spPr>
           <a:xfrm>
-            <a:off x="1463040" y="137160"/>
+            <a:off x="2011680" y="137160"/>
             <a:ext cx="9144000" cy="457200"/>
           </a:xfrm>
           <a:prstGeom prst="rect">
@@ -5678,7 +5172,7 @@
           <a:lstStyle/>
           <a:p>
             <a:pPr>
-              <a:defRPr sz="1800" b="1">
+              <a:defRPr sz="2000" b="1">
                 <a:solidFill>
                   <a:srgbClr val="FFFFFF"/>
                 </a:solidFill>
@@ -5698,8 +5192,8 @@
         </p:nvSpPr>
         <p:spPr>
           <a:xfrm>
-            <a:off x="457200" y="1097280"/>
-            <a:ext cx="10972800" cy="731520"/>
+            <a:off x="1371600" y="2560320"/>
+            <a:ext cx="9144000" cy="1371600"/>
           </a:xfrm>
           <a:prstGeom prst="rect">
             <a:avLst/>
@@ -5712,15 +5206,15 @@
           </a:bodyPr>
           <a:lstStyle/>
           <a:p>
-            <a:pPr>
-              <a:defRPr sz="3600" b="1">
+            <a:pPr algn="ctr">
+              <a:defRPr sz="5400" b="1">
                 <a:solidFill>
                   <a:srgbClr val="333333"/>
                 </a:solidFill>
               </a:defRPr>
             </a:pPr>
             <a:r>
-              <a:t>Tích hợp chương trình Tin học 10</a:t>
+              <a:t>Cảm ơn</a:t>
             </a:r>
           </a:p>
         </p:txBody>
@@ -5733,8 +5227,8 @@
         </p:nvSpPr>
         <p:spPr>
           <a:xfrm>
-            <a:off x="457200" y="6217920"/>
-            <a:ext cx="10972800" cy="457200"/>
+            <a:off x="1371600" y="4114800"/>
+            <a:ext cx="9144000" cy="1371600"/>
           </a:xfrm>
           <a:prstGeom prst="rect">
             <a:avLst/>
@@ -5748,675 +5242,22 @@
           <a:lstStyle/>
           <a:p>
             <a:pPr algn="ctr">
-              <a:defRPr sz="1100">
-                <a:solidFill>
-                  <a:srgbClr val="C8C8C8"/>
+              <a:defRPr sz="2000">
+                <a:solidFill>
+                  <a:srgbClr val="333333"/>
                 </a:solidFill>
               </a:defRPr>
             </a:pPr>
             <a:r>
-              <a:t>Trường THPT Thuận Hoá — ĐHSP Huế | GV: Mai Xuân Văn</a:t>
-            </a:r>
-          </a:p>
-        </p:txBody>
-      </p:sp>
-      <p:sp>
-        <p:nvSpPr>
-          <p:cNvPr id="8" name="TextBox 7"/>
-          <p:cNvSpPr txBox="1"/>
-          <p:nvPr/>
-        </p:nvSpPr>
-        <p:spPr>
-          <a:xfrm>
-            <a:off x="457200" y="2011680"/>
-            <a:ext cx="10972800" cy="1097280"/>
-          </a:xfrm>
-          <a:prstGeom prst="rect">
-            <a:avLst/>
-          </a:prstGeom>
-          <a:noFill/>
-        </p:spPr>
-        <p:txBody>
-          <a:bodyPr wrap="square">
-            <a:spAutoFit/>
-          </a:bodyPr>
-          <a:lstStyle/>
-          <a:p/>
-          <a:p>
-            <a:pPr>
-              <a:spcBef>
-                <a:spcPts val="800"/>
-              </a:spcBef>
-            </a:pPr>
-            <a:r>
-              <a:rPr sz="2400" b="1">
-                <a:solidFill>
-                  <a:srgbClr val="27AE60"/>
-                </a:solidFill>
-              </a:rPr>
-              <a:t>28 bài </a:t>
-            </a:r>
-            <a:r>
-              <a:rPr sz="2000">
-                <a:solidFill>
-                  <a:srgbClr val="333333"/>
-                </a:solidFill>
-              </a:rPr>
-              <a:t>trong SGK Tin học 10 được hỗ trợ</a:t>
-            </a:r>
-          </a:p>
-          <a:p>
-            <a:pPr>
-              <a:spcBef>
-                <a:spcPts val="800"/>
-              </a:spcBef>
-            </a:pPr>
-            <a:r>
-              <a:rPr sz="2400" b="1">
-                <a:solidFill>
-                  <a:srgbClr val="27AE60"/>
-                </a:solidFill>
-              </a:rPr>
-              <a:t>22/22 YCCĐ </a:t>
-            </a:r>
-            <a:r>
-              <a:rPr sz="2000">
-                <a:solidFill>
-                  <a:srgbClr val="333333"/>
-                </a:solidFill>
-              </a:rPr>
-              <a:t>lớp 10 theo QĐ 2422 đều được phủ</a:t>
-            </a:r>
-          </a:p>
-          <a:p>
-            <a:pPr>
-              <a:spcBef>
-                <a:spcPts val="800"/>
-              </a:spcBef>
-            </a:pPr>
-            <a:r>
-              <a:rPr sz="2400" b="1">
-                <a:solidFill>
-                  <a:srgbClr val="27AE60"/>
-                </a:solidFill>
-              </a:rPr>
-              <a:t>6 chủ đề </a:t>
-            </a:r>
-            <a:r>
-              <a:rPr sz="2000">
-                <a:solidFill>
-                  <a:srgbClr val="333333"/>
-                </a:solidFill>
-              </a:rPr>
-              <a:t>A-F trong chương trình</a:t>
-            </a:r>
-          </a:p>
-        </p:txBody>
-      </p:sp>
-      <p:sp>
-        <p:nvSpPr>
-          <p:cNvPr id="9" name="TextBox 8"/>
-          <p:cNvSpPr txBox="1"/>
-          <p:nvPr/>
-        </p:nvSpPr>
-        <p:spPr>
-          <a:xfrm>
-            <a:off x="457200" y="3474720"/>
-            <a:ext cx="10972800" cy="2560320"/>
-          </a:xfrm>
-          <a:prstGeom prst="rect">
-            <a:avLst/>
-          </a:prstGeom>
-          <a:noFill/>
-        </p:spPr>
-        <p:txBody>
-          <a:bodyPr wrap="square">
-            <a:spAutoFit/>
-          </a:bodyPr>
-          <a:lstStyle/>
-          <a:p>
-            <a:pPr>
-              <a:spcAft>
-                <a:spcPts val="800"/>
-              </a:spcAft>
-              <a:defRPr sz="2200" b="1">
-                <a:solidFill>
-                  <a:srgbClr val="0078D7"/>
-                </a:solidFill>
-              </a:defRPr>
-            </a:pPr>
-            <a:r>
-              <a:t>Ví dụ: Chủ đề A - Máy tính và xã hội tri thức</a:t>
-            </a:r>
-          </a:p>
-          <a:p>
-            <a:pPr>
-              <a:spcBef>
-                <a:spcPts val="600"/>
-              </a:spcBef>
-              <a:defRPr sz="1600">
-                <a:solidFill>
-                  <a:srgbClr val="333333"/>
-                </a:solidFill>
-              </a:defRPr>
-            </a:pPr>
-            <a:r>
-              <a:t>• Bài 1: Dữ liệu, thông tin → Kịch bản 9 cảnh + Trạm 0 (15-20 phút)</a:t>
-            </a:r>
-          </a:p>
-          <a:p>
-            <a:pPr>
-              <a:spcBef>
-                <a:spcPts val="600"/>
-              </a:spcBef>
-              <a:defRPr sz="1600">
-                <a:solidFill>
-                  <a:srgbClr val="333333"/>
-                </a:solidFill>
-              </a:defRPr>
-            </a:pPr>
-            <a:r>
-              <a:t>• Bài 2: Sự ưu việt của máy tính → Đấu trường bắt lỗi AI (20-25 phút)</a:t>
-            </a:r>
-          </a:p>
-          <a:p>
-            <a:pPr>
-              <a:spcBef>
-                <a:spcPts val="600"/>
-              </a:spcBef>
-              <a:defRPr sz="1600">
-                <a:solidFill>
-                  <a:srgbClr val="333333"/>
-                </a:solidFill>
-              </a:defRPr>
-            </a:pPr>
-            <a:r>
-              <a:t>• Bài 3: Thực hành thiết bị số → Tình huống + Kiến thức (10 phút)</a:t>
-            </a:r>
-          </a:p>
-          <a:p>
-            <a:pPr>
-              <a:spcBef>
-                <a:spcPts val="600"/>
-              </a:spcBef>
-              <a:defRPr sz="1600">
-                <a:solidFill>
-                  <a:srgbClr val="333333"/>
-                </a:solidFill>
-              </a:defRPr>
-            </a:pPr>
-            <a:r>
-              <a:t>• Bài 4: Tin học trong kinh tế, xã hội → Nhà máy AI Trạm 0, 5 (15 phút)</a:t>
-            </a:r>
-          </a:p>
-        </p:txBody>
-      </p:sp>
-    </p:spTree>
-  </p:cSld>
-  <p:clrMapOvr>
-    <a:masterClrMapping/>
-  </p:clrMapOvr>
-</p:sld>
-</file>
-
-<file path=ppt/slides/slide8.xml><?xml version="1.0" encoding="utf-8"?>
-<p:sld xmlns:a="http://schemas.openxmlformats.org/drawingml/2006/main" xmlns:p="http://schemas.openxmlformats.org/presentationml/2006/main" xmlns:r="http://schemas.openxmlformats.org/officeDocument/2006/relationships">
-  <p:cSld>
-    <p:spTree>
-      <p:nvGrpSpPr>
-        <p:cNvPr id="1" name=""/>
-        <p:cNvGrpSpPr/>
-        <p:nvPr/>
-      </p:nvGrpSpPr>
-      <p:grpSpPr/>
-      <p:sp>
-        <p:nvSpPr>
-          <p:cNvPr id="2" name="Rectangle 1"/>
-          <p:cNvSpPr/>
-          <p:nvPr/>
-        </p:nvSpPr>
-        <p:spPr>
-          <a:xfrm>
-            <a:off x="0" y="0"/>
-            <a:ext cx="12191695" cy="731520"/>
-          </a:xfrm>
-          <a:prstGeom prst="rect">
-            <a:avLst/>
-          </a:prstGeom>
-          <a:solidFill>
-            <a:srgbClr val="0078D7"/>
-          </a:solidFill>
-          <a:ln>
-            <a:noFill/>
-          </a:ln>
-        </p:spPr>
-        <p:style>
-          <a:lnRef idx="1">
-            <a:schemeClr val="accent1"/>
-          </a:lnRef>
-          <a:fillRef idx="3">
-            <a:schemeClr val="accent1"/>
-          </a:fillRef>
-          <a:effectRef idx="2">
-            <a:schemeClr val="accent1"/>
-          </a:effectRef>
-          <a:fontRef idx="minor">
-            <a:schemeClr val="lt1"/>
-          </a:fontRef>
-        </p:style>
-        <p:txBody>
-          <a:bodyPr rtlCol="0" anchor="ctr"/>
-          <a:lstStyle/>
-          <a:p>
-            <a:pPr algn="ctr"/>
-          </a:p>
-        </p:txBody>
-      </p:sp>
-      <p:sp>
-        <p:nvSpPr>
-          <p:cNvPr id="3" name="Oval 2"/>
-          <p:cNvSpPr/>
-          <p:nvPr/>
-        </p:nvSpPr>
-        <p:spPr>
-          <a:xfrm>
-            <a:off x="274320" y="137160"/>
-            <a:ext cx="457200" cy="457200"/>
-          </a:xfrm>
-          <a:prstGeom prst="ellipse">
-            <a:avLst/>
-          </a:prstGeom>
-          <a:solidFill>
-            <a:srgbClr val="F0F0F0"/>
-          </a:solidFill>
-          <a:ln w="25400">
-            <a:solidFill>
-              <a:srgbClr val="C8C8C8"/>
-            </a:solidFill>
-          </a:ln>
-        </p:spPr>
-        <p:style>
-          <a:lnRef idx="1">
-            <a:schemeClr val="accent1"/>
-          </a:lnRef>
-          <a:fillRef idx="3">
-            <a:schemeClr val="accent1"/>
-          </a:fillRef>
-          <a:effectRef idx="2">
-            <a:schemeClr val="accent1"/>
-          </a:effectRef>
-          <a:fontRef idx="minor">
-            <a:schemeClr val="lt1"/>
-          </a:fontRef>
-        </p:style>
-        <p:txBody>
-          <a:bodyPr rtlCol="0" anchor="ctr" wrap="square"/>
-          <a:lstStyle/>
-          <a:p>
-            <a:pPr algn="ctr">
-              <a:defRPr sz="1000" b="1">
-                <a:solidFill>
-                  <a:srgbClr val="C8C8C8"/>
-                </a:solidFill>
-              </a:defRPr>
-            </a:pPr>
-            <a:r>
-              <a:t>ĐHSP</a:t>
-            </a:r>
-          </a:p>
-        </p:txBody>
-      </p:sp>
-      <p:sp>
-        <p:nvSpPr>
-          <p:cNvPr id="4" name="Oval 3"/>
-          <p:cNvSpPr/>
-          <p:nvPr/>
-        </p:nvSpPr>
-        <p:spPr>
-          <a:xfrm>
-            <a:off x="822960" y="137160"/>
-            <a:ext cx="457200" cy="457200"/>
-          </a:xfrm>
-          <a:prstGeom prst="ellipse">
-            <a:avLst/>
-          </a:prstGeom>
-          <a:solidFill>
-            <a:srgbClr val="F0F0F0"/>
-          </a:solidFill>
-          <a:ln w="25400">
-            <a:solidFill>
-              <a:srgbClr val="C8C8C8"/>
-            </a:solidFill>
-          </a:ln>
-        </p:spPr>
-        <p:style>
-          <a:lnRef idx="1">
-            <a:schemeClr val="accent1"/>
-          </a:lnRef>
-          <a:fillRef idx="3">
-            <a:schemeClr val="accent1"/>
-          </a:fillRef>
-          <a:effectRef idx="2">
-            <a:schemeClr val="accent1"/>
-          </a:effectRef>
-          <a:fontRef idx="minor">
-            <a:schemeClr val="lt1"/>
-          </a:fontRef>
-        </p:style>
-        <p:txBody>
-          <a:bodyPr rtlCol="0" anchor="ctr" wrap="square"/>
-          <a:lstStyle/>
-          <a:p>
-            <a:pPr algn="ctr">
-              <a:defRPr sz="1000" b="1">
-                <a:solidFill>
-                  <a:srgbClr val="C8C8C8"/>
-                </a:solidFill>
-              </a:defRPr>
-            </a:pPr>
-            <a:r>
-              <a:t>THPT</a:t>
-            </a:r>
-          </a:p>
-        </p:txBody>
-      </p:sp>
-      <p:sp>
-        <p:nvSpPr>
-          <p:cNvPr id="5" name="TextBox 4"/>
-          <p:cNvSpPr txBox="1"/>
-          <p:nvPr/>
-        </p:nvSpPr>
-        <p:spPr>
-          <a:xfrm>
-            <a:off x="1463040" y="137160"/>
-            <a:ext cx="9144000" cy="457200"/>
-          </a:xfrm>
-          <a:prstGeom prst="rect">
-            <a:avLst/>
-          </a:prstGeom>
-          <a:noFill/>
-        </p:spPr>
-        <p:txBody>
-          <a:bodyPr wrap="none">
-            <a:spAutoFit/>
-          </a:bodyPr>
-          <a:lstStyle/>
-          <a:p>
-            <a:pPr>
-              <a:defRPr sz="1800" b="1">
-                <a:solidFill>
-                  <a:srgbClr val="FFFFFF"/>
-                </a:solidFill>
-              </a:defRPr>
-            </a:pPr>
-            <a:r>
-              <a:t>AInatomy — Phòng thực hành AI</a:t>
-            </a:r>
-          </a:p>
-        </p:txBody>
-      </p:sp>
-      <p:sp>
-        <p:nvSpPr>
-          <p:cNvPr id="6" name="TextBox 5"/>
-          <p:cNvSpPr txBox="1"/>
-          <p:nvPr/>
-        </p:nvSpPr>
-        <p:spPr>
-          <a:xfrm>
-            <a:off x="457200" y="1097280"/>
-            <a:ext cx="10972800" cy="731520"/>
-          </a:xfrm>
-          <a:prstGeom prst="rect">
-            <a:avLst/>
-          </a:prstGeom>
-          <a:noFill/>
-        </p:spPr>
-        <p:txBody>
-          <a:bodyPr wrap="none">
-            <a:spAutoFit/>
-          </a:bodyPr>
-          <a:lstStyle/>
-          <a:p>
-            <a:pPr>
-              <a:defRPr sz="3600" b="1">
-                <a:solidFill>
-                  <a:srgbClr val="333333"/>
-                </a:solidFill>
-              </a:defRPr>
-            </a:pPr>
-            <a:r>
-              <a:t>Hướng dẫn sử dụng</a:t>
-            </a:r>
-          </a:p>
-        </p:txBody>
-      </p:sp>
-      <p:sp>
-        <p:nvSpPr>
-          <p:cNvPr id="7" name="TextBox 6"/>
-          <p:cNvSpPr txBox="1"/>
-          <p:nvPr/>
-        </p:nvSpPr>
-        <p:spPr>
-          <a:xfrm>
-            <a:off x="457200" y="6217920"/>
-            <a:ext cx="10972800" cy="457200"/>
-          </a:xfrm>
-          <a:prstGeom prst="rect">
-            <a:avLst/>
-          </a:prstGeom>
-          <a:noFill/>
-        </p:spPr>
-        <p:txBody>
-          <a:bodyPr wrap="none">
-            <a:spAutoFit/>
-          </a:bodyPr>
-          <a:lstStyle/>
-          <a:p>
-            <a:pPr algn="ctr">
-              <a:defRPr sz="1100">
-                <a:solidFill>
-                  <a:srgbClr val="C8C8C8"/>
-                </a:solidFill>
-              </a:defRPr>
-            </a:pPr>
-            <a:r>
-              <a:t>Trường THPT Thuận Hoá — ĐHSP Huế | GV: Mai Xuân Văn</a:t>
-            </a:r>
-          </a:p>
-        </p:txBody>
-      </p:sp>
-      <p:sp>
-        <p:nvSpPr>
-          <p:cNvPr id="8" name="TextBox 7"/>
-          <p:cNvSpPr txBox="1"/>
-          <p:nvPr/>
-        </p:nvSpPr>
-        <p:spPr>
-          <a:xfrm>
-            <a:off x="457200" y="2011680"/>
-            <a:ext cx="5029200" cy="3840480"/>
-          </a:xfrm>
-          <a:prstGeom prst="rect">
-            <a:avLst/>
-          </a:prstGeom>
-          <a:noFill/>
-        </p:spPr>
-        <p:txBody>
-          <a:bodyPr wrap="square">
-            <a:spAutoFit/>
-          </a:bodyPr>
-          <a:lstStyle/>
-          <a:p>
-            <a:pPr>
-              <a:spcAft>
-                <a:spcPts val="1000"/>
-              </a:spcAft>
-              <a:defRPr sz="2400" b="1">
-                <a:solidFill>
-                  <a:srgbClr val="0078D7"/>
-                </a:solidFill>
-              </a:defRPr>
-            </a:pPr>
-            <a:r>
-              <a:t>3 cách chạy</a:t>
-            </a:r>
-          </a:p>
-          <a:p>
-            <a:pPr>
-              <a:spcBef>
-                <a:spcPts val="800"/>
-              </a:spcBef>
-              <a:defRPr sz="1600">
-                <a:solidFill>
-                  <a:srgbClr val="333333"/>
-                </a:solidFill>
-              </a:defRPr>
-            </a:pPr>
-            <a:r>
-              <a:t>• USB: Chép thư mục, mở index.html</a:t>
-            </a:r>
-          </a:p>
-          <a:p>
-            <a:pPr>
-              <a:spcBef>
-                <a:spcPts val="800"/>
-              </a:spcBef>
-              <a:defRPr sz="1600">
-                <a:solidFill>
-                  <a:srgbClr val="333333"/>
-                </a:solidFill>
-              </a:defRPr>
-            </a:pPr>
-            <a:r>
-              <a:t>• Máy chủ lớp: Chia sẻ qua mạng LAN</a:t>
-            </a:r>
-          </a:p>
-          <a:p>
-            <a:pPr>
-              <a:spcBef>
-                <a:spcPts val="800"/>
-              </a:spcBef>
-              <a:defRPr sz="1600">
-                <a:solidFill>
-                  <a:srgbClr val="333333"/>
-                </a:solidFill>
-              </a:defRPr>
-            </a:pPr>
-            <a:r>
-              <a:t>• Máy cá nhân: Mở trực tiếp từ thư mục</a:t>
-            </a:r>
-          </a:p>
-        </p:txBody>
-      </p:sp>
-      <p:sp>
-        <p:nvSpPr>
-          <p:cNvPr id="9" name="TextBox 8"/>
-          <p:cNvSpPr txBox="1"/>
-          <p:nvPr/>
-        </p:nvSpPr>
-        <p:spPr>
-          <a:xfrm>
-            <a:off x="5943600" y="2011680"/>
-            <a:ext cx="5029200" cy="3840480"/>
-          </a:xfrm>
-          <a:prstGeom prst="rect">
-            <a:avLst/>
-          </a:prstGeom>
-          <a:noFill/>
-        </p:spPr>
-        <p:txBody>
-          <a:bodyPr wrap="square">
-            <a:spAutoFit/>
-          </a:bodyPr>
-          <a:lstStyle/>
-          <a:p>
-            <a:pPr>
-              <a:spcAft>
-                <a:spcPts val="1000"/>
-              </a:spcAft>
-              <a:defRPr sz="2400" b="1">
-                <a:solidFill>
-                  <a:srgbClr val="0078D7"/>
-                </a:solidFill>
-              </a:defRPr>
-            </a:pPr>
-            <a:r>
-              <a:t>Yêu cầu</a:t>
-            </a:r>
-          </a:p>
-          <a:p>
-            <a:pPr>
-              <a:spcBef>
-                <a:spcPts val="800"/>
-              </a:spcBef>
-              <a:defRPr sz="1600">
-                <a:solidFill>
-                  <a:srgbClr val="333333"/>
-                </a:solidFill>
-              </a:defRPr>
-            </a:pPr>
-            <a:r>
-              <a:t>✓ Không cần Internet</a:t>
-            </a:r>
-          </a:p>
-          <a:p>
-            <a:pPr>
-              <a:spcBef>
-                <a:spcPts val="800"/>
-              </a:spcBef>
-              <a:defRPr sz="1600">
-                <a:solidFill>
-                  <a:srgbClr val="333333"/>
-                </a:solidFill>
-              </a:defRPr>
-            </a:pPr>
-            <a:r>
-              <a:t>✓ Không cần tài khoản</a:t>
-            </a:r>
-          </a:p>
-          <a:p>
-            <a:pPr>
-              <a:spcBef>
-                <a:spcPts val="800"/>
-              </a:spcBef>
-              <a:defRPr sz="1600">
-                <a:solidFill>
-                  <a:srgbClr val="333333"/>
-                </a:solidFill>
-              </a:defRPr>
-            </a:pPr>
-            <a:r>
-              <a:t>✓ Trình duyệt bất kỳ</a:t>
-            </a:r>
-          </a:p>
-          <a:p>
-            <a:pPr>
-              <a:spcBef>
-                <a:spcPts val="800"/>
-              </a:spcBef>
-              <a:defRPr sz="1600">
-                <a:solidFill>
-                  <a:srgbClr val="333333"/>
-                </a:solidFill>
-              </a:defRPr>
-            </a:pPr>
-            <a:r>
-              <a:t>✓ Máy cấu hình yếu vẫn chạy</a:t>
-            </a:r>
-          </a:p>
-          <a:p>
-            <a:pPr>
-              <a:spcBef>
-                <a:spcPts val="800"/>
-              </a:spcBef>
-              <a:defRPr sz="1600">
-                <a:solidFill>
-                  <a:srgbClr val="333333"/>
-                </a:solidFill>
-              </a:defRPr>
-            </a:pPr>
-            <a:r>
-              <a:t>✓ Dữ liệu lưu cục bộ</a:t>
+              <a:t>Trường THPT Thuận Hoá</a:t>
+            </a:r>
+            <a:br/>
+            <a:r>
+              <a:t>Đại học Sư Phạm, Đại học Huế</a:t>
+            </a:r>
+            <a:br/>
+            <a:r>
+              <a:t>GV: Mai Xuân Văn</a:t>
             </a:r>
           </a:p>
         </p:txBody>

--- a/template_thuanhoa.pptx
+++ b/template_thuanhoa.pptx
@@ -12,6 +12,12 @@
     <p:sldId id="260" r:id="rId11"/>
     <p:sldId id="261" r:id="rId12"/>
     <p:sldId id="262" r:id="rId13"/>
+    <p:sldId id="263" r:id="rId14"/>
+    <p:sldId id="264" r:id="rId15"/>
+    <p:sldId id="265" r:id="rId16"/>
+    <p:sldId id="266" r:id="rId17"/>
+    <p:sldId id="267" r:id="rId18"/>
+    <p:sldId id="268" r:id="rId19"/>
   </p:sldIdLst>
   <p:sldSz cx="12191695" cy="6858000" type="screen4x3"/>
   <p:notesSz cx="6858000" cy="9144000"/>
@@ -3102,14 +3108,14 @@
         </p:nvSpPr>
         <p:spPr>
           <a:xfrm>
-            <a:off x="0" y="0"/>
-            <a:ext cx="12191695" cy="914400"/>
+            <a:off x="457200" y="868680"/>
+            <a:ext cx="11247120" cy="12700"/>
           </a:xfrm>
           <a:prstGeom prst="rect">
             <a:avLst/>
           </a:prstGeom>
           <a:solidFill>
-            <a:srgbClr val="0078D7"/>
+            <a:srgbClr val="B4B4B4"/>
           </a:solidFill>
           <a:ln>
             <a:noFill/>
@@ -3153,7 +3159,7 @@
         </p:blipFill>
         <p:spPr>
           <a:xfrm>
-            <a:off x="274320" y="137160"/>
+            <a:off x="457200" y="137160"/>
             <a:ext cx="640080" cy="640080"/>
           </a:xfrm>
           <a:prstGeom prst="rect">
@@ -3177,7 +3183,7 @@
         </p:blipFill>
         <p:spPr>
           <a:xfrm>
-            <a:off x="1051560" y="137160"/>
+            <a:off x="1188720" y="137160"/>
             <a:ext cx="640080" cy="640080"/>
           </a:xfrm>
           <a:prstGeom prst="rect">
@@ -3193,8 +3199,90 @@
         </p:nvSpPr>
         <p:spPr>
           <a:xfrm>
-            <a:off x="2011680" y="137160"/>
-            <a:ext cx="9144000" cy="457200"/>
+            <a:off x="1920240" y="137160"/>
+            <a:ext cx="3200400" cy="640080"/>
+          </a:xfrm>
+          <a:prstGeom prst="rect">
+            <a:avLst/>
+          </a:prstGeom>
+          <a:noFill/>
+        </p:spPr>
+        <p:txBody>
+          <a:bodyPr wrap="square">
+            <a:spAutoFit/>
+          </a:bodyPr>
+          <a:lstStyle/>
+          <a:p>
+            <a:pPr>
+              <a:defRPr sz="1100" b="1">
+                <a:solidFill>
+                  <a:srgbClr val="333333"/>
+                </a:solidFill>
+              </a:defRPr>
+            </a:pPr>
+            <a:r>
+              <a:t>TRƯỜNG THPT THUẬN HOÁ</a:t>
+            </a:r>
+          </a:p>
+          <a:p>
+            <a:pPr>
+              <a:defRPr sz="1000">
+                <a:solidFill>
+                  <a:srgbClr val="646464"/>
+                </a:solidFill>
+              </a:defRPr>
+            </a:pPr>
+            <a:r>
+              <a:t>Đại học Sư Phạm, Đại học Huế</a:t>
+            </a:r>
+          </a:p>
+        </p:txBody>
+      </p:sp>
+      <p:sp>
+        <p:nvSpPr>
+          <p:cNvPr id="6" name="TextBox 5"/>
+          <p:cNvSpPr txBox="1"/>
+          <p:nvPr/>
+        </p:nvSpPr>
+        <p:spPr>
+          <a:xfrm>
+            <a:off x="5303520" y="182880"/>
+            <a:ext cx="6400800" cy="640080"/>
+          </a:xfrm>
+          <a:prstGeom prst="rect">
+            <a:avLst/>
+          </a:prstGeom>
+          <a:noFill/>
+        </p:spPr>
+        <p:txBody>
+          <a:bodyPr wrap="square">
+            <a:spAutoFit/>
+          </a:bodyPr>
+          <a:lstStyle/>
+          <a:p>
+            <a:pPr algn="ctr">
+              <a:defRPr sz="1600" b="1">
+                <a:solidFill>
+                  <a:srgbClr val="333333"/>
+                </a:solidFill>
+              </a:defRPr>
+            </a:pPr>
+            <a:r>
+              <a:t>THUYẾT MINH Ý TƯỞNG</a:t>
+            </a:r>
+          </a:p>
+        </p:txBody>
+      </p:sp>
+      <p:sp>
+        <p:nvSpPr>
+          <p:cNvPr id="7" name="TextBox 6"/>
+          <p:cNvSpPr txBox="1"/>
+          <p:nvPr/>
+        </p:nvSpPr>
+        <p:spPr>
+          <a:xfrm>
+            <a:off x="914400" y="2011680"/>
+            <a:ext cx="10058400" cy="1371600"/>
           </a:xfrm>
           <a:prstGeom prst="rect">
             <a:avLst/>
@@ -3207,29 +3295,29 @@
           </a:bodyPr>
           <a:lstStyle/>
           <a:p>
-            <a:pPr>
-              <a:defRPr sz="2000" b="1">
-                <a:solidFill>
-                  <a:srgbClr val="FFFFFF"/>
-                </a:solidFill>
-              </a:defRPr>
-            </a:pPr>
-            <a:r>
-              <a:t>AInatomy — Phòng thực hành AI</a:t>
-            </a:r>
-          </a:p>
-        </p:txBody>
-      </p:sp>
-      <p:sp>
-        <p:nvSpPr>
-          <p:cNvPr id="6" name="TextBox 5"/>
+            <a:pPr algn="ctr">
+              <a:defRPr sz="5400" b="1">
+                <a:solidFill>
+                  <a:srgbClr val="000000"/>
+                </a:solidFill>
+              </a:defRPr>
+            </a:pPr>
+            <a:r>
+              <a:t>AInatomy</a:t>
+            </a:r>
+          </a:p>
+        </p:txBody>
+      </p:sp>
+      <p:sp>
+        <p:nvSpPr>
+          <p:cNvPr id="8" name="TextBox 7"/>
           <p:cNvSpPr txBox="1"/>
           <p:nvPr/>
         </p:nvSpPr>
         <p:spPr>
           <a:xfrm>
-            <a:off x="1371600" y="2286000"/>
-            <a:ext cx="9144000" cy="1371600"/>
+            <a:off x="914400" y="3474720"/>
+            <a:ext cx="10058400" cy="914400"/>
           </a:xfrm>
           <a:prstGeom prst="rect">
             <a:avLst/>
@@ -3243,14 +3331,281 @@
           <a:lstStyle/>
           <a:p>
             <a:pPr algn="ctr">
-              <a:defRPr sz="5600" b="1">
-                <a:solidFill>
-                  <a:srgbClr val="333333"/>
-                </a:solidFill>
-              </a:defRPr>
-            </a:pPr>
-            <a:r>
-              <a:t>AInatomy</a:t>
+              <a:defRPr sz="2400">
+                <a:solidFill>
+                  <a:srgbClr val="333333"/>
+                </a:solidFill>
+              </a:defRPr>
+            </a:pPr>
+            <a:r>
+              <a:t>Phòng thí nghiệm AI offline cho học sinh phổ thông</a:t>
+            </a:r>
+          </a:p>
+        </p:txBody>
+      </p:sp>
+      <p:sp>
+        <p:nvSpPr>
+          <p:cNvPr id="9" name="TextBox 8"/>
+          <p:cNvSpPr txBox="1"/>
+          <p:nvPr/>
+        </p:nvSpPr>
+        <p:spPr>
+          <a:xfrm>
+            <a:off x="914400" y="4754880"/>
+            <a:ext cx="10058400" cy="1371600"/>
+          </a:xfrm>
+          <a:prstGeom prst="rect">
+            <a:avLst/>
+          </a:prstGeom>
+          <a:noFill/>
+        </p:spPr>
+        <p:txBody>
+          <a:bodyPr wrap="square">
+            <a:spAutoFit/>
+          </a:bodyPr>
+          <a:lstStyle/>
+          <a:p>
+            <a:pPr algn="ctr">
+              <a:defRPr sz="1400">
+                <a:solidFill>
+                  <a:srgbClr val="646464"/>
+                </a:solidFill>
+              </a:defRPr>
+            </a:pPr>
+            <a:r>
+              <a:t>Giải thưởng Tiên phong Ứng dụng AI trong Giáo dục Việt Nam 2026</a:t>
+            </a:r>
+          </a:p>
+          <a:p>
+            <a:pPr algn="ctr">
+              <a:defRPr sz="1400">
+                <a:solidFill>
+                  <a:srgbClr val="646464"/>
+                </a:solidFill>
+              </a:defRPr>
+            </a:pPr>
+            <a:r>
+              <a:t>Bảng B — Trung học phổ thông</a:t>
+            </a:r>
+          </a:p>
+          <a:p>
+            <a:pPr>
+              <a:defRPr sz="1200"/>
+            </a:pPr>
+          </a:p>
+          <a:p>
+            <a:pPr algn="ctr">
+              <a:defRPr sz="1600" b="1">
+                <a:solidFill>
+                  <a:srgbClr val="333333"/>
+                </a:solidFill>
+              </a:defRPr>
+            </a:pPr>
+            <a:r>
+              <a:t>Tác giả: GV Mai Xuân Văn</a:t>
+            </a:r>
+          </a:p>
+          <a:p>
+            <a:pPr algn="ctr">
+              <a:defRPr sz="1400">
+                <a:solidFill>
+                  <a:srgbClr val="646464"/>
+                </a:solidFill>
+              </a:defRPr>
+            </a:pPr>
+            <a:r>
+              <a:t>Trường THPT Thuận Hoá — Đại học Sư Phạm, Đại học Huế</a:t>
+            </a:r>
+          </a:p>
+        </p:txBody>
+      </p:sp>
+    </p:spTree>
+  </p:cSld>
+  <p:clrMapOvr>
+    <a:masterClrMapping/>
+  </p:clrMapOvr>
+</p:sld>
+</file>
+
+<file path=ppt/slides/slide10.xml><?xml version="1.0" encoding="utf-8"?>
+<p:sld xmlns:a="http://schemas.openxmlformats.org/drawingml/2006/main" xmlns:p="http://schemas.openxmlformats.org/presentationml/2006/main" xmlns:r="http://schemas.openxmlformats.org/officeDocument/2006/relationships">
+  <p:cSld>
+    <p:spTree>
+      <p:nvGrpSpPr>
+        <p:cNvPr id="1" name=""/>
+        <p:cNvGrpSpPr/>
+        <p:nvPr/>
+      </p:nvGrpSpPr>
+      <p:grpSpPr/>
+      <p:sp>
+        <p:nvSpPr>
+          <p:cNvPr id="2" name="Rectangle 1"/>
+          <p:cNvSpPr/>
+          <p:nvPr/>
+        </p:nvSpPr>
+        <p:spPr>
+          <a:xfrm>
+            <a:off x="457200" y="868680"/>
+            <a:ext cx="11247120" cy="12700"/>
+          </a:xfrm>
+          <a:prstGeom prst="rect">
+            <a:avLst/>
+          </a:prstGeom>
+          <a:solidFill>
+            <a:srgbClr val="B4B4B4"/>
+          </a:solidFill>
+          <a:ln>
+            <a:noFill/>
+          </a:ln>
+        </p:spPr>
+        <p:style>
+          <a:lnRef idx="1">
+            <a:schemeClr val="accent1"/>
+          </a:lnRef>
+          <a:fillRef idx="3">
+            <a:schemeClr val="accent1"/>
+          </a:fillRef>
+          <a:effectRef idx="2">
+            <a:schemeClr val="accent1"/>
+          </a:effectRef>
+          <a:fontRef idx="minor">
+            <a:schemeClr val="lt1"/>
+          </a:fontRef>
+        </p:style>
+        <p:txBody>
+          <a:bodyPr rtlCol="0" anchor="ctr"/>
+          <a:lstStyle/>
+          <a:p>
+            <a:pPr algn="ctr"/>
+          </a:p>
+        </p:txBody>
+      </p:sp>
+      <p:pic>
+        <p:nvPicPr>
+          <p:cNvPr id="3" name="Picture 2" descr="logo_dhsp_hue.png"/>
+          <p:cNvPicPr>
+            <a:picLocks noChangeAspect="1"/>
+          </p:cNvPicPr>
+          <p:nvPr/>
+        </p:nvPicPr>
+        <p:blipFill>
+          <a:blip r:embed="rId2"/>
+          <a:stretch>
+            <a:fillRect/>
+          </a:stretch>
+        </p:blipFill>
+        <p:spPr>
+          <a:xfrm>
+            <a:off x="457200" y="137160"/>
+            <a:ext cx="548640" cy="548640"/>
+          </a:xfrm>
+          <a:prstGeom prst="rect">
+            <a:avLst/>
+          </a:prstGeom>
+        </p:spPr>
+      </p:pic>
+      <p:pic>
+        <p:nvPicPr>
+          <p:cNvPr id="4" name="Picture 3" descr="logo_thpt_thuan_hoa.jpg"/>
+          <p:cNvPicPr>
+            <a:picLocks noChangeAspect="1"/>
+          </p:cNvPicPr>
+          <p:nvPr/>
+        </p:nvPicPr>
+        <p:blipFill>
+          <a:blip r:embed="rId3"/>
+          <a:stretch>
+            <a:fillRect/>
+          </a:stretch>
+        </p:blipFill>
+        <p:spPr>
+          <a:xfrm>
+            <a:off x="1188720" y="137160"/>
+            <a:ext cx="548640" cy="548640"/>
+          </a:xfrm>
+          <a:prstGeom prst="rect">
+            <a:avLst/>
+          </a:prstGeom>
+        </p:spPr>
+      </p:pic>
+      <p:sp>
+        <p:nvSpPr>
+          <p:cNvPr id="5" name="TextBox 4"/>
+          <p:cNvSpPr txBox="1"/>
+          <p:nvPr/>
+        </p:nvSpPr>
+        <p:spPr>
+          <a:xfrm>
+            <a:off x="1920240" y="137160"/>
+            <a:ext cx="3200400" cy="640080"/>
+          </a:xfrm>
+          <a:prstGeom prst="rect">
+            <a:avLst/>
+          </a:prstGeom>
+          <a:noFill/>
+        </p:spPr>
+        <p:txBody>
+          <a:bodyPr wrap="square">
+            <a:spAutoFit/>
+          </a:bodyPr>
+          <a:lstStyle/>
+          <a:p>
+            <a:pPr>
+              <a:defRPr sz="1100" b="1">
+                <a:solidFill>
+                  <a:srgbClr val="333333"/>
+                </a:solidFill>
+              </a:defRPr>
+            </a:pPr>
+            <a:r>
+              <a:t>TRƯỜNG THPT THUẬN HOÁ</a:t>
+            </a:r>
+          </a:p>
+          <a:p>
+            <a:pPr>
+              <a:defRPr sz="1000">
+                <a:solidFill>
+                  <a:srgbClr val="646464"/>
+                </a:solidFill>
+              </a:defRPr>
+            </a:pPr>
+            <a:r>
+              <a:t>Đại học Sư Phạm, Đại học Huế</a:t>
+            </a:r>
+          </a:p>
+        </p:txBody>
+      </p:sp>
+      <p:sp>
+        <p:nvSpPr>
+          <p:cNvPr id="6" name="TextBox 5"/>
+          <p:cNvSpPr txBox="1"/>
+          <p:nvPr/>
+        </p:nvSpPr>
+        <p:spPr>
+          <a:xfrm>
+            <a:off x="5303520" y="182880"/>
+            <a:ext cx="6400800" cy="640080"/>
+          </a:xfrm>
+          <a:prstGeom prst="rect">
+            <a:avLst/>
+          </a:prstGeom>
+          <a:noFill/>
+        </p:spPr>
+        <p:txBody>
+          <a:bodyPr wrap="square">
+            <a:spAutoFit/>
+          </a:bodyPr>
+          <a:lstStyle/>
+          <a:p>
+            <a:pPr algn="ctr">
+              <a:defRPr sz="1400" b="1">
+                <a:solidFill>
+                  <a:srgbClr val="333333"/>
+                </a:solidFill>
+              </a:defRPr>
+            </a:pPr>
+            <a:r>
+              <a:t>9. Khả năng nhân rộng</a:t>
             </a:r>
           </a:p>
         </p:txBody>
@@ -3263,8 +3618,8 @@
         </p:nvSpPr>
         <p:spPr>
           <a:xfrm>
-            <a:off x="1371600" y="3657600"/>
-            <a:ext cx="9144000" cy="914400"/>
+            <a:off x="457200" y="6400800"/>
+            <a:ext cx="10972800" cy="365760"/>
           </a:xfrm>
           <a:prstGeom prst="rect">
             <a:avLst/>
@@ -3277,15 +3632,15 @@
           </a:bodyPr>
           <a:lstStyle/>
           <a:p>
-            <a:pPr algn="ctr">
-              <a:defRPr sz="2400">
-                <a:solidFill>
-                  <a:srgbClr val="333333"/>
-                </a:solidFill>
-              </a:defRPr>
-            </a:pPr>
-            <a:r>
-              <a:t>Phòng thực hành Trí tuệ nhân tạo — Báo cáo cuộc thi</a:t>
+            <a:pPr>
+              <a:defRPr sz="1000">
+                <a:solidFill>
+                  <a:srgbClr val="646464"/>
+                </a:solidFill>
+              </a:defRPr>
+            </a:pPr>
+            <a:r>
+              <a:t>GV hướng dẫn: Mai Xuân Văn                                                                                           10</a:t>
             </a:r>
           </a:p>
         </p:txBody>
@@ -3298,8 +3653,8 @@
         </p:nvSpPr>
         <p:spPr>
           <a:xfrm>
-            <a:off x="457200" y="5303520"/>
-            <a:ext cx="10972800" cy="914400"/>
+            <a:off x="457200" y="1097280"/>
+            <a:ext cx="10972800" cy="548640"/>
           </a:xfrm>
           <a:prstGeom prst="rect">
             <a:avLst/>
@@ -3312,19 +3667,1524 @@
           </a:bodyPr>
           <a:lstStyle/>
           <a:p>
+            <a:pPr>
+              <a:defRPr sz="2800" b="1">
+                <a:solidFill>
+                  <a:srgbClr val="0066CC"/>
+                </a:solidFill>
+              </a:defRPr>
+            </a:pPr>
+            <a:r>
+              <a:t>Triển khai thực tế</a:t>
+            </a:r>
+          </a:p>
+        </p:txBody>
+      </p:sp>
+      <p:sp>
+        <p:nvSpPr>
+          <p:cNvPr id="9" name="TextBox 8"/>
+          <p:cNvSpPr txBox="1"/>
+          <p:nvPr/>
+        </p:nvSpPr>
+        <p:spPr>
+          <a:xfrm>
+            <a:off x="640080" y="1828800"/>
+            <a:ext cx="10515600" cy="4389120"/>
+          </a:xfrm>
+          <a:prstGeom prst="rect">
+            <a:avLst/>
+          </a:prstGeom>
+          <a:noFill/>
+        </p:spPr>
+        <p:txBody>
+          <a:bodyPr wrap="square">
+            <a:spAutoFit/>
+          </a:bodyPr>
+          <a:lstStyle/>
+          <a:p>
+            <a:pPr>
+              <a:spcBef>
+                <a:spcPts val="800"/>
+              </a:spcBef>
+              <a:spcAft>
+                <a:spcPts val="400"/>
+              </a:spcAft>
+              <a:defRPr sz="1500">
+                <a:solidFill>
+                  <a:srgbClr val="333333"/>
+                </a:solidFill>
+              </a:defRPr>
+            </a:pPr>
+            <a:r>
+              <a:t>• 3 cách chạy, không cần Internet:</a:t>
+            </a:r>
+          </a:p>
+          <a:p>
+            <a:pPr>
+              <a:spcBef>
+                <a:spcPts val="800"/>
+              </a:spcBef>
+              <a:spcAft>
+                <a:spcPts val="400"/>
+              </a:spcAft>
+              <a:defRPr sz="1500">
+                <a:solidFill>
+                  <a:srgbClr val="333333"/>
+                </a:solidFill>
+              </a:defRPr>
+            </a:pPr>
+            <a:r>
+              <a:t>  — USB: Chép thư mục → mở index.html</a:t>
+            </a:r>
+          </a:p>
+          <a:p>
+            <a:pPr>
+              <a:spcBef>
+                <a:spcPts val="800"/>
+              </a:spcBef>
+              <a:spcAft>
+                <a:spcPts val="400"/>
+              </a:spcAft>
+              <a:defRPr sz="1500">
+                <a:solidFill>
+                  <a:srgbClr val="333333"/>
+                </a:solidFill>
+              </a:defRPr>
+            </a:pPr>
+            <a:r>
+              <a:t>  — Máy chủ lớp: Chia sẻ qua mạng LAN</a:t>
+            </a:r>
+          </a:p>
+          <a:p>
+            <a:pPr>
+              <a:spcBef>
+                <a:spcPts val="800"/>
+              </a:spcBef>
+              <a:spcAft>
+                <a:spcPts val="400"/>
+              </a:spcAft>
+              <a:defRPr sz="1500">
+                <a:solidFill>
+                  <a:srgbClr val="333333"/>
+                </a:solidFill>
+              </a:defRPr>
+            </a:pPr>
+            <a:r>
+              <a:t>  — GitHub Pages: https://mxuanvan02.github.io/ainatomy/</a:t>
+            </a:r>
+          </a:p>
+          <a:p>
+            <a:pPr>
+              <a:spcBef>
+                <a:spcPts val="800"/>
+              </a:spcBef>
+              <a:spcAft>
+                <a:spcPts val="400"/>
+              </a:spcAft>
+              <a:defRPr sz="1500">
+                <a:solidFill>
+                  <a:srgbClr val="333333"/>
+                </a:solidFill>
+              </a:defRPr>
+            </a:pPr>
+            <a:r>
+              <a:t>• </a:t>
+            </a:r>
+          </a:p>
+          <a:p>
+            <a:pPr>
+              <a:spcBef>
+                <a:spcPts val="800"/>
+              </a:spcBef>
+              <a:spcAft>
+                <a:spcPts val="400"/>
+              </a:spcAft>
+              <a:defRPr sz="1500">
+                <a:solidFill>
+                  <a:srgbClr val="333333"/>
+                </a:solidFill>
+              </a:defRPr>
+            </a:pPr>
+            <a:r>
+              <a:t>• Yêu cầu tối thiểu:</a:t>
+            </a:r>
+          </a:p>
+          <a:p>
+            <a:pPr>
+              <a:spcBef>
+                <a:spcPts val="800"/>
+              </a:spcBef>
+              <a:spcAft>
+                <a:spcPts val="400"/>
+              </a:spcAft>
+              <a:defRPr sz="1500">
+                <a:solidFill>
+                  <a:srgbClr val="333333"/>
+                </a:solidFill>
+              </a:defRPr>
+            </a:pPr>
+            <a:r>
+              <a:t>  — Trình duyệt bất kỳ (Chrome, Edge, Firefox)</a:t>
+            </a:r>
+          </a:p>
+          <a:p>
+            <a:pPr>
+              <a:spcBef>
+                <a:spcPts val="800"/>
+              </a:spcBef>
+              <a:spcAft>
+                <a:spcPts val="400"/>
+              </a:spcAft>
+              <a:defRPr sz="1500">
+                <a:solidFill>
+                  <a:srgbClr val="333333"/>
+                </a:solidFill>
+              </a:defRPr>
+            </a:pPr>
+            <a:r>
+              <a:t>  — Python 3.8+ (chỉ cần cho công cụ kiểm tra)</a:t>
+            </a:r>
+          </a:p>
+          <a:p>
+            <a:pPr>
+              <a:spcBef>
+                <a:spcPts val="800"/>
+              </a:spcBef>
+              <a:spcAft>
+                <a:spcPts val="400"/>
+              </a:spcAft>
+              <a:defRPr sz="1500">
+                <a:solidFill>
+                  <a:srgbClr val="333333"/>
+                </a:solidFill>
+              </a:defRPr>
+            </a:pPr>
+            <a:r>
+              <a:t>  — Không cần card đồ họa rời</a:t>
+            </a:r>
+          </a:p>
+          <a:p>
+            <a:pPr>
+              <a:spcBef>
+                <a:spcPts val="800"/>
+              </a:spcBef>
+              <a:spcAft>
+                <a:spcPts val="400"/>
+              </a:spcAft>
+              <a:defRPr sz="1500">
+                <a:solidFill>
+                  <a:srgbClr val="333333"/>
+                </a:solidFill>
+              </a:defRPr>
+            </a:pPr>
+            <a:r>
+              <a:t>• </a:t>
+            </a:r>
+          </a:p>
+          <a:p>
+            <a:pPr>
+              <a:spcBef>
+                <a:spcPts val="800"/>
+              </a:spcBef>
+              <a:spcAft>
+                <a:spcPts val="400"/>
+              </a:spcAft>
+              <a:defRPr sz="1500">
+                <a:solidFill>
+                  <a:srgbClr val="333333"/>
+                </a:solidFill>
+              </a:defRPr>
+            </a:pPr>
+            <a:r>
+              <a:t>• Dữ liệu lưu cục bộ, ẩn danh theo mã học sinh:</a:t>
+            </a:r>
+          </a:p>
+          <a:p>
+            <a:pPr>
+              <a:spcBef>
+                <a:spcPts val="800"/>
+              </a:spcBef>
+              <a:spcAft>
+                <a:spcPts val="400"/>
+              </a:spcAft>
+              <a:defRPr sz="1500">
+                <a:solidFill>
+                  <a:srgbClr val="333333"/>
+                </a:solidFill>
+              </a:defRPr>
+            </a:pPr>
+            <a:r>
+              <a:t>  — Không thu thập họ tên, ảnh, định danh cá nhân</a:t>
+            </a:r>
+          </a:p>
+          <a:p>
+            <a:pPr>
+              <a:spcBef>
+                <a:spcPts val="800"/>
+              </a:spcBef>
+              <a:spcAft>
+                <a:spcPts val="400"/>
+              </a:spcAft>
+              <a:defRPr sz="1500">
+                <a:solidFill>
+                  <a:srgbClr val="333333"/>
+                </a:solidFill>
+              </a:defRPr>
+            </a:pPr>
+            <a:r>
+              <a:t>  — Xuất CSV/JSON làm minh chứng cuối kì</a:t>
+            </a:r>
+          </a:p>
+        </p:txBody>
+      </p:sp>
+    </p:spTree>
+  </p:cSld>
+  <p:clrMapOvr>
+    <a:masterClrMapping/>
+  </p:clrMapOvr>
+</p:sld>
+</file>
+
+<file path=ppt/slides/slide11.xml><?xml version="1.0" encoding="utf-8"?>
+<p:sld xmlns:a="http://schemas.openxmlformats.org/drawingml/2006/main" xmlns:p="http://schemas.openxmlformats.org/presentationml/2006/main" xmlns:r="http://schemas.openxmlformats.org/officeDocument/2006/relationships">
+  <p:cSld>
+    <p:spTree>
+      <p:nvGrpSpPr>
+        <p:cNvPr id="1" name=""/>
+        <p:cNvGrpSpPr/>
+        <p:nvPr/>
+      </p:nvGrpSpPr>
+      <p:grpSpPr/>
+      <p:sp>
+        <p:nvSpPr>
+          <p:cNvPr id="2" name="Rectangle 1"/>
+          <p:cNvSpPr/>
+          <p:nvPr/>
+        </p:nvSpPr>
+        <p:spPr>
+          <a:xfrm>
+            <a:off x="457200" y="868680"/>
+            <a:ext cx="11247120" cy="12700"/>
+          </a:xfrm>
+          <a:prstGeom prst="rect">
+            <a:avLst/>
+          </a:prstGeom>
+          <a:solidFill>
+            <a:srgbClr val="B4B4B4"/>
+          </a:solidFill>
+          <a:ln>
+            <a:noFill/>
+          </a:ln>
+        </p:spPr>
+        <p:style>
+          <a:lnRef idx="1">
+            <a:schemeClr val="accent1"/>
+          </a:lnRef>
+          <a:fillRef idx="3">
+            <a:schemeClr val="accent1"/>
+          </a:fillRef>
+          <a:effectRef idx="2">
+            <a:schemeClr val="accent1"/>
+          </a:effectRef>
+          <a:fontRef idx="minor">
+            <a:schemeClr val="lt1"/>
+          </a:fontRef>
+        </p:style>
+        <p:txBody>
+          <a:bodyPr rtlCol="0" anchor="ctr"/>
+          <a:lstStyle/>
+          <a:p>
+            <a:pPr algn="ctr"/>
+          </a:p>
+        </p:txBody>
+      </p:sp>
+      <p:pic>
+        <p:nvPicPr>
+          <p:cNvPr id="3" name="Picture 2" descr="logo_dhsp_hue.png"/>
+          <p:cNvPicPr>
+            <a:picLocks noChangeAspect="1"/>
+          </p:cNvPicPr>
+          <p:nvPr/>
+        </p:nvPicPr>
+        <p:blipFill>
+          <a:blip r:embed="rId2"/>
+          <a:stretch>
+            <a:fillRect/>
+          </a:stretch>
+        </p:blipFill>
+        <p:spPr>
+          <a:xfrm>
+            <a:off x="457200" y="137160"/>
+            <a:ext cx="548640" cy="548640"/>
+          </a:xfrm>
+          <a:prstGeom prst="rect">
+            <a:avLst/>
+          </a:prstGeom>
+        </p:spPr>
+      </p:pic>
+      <p:pic>
+        <p:nvPicPr>
+          <p:cNvPr id="4" name="Picture 3" descr="logo_thpt_thuan_hoa.jpg"/>
+          <p:cNvPicPr>
+            <a:picLocks noChangeAspect="1"/>
+          </p:cNvPicPr>
+          <p:nvPr/>
+        </p:nvPicPr>
+        <p:blipFill>
+          <a:blip r:embed="rId3"/>
+          <a:stretch>
+            <a:fillRect/>
+          </a:stretch>
+        </p:blipFill>
+        <p:spPr>
+          <a:xfrm>
+            <a:off x="1188720" y="137160"/>
+            <a:ext cx="548640" cy="548640"/>
+          </a:xfrm>
+          <a:prstGeom prst="rect">
+            <a:avLst/>
+          </a:prstGeom>
+        </p:spPr>
+      </p:pic>
+      <p:sp>
+        <p:nvSpPr>
+          <p:cNvPr id="5" name="TextBox 4"/>
+          <p:cNvSpPr txBox="1"/>
+          <p:nvPr/>
+        </p:nvSpPr>
+        <p:spPr>
+          <a:xfrm>
+            <a:off x="1920240" y="137160"/>
+            <a:ext cx="3200400" cy="640080"/>
+          </a:xfrm>
+          <a:prstGeom prst="rect">
+            <a:avLst/>
+          </a:prstGeom>
+          <a:noFill/>
+        </p:spPr>
+        <p:txBody>
+          <a:bodyPr wrap="square">
+            <a:spAutoFit/>
+          </a:bodyPr>
+          <a:lstStyle/>
+          <a:p>
+            <a:pPr>
+              <a:defRPr sz="1100" b="1">
+                <a:solidFill>
+                  <a:srgbClr val="333333"/>
+                </a:solidFill>
+              </a:defRPr>
+            </a:pPr>
+            <a:r>
+              <a:t>TRƯỜNG THPT THUẬN HOÁ</a:t>
+            </a:r>
+          </a:p>
+          <a:p>
+            <a:pPr>
+              <a:defRPr sz="1000">
+                <a:solidFill>
+                  <a:srgbClr val="646464"/>
+                </a:solidFill>
+              </a:defRPr>
+            </a:pPr>
+            <a:r>
+              <a:t>Đại học Sư Phạm, Đại học Huế</a:t>
+            </a:r>
+          </a:p>
+        </p:txBody>
+      </p:sp>
+      <p:sp>
+        <p:nvSpPr>
+          <p:cNvPr id="6" name="TextBox 5"/>
+          <p:cNvSpPr txBox="1"/>
+          <p:nvPr/>
+        </p:nvSpPr>
+        <p:spPr>
+          <a:xfrm>
+            <a:off x="5303520" y="182880"/>
+            <a:ext cx="6400800" cy="640080"/>
+          </a:xfrm>
+          <a:prstGeom prst="rect">
+            <a:avLst/>
+          </a:prstGeom>
+          <a:noFill/>
+        </p:spPr>
+        <p:txBody>
+          <a:bodyPr wrap="square">
+            <a:spAutoFit/>
+          </a:bodyPr>
+          <a:lstStyle/>
+          <a:p>
+            <a:pPr algn="ctr">
+              <a:defRPr sz="1400" b="1">
+                <a:solidFill>
+                  <a:srgbClr val="333333"/>
+                </a:solidFill>
+              </a:defRPr>
+            </a:pPr>
+            <a:r>
+              <a:t>10. Kết luận</a:t>
+            </a:r>
+          </a:p>
+        </p:txBody>
+      </p:sp>
+      <p:sp>
+        <p:nvSpPr>
+          <p:cNvPr id="7" name="TextBox 6"/>
+          <p:cNvSpPr txBox="1"/>
+          <p:nvPr/>
+        </p:nvSpPr>
+        <p:spPr>
+          <a:xfrm>
+            <a:off x="457200" y="6400800"/>
+            <a:ext cx="10972800" cy="365760"/>
+          </a:xfrm>
+          <a:prstGeom prst="rect">
+            <a:avLst/>
+          </a:prstGeom>
+          <a:noFill/>
+        </p:spPr>
+        <p:txBody>
+          <a:bodyPr wrap="none">
+            <a:spAutoFit/>
+          </a:bodyPr>
+          <a:lstStyle/>
+          <a:p>
+            <a:pPr>
+              <a:defRPr sz="1000">
+                <a:solidFill>
+                  <a:srgbClr val="646464"/>
+                </a:solidFill>
+              </a:defRPr>
+            </a:pPr>
+            <a:r>
+              <a:t>GV hướng dẫn: Mai Xuân Văn                                                                                           11</a:t>
+            </a:r>
+          </a:p>
+        </p:txBody>
+      </p:sp>
+      <p:sp>
+        <p:nvSpPr>
+          <p:cNvPr id="8" name="TextBox 7"/>
+          <p:cNvSpPr txBox="1"/>
+          <p:nvPr/>
+        </p:nvSpPr>
+        <p:spPr>
+          <a:xfrm>
+            <a:off x="457200" y="1097280"/>
+            <a:ext cx="10972800" cy="548640"/>
+          </a:xfrm>
+          <a:prstGeom prst="rect">
+            <a:avLst/>
+          </a:prstGeom>
+          <a:noFill/>
+        </p:spPr>
+        <p:txBody>
+          <a:bodyPr wrap="none">
+            <a:spAutoFit/>
+          </a:bodyPr>
+          <a:lstStyle/>
+          <a:p>
+            <a:pPr>
+              <a:defRPr sz="2800" b="1">
+                <a:solidFill>
+                  <a:srgbClr val="0066CC"/>
+                </a:solidFill>
+              </a:defRPr>
+            </a:pPr>
+            <a:r>
+              <a:t>Đóng góp chính</a:t>
+            </a:r>
+          </a:p>
+        </p:txBody>
+      </p:sp>
+      <p:sp>
+        <p:nvSpPr>
+          <p:cNvPr id="9" name="TextBox 8"/>
+          <p:cNvSpPr txBox="1"/>
+          <p:nvPr/>
+        </p:nvSpPr>
+        <p:spPr>
+          <a:xfrm>
+            <a:off x="640080" y="1828800"/>
+            <a:ext cx="10515600" cy="4389120"/>
+          </a:xfrm>
+          <a:prstGeom prst="rect">
+            <a:avLst/>
+          </a:prstGeom>
+          <a:noFill/>
+        </p:spPr>
+        <p:txBody>
+          <a:bodyPr wrap="square">
+            <a:spAutoFit/>
+          </a:bodyPr>
+          <a:lstStyle/>
+          <a:p>
+            <a:pPr>
+              <a:spcBef>
+                <a:spcPts val="800"/>
+              </a:spcBef>
+              <a:spcAft>
+                <a:spcPts val="400"/>
+              </a:spcAft>
+              <a:defRPr sz="1600">
+                <a:solidFill>
+                  <a:srgbClr val="333333"/>
+                </a:solidFill>
+              </a:defRPr>
+            </a:pPr>
+            <a:r>
+              <a:t>• 1. Công cụ offline tiếng Việt đầu tiên phủ 22/22 YCCĐ lớp 10 theo QĐ 2422</a:t>
+            </a:r>
+          </a:p>
+          <a:p>
+            <a:pPr>
+              <a:spcBef>
+                <a:spcPts val="800"/>
+              </a:spcBef>
+              <a:spcAft>
+                <a:spcPts val="400"/>
+              </a:spcAft>
+              <a:defRPr sz="1600">
+                <a:solidFill>
+                  <a:srgbClr val="333333"/>
+                </a:solidFill>
+              </a:defRPr>
+            </a:pPr>
+            <a:r>
+              <a:t>• </a:t>
+            </a:r>
+          </a:p>
+          <a:p>
+            <a:pPr>
+              <a:spcBef>
+                <a:spcPts val="800"/>
+              </a:spcBef>
+              <a:spcAft>
+                <a:spcPts val="400"/>
+              </a:spcAft>
+              <a:defRPr sz="1600">
+                <a:solidFill>
+                  <a:srgbClr val="333333"/>
+                </a:solidFill>
+              </a:defRPr>
+            </a:pPr>
+            <a:r>
+              <a:t>• 2. Kiến trúc 3 tầng chạy được trên file://, không phụ thuộc máy chủ</a:t>
+            </a:r>
+          </a:p>
+          <a:p>
+            <a:pPr>
+              <a:spcBef>
+                <a:spcPts val="800"/>
+              </a:spcBef>
+              <a:spcAft>
+                <a:spcPts val="400"/>
+              </a:spcAft>
+              <a:defRPr sz="1600">
+                <a:solidFill>
+                  <a:srgbClr val="333333"/>
+                </a:solidFill>
+              </a:defRPr>
+            </a:pPr>
+            <a:r>
+              <a:t>• </a:t>
+            </a:r>
+          </a:p>
+          <a:p>
+            <a:pPr>
+              <a:spcBef>
+                <a:spcPts val="800"/>
+              </a:spcBef>
+              <a:spcAft>
+                <a:spcPts val="400"/>
+              </a:spcAft>
+              <a:defRPr sz="1600">
+                <a:solidFill>
+                  <a:srgbClr val="333333"/>
+                </a:solidFill>
+              </a:defRPr>
+            </a:pPr>
+            <a:r>
+              <a:t>• 3. 5 phân hệ mô phỏng với cơ chế tự chấm tất định</a:t>
+            </a:r>
+          </a:p>
+          <a:p>
+            <a:pPr>
+              <a:spcBef>
+                <a:spcPts val="800"/>
+              </a:spcBef>
+              <a:spcAft>
+                <a:spcPts val="400"/>
+              </a:spcAft>
+              <a:defRPr sz="1600">
+                <a:solidFill>
+                  <a:srgbClr val="333333"/>
+                </a:solidFill>
+              </a:defRPr>
+            </a:pPr>
+            <a:r>
+              <a:t>• </a:t>
+            </a:r>
+          </a:p>
+          <a:p>
+            <a:pPr>
+              <a:spcBef>
+                <a:spcPts val="800"/>
+              </a:spcBef>
+              <a:spcAft>
+                <a:spcPts val="400"/>
+              </a:spcAft>
+              <a:defRPr sz="1600">
+                <a:solidFill>
+                  <a:srgbClr val="333333"/>
+                </a:solidFill>
+              </a:defRPr>
+            </a:pPr>
+            <a:r>
+              <a:t>• 4. Tích hợp vào 28 bài SGK Tin học 10 với phân phối 12 tiết</a:t>
+            </a:r>
+          </a:p>
+          <a:p>
+            <a:pPr>
+              <a:spcBef>
+                <a:spcPts val="800"/>
+              </a:spcBef>
+              <a:spcAft>
+                <a:spcPts val="400"/>
+              </a:spcAft>
+              <a:defRPr sz="1600">
+                <a:solidFill>
+                  <a:srgbClr val="333333"/>
+                </a:solidFill>
+              </a:defRPr>
+            </a:pPr>
+            <a:r>
+              <a:t>• </a:t>
+            </a:r>
+          </a:p>
+          <a:p>
+            <a:pPr>
+              <a:spcBef>
+                <a:spcPts val="800"/>
+              </a:spcBef>
+              <a:spcAft>
+                <a:spcPts val="400"/>
+              </a:spcAft>
+              <a:defRPr sz="1600">
+                <a:solidFill>
+                  <a:srgbClr val="333333"/>
+                </a:solidFill>
+              </a:defRPr>
+            </a:pPr>
+            <a:r>
+              <a:t>• 5. Hệ thống kiểm chứng tự động 97/97 tiêu chí, có mutation test</a:t>
+            </a:r>
+          </a:p>
+          <a:p>
+            <a:pPr>
+              <a:spcBef>
+                <a:spcPts val="800"/>
+              </a:spcBef>
+              <a:spcAft>
+                <a:spcPts val="400"/>
+              </a:spcAft>
+              <a:defRPr sz="1600">
+                <a:solidFill>
+                  <a:srgbClr val="333333"/>
+                </a:solidFill>
+              </a:defRPr>
+            </a:pPr>
+            <a:r>
+              <a:t>• </a:t>
+            </a:r>
+          </a:p>
+          <a:p>
+            <a:pPr>
+              <a:spcBef>
+                <a:spcPts val="800"/>
+              </a:spcBef>
+              <a:spcAft>
+                <a:spcPts val="400"/>
+              </a:spcAft>
+              <a:defRPr sz="1600">
+                <a:solidFill>
+                  <a:srgbClr val="333333"/>
+                </a:solidFill>
+              </a:defRPr>
+            </a:pPr>
+            <a:r>
+              <a:t>• 6. Tuân thủ CV 5588: không tài khoản, không phụ thuộc nhà cung cấp,</a:t>
+            </a:r>
+          </a:p>
+          <a:p>
+            <a:pPr>
+              <a:spcBef>
+                <a:spcPts val="800"/>
+              </a:spcBef>
+              <a:spcAft>
+                <a:spcPts val="400"/>
+              </a:spcAft>
+              <a:defRPr sz="1600">
+                <a:solidFill>
+                  <a:srgbClr val="333333"/>
+                </a:solidFill>
+              </a:defRPr>
+            </a:pPr>
+            <a:r>
+              <a:t>    không buộc mua thiết bị, ưu tiên mã nguồn mở</a:t>
+            </a:r>
+          </a:p>
+        </p:txBody>
+      </p:sp>
+    </p:spTree>
+  </p:cSld>
+  <p:clrMapOvr>
+    <a:masterClrMapping/>
+  </p:clrMapOvr>
+</p:sld>
+</file>
+
+<file path=ppt/slides/slide12.xml><?xml version="1.0" encoding="utf-8"?>
+<p:sld xmlns:a="http://schemas.openxmlformats.org/drawingml/2006/main" xmlns:p="http://schemas.openxmlformats.org/presentationml/2006/main" xmlns:r="http://schemas.openxmlformats.org/officeDocument/2006/relationships">
+  <p:cSld>
+    <p:spTree>
+      <p:nvGrpSpPr>
+        <p:cNvPr id="1" name=""/>
+        <p:cNvGrpSpPr/>
+        <p:nvPr/>
+      </p:nvGrpSpPr>
+      <p:grpSpPr/>
+      <p:sp>
+        <p:nvSpPr>
+          <p:cNvPr id="2" name="Rectangle 1"/>
+          <p:cNvSpPr/>
+          <p:nvPr/>
+        </p:nvSpPr>
+        <p:spPr>
+          <a:xfrm>
+            <a:off x="457200" y="868680"/>
+            <a:ext cx="11247120" cy="12700"/>
+          </a:xfrm>
+          <a:prstGeom prst="rect">
+            <a:avLst/>
+          </a:prstGeom>
+          <a:solidFill>
+            <a:srgbClr val="B4B4B4"/>
+          </a:solidFill>
+          <a:ln>
+            <a:noFill/>
+          </a:ln>
+        </p:spPr>
+        <p:style>
+          <a:lnRef idx="1">
+            <a:schemeClr val="accent1"/>
+          </a:lnRef>
+          <a:fillRef idx="3">
+            <a:schemeClr val="accent1"/>
+          </a:fillRef>
+          <a:effectRef idx="2">
+            <a:schemeClr val="accent1"/>
+          </a:effectRef>
+          <a:fontRef idx="minor">
+            <a:schemeClr val="lt1"/>
+          </a:fontRef>
+        </p:style>
+        <p:txBody>
+          <a:bodyPr rtlCol="0" anchor="ctr"/>
+          <a:lstStyle/>
+          <a:p>
+            <a:pPr algn="ctr"/>
+          </a:p>
+        </p:txBody>
+      </p:sp>
+      <p:pic>
+        <p:nvPicPr>
+          <p:cNvPr id="3" name="Picture 2" descr="logo_dhsp_hue.png"/>
+          <p:cNvPicPr>
+            <a:picLocks noChangeAspect="1"/>
+          </p:cNvPicPr>
+          <p:nvPr/>
+        </p:nvPicPr>
+        <p:blipFill>
+          <a:blip r:embed="rId2"/>
+          <a:stretch>
+            <a:fillRect/>
+          </a:stretch>
+        </p:blipFill>
+        <p:spPr>
+          <a:xfrm>
+            <a:off x="457200" y="137160"/>
+            <a:ext cx="548640" cy="548640"/>
+          </a:xfrm>
+          <a:prstGeom prst="rect">
+            <a:avLst/>
+          </a:prstGeom>
+        </p:spPr>
+      </p:pic>
+      <p:pic>
+        <p:nvPicPr>
+          <p:cNvPr id="4" name="Picture 3" descr="logo_thpt_thuan_hoa.jpg"/>
+          <p:cNvPicPr>
+            <a:picLocks noChangeAspect="1"/>
+          </p:cNvPicPr>
+          <p:nvPr/>
+        </p:nvPicPr>
+        <p:blipFill>
+          <a:blip r:embed="rId3"/>
+          <a:stretch>
+            <a:fillRect/>
+          </a:stretch>
+        </p:blipFill>
+        <p:spPr>
+          <a:xfrm>
+            <a:off x="1188720" y="137160"/>
+            <a:ext cx="548640" cy="548640"/>
+          </a:xfrm>
+          <a:prstGeom prst="rect">
+            <a:avLst/>
+          </a:prstGeom>
+        </p:spPr>
+      </p:pic>
+      <p:sp>
+        <p:nvSpPr>
+          <p:cNvPr id="5" name="TextBox 4"/>
+          <p:cNvSpPr txBox="1"/>
+          <p:nvPr/>
+        </p:nvSpPr>
+        <p:spPr>
+          <a:xfrm>
+            <a:off x="1920240" y="137160"/>
+            <a:ext cx="3200400" cy="640080"/>
+          </a:xfrm>
+          <a:prstGeom prst="rect">
+            <a:avLst/>
+          </a:prstGeom>
+          <a:noFill/>
+        </p:spPr>
+        <p:txBody>
+          <a:bodyPr wrap="square">
+            <a:spAutoFit/>
+          </a:bodyPr>
+          <a:lstStyle/>
+          <a:p>
+            <a:pPr>
+              <a:defRPr sz="1100" b="1">
+                <a:solidFill>
+                  <a:srgbClr val="333333"/>
+                </a:solidFill>
+              </a:defRPr>
+            </a:pPr>
+            <a:r>
+              <a:t>TRƯỜNG THPT THUẬN HOÁ</a:t>
+            </a:r>
+          </a:p>
+          <a:p>
+            <a:pPr>
+              <a:defRPr sz="1000">
+                <a:solidFill>
+                  <a:srgbClr val="646464"/>
+                </a:solidFill>
+              </a:defRPr>
+            </a:pPr>
+            <a:r>
+              <a:t>Đại học Sư Phạm, Đại học Huế</a:t>
+            </a:r>
+          </a:p>
+        </p:txBody>
+      </p:sp>
+      <p:sp>
+        <p:nvSpPr>
+          <p:cNvPr id="6" name="TextBox 5"/>
+          <p:cNvSpPr txBox="1"/>
+          <p:nvPr/>
+        </p:nvSpPr>
+        <p:spPr>
+          <a:xfrm>
+            <a:off x="5303520" y="182880"/>
+            <a:ext cx="6400800" cy="640080"/>
+          </a:xfrm>
+          <a:prstGeom prst="rect">
+            <a:avLst/>
+          </a:prstGeom>
+          <a:noFill/>
+        </p:spPr>
+        <p:txBody>
+          <a:bodyPr wrap="square">
+            <a:spAutoFit/>
+          </a:bodyPr>
+          <a:lstStyle/>
+          <a:p>
+            <a:pPr algn="ctr">
+              <a:defRPr sz="1400" b="1">
+                <a:solidFill>
+                  <a:srgbClr val="333333"/>
+                </a:solidFill>
+              </a:defRPr>
+            </a:pPr>
+            <a:r>
+              <a:t>Tài liệu tham khảo</a:t>
+            </a:r>
+          </a:p>
+        </p:txBody>
+      </p:sp>
+      <p:sp>
+        <p:nvSpPr>
+          <p:cNvPr id="7" name="TextBox 6"/>
+          <p:cNvSpPr txBox="1"/>
+          <p:nvPr/>
+        </p:nvSpPr>
+        <p:spPr>
+          <a:xfrm>
+            <a:off x="457200" y="6400800"/>
+            <a:ext cx="10972800" cy="365760"/>
+          </a:xfrm>
+          <a:prstGeom prst="rect">
+            <a:avLst/>
+          </a:prstGeom>
+          <a:noFill/>
+        </p:spPr>
+        <p:txBody>
+          <a:bodyPr wrap="none">
+            <a:spAutoFit/>
+          </a:bodyPr>
+          <a:lstStyle/>
+          <a:p>
+            <a:pPr>
+              <a:defRPr sz="1000">
+                <a:solidFill>
+                  <a:srgbClr val="646464"/>
+                </a:solidFill>
+              </a:defRPr>
+            </a:pPr>
+            <a:r>
+              <a:t>GV hướng dẫn: Mai Xuân Văn                                                                                           12</a:t>
+            </a:r>
+          </a:p>
+        </p:txBody>
+      </p:sp>
+      <p:sp>
+        <p:nvSpPr>
+          <p:cNvPr id="8" name="TextBox 7"/>
+          <p:cNvSpPr txBox="1"/>
+          <p:nvPr/>
+        </p:nvSpPr>
+        <p:spPr>
+          <a:xfrm>
+            <a:off x="640080" y="1828800"/>
+            <a:ext cx="10515600" cy="4389120"/>
+          </a:xfrm>
+          <a:prstGeom prst="rect">
+            <a:avLst/>
+          </a:prstGeom>
+          <a:noFill/>
+        </p:spPr>
+        <p:txBody>
+          <a:bodyPr wrap="square">
+            <a:spAutoFit/>
+          </a:bodyPr>
+          <a:lstStyle/>
+          <a:p>
+            <a:pPr>
+              <a:spcBef>
+                <a:spcPts val="800"/>
+              </a:spcBef>
+              <a:spcAft>
+                <a:spcPts val="400"/>
+              </a:spcAft>
+              <a:defRPr sz="1400">
+                <a:solidFill>
+                  <a:srgbClr val="333333"/>
+                </a:solidFill>
+              </a:defRPr>
+            </a:pPr>
+            <a:r>
+              <a:t>• [1] Bộ GD&amp;ĐT (2026). Quyết định 2422/QĐ-BGDĐT ban hành Khung nội dung</a:t>
+            </a:r>
+          </a:p>
+          <a:p>
+            <a:pPr>
+              <a:spcBef>
+                <a:spcPts val="800"/>
+              </a:spcBef>
+              <a:spcAft>
+                <a:spcPts val="400"/>
+              </a:spcAft>
+              <a:defRPr sz="1400">
+                <a:solidFill>
+                  <a:srgbClr val="333333"/>
+                </a:solidFill>
+              </a:defRPr>
+            </a:pPr>
+            <a:r>
+              <a:t>      giáo dục trí tuệ nhân tạo cho học sinh phổ thông.</a:t>
+            </a:r>
+          </a:p>
+          <a:p>
+            <a:pPr>
+              <a:spcBef>
+                <a:spcPts val="800"/>
+              </a:spcBef>
+              <a:spcAft>
+                <a:spcPts val="400"/>
+              </a:spcAft>
+              <a:defRPr sz="1400">
+                <a:solidFill>
+                  <a:srgbClr val="333333"/>
+                </a:solidFill>
+              </a:defRPr>
+            </a:pPr>
+            <a:r>
+              <a:t>• </a:t>
+            </a:r>
+          </a:p>
+          <a:p>
+            <a:pPr>
+              <a:spcBef>
+                <a:spcPts val="800"/>
+              </a:spcBef>
+              <a:spcAft>
+                <a:spcPts val="400"/>
+              </a:spcAft>
+              <a:defRPr sz="1400">
+                <a:solidFill>
+                  <a:srgbClr val="333333"/>
+                </a:solidFill>
+              </a:defRPr>
+            </a:pPr>
+            <a:r>
+              <a:t>• [2] Bộ GD&amp;ĐT (2026). Công văn 5588/BGDĐT-GDPT về triển khai thực hiện</a:t>
+            </a:r>
+          </a:p>
+          <a:p>
+            <a:pPr>
+              <a:spcBef>
+                <a:spcPts val="800"/>
+              </a:spcBef>
+              <a:spcAft>
+                <a:spcPts val="400"/>
+              </a:spcAft>
+              <a:defRPr sz="1400">
+                <a:solidFill>
+                  <a:srgbClr val="333333"/>
+                </a:solidFill>
+              </a:defRPr>
+            </a:pPr>
+            <a:r>
+              <a:t>      Khung nội dung giáo dục AI năm học 2026-2027.</a:t>
+            </a:r>
+          </a:p>
+          <a:p>
+            <a:pPr>
+              <a:spcBef>
+                <a:spcPts val="800"/>
+              </a:spcBef>
+              <a:spcAft>
+                <a:spcPts val="400"/>
+              </a:spcAft>
+              <a:defRPr sz="1400">
+                <a:solidFill>
+                  <a:srgbClr val="333333"/>
+                </a:solidFill>
+              </a:defRPr>
+            </a:pPr>
+            <a:r>
+              <a:t>• </a:t>
+            </a:r>
+          </a:p>
+          <a:p>
+            <a:pPr>
+              <a:spcBef>
+                <a:spcPts val="800"/>
+              </a:spcBef>
+              <a:spcAft>
+                <a:spcPts val="400"/>
+              </a:spcAft>
+              <a:defRPr sz="1400">
+                <a:solidFill>
+                  <a:srgbClr val="333333"/>
+                </a:solidFill>
+              </a:defRPr>
+            </a:pPr>
+            <a:r>
+              <a:t>• [3] Quốc hội (2025). Luật Trí tuệ nhân tạo 134/2025/QH15.</a:t>
+            </a:r>
+          </a:p>
+          <a:p>
+            <a:pPr>
+              <a:spcBef>
+                <a:spcPts val="800"/>
+              </a:spcBef>
+              <a:spcAft>
+                <a:spcPts val="400"/>
+              </a:spcAft>
+              <a:defRPr sz="1400">
+                <a:solidFill>
+                  <a:srgbClr val="333333"/>
+                </a:solidFill>
+              </a:defRPr>
+            </a:pPr>
+            <a:r>
+              <a:t>• </a:t>
+            </a:r>
+          </a:p>
+          <a:p>
+            <a:pPr>
+              <a:spcBef>
+                <a:spcPts val="800"/>
+              </a:spcBef>
+              <a:spcAft>
+                <a:spcPts val="400"/>
+              </a:spcAft>
+              <a:defRPr sz="1400">
+                <a:solidFill>
+                  <a:srgbClr val="333333"/>
+                </a:solidFill>
+              </a:defRPr>
+            </a:pPr>
+            <a:r>
+              <a:t>• [4] Quốc hội (2025). Luật Bảo vệ dữ liệu cá nhân 91/2025/QH15.</a:t>
+            </a:r>
+          </a:p>
+          <a:p>
+            <a:pPr>
+              <a:spcBef>
+                <a:spcPts val="800"/>
+              </a:spcBef>
+              <a:spcAft>
+                <a:spcPts val="400"/>
+              </a:spcAft>
+              <a:defRPr sz="1400">
+                <a:solidFill>
+                  <a:srgbClr val="333333"/>
+                </a:solidFill>
+              </a:defRPr>
+            </a:pPr>
+            <a:r>
+              <a:t>• </a:t>
+            </a:r>
+          </a:p>
+          <a:p>
+            <a:pPr>
+              <a:spcBef>
+                <a:spcPts val="800"/>
+              </a:spcBef>
+              <a:spcAft>
+                <a:spcPts val="400"/>
+              </a:spcAft>
+              <a:defRPr sz="1400">
+                <a:solidFill>
+                  <a:srgbClr val="333333"/>
+                </a:solidFill>
+              </a:defRPr>
+            </a:pPr>
+            <a:r>
+              <a:t>• [5] UNESCO (2022). K-12 AI curricula: a snapshot of AI curricula for</a:t>
+            </a:r>
+          </a:p>
+          <a:p>
+            <a:pPr>
+              <a:spcBef>
+                <a:spcPts val="800"/>
+              </a:spcBef>
+              <a:spcAft>
+                <a:spcPts val="400"/>
+              </a:spcAft>
+              <a:defRPr sz="1400">
+                <a:solidFill>
+                  <a:srgbClr val="333333"/>
+                </a:solidFill>
+              </a:defRPr>
+            </a:pPr>
+            <a:r>
+              <a:t>      primary and secondary schools.</a:t>
+            </a:r>
+          </a:p>
+        </p:txBody>
+      </p:sp>
+    </p:spTree>
+  </p:cSld>
+  <p:clrMapOvr>
+    <a:masterClrMapping/>
+  </p:clrMapOvr>
+</p:sld>
+</file>
+
+<file path=ppt/slides/slide13.xml><?xml version="1.0" encoding="utf-8"?>
+<p:sld xmlns:a="http://schemas.openxmlformats.org/drawingml/2006/main" xmlns:p="http://schemas.openxmlformats.org/presentationml/2006/main" xmlns:r="http://schemas.openxmlformats.org/officeDocument/2006/relationships">
+  <p:cSld>
+    <p:spTree>
+      <p:nvGrpSpPr>
+        <p:cNvPr id="1" name=""/>
+        <p:cNvGrpSpPr/>
+        <p:nvPr/>
+      </p:nvGrpSpPr>
+      <p:grpSpPr/>
+      <p:sp>
+        <p:nvSpPr>
+          <p:cNvPr id="2" name="Rectangle 1"/>
+          <p:cNvSpPr/>
+          <p:nvPr/>
+        </p:nvSpPr>
+        <p:spPr>
+          <a:xfrm>
+            <a:off x="457200" y="868680"/>
+            <a:ext cx="11247120" cy="12700"/>
+          </a:xfrm>
+          <a:prstGeom prst="rect">
+            <a:avLst/>
+          </a:prstGeom>
+          <a:solidFill>
+            <a:srgbClr val="B4B4B4"/>
+          </a:solidFill>
+          <a:ln>
+            <a:noFill/>
+          </a:ln>
+        </p:spPr>
+        <p:style>
+          <a:lnRef idx="1">
+            <a:schemeClr val="accent1"/>
+          </a:lnRef>
+          <a:fillRef idx="3">
+            <a:schemeClr val="accent1"/>
+          </a:fillRef>
+          <a:effectRef idx="2">
+            <a:schemeClr val="accent1"/>
+          </a:effectRef>
+          <a:fontRef idx="minor">
+            <a:schemeClr val="lt1"/>
+          </a:fontRef>
+        </p:style>
+        <p:txBody>
+          <a:bodyPr rtlCol="0" anchor="ctr"/>
+          <a:lstStyle/>
+          <a:p>
+            <a:pPr algn="ctr"/>
+          </a:p>
+        </p:txBody>
+      </p:sp>
+      <p:pic>
+        <p:nvPicPr>
+          <p:cNvPr id="3" name="Picture 2" descr="logo_dhsp_hue.png"/>
+          <p:cNvPicPr>
+            <a:picLocks noChangeAspect="1"/>
+          </p:cNvPicPr>
+          <p:nvPr/>
+        </p:nvPicPr>
+        <p:blipFill>
+          <a:blip r:embed="rId2"/>
+          <a:stretch>
+            <a:fillRect/>
+          </a:stretch>
+        </p:blipFill>
+        <p:spPr>
+          <a:xfrm>
+            <a:off x="457200" y="137160"/>
+            <a:ext cx="640080" cy="640080"/>
+          </a:xfrm>
+          <a:prstGeom prst="rect">
+            <a:avLst/>
+          </a:prstGeom>
+        </p:spPr>
+      </p:pic>
+      <p:pic>
+        <p:nvPicPr>
+          <p:cNvPr id="4" name="Picture 3" descr="logo_thpt_thuan_hoa.jpg"/>
+          <p:cNvPicPr>
+            <a:picLocks noChangeAspect="1"/>
+          </p:cNvPicPr>
+          <p:nvPr/>
+        </p:nvPicPr>
+        <p:blipFill>
+          <a:blip r:embed="rId3"/>
+          <a:stretch>
+            <a:fillRect/>
+          </a:stretch>
+        </p:blipFill>
+        <p:spPr>
+          <a:xfrm>
+            <a:off x="1188720" y="137160"/>
+            <a:ext cx="640080" cy="640080"/>
+          </a:xfrm>
+          <a:prstGeom prst="rect">
+            <a:avLst/>
+          </a:prstGeom>
+        </p:spPr>
+      </p:pic>
+      <p:sp>
+        <p:nvSpPr>
+          <p:cNvPr id="5" name="TextBox 4"/>
+          <p:cNvSpPr txBox="1"/>
+          <p:nvPr/>
+        </p:nvSpPr>
+        <p:spPr>
+          <a:xfrm>
+            <a:off x="1920240" y="137160"/>
+            <a:ext cx="3200400" cy="640080"/>
+          </a:xfrm>
+          <a:prstGeom prst="rect">
+            <a:avLst/>
+          </a:prstGeom>
+          <a:noFill/>
+        </p:spPr>
+        <p:txBody>
+          <a:bodyPr wrap="square">
+            <a:spAutoFit/>
+          </a:bodyPr>
+          <a:lstStyle/>
+          <a:p>
+            <a:pPr>
+              <a:defRPr sz="1100" b="1">
+                <a:solidFill>
+                  <a:srgbClr val="333333"/>
+                </a:solidFill>
+              </a:defRPr>
+            </a:pPr>
+            <a:r>
+              <a:t>TRƯỜNG THPT THUẬN HOÁ</a:t>
+            </a:r>
+          </a:p>
+          <a:p>
+            <a:pPr>
+              <a:defRPr sz="1000">
+                <a:solidFill>
+                  <a:srgbClr val="646464"/>
+                </a:solidFill>
+              </a:defRPr>
+            </a:pPr>
+            <a:r>
+              <a:t>Đại học Sư Phạm, Đại học Huế</a:t>
+            </a:r>
+          </a:p>
+        </p:txBody>
+      </p:sp>
+      <p:sp>
+        <p:nvSpPr>
+          <p:cNvPr id="6" name="TextBox 5"/>
+          <p:cNvSpPr txBox="1"/>
+          <p:nvPr/>
+        </p:nvSpPr>
+        <p:spPr>
+          <a:xfrm>
+            <a:off x="5303520" y="182880"/>
+            <a:ext cx="6400800" cy="640080"/>
+          </a:xfrm>
+          <a:prstGeom prst="rect">
+            <a:avLst/>
+          </a:prstGeom>
+          <a:noFill/>
+        </p:spPr>
+        <p:txBody>
+          <a:bodyPr wrap="square">
+            <a:spAutoFit/>
+          </a:bodyPr>
+          <a:lstStyle/>
+          <a:p>
+            <a:pPr algn="ctr">
+              <a:defRPr sz="1600" b="1">
+                <a:solidFill>
+                  <a:srgbClr val="333333"/>
+                </a:solidFill>
+              </a:defRPr>
+            </a:pPr>
+          </a:p>
+        </p:txBody>
+      </p:sp>
+      <p:sp>
+        <p:nvSpPr>
+          <p:cNvPr id="7" name="TextBox 6"/>
+          <p:cNvSpPr txBox="1"/>
+          <p:nvPr/>
+        </p:nvSpPr>
+        <p:spPr>
+          <a:xfrm>
+            <a:off x="914400" y="2286000"/>
+            <a:ext cx="10058400" cy="1371600"/>
+          </a:xfrm>
+          <a:prstGeom prst="rect">
+            <a:avLst/>
+          </a:prstGeom>
+          <a:noFill/>
+        </p:spPr>
+        <p:txBody>
+          <a:bodyPr wrap="none">
+            <a:spAutoFit/>
+          </a:bodyPr>
+          <a:lstStyle/>
+          <a:p>
+            <a:pPr algn="ctr">
+              <a:defRPr sz="5400" b="1">
+                <a:solidFill>
+                  <a:srgbClr val="000000"/>
+                </a:solidFill>
+              </a:defRPr>
+            </a:pPr>
+            <a:r>
+              <a:t>Cảm ơn</a:t>
+            </a:r>
+          </a:p>
+        </p:txBody>
+      </p:sp>
+      <p:sp>
+        <p:nvSpPr>
+          <p:cNvPr id="8" name="TextBox 7"/>
+          <p:cNvSpPr txBox="1"/>
+          <p:nvPr/>
+        </p:nvSpPr>
+        <p:spPr>
+          <a:xfrm>
+            <a:off x="914400" y="3840480"/>
+            <a:ext cx="10058400" cy="1828800"/>
+          </a:xfrm>
+          <a:prstGeom prst="rect">
+            <a:avLst/>
+          </a:prstGeom>
+          <a:noFill/>
+        </p:spPr>
+        <p:txBody>
+          <a:bodyPr wrap="square">
+            <a:spAutoFit/>
+          </a:bodyPr>
+          <a:lstStyle/>
+          <a:p>
+            <a:pPr algn="ctr">
+              <a:defRPr sz="2200" b="1">
+                <a:solidFill>
+                  <a:srgbClr val="333333"/>
+                </a:solidFill>
+              </a:defRPr>
+            </a:pPr>
+            <a:r>
+              <a:t>GV Mai Xuân Văn</a:t>
+            </a:r>
+          </a:p>
+          <a:p>
+            <a:pPr algn="ctr">
+              <a:defRPr sz="1600">
+                <a:solidFill>
+                  <a:srgbClr val="646464"/>
+                </a:solidFill>
+              </a:defRPr>
+            </a:pPr>
+            <a:r>
+              <a:t>Trường THPT Thuận Hoá — Đại học Sư Phạm, Đại học Huế</a:t>
+            </a:r>
+          </a:p>
+          <a:p>
+            <a:pPr>
+              <a:defRPr sz="1200"/>
+            </a:pPr>
+          </a:p>
+          <a:p>
             <a:pPr algn="ctr">
               <a:defRPr sz="1400">
                 <a:solidFill>
-                  <a:srgbClr val="C8C8C8"/>
-                </a:solidFill>
-              </a:defRPr>
-            </a:pPr>
-            <a:r>
-              <a:t>Trường THPT Thuận Hoá — Đại học Sư Phạm, Đại học Huế</a:t>
-            </a:r>
-            <a:br/>
-            <a:r>
-              <a:t>GV: Mai Xuân Văn</a:t>
+                  <a:srgbClr val="0066CC"/>
+                </a:solidFill>
+              </a:defRPr>
+            </a:pPr>
+            <a:r>
+              <a:t>https://mxuanvan02.github.io/ainatomy/</a:t>
             </a:r>
           </a:p>
         </p:txBody>
@@ -3355,14 +5215,14 @@
         </p:nvSpPr>
         <p:spPr>
           <a:xfrm>
-            <a:off x="0" y="0"/>
-            <a:ext cx="12191695" cy="731520"/>
+            <a:off x="457200" y="868680"/>
+            <a:ext cx="11247120" cy="12700"/>
           </a:xfrm>
           <a:prstGeom prst="rect">
             <a:avLst/>
           </a:prstGeom>
           <a:solidFill>
-            <a:srgbClr val="0078D7"/>
+            <a:srgbClr val="B4B4B4"/>
           </a:solidFill>
           <a:ln>
             <a:noFill/>
@@ -3406,8 +5266,8 @@
         </p:blipFill>
         <p:spPr>
           <a:xfrm>
-            <a:off x="274320" y="137160"/>
-            <a:ext cx="457200" cy="457200"/>
+            <a:off x="457200" y="137160"/>
+            <a:ext cx="548640" cy="548640"/>
           </a:xfrm>
           <a:prstGeom prst="rect">
             <a:avLst/>
@@ -3430,8 +5290,8 @@
         </p:blipFill>
         <p:spPr>
           <a:xfrm>
-            <a:off x="868680" y="137160"/>
-            <a:ext cx="457200" cy="457200"/>
+            <a:off x="1188720" y="137160"/>
+            <a:ext cx="548640" cy="548640"/>
           </a:xfrm>
           <a:prstGeom prst="rect">
             <a:avLst/>
@@ -3446,8 +5306,90 @@
         </p:nvSpPr>
         <p:spPr>
           <a:xfrm>
-            <a:off x="2011680" y="137160"/>
-            <a:ext cx="9144000" cy="457200"/>
+            <a:off x="1920240" y="137160"/>
+            <a:ext cx="3200400" cy="640080"/>
+          </a:xfrm>
+          <a:prstGeom prst="rect">
+            <a:avLst/>
+          </a:prstGeom>
+          <a:noFill/>
+        </p:spPr>
+        <p:txBody>
+          <a:bodyPr wrap="square">
+            <a:spAutoFit/>
+          </a:bodyPr>
+          <a:lstStyle/>
+          <a:p>
+            <a:pPr>
+              <a:defRPr sz="1100" b="1">
+                <a:solidFill>
+                  <a:srgbClr val="333333"/>
+                </a:solidFill>
+              </a:defRPr>
+            </a:pPr>
+            <a:r>
+              <a:t>TRƯỜNG THPT THUẬN HOÁ</a:t>
+            </a:r>
+          </a:p>
+          <a:p>
+            <a:pPr>
+              <a:defRPr sz="1000">
+                <a:solidFill>
+                  <a:srgbClr val="646464"/>
+                </a:solidFill>
+              </a:defRPr>
+            </a:pPr>
+            <a:r>
+              <a:t>Đại học Sư Phạm, Đại học Huế</a:t>
+            </a:r>
+          </a:p>
+        </p:txBody>
+      </p:sp>
+      <p:sp>
+        <p:nvSpPr>
+          <p:cNvPr id="6" name="TextBox 5"/>
+          <p:cNvSpPr txBox="1"/>
+          <p:nvPr/>
+        </p:nvSpPr>
+        <p:spPr>
+          <a:xfrm>
+            <a:off x="5303520" y="182880"/>
+            <a:ext cx="6400800" cy="640080"/>
+          </a:xfrm>
+          <a:prstGeom prst="rect">
+            <a:avLst/>
+          </a:prstGeom>
+          <a:noFill/>
+        </p:spPr>
+        <p:txBody>
+          <a:bodyPr wrap="square">
+            <a:spAutoFit/>
+          </a:bodyPr>
+          <a:lstStyle/>
+          <a:p>
+            <a:pPr algn="ctr">
+              <a:defRPr sz="1400" b="1">
+                <a:solidFill>
+                  <a:srgbClr val="333333"/>
+                </a:solidFill>
+              </a:defRPr>
+            </a:pPr>
+            <a:r>
+              <a:t>1. Đặt vấn đề</a:t>
+            </a:r>
+          </a:p>
+        </p:txBody>
+      </p:sp>
+      <p:sp>
+        <p:nvSpPr>
+          <p:cNvPr id="7" name="TextBox 6"/>
+          <p:cNvSpPr txBox="1"/>
+          <p:nvPr/>
+        </p:nvSpPr>
+        <p:spPr>
+          <a:xfrm>
+            <a:off x="457200" y="6400800"/>
+            <a:ext cx="10972800" cy="365760"/>
           </a:xfrm>
           <a:prstGeom prst="rect">
             <a:avLst/>
@@ -3461,28 +5403,28 @@
           <a:lstStyle/>
           <a:p>
             <a:pPr>
-              <a:defRPr sz="1600" b="1">
-                <a:solidFill>
-                  <a:srgbClr val="FFFFFF"/>
-                </a:solidFill>
-              </a:defRPr>
-            </a:pPr>
-            <a:r>
-              <a:t>AInatomy — Phòng thực hành AI</a:t>
-            </a:r>
-          </a:p>
-        </p:txBody>
-      </p:sp>
-      <p:sp>
-        <p:nvSpPr>
-          <p:cNvPr id="6" name="TextBox 5"/>
+              <a:defRPr sz="1000">
+                <a:solidFill>
+                  <a:srgbClr val="646464"/>
+                </a:solidFill>
+              </a:defRPr>
+            </a:pPr>
+            <a:r>
+              <a:t>GV hướng dẫn: Mai Xuân Văn                                                                                           2</a:t>
+            </a:r>
+          </a:p>
+        </p:txBody>
+      </p:sp>
+      <p:sp>
+        <p:nvSpPr>
+          <p:cNvPr id="8" name="TextBox 7"/>
           <p:cNvSpPr txBox="1"/>
           <p:nvPr/>
         </p:nvSpPr>
         <p:spPr>
           <a:xfrm>
-            <a:off x="457200" y="1005840"/>
-            <a:ext cx="10972800" cy="640080"/>
+            <a:off x="457200" y="1097280"/>
+            <a:ext cx="10972800" cy="548640"/>
           </a:xfrm>
           <a:prstGeom prst="rect">
             <a:avLst/>
@@ -3496,63 +5438,28 @@
           <a:lstStyle/>
           <a:p>
             <a:pPr>
-              <a:defRPr sz="3200" b="1">
-                <a:solidFill>
-                  <a:srgbClr val="333333"/>
-                </a:solidFill>
-              </a:defRPr>
-            </a:pPr>
-            <a:r>
-              <a:t>Vấn đề</a:t>
-            </a:r>
-          </a:p>
-        </p:txBody>
-      </p:sp>
-      <p:sp>
-        <p:nvSpPr>
-          <p:cNvPr id="7" name="TextBox 6"/>
+              <a:defRPr sz="2800" b="1">
+                <a:solidFill>
+                  <a:srgbClr val="0066CC"/>
+                </a:solidFill>
+              </a:defRPr>
+            </a:pPr>
+            <a:r>
+              <a:t>Bối cảnh và thách thức</a:t>
+            </a:r>
+          </a:p>
+        </p:txBody>
+      </p:sp>
+      <p:sp>
+        <p:nvSpPr>
+          <p:cNvPr id="9" name="TextBox 8"/>
           <p:cNvSpPr txBox="1"/>
           <p:nvPr/>
         </p:nvSpPr>
         <p:spPr>
           <a:xfrm>
-            <a:off x="457200" y="6309360"/>
-            <a:ext cx="10972800" cy="365760"/>
-          </a:xfrm>
-          <a:prstGeom prst="rect">
-            <a:avLst/>
-          </a:prstGeom>
-          <a:noFill/>
-        </p:spPr>
-        <p:txBody>
-          <a:bodyPr wrap="none">
-            <a:spAutoFit/>
-          </a:bodyPr>
-          <a:lstStyle/>
-          <a:p>
-            <a:pPr algn="ctr">
-              <a:defRPr sz="1100">
-                <a:solidFill>
-                  <a:srgbClr val="C8C8C8"/>
-                </a:solidFill>
-              </a:defRPr>
-            </a:pPr>
-            <a:r>
-              <a:t>Trường THPT Thuận Hoá — ĐHSP Huế | GV: Mai Xuân Văn</a:t>
-            </a:r>
-          </a:p>
-        </p:txBody>
-      </p:sp>
-      <p:sp>
-        <p:nvSpPr>
-          <p:cNvPr id="8" name="TextBox 7"/>
-          <p:cNvSpPr txBox="1"/>
-          <p:nvPr/>
-        </p:nvSpPr>
-        <p:spPr>
-          <a:xfrm>
-            <a:off x="457200" y="1828800"/>
-            <a:ext cx="10972800" cy="4114800"/>
+            <a:off x="640080" y="1828800"/>
+            <a:ext cx="10515600" cy="4389120"/>
           </a:xfrm>
           <a:prstGeom prst="rect">
             <a:avLst/>
@@ -3567,61 +5474,145 @@
           <a:p>
             <a:pPr>
               <a:spcBef>
-                <a:spcPts val="1000"/>
-              </a:spcBef>
-              <a:defRPr sz="2200">
-                <a:solidFill>
-                  <a:srgbClr val="333333"/>
-                </a:solidFill>
-              </a:defRPr>
-            </a:pPr>
-            <a:r>
-              <a:t>• Học sinh học AI thụ động: hỏi → nhận đáp án → không hiểu</a:t>
-            </a:r>
-          </a:p>
-          <a:p>
-            <a:pPr>
-              <a:spcBef>
-                <a:spcPts val="1000"/>
-              </a:spcBef>
-              <a:defRPr sz="2200">
-                <a:solidFill>
-                  <a:srgbClr val="333333"/>
-                </a:solidFill>
-              </a:defRPr>
-            </a:pPr>
-            <a:r>
-              <a:t>• Công cụ AI thương mại (ChatGPT, Gemini) cần internet + tài khoản</a:t>
-            </a:r>
-          </a:p>
-          <a:p>
-            <a:pPr>
-              <a:spcBef>
-                <a:spcPts val="1000"/>
-              </a:spcBef>
-              <a:defRPr sz="2200">
-                <a:solidFill>
-                  <a:srgbClr val="333333"/>
-                </a:solidFill>
-              </a:defRPr>
-            </a:pPr>
-            <a:r>
-              <a:t>• Giáo viên thiếu công cụ trực quan để dạy khái niệm AI</a:t>
-            </a:r>
-          </a:p>
-          <a:p>
-            <a:pPr>
-              <a:spcBef>
-                <a:spcPts val="1000"/>
-              </a:spcBef>
-              <a:defRPr sz="2200">
-                <a:solidFill>
-                  <a:srgbClr val="333333"/>
-                </a:solidFill>
-              </a:defRPr>
-            </a:pPr>
-            <a:r>
-              <a:t>• Chương trình QĐ 2422/QĐ-BGDĐT yêu cầu 22 YCCĐ lớp 10 — chưa có công cụ offline phủ đủ</a:t>
+                <a:spcPts val="800"/>
+              </a:spcBef>
+              <a:spcAft>
+                <a:spcPts val="400"/>
+              </a:spcAft>
+              <a:defRPr sz="1600">
+                <a:solidFill>
+                  <a:srgbClr val="333333"/>
+                </a:solidFill>
+              </a:defRPr>
+            </a:pPr>
+            <a:r>
+              <a:t>• Quyết định 2422/QĐ-BGDĐT (18/8/2026) ban hành Khung nội dung giáo dục AI với 22 YCCĐ lớp 10</a:t>
+            </a:r>
+          </a:p>
+          <a:p>
+            <a:pPr>
+              <a:spcBef>
+                <a:spcPts val="800"/>
+              </a:spcBef>
+              <a:spcAft>
+                <a:spcPts val="400"/>
+              </a:spcAft>
+              <a:defRPr sz="1600">
+                <a:solidFill>
+                  <a:srgbClr val="333333"/>
+                </a:solidFill>
+              </a:defRPr>
+            </a:pPr>
+            <a:r>
+              <a:t>• Công văn 5588/BGDĐT-GDPT yêu cầu: không tài khoản, không phụ thuộc nhà cung cấp, ưu tiên mã nguồn mở</a:t>
+            </a:r>
+          </a:p>
+          <a:p>
+            <a:pPr>
+              <a:spcBef>
+                <a:spcPts val="800"/>
+              </a:spcBef>
+              <a:spcAft>
+                <a:spcPts val="400"/>
+              </a:spcAft>
+              <a:defRPr sz="1600">
+                <a:solidFill>
+                  <a:srgbClr val="333333"/>
+                </a:solidFill>
+              </a:defRPr>
+            </a:pPr>
+            <a:r>
+              <a:t>• Thực tế phòng lab trường phổ thông: cấu hình thấp, Internet không ổn định</a:t>
+            </a:r>
+          </a:p>
+          <a:p>
+            <a:pPr>
+              <a:spcBef>
+                <a:spcPts val="800"/>
+              </a:spcBef>
+              <a:spcAft>
+                <a:spcPts val="400"/>
+              </a:spcAft>
+              <a:defRPr sz="1600">
+                <a:solidFill>
+                  <a:srgbClr val="333333"/>
+                </a:solidFill>
+              </a:defRPr>
+            </a:pPr>
+            <a:r>
+              <a:t>• </a:t>
+            </a:r>
+          </a:p>
+          <a:p>
+            <a:pPr>
+              <a:spcBef>
+                <a:spcPts val="800"/>
+              </a:spcBef>
+              <a:spcAft>
+                <a:spcPts val="400"/>
+              </a:spcAft>
+              <a:defRPr sz="1600">
+                <a:solidFill>
+                  <a:srgbClr val="333333"/>
+                </a:solidFill>
+              </a:defRPr>
+            </a:pPr>
+            <a:r>
+              <a:t>• Khoảng trống:</a:t>
+            </a:r>
+          </a:p>
+          <a:p>
+            <a:pPr>
+              <a:spcBef>
+                <a:spcPts val="800"/>
+              </a:spcBef>
+              <a:spcAft>
+                <a:spcPts val="400"/>
+              </a:spcAft>
+              <a:defRPr sz="1600">
+                <a:solidFill>
+                  <a:srgbClr val="333333"/>
+                </a:solidFill>
+              </a:defRPr>
+            </a:pPr>
+            <a:r>
+              <a:t>  — Chưa có công cụ offline tiếng Việt phủ đủ 22 YCCĐ</a:t>
+            </a:r>
+          </a:p>
+          <a:p>
+            <a:pPr>
+              <a:spcBef>
+                <a:spcPts val="800"/>
+              </a:spcBef>
+              <a:spcAft>
+                <a:spcPts val="400"/>
+              </a:spcAft>
+              <a:defRPr sz="1600">
+                <a:solidFill>
+                  <a:srgbClr val="333333"/>
+                </a:solidFill>
+              </a:defRPr>
+            </a:pPr>
+            <a:r>
+              <a:t>  — Học sinh học AI thụ động: hỏi → nhận đáp án → không hiểu bản chất</a:t>
+            </a:r>
+          </a:p>
+          <a:p>
+            <a:pPr>
+              <a:spcBef>
+                <a:spcPts val="800"/>
+              </a:spcBef>
+              <a:spcAft>
+                <a:spcPts val="400"/>
+              </a:spcAft>
+              <a:defRPr sz="1600">
+                <a:solidFill>
+                  <a:srgbClr val="333333"/>
+                </a:solidFill>
+              </a:defRPr>
+            </a:pPr>
+            <a:r>
+              <a:t>  — Thiếu công cụ trực quan để giáo viên dạy khái niệm AI</a:t>
             </a:r>
           </a:p>
         </p:txBody>
@@ -3652,14 +5643,14 @@
         </p:nvSpPr>
         <p:spPr>
           <a:xfrm>
-            <a:off x="0" y="0"/>
-            <a:ext cx="12191695" cy="731520"/>
+            <a:off x="457200" y="868680"/>
+            <a:ext cx="11247120" cy="12700"/>
           </a:xfrm>
           <a:prstGeom prst="rect">
             <a:avLst/>
           </a:prstGeom>
           <a:solidFill>
-            <a:srgbClr val="0078D7"/>
+            <a:srgbClr val="B4B4B4"/>
           </a:solidFill>
           <a:ln>
             <a:noFill/>
@@ -3703,8 +5694,8 @@
         </p:blipFill>
         <p:spPr>
           <a:xfrm>
-            <a:off x="274320" y="137160"/>
-            <a:ext cx="457200" cy="457200"/>
+            <a:off x="457200" y="137160"/>
+            <a:ext cx="548640" cy="548640"/>
           </a:xfrm>
           <a:prstGeom prst="rect">
             <a:avLst/>
@@ -3727,8 +5718,8 @@
         </p:blipFill>
         <p:spPr>
           <a:xfrm>
-            <a:off x="868680" y="137160"/>
-            <a:ext cx="457200" cy="457200"/>
+            <a:off x="1188720" y="137160"/>
+            <a:ext cx="548640" cy="548640"/>
           </a:xfrm>
           <a:prstGeom prst="rect">
             <a:avLst/>
@@ -3743,8 +5734,90 @@
         </p:nvSpPr>
         <p:spPr>
           <a:xfrm>
-            <a:off x="2011680" y="137160"/>
-            <a:ext cx="9144000" cy="457200"/>
+            <a:off x="1920240" y="137160"/>
+            <a:ext cx="3200400" cy="640080"/>
+          </a:xfrm>
+          <a:prstGeom prst="rect">
+            <a:avLst/>
+          </a:prstGeom>
+          <a:noFill/>
+        </p:spPr>
+        <p:txBody>
+          <a:bodyPr wrap="square">
+            <a:spAutoFit/>
+          </a:bodyPr>
+          <a:lstStyle/>
+          <a:p>
+            <a:pPr>
+              <a:defRPr sz="1100" b="1">
+                <a:solidFill>
+                  <a:srgbClr val="333333"/>
+                </a:solidFill>
+              </a:defRPr>
+            </a:pPr>
+            <a:r>
+              <a:t>TRƯỜNG THPT THUẬN HOÁ</a:t>
+            </a:r>
+          </a:p>
+          <a:p>
+            <a:pPr>
+              <a:defRPr sz="1000">
+                <a:solidFill>
+                  <a:srgbClr val="646464"/>
+                </a:solidFill>
+              </a:defRPr>
+            </a:pPr>
+            <a:r>
+              <a:t>Đại học Sư Phạm, Đại học Huế</a:t>
+            </a:r>
+          </a:p>
+        </p:txBody>
+      </p:sp>
+      <p:sp>
+        <p:nvSpPr>
+          <p:cNvPr id="6" name="TextBox 5"/>
+          <p:cNvSpPr txBox="1"/>
+          <p:nvPr/>
+        </p:nvSpPr>
+        <p:spPr>
+          <a:xfrm>
+            <a:off x="5303520" y="182880"/>
+            <a:ext cx="6400800" cy="640080"/>
+          </a:xfrm>
+          <a:prstGeom prst="rect">
+            <a:avLst/>
+          </a:prstGeom>
+          <a:noFill/>
+        </p:spPr>
+        <p:txBody>
+          <a:bodyPr wrap="square">
+            <a:spAutoFit/>
+          </a:bodyPr>
+          <a:lstStyle/>
+          <a:p>
+            <a:pPr algn="ctr">
+              <a:defRPr sz="1400" b="1">
+                <a:solidFill>
+                  <a:srgbClr val="333333"/>
+                </a:solidFill>
+              </a:defRPr>
+            </a:pPr>
+            <a:r>
+              <a:t>2. Mục tiêu nghiên cứu</a:t>
+            </a:r>
+          </a:p>
+        </p:txBody>
+      </p:sp>
+      <p:sp>
+        <p:nvSpPr>
+          <p:cNvPr id="7" name="TextBox 6"/>
+          <p:cNvSpPr txBox="1"/>
+          <p:nvPr/>
+        </p:nvSpPr>
+        <p:spPr>
+          <a:xfrm>
+            <a:off x="457200" y="6400800"/>
+            <a:ext cx="10972800" cy="365760"/>
           </a:xfrm>
           <a:prstGeom prst="rect">
             <a:avLst/>
@@ -3758,28 +5831,28 @@
           <a:lstStyle/>
           <a:p>
             <a:pPr>
-              <a:defRPr sz="1600" b="1">
-                <a:solidFill>
-                  <a:srgbClr val="FFFFFF"/>
-                </a:solidFill>
-              </a:defRPr>
-            </a:pPr>
-            <a:r>
-              <a:t>AInatomy — Phòng thực hành AI</a:t>
-            </a:r>
-          </a:p>
-        </p:txBody>
-      </p:sp>
-      <p:sp>
-        <p:nvSpPr>
-          <p:cNvPr id="6" name="TextBox 5"/>
+              <a:defRPr sz="1000">
+                <a:solidFill>
+                  <a:srgbClr val="646464"/>
+                </a:solidFill>
+              </a:defRPr>
+            </a:pPr>
+            <a:r>
+              <a:t>GV hướng dẫn: Mai Xuân Văn                                                                                           3</a:t>
+            </a:r>
+          </a:p>
+        </p:txBody>
+      </p:sp>
+      <p:sp>
+        <p:nvSpPr>
+          <p:cNvPr id="8" name="TextBox 7"/>
           <p:cNvSpPr txBox="1"/>
           <p:nvPr/>
         </p:nvSpPr>
         <p:spPr>
           <a:xfrm>
-            <a:off x="457200" y="1005840"/>
-            <a:ext cx="10972800" cy="640080"/>
+            <a:off x="457200" y="1097280"/>
+            <a:ext cx="10972800" cy="548640"/>
           </a:xfrm>
           <a:prstGeom prst="rect">
             <a:avLst/>
@@ -3793,63 +5866,28 @@
           <a:lstStyle/>
           <a:p>
             <a:pPr>
-              <a:defRPr sz="3200" b="1">
-                <a:solidFill>
-                  <a:srgbClr val="333333"/>
-                </a:solidFill>
-              </a:defRPr>
-            </a:pPr>
-            <a:r>
-              <a:t>Giải pháp: AInatomy</a:t>
-            </a:r>
-          </a:p>
-        </p:txBody>
-      </p:sp>
-      <p:sp>
-        <p:nvSpPr>
-          <p:cNvPr id="7" name="TextBox 6"/>
+              <a:defRPr sz="2800" b="1">
+                <a:solidFill>
+                  <a:srgbClr val="0066CC"/>
+                </a:solidFill>
+              </a:defRPr>
+            </a:pPr>
+            <a:r>
+              <a:t>Mục tiêu tổng quát</a:t>
+            </a:r>
+          </a:p>
+        </p:txBody>
+      </p:sp>
+      <p:sp>
+        <p:nvSpPr>
+          <p:cNvPr id="9" name="TextBox 8"/>
           <p:cNvSpPr txBox="1"/>
           <p:nvPr/>
         </p:nvSpPr>
         <p:spPr>
           <a:xfrm>
-            <a:off x="457200" y="6309360"/>
-            <a:ext cx="10972800" cy="365760"/>
-          </a:xfrm>
-          <a:prstGeom prst="rect">
-            <a:avLst/>
-          </a:prstGeom>
-          <a:noFill/>
-        </p:spPr>
-        <p:txBody>
-          <a:bodyPr wrap="none">
-            <a:spAutoFit/>
-          </a:bodyPr>
-          <a:lstStyle/>
-          <a:p>
-            <a:pPr algn="ctr">
-              <a:defRPr sz="1100">
-                <a:solidFill>
-                  <a:srgbClr val="C8C8C8"/>
-                </a:solidFill>
-              </a:defRPr>
-            </a:pPr>
-            <a:r>
-              <a:t>Trường THPT Thuận Hoá — ĐHSP Huế | GV: Mai Xuân Văn</a:t>
-            </a:r>
-          </a:p>
-        </p:txBody>
-      </p:sp>
-      <p:sp>
-        <p:nvSpPr>
-          <p:cNvPr id="8" name="TextBox 7"/>
-          <p:cNvSpPr txBox="1"/>
-          <p:nvPr/>
-        </p:nvSpPr>
-        <p:spPr>
-          <a:xfrm>
-            <a:off x="457200" y="1828800"/>
-            <a:ext cx="10972800" cy="4114800"/>
+            <a:off x="640080" y="1828800"/>
+            <a:ext cx="10515600" cy="4389120"/>
           </a:xfrm>
           <a:prstGeom prst="rect">
             <a:avLst/>
@@ -3864,118 +5902,163 @@
           <a:p>
             <a:pPr>
               <a:spcBef>
-                <a:spcPts val="1000"/>
-              </a:spcBef>
-              <a:defRPr sz="1800">
-                <a:solidFill>
-                  <a:srgbClr val="333333"/>
-                </a:solidFill>
-              </a:defRPr>
-            </a:pPr>
-            <a:r>
-              <a:t>Phòng thí nghiệm AI offline, tiếng Việt, không tài khoản</a:t>
-            </a:r>
-          </a:p>
-          <a:p>
-            <a:pPr>
-              <a:spcBef>
-                <a:spcPts val="1000"/>
-              </a:spcBef>
-              <a:defRPr sz="1800">
-                <a:solidFill>
-                  <a:srgbClr val="333333"/>
-                </a:solidFill>
-              </a:defRPr>
-            </a:pPr>
-          </a:p>
-          <a:p>
-            <a:pPr>
-              <a:spcBef>
-                <a:spcPts val="1000"/>
-              </a:spcBef>
-              <a:defRPr sz="1800">
-                <a:solidFill>
-                  <a:srgbClr val="333333"/>
-                </a:solidFill>
-              </a:defRPr>
-            </a:pPr>
-            <a:r>
-              <a:t>5 phân hệ chính:</a:t>
-            </a:r>
-          </a:p>
-          <a:p>
-            <a:pPr>
-              <a:spcBef>
-                <a:spcPts val="1000"/>
-              </a:spcBef>
-              <a:defRPr sz="1800">
-                <a:solidFill>
-                  <a:srgbClr val="333333"/>
-                </a:solidFill>
-              </a:defRPr>
-            </a:pPr>
-            <a:r>
-              <a:t>  1. Kịch bản 9 cảnh — hành trình dữ liệu từ đầu vào đến đầu ra</a:t>
-            </a:r>
-          </a:p>
-          <a:p>
-            <a:pPr>
-              <a:spcBef>
-                <a:spcPts val="1000"/>
-              </a:spcBef>
-              <a:defRPr sz="1800">
-                <a:solidFill>
-                  <a:srgbClr val="333333"/>
-                </a:solidFill>
-              </a:defRPr>
-            </a:pPr>
-            <a:r>
-              <a:t>  2. Đấu trường bắt lỗi AI — 12 tình huống, 5 loại lỗi</a:t>
-            </a:r>
-          </a:p>
-          <a:p>
-            <a:pPr>
-              <a:spcBef>
-                <a:spcPts val="1000"/>
-              </a:spcBef>
-              <a:defRPr sz="1800">
-                <a:solidFill>
-                  <a:srgbClr val="333333"/>
-                </a:solidFill>
-              </a:defRPr>
-            </a:pPr>
-            <a:r>
-              <a:t>  3. Nhà máy AI 7 trạm — từ nhập liệu đến ứng dụng</a:t>
-            </a:r>
-          </a:p>
-          <a:p>
-            <a:pPr>
-              <a:spcBef>
-                <a:spcPts val="1000"/>
-              </a:spcBef>
-              <a:defRPr sz="1800">
-                <a:solidFill>
-                  <a:srgbClr val="333333"/>
-                </a:solidFill>
-              </a:defRPr>
-            </a:pPr>
-            <a:r>
-              <a:t>  4. Xưởng huấn luyện — tự huấn luyện, thấy thiên kiến</a:t>
-            </a:r>
-          </a:p>
-          <a:p>
-            <a:pPr>
-              <a:spcBef>
-                <a:spcPts val="1000"/>
-              </a:spcBef>
-              <a:defRPr sz="1800">
-                <a:solidFill>
-                  <a:srgbClr val="333333"/>
-                </a:solidFill>
-              </a:defRPr>
-            </a:pPr>
-            <a:r>
-              <a:t>  5. Bản đồ năng lực — theo dõi tiến bộ 12 khối UNESCO</a:t>
+                <a:spcPts val="800"/>
+              </a:spcBef>
+              <a:spcAft>
+                <a:spcPts val="400"/>
+              </a:spcAft>
+              <a:defRPr sz="1600">
+                <a:solidFill>
+                  <a:srgbClr val="333333"/>
+                </a:solidFill>
+              </a:defRPr>
+            </a:pPr>
+            <a:r>
+              <a:t>• Xây dựng phòng thí nghiệm AI offline, tiếng Việt, không tài khoản,</a:t>
+            </a:r>
+          </a:p>
+          <a:p>
+            <a:pPr>
+              <a:spcBef>
+                <a:spcPts val="800"/>
+              </a:spcBef>
+              <a:spcAft>
+                <a:spcPts val="400"/>
+              </a:spcAft>
+              <a:defRPr sz="1600">
+                <a:solidFill>
+                  <a:srgbClr val="333333"/>
+                </a:solidFill>
+              </a:defRPr>
+            </a:pPr>
+            <a:r>
+              <a:t>• cho phép học sinh phổ thông học về AI thông qua việc bắt lỗi AI,</a:t>
+            </a:r>
+          </a:p>
+          <a:p>
+            <a:pPr>
+              <a:spcBef>
+                <a:spcPts val="800"/>
+              </a:spcBef>
+              <a:spcAft>
+                <a:spcPts val="400"/>
+              </a:spcAft>
+              <a:defRPr sz="1600">
+                <a:solidFill>
+                  <a:srgbClr val="333333"/>
+                </a:solidFill>
+              </a:defRPr>
+            </a:pPr>
+            <a:r>
+              <a:t>• phủ 22/22 YCCĐ lớp 10 theo QĐ 2422/QĐ-BGDĐT.</a:t>
+            </a:r>
+          </a:p>
+          <a:p>
+            <a:pPr>
+              <a:spcBef>
+                <a:spcPts val="800"/>
+              </a:spcBef>
+              <a:spcAft>
+                <a:spcPts val="400"/>
+              </a:spcAft>
+              <a:defRPr sz="1600">
+                <a:solidFill>
+                  <a:srgbClr val="333333"/>
+                </a:solidFill>
+              </a:defRPr>
+            </a:pPr>
+            <a:r>
+              <a:t>• </a:t>
+            </a:r>
+          </a:p>
+          <a:p>
+            <a:pPr>
+              <a:spcBef>
+                <a:spcPts val="800"/>
+              </a:spcBef>
+              <a:spcAft>
+                <a:spcPts val="400"/>
+              </a:spcAft>
+              <a:defRPr sz="1600">
+                <a:solidFill>
+                  <a:srgbClr val="333333"/>
+                </a:solidFill>
+              </a:defRPr>
+            </a:pPr>
+            <a:r>
+              <a:t>• Mục tiêu cụ thể:</a:t>
+            </a:r>
+          </a:p>
+          <a:p>
+            <a:pPr>
+              <a:spcBef>
+                <a:spcPts val="800"/>
+              </a:spcBef>
+              <a:spcAft>
+                <a:spcPts val="400"/>
+              </a:spcAft>
+              <a:defRPr sz="1600">
+                <a:solidFill>
+                  <a:srgbClr val="333333"/>
+                </a:solidFill>
+              </a:defRPr>
+            </a:pPr>
+            <a:r>
+              <a:t>  1. Thiết kế kiến trúc 3 tầng chạy được trên file:// không cần máy chủ</a:t>
+            </a:r>
+          </a:p>
+          <a:p>
+            <a:pPr>
+              <a:spcBef>
+                <a:spcPts val="800"/>
+              </a:spcBef>
+              <a:spcAft>
+                <a:spcPts val="400"/>
+              </a:spcAft>
+              <a:defRPr sz="1600">
+                <a:solidFill>
+                  <a:srgbClr val="333333"/>
+                </a:solidFill>
+              </a:defRPr>
+            </a:pPr>
+            <a:r>
+              <a:t>  2. Xây dựng 5 phân hệ mô phỏng: Kịch bản, Đấu trường, Nhà máy, Xưởng huấn luyện, Bản đồ năng lực</a:t>
+            </a:r>
+          </a:p>
+          <a:p>
+            <a:pPr>
+              <a:spcBef>
+                <a:spcPts val="800"/>
+              </a:spcBef>
+              <a:spcAft>
+                <a:spcPts val="400"/>
+              </a:spcAft>
+              <a:defRPr sz="1600">
+                <a:solidFill>
+                  <a:srgbClr val="333333"/>
+                </a:solidFill>
+              </a:defRPr>
+            </a:pPr>
+            <a:r>
+              <a:t>  3. Tích hợp vào 28 bài SGK Tin học 10 với phân phối 12 tiết đề xuất</a:t>
+            </a:r>
+          </a:p>
+          <a:p>
+            <a:pPr>
+              <a:spcBef>
+                <a:spcPts val="800"/>
+              </a:spcBef>
+              <a:spcAft>
+                <a:spcPts val="400"/>
+              </a:spcAft>
+              <a:defRPr sz="1600">
+                <a:solidFill>
+                  <a:srgbClr val="333333"/>
+                </a:solidFill>
+              </a:defRPr>
+            </a:pPr>
+            <a:r>
+              <a:t>  4. Đảm bảo tự chấm 100% bằng nhãn đúng có sẵn, không cần giáo viên</a:t>
             </a:r>
           </a:p>
         </p:txBody>
@@ -4006,14 +6089,14 @@
         </p:nvSpPr>
         <p:spPr>
           <a:xfrm>
-            <a:off x="0" y="0"/>
-            <a:ext cx="12191695" cy="731520"/>
+            <a:off x="457200" y="868680"/>
+            <a:ext cx="11247120" cy="12700"/>
           </a:xfrm>
           <a:prstGeom prst="rect">
             <a:avLst/>
           </a:prstGeom>
           <a:solidFill>
-            <a:srgbClr val="0078D7"/>
+            <a:srgbClr val="B4B4B4"/>
           </a:solidFill>
           <a:ln>
             <a:noFill/>
@@ -4057,8 +6140,8 @@
         </p:blipFill>
         <p:spPr>
           <a:xfrm>
-            <a:off x="274320" y="137160"/>
-            <a:ext cx="457200" cy="457200"/>
+            <a:off x="457200" y="137160"/>
+            <a:ext cx="548640" cy="548640"/>
           </a:xfrm>
           <a:prstGeom prst="rect">
             <a:avLst/>
@@ -4081,8 +6164,8 @@
         </p:blipFill>
         <p:spPr>
           <a:xfrm>
-            <a:off x="868680" y="137160"/>
-            <a:ext cx="457200" cy="457200"/>
+            <a:off x="1188720" y="137160"/>
+            <a:ext cx="548640" cy="548640"/>
           </a:xfrm>
           <a:prstGeom prst="rect">
             <a:avLst/>
@@ -4097,8 +6180,90 @@
         </p:nvSpPr>
         <p:spPr>
           <a:xfrm>
-            <a:off x="2011680" y="137160"/>
-            <a:ext cx="9144000" cy="457200"/>
+            <a:off x="1920240" y="137160"/>
+            <a:ext cx="3200400" cy="640080"/>
+          </a:xfrm>
+          <a:prstGeom prst="rect">
+            <a:avLst/>
+          </a:prstGeom>
+          <a:noFill/>
+        </p:spPr>
+        <p:txBody>
+          <a:bodyPr wrap="square">
+            <a:spAutoFit/>
+          </a:bodyPr>
+          <a:lstStyle/>
+          <a:p>
+            <a:pPr>
+              <a:defRPr sz="1100" b="1">
+                <a:solidFill>
+                  <a:srgbClr val="333333"/>
+                </a:solidFill>
+              </a:defRPr>
+            </a:pPr>
+            <a:r>
+              <a:t>TRƯỜNG THPT THUẬN HOÁ</a:t>
+            </a:r>
+          </a:p>
+          <a:p>
+            <a:pPr>
+              <a:defRPr sz="1000">
+                <a:solidFill>
+                  <a:srgbClr val="646464"/>
+                </a:solidFill>
+              </a:defRPr>
+            </a:pPr>
+            <a:r>
+              <a:t>Đại học Sư Phạm, Đại học Huế</a:t>
+            </a:r>
+          </a:p>
+        </p:txBody>
+      </p:sp>
+      <p:sp>
+        <p:nvSpPr>
+          <p:cNvPr id="6" name="TextBox 5"/>
+          <p:cNvSpPr txBox="1"/>
+          <p:nvPr/>
+        </p:nvSpPr>
+        <p:spPr>
+          <a:xfrm>
+            <a:off x="5303520" y="182880"/>
+            <a:ext cx="6400800" cy="640080"/>
+          </a:xfrm>
+          <a:prstGeom prst="rect">
+            <a:avLst/>
+          </a:prstGeom>
+          <a:noFill/>
+        </p:spPr>
+        <p:txBody>
+          <a:bodyPr wrap="square">
+            <a:spAutoFit/>
+          </a:bodyPr>
+          <a:lstStyle/>
+          <a:p>
+            <a:pPr algn="ctr">
+              <a:defRPr sz="1400" b="1">
+                <a:solidFill>
+                  <a:srgbClr val="333333"/>
+                </a:solidFill>
+              </a:defRPr>
+            </a:pPr>
+            <a:r>
+              <a:t>3. Cơ sở lý thuyết</a:t>
+            </a:r>
+          </a:p>
+        </p:txBody>
+      </p:sp>
+      <p:sp>
+        <p:nvSpPr>
+          <p:cNvPr id="7" name="TextBox 6"/>
+          <p:cNvSpPr txBox="1"/>
+          <p:nvPr/>
+        </p:nvSpPr>
+        <p:spPr>
+          <a:xfrm>
+            <a:off x="457200" y="6400800"/>
+            <a:ext cx="10972800" cy="365760"/>
           </a:xfrm>
           <a:prstGeom prst="rect">
             <a:avLst/>
@@ -4112,28 +6277,28 @@
           <a:lstStyle/>
           <a:p>
             <a:pPr>
-              <a:defRPr sz="1600" b="1">
-                <a:solidFill>
-                  <a:srgbClr val="FFFFFF"/>
-                </a:solidFill>
-              </a:defRPr>
-            </a:pPr>
-            <a:r>
-              <a:t>AInatomy — Phòng thực hành AI</a:t>
-            </a:r>
-          </a:p>
-        </p:txBody>
-      </p:sp>
-      <p:sp>
-        <p:nvSpPr>
-          <p:cNvPr id="6" name="TextBox 5"/>
+              <a:defRPr sz="1000">
+                <a:solidFill>
+                  <a:srgbClr val="646464"/>
+                </a:solidFill>
+              </a:defRPr>
+            </a:pPr>
+            <a:r>
+              <a:t>GV hướng dẫn: Mai Xuân Văn                                                                                           4</a:t>
+            </a:r>
+          </a:p>
+        </p:txBody>
+      </p:sp>
+      <p:sp>
+        <p:nvSpPr>
+          <p:cNvPr id="8" name="TextBox 7"/>
           <p:cNvSpPr txBox="1"/>
           <p:nvPr/>
         </p:nvSpPr>
         <p:spPr>
           <a:xfrm>
-            <a:off x="457200" y="1005840"/>
-            <a:ext cx="10972800" cy="640080"/>
+            <a:off x="457200" y="1097280"/>
+            <a:ext cx="10972800" cy="548640"/>
           </a:xfrm>
           <a:prstGeom prst="rect">
             <a:avLst/>
@@ -4147,63 +6312,28 @@
           <a:lstStyle/>
           <a:p>
             <a:pPr>
-              <a:defRPr sz="3200" b="1">
-                <a:solidFill>
-                  <a:srgbClr val="333333"/>
-                </a:solidFill>
-              </a:defRPr>
-            </a:pPr>
-            <a:r>
-              <a:t>Tích hợp chương trình Tin học 10</a:t>
-            </a:r>
-          </a:p>
-        </p:txBody>
-      </p:sp>
-      <p:sp>
-        <p:nvSpPr>
-          <p:cNvPr id="7" name="TextBox 6"/>
+              <a:defRPr sz="2800" b="1">
+                <a:solidFill>
+                  <a:srgbClr val="0066CC"/>
+                </a:solidFill>
+              </a:defRPr>
+            </a:pPr>
+            <a:r>
+              <a:t>Căn cứ pháp lý và khung năng lực</a:t>
+            </a:r>
+          </a:p>
+        </p:txBody>
+      </p:sp>
+      <p:sp>
+        <p:nvSpPr>
+          <p:cNvPr id="9" name="TextBox 8"/>
           <p:cNvSpPr txBox="1"/>
           <p:nvPr/>
         </p:nvSpPr>
         <p:spPr>
           <a:xfrm>
-            <a:off x="457200" y="6309360"/>
-            <a:ext cx="10972800" cy="365760"/>
-          </a:xfrm>
-          <a:prstGeom prst="rect">
-            <a:avLst/>
-          </a:prstGeom>
-          <a:noFill/>
-        </p:spPr>
-        <p:txBody>
-          <a:bodyPr wrap="none">
-            <a:spAutoFit/>
-          </a:bodyPr>
-          <a:lstStyle/>
-          <a:p>
-            <a:pPr algn="ctr">
-              <a:defRPr sz="1100">
-                <a:solidFill>
-                  <a:srgbClr val="C8C8C8"/>
-                </a:solidFill>
-              </a:defRPr>
-            </a:pPr>
-            <a:r>
-              <a:t>Trường THPT Thuận Hoá — ĐHSP Huế | GV: Mai Xuân Văn</a:t>
-            </a:r>
-          </a:p>
-        </p:txBody>
-      </p:sp>
-      <p:sp>
-        <p:nvSpPr>
-          <p:cNvPr id="8" name="TextBox 7"/>
-          <p:cNvSpPr txBox="1"/>
-          <p:nvPr/>
-        </p:nvSpPr>
-        <p:spPr>
-          <a:xfrm>
-            <a:off x="457200" y="1828800"/>
-            <a:ext cx="5029200" cy="4114800"/>
+            <a:off x="640080" y="1828800"/>
+            <a:ext cx="10515600" cy="4389120"/>
           </a:xfrm>
           <a:prstGeom prst="rect">
             <a:avLst/>
@@ -4217,214 +6347,200 @@
           <a:lstStyle/>
           <a:p>
             <a:pPr>
-              <a:defRPr sz="2200" b="1">
-                <a:solidFill>
-                  <a:srgbClr val="0078D7"/>
-                </a:solidFill>
-              </a:defRPr>
-            </a:pPr>
-            <a:r>
-              <a:t>28 bài SGK → 22/22 YCCĐ</a:t>
-            </a:r>
-          </a:p>
-          <a:p>
-            <a:pPr>
-              <a:spcBef>
-                <a:spcPts val="600"/>
-              </a:spcBef>
-              <a:defRPr sz="1600">
-                <a:solidFill>
-                  <a:srgbClr val="333333"/>
-                </a:solidFill>
-              </a:defRPr>
-            </a:pPr>
-            <a:r>
-              <a:t>• Chủ đề A: Máy tính &amp; xã hội tri thức</a:t>
-            </a:r>
-          </a:p>
-          <a:p>
-            <a:pPr>
-              <a:spcBef>
-                <a:spcPts val="600"/>
-              </a:spcBef>
-              <a:defRPr sz="1600">
-                <a:solidFill>
-                  <a:srgbClr val="333333"/>
-                </a:solidFill>
-              </a:defRPr>
-            </a:pPr>
-            <a:r>
-              <a:t>• Chủ đề B: Mạng máy tính &amp; Internet</a:t>
-            </a:r>
-          </a:p>
-          <a:p>
-            <a:pPr>
-              <a:spcBef>
-                <a:spcPts val="600"/>
-              </a:spcBef>
-              <a:defRPr sz="1600">
-                <a:solidFill>
-                  <a:srgbClr val="333333"/>
-                </a:solidFill>
-              </a:defRPr>
-            </a:pPr>
-            <a:r>
-              <a:t>• Chủ đề D: Đạo đức, pháp luật số</a:t>
-            </a:r>
-          </a:p>
-          <a:p>
-            <a:pPr>
-              <a:spcBef>
-                <a:spcPts val="600"/>
-              </a:spcBef>
-              <a:defRPr sz="1600">
-                <a:solidFill>
-                  <a:srgbClr val="333333"/>
-                </a:solidFill>
-              </a:defRPr>
-            </a:pPr>
-            <a:r>
-              <a:t>• Chủ đề E: Thiết kế đồ họa (ICT)</a:t>
-            </a:r>
-          </a:p>
-          <a:p>
-            <a:pPr>
-              <a:spcBef>
-                <a:spcPts val="600"/>
-              </a:spcBef>
-              <a:defRPr sz="1600">
-                <a:solidFill>
-                  <a:srgbClr val="333333"/>
-                </a:solidFill>
-              </a:defRPr>
-            </a:pPr>
-            <a:r>
-              <a:t>• Chủ đề F: Giải quyết vấn đề</a:t>
-            </a:r>
-          </a:p>
-          <a:p>
-            <a:pPr>
-              <a:spcBef>
-                <a:spcPts val="600"/>
-              </a:spcBef>
-              <a:defRPr sz="1600">
-                <a:solidFill>
-                  <a:srgbClr val="333333"/>
-                </a:solidFill>
-              </a:defRPr>
-            </a:pPr>
-            <a:r>
-              <a:t>• Chủ đề G: Hướng nghiệp (CS)</a:t>
-            </a:r>
-          </a:p>
-        </p:txBody>
-      </p:sp>
-      <p:sp>
-        <p:nvSpPr>
-          <p:cNvPr id="9" name="TextBox 8"/>
-          <p:cNvSpPr txBox="1"/>
-          <p:nvPr/>
-        </p:nvSpPr>
-        <p:spPr>
-          <a:xfrm>
-            <a:off x="5943600" y="1828800"/>
-            <a:ext cx="5029200" cy="4114800"/>
-          </a:xfrm>
-          <a:prstGeom prst="rect">
-            <a:avLst/>
-          </a:prstGeom>
-          <a:noFill/>
-        </p:spPr>
-        <p:txBody>
-          <a:bodyPr wrap="square">
-            <a:spAutoFit/>
-          </a:bodyPr>
-          <a:lstStyle/>
-          <a:p>
-            <a:pPr>
-              <a:defRPr sz="2200" b="1">
-                <a:solidFill>
-                  <a:srgbClr val="0078D7"/>
-                </a:solidFill>
-              </a:defRPr>
-            </a:pPr>
-            <a:r>
-              <a:t>Căn cứ pháp lý</a:t>
-            </a:r>
-          </a:p>
-          <a:p>
-            <a:pPr>
-              <a:spcBef>
-                <a:spcPts val="600"/>
-              </a:spcBef>
-              <a:defRPr sz="1600">
-                <a:solidFill>
-                  <a:srgbClr val="333333"/>
-                </a:solidFill>
-              </a:defRPr>
-            </a:pPr>
-            <a:r>
-              <a:t>• QĐ 2422/QĐ-BGDĐT (18/8/2026)</a:t>
-            </a:r>
-          </a:p>
-          <a:p>
-            <a:pPr>
-              <a:spcBef>
-                <a:spcPts val="600"/>
-              </a:spcBef>
-              <a:defRPr sz="1600">
-                <a:solidFill>
-                  <a:srgbClr val="333333"/>
-                </a:solidFill>
-              </a:defRPr>
-            </a:pPr>
-            <a:r>
-              <a:t>• Khung nội dung giáo dục AI</a:t>
-            </a:r>
-          </a:p>
-          <a:p>
-            <a:pPr>
-              <a:spcBef>
-                <a:spcPts val="600"/>
-              </a:spcBef>
-              <a:defRPr sz="1600">
-                <a:solidFill>
-                  <a:srgbClr val="333333"/>
-                </a:solidFill>
-              </a:defRPr>
-            </a:pPr>
-            <a:r>
-              <a:t>• 4 mạch × 12 khối UNESCO</a:t>
-            </a:r>
-          </a:p>
-          <a:p>
-            <a:pPr>
-              <a:spcBef>
-                <a:spcPts val="600"/>
-              </a:spcBef>
-              <a:defRPr sz="1600">
-                <a:solidFill>
-                  <a:srgbClr val="333333"/>
-                </a:solidFill>
-              </a:defRPr>
-            </a:pPr>
-            <a:r>
-              <a:t>• CV 5588/BGDĐT-GDTrH</a:t>
-            </a:r>
-          </a:p>
-          <a:p>
-            <a:pPr>
-              <a:spcBef>
-                <a:spcPts val="600"/>
-              </a:spcBef>
-              <a:defRPr sz="1600">
-                <a:solidFill>
-                  <a:srgbClr val="333333"/>
-                </a:solidFill>
-              </a:defRPr>
-            </a:pPr>
-            <a:r>
-              <a:t>• Phân phối 12 tiết đề xuất</a:t>
+              <a:spcBef>
+                <a:spcPts val="800"/>
+              </a:spcBef>
+              <a:spcAft>
+                <a:spcPts val="400"/>
+              </a:spcAft>
+              <a:defRPr sz="1500">
+                <a:solidFill>
+                  <a:srgbClr val="333333"/>
+                </a:solidFill>
+              </a:defRPr>
+            </a:pPr>
+            <a:r>
+              <a:t>• QĐ 2422/QĐ-BGDĐT (18/8/2026): 4 mạch nội dung × 13 chủ đề × 22 YCCĐ lớp 10</a:t>
+            </a:r>
+          </a:p>
+          <a:p>
+            <a:pPr>
+              <a:spcBef>
+                <a:spcPts val="800"/>
+              </a:spcBef>
+              <a:spcAft>
+                <a:spcPts val="400"/>
+              </a:spcAft>
+              <a:defRPr sz="1500">
+                <a:solidFill>
+                  <a:srgbClr val="333333"/>
+                </a:solidFill>
+              </a:defRPr>
+            </a:pPr>
+            <a:r>
+              <a:t>  — Mạch A: Tư duy lấy con người làm trung tâm (5 YCCĐ)</a:t>
+            </a:r>
+          </a:p>
+          <a:p>
+            <a:pPr>
+              <a:spcBef>
+                <a:spcPts val="800"/>
+              </a:spcBef>
+              <a:spcAft>
+                <a:spcPts val="400"/>
+              </a:spcAft>
+              <a:defRPr sz="1500">
+                <a:solidFill>
+                  <a:srgbClr val="333333"/>
+                </a:solidFill>
+              </a:defRPr>
+            </a:pPr>
+            <a:r>
+              <a:t>  — Mạch B: Đạo đức AI (3 YCCĐ)</a:t>
+            </a:r>
+          </a:p>
+          <a:p>
+            <a:pPr>
+              <a:spcBef>
+                <a:spcPts val="800"/>
+              </a:spcBef>
+              <a:spcAft>
+                <a:spcPts val="400"/>
+              </a:spcAft>
+              <a:defRPr sz="1500">
+                <a:solidFill>
+                  <a:srgbClr val="333333"/>
+                </a:solidFill>
+              </a:defRPr>
+            </a:pPr>
+            <a:r>
+              <a:t>  — Mạch C: Các kỹ thuật và ứng dụng AI (11 YCCĐ)</a:t>
+            </a:r>
+          </a:p>
+          <a:p>
+            <a:pPr>
+              <a:spcBef>
+                <a:spcPts val="800"/>
+              </a:spcBef>
+              <a:spcAft>
+                <a:spcPts val="400"/>
+              </a:spcAft>
+              <a:defRPr sz="1500">
+                <a:solidFill>
+                  <a:srgbClr val="333333"/>
+                </a:solidFill>
+              </a:defRPr>
+            </a:pPr>
+            <a:r>
+              <a:t>  — Mạch D: Thiết kế hệ thống AI (3 YCCĐ)</a:t>
+            </a:r>
+          </a:p>
+          <a:p>
+            <a:pPr>
+              <a:spcBef>
+                <a:spcPts val="800"/>
+              </a:spcBef>
+              <a:spcAft>
+                <a:spcPts val="400"/>
+              </a:spcAft>
+              <a:defRPr sz="1500">
+                <a:solidFill>
+                  <a:srgbClr val="333333"/>
+                </a:solidFill>
+              </a:defRPr>
+            </a:pPr>
+            <a:r>
+              <a:t>• </a:t>
+            </a:r>
+          </a:p>
+          <a:p>
+            <a:pPr>
+              <a:spcBef>
+                <a:spcPts val="800"/>
+              </a:spcBef>
+              <a:spcAft>
+                <a:spcPts val="400"/>
+              </a:spcAft>
+              <a:defRPr sz="1500">
+                <a:solidFill>
+                  <a:srgbClr val="333333"/>
+                </a:solidFill>
+              </a:defRPr>
+            </a:pPr>
+            <a:r>
+              <a:t>• CV 5588/BGDĐT-GDPT (19/8/2026): 4 điều kiện bắt buộc</a:t>
+            </a:r>
+          </a:p>
+          <a:p>
+            <a:pPr>
+              <a:spcBef>
+                <a:spcPts val="800"/>
+              </a:spcBef>
+              <a:spcAft>
+                <a:spcPts val="400"/>
+              </a:spcAft>
+              <a:defRPr sz="1500">
+                <a:solidFill>
+                  <a:srgbClr val="333333"/>
+                </a:solidFill>
+              </a:defRPr>
+            </a:pPr>
+            <a:r>
+              <a:t>  — Không yêu cầu tài khoản cá nhân</a:t>
+            </a:r>
+          </a:p>
+          <a:p>
+            <a:pPr>
+              <a:spcBef>
+                <a:spcPts val="800"/>
+              </a:spcBef>
+              <a:spcAft>
+                <a:spcPts val="400"/>
+              </a:spcAft>
+              <a:defRPr sz="1500">
+                <a:solidFill>
+                  <a:srgbClr val="333333"/>
+                </a:solidFill>
+              </a:defRPr>
+            </a:pPr>
+            <a:r>
+              <a:t>  — Không phụ thuộc nhà cung cấp</a:t>
+            </a:r>
+          </a:p>
+          <a:p>
+            <a:pPr>
+              <a:spcBef>
+                <a:spcPts val="800"/>
+              </a:spcBef>
+              <a:spcAft>
+                <a:spcPts val="400"/>
+              </a:spcAft>
+              <a:defRPr sz="1500">
+                <a:solidFill>
+                  <a:srgbClr val="333333"/>
+                </a:solidFill>
+              </a:defRPr>
+            </a:pPr>
+            <a:r>
+              <a:t>  — Không buộc mua tài khoản/thiết bị/dịch vụ</a:t>
+            </a:r>
+          </a:p>
+          <a:p>
+            <a:pPr>
+              <a:spcBef>
+                <a:spcPts val="800"/>
+              </a:spcBef>
+              <a:spcAft>
+                <a:spcPts val="400"/>
+              </a:spcAft>
+              <a:defRPr sz="1500">
+                <a:solidFill>
+                  <a:srgbClr val="333333"/>
+                </a:solidFill>
+              </a:defRPr>
+            </a:pPr>
+            <a:r>
+              <a:t>  — Ưu tiên mã nguồn mở, có phiên bản ngoại tuyến</a:t>
             </a:r>
           </a:p>
         </p:txBody>
@@ -4455,14 +6571,14 @@
         </p:nvSpPr>
         <p:spPr>
           <a:xfrm>
-            <a:off x="0" y="0"/>
-            <a:ext cx="12191695" cy="731520"/>
+            <a:off x="457200" y="868680"/>
+            <a:ext cx="11247120" cy="12700"/>
           </a:xfrm>
           <a:prstGeom prst="rect">
             <a:avLst/>
           </a:prstGeom>
           <a:solidFill>
-            <a:srgbClr val="0078D7"/>
+            <a:srgbClr val="B4B4B4"/>
           </a:solidFill>
           <a:ln>
             <a:noFill/>
@@ -4506,8 +6622,8 @@
         </p:blipFill>
         <p:spPr>
           <a:xfrm>
-            <a:off x="274320" y="137160"/>
-            <a:ext cx="457200" cy="457200"/>
+            <a:off x="457200" y="137160"/>
+            <a:ext cx="548640" cy="548640"/>
           </a:xfrm>
           <a:prstGeom prst="rect">
             <a:avLst/>
@@ -4530,8 +6646,8 @@
         </p:blipFill>
         <p:spPr>
           <a:xfrm>
-            <a:off x="868680" y="137160"/>
-            <a:ext cx="457200" cy="457200"/>
+            <a:off x="1188720" y="137160"/>
+            <a:ext cx="548640" cy="548640"/>
           </a:xfrm>
           <a:prstGeom prst="rect">
             <a:avLst/>
@@ -4546,8 +6662,90 @@
         </p:nvSpPr>
         <p:spPr>
           <a:xfrm>
-            <a:off x="2011680" y="137160"/>
-            <a:ext cx="9144000" cy="457200"/>
+            <a:off x="1920240" y="137160"/>
+            <a:ext cx="3200400" cy="640080"/>
+          </a:xfrm>
+          <a:prstGeom prst="rect">
+            <a:avLst/>
+          </a:prstGeom>
+          <a:noFill/>
+        </p:spPr>
+        <p:txBody>
+          <a:bodyPr wrap="square">
+            <a:spAutoFit/>
+          </a:bodyPr>
+          <a:lstStyle/>
+          <a:p>
+            <a:pPr>
+              <a:defRPr sz="1100" b="1">
+                <a:solidFill>
+                  <a:srgbClr val="333333"/>
+                </a:solidFill>
+              </a:defRPr>
+            </a:pPr>
+            <a:r>
+              <a:t>TRƯỜNG THPT THUẬN HOÁ</a:t>
+            </a:r>
+          </a:p>
+          <a:p>
+            <a:pPr>
+              <a:defRPr sz="1000">
+                <a:solidFill>
+                  <a:srgbClr val="646464"/>
+                </a:solidFill>
+              </a:defRPr>
+            </a:pPr>
+            <a:r>
+              <a:t>Đại học Sư Phạm, Đại học Huế</a:t>
+            </a:r>
+          </a:p>
+        </p:txBody>
+      </p:sp>
+      <p:sp>
+        <p:nvSpPr>
+          <p:cNvPr id="6" name="TextBox 5"/>
+          <p:cNvSpPr txBox="1"/>
+          <p:nvPr/>
+        </p:nvSpPr>
+        <p:spPr>
+          <a:xfrm>
+            <a:off x="5303520" y="182880"/>
+            <a:ext cx="6400800" cy="640080"/>
+          </a:xfrm>
+          <a:prstGeom prst="rect">
+            <a:avLst/>
+          </a:prstGeom>
+          <a:noFill/>
+        </p:spPr>
+        <p:txBody>
+          <a:bodyPr wrap="square">
+            <a:spAutoFit/>
+          </a:bodyPr>
+          <a:lstStyle/>
+          <a:p>
+            <a:pPr algn="ctr">
+              <a:defRPr sz="1400" b="1">
+                <a:solidFill>
+                  <a:srgbClr val="333333"/>
+                </a:solidFill>
+              </a:defRPr>
+            </a:pPr>
+            <a:r>
+              <a:t>4. Kiến trúc hệ thống</a:t>
+            </a:r>
+          </a:p>
+        </p:txBody>
+      </p:sp>
+      <p:sp>
+        <p:nvSpPr>
+          <p:cNvPr id="7" name="TextBox 6"/>
+          <p:cNvSpPr txBox="1"/>
+          <p:nvPr/>
+        </p:nvSpPr>
+        <p:spPr>
+          <a:xfrm>
+            <a:off x="457200" y="6400800"/>
+            <a:ext cx="10972800" cy="365760"/>
           </a:xfrm>
           <a:prstGeom prst="rect">
             <a:avLst/>
@@ -4561,28 +6759,28 @@
           <a:lstStyle/>
           <a:p>
             <a:pPr>
-              <a:defRPr sz="1600" b="1">
-                <a:solidFill>
-                  <a:srgbClr val="FFFFFF"/>
-                </a:solidFill>
-              </a:defRPr>
-            </a:pPr>
-            <a:r>
-              <a:t>AInatomy — Phòng thực hành AI</a:t>
-            </a:r>
-          </a:p>
-        </p:txBody>
-      </p:sp>
-      <p:sp>
-        <p:nvSpPr>
-          <p:cNvPr id="6" name="TextBox 5"/>
+              <a:defRPr sz="1000">
+                <a:solidFill>
+                  <a:srgbClr val="646464"/>
+                </a:solidFill>
+              </a:defRPr>
+            </a:pPr>
+            <a:r>
+              <a:t>GV hướng dẫn: Mai Xuân Văn                                                                                           5</a:t>
+            </a:r>
+          </a:p>
+        </p:txBody>
+      </p:sp>
+      <p:sp>
+        <p:nvSpPr>
+          <p:cNvPr id="8" name="TextBox 7"/>
           <p:cNvSpPr txBox="1"/>
           <p:nvPr/>
         </p:nvSpPr>
         <p:spPr>
           <a:xfrm>
-            <a:off x="457200" y="1005840"/>
-            <a:ext cx="10972800" cy="640080"/>
+            <a:off x="457200" y="1097280"/>
+            <a:ext cx="10972800" cy="548640"/>
           </a:xfrm>
           <a:prstGeom prst="rect">
             <a:avLst/>
@@ -4596,63 +6794,28 @@
           <a:lstStyle/>
           <a:p>
             <a:pPr>
-              <a:defRPr sz="3200" b="1">
-                <a:solidFill>
-                  <a:srgbClr val="333333"/>
-                </a:solidFill>
-              </a:defRPr>
-            </a:pPr>
-            <a:r>
-              <a:t>Kết quả</a:t>
-            </a:r>
-          </a:p>
-        </p:txBody>
-      </p:sp>
-      <p:sp>
-        <p:nvSpPr>
-          <p:cNvPr id="7" name="TextBox 6"/>
+              <a:defRPr sz="2800" b="1">
+                <a:solidFill>
+                  <a:srgbClr val="0066CC"/>
+                </a:solidFill>
+              </a:defRPr>
+            </a:pPr>
+            <a:r>
+              <a:t>Mô hình 3 tầng</a:t>
+            </a:r>
+          </a:p>
+        </p:txBody>
+      </p:sp>
+      <p:sp>
+        <p:nvSpPr>
+          <p:cNvPr id="9" name="TextBox 8"/>
           <p:cNvSpPr txBox="1"/>
           <p:nvPr/>
         </p:nvSpPr>
         <p:spPr>
           <a:xfrm>
-            <a:off x="457200" y="6309360"/>
-            <a:ext cx="10972800" cy="365760"/>
-          </a:xfrm>
-          <a:prstGeom prst="rect">
-            <a:avLst/>
-          </a:prstGeom>
-          <a:noFill/>
-        </p:spPr>
-        <p:txBody>
-          <a:bodyPr wrap="none">
-            <a:spAutoFit/>
-          </a:bodyPr>
-          <a:lstStyle/>
-          <a:p>
-            <a:pPr algn="ctr">
-              <a:defRPr sz="1100">
-                <a:solidFill>
-                  <a:srgbClr val="C8C8C8"/>
-                </a:solidFill>
-              </a:defRPr>
-            </a:pPr>
-            <a:r>
-              <a:t>Trường THPT Thuận Hoá — ĐHSP Huế | GV: Mai Xuân Văn</a:t>
-            </a:r>
-          </a:p>
-        </p:txBody>
-      </p:sp>
-      <p:sp>
-        <p:nvSpPr>
-          <p:cNvPr id="8" name="TextBox 7"/>
-          <p:cNvSpPr txBox="1"/>
-          <p:nvPr/>
-        </p:nvSpPr>
-        <p:spPr>
-          <a:xfrm>
-            <a:off x="457200" y="1828800"/>
-            <a:ext cx="10972800" cy="4114800"/>
+            <a:off x="640080" y="1828800"/>
+            <a:ext cx="10515600" cy="4389120"/>
           </a:xfrm>
           <a:prstGeom prst="rect">
             <a:avLst/>
@@ -4667,91 +6830,217 @@
           <a:p>
             <a:pPr>
               <a:spcBef>
-                <a:spcPts val="1000"/>
-              </a:spcBef>
-              <a:defRPr sz="2200">
-                <a:solidFill>
-                  <a:srgbClr val="333333"/>
-                </a:solidFill>
-              </a:defRPr>
-            </a:pPr>
-            <a:r>
-              <a:t>✓ 97/97 tiêu chí nghiệm thu tự động</a:t>
-            </a:r>
-          </a:p>
-          <a:p>
-            <a:pPr>
-              <a:spcBef>
-                <a:spcPts val="1000"/>
-              </a:spcBef>
-              <a:defRPr sz="2200">
-                <a:solidFill>
-                  <a:srgbClr val="333333"/>
-                </a:solidFill>
-              </a:defRPr>
-            </a:pPr>
-            <a:r>
-              <a:t>✓ 22/22 YCCĐ lớp 10 được phủ</a:t>
-            </a:r>
-          </a:p>
-          <a:p>
-            <a:pPr>
-              <a:spcBef>
-                <a:spcPts val="1000"/>
-              </a:spcBef>
-              <a:defRPr sz="2200">
-                <a:solidFill>
-                  <a:srgbClr val="333333"/>
-                </a:solidFill>
-              </a:defRPr>
-            </a:pPr>
-            <a:r>
-              <a:t>✓ 28 bài SGK Tin học 10 có hỗ trợ</a:t>
-            </a:r>
-          </a:p>
-          <a:p>
-            <a:pPr>
-              <a:spcBef>
-                <a:spcPts val="1000"/>
-              </a:spcBef>
-              <a:defRPr sz="2200">
-                <a:solidFill>
-                  <a:srgbClr val="333333"/>
-                </a:solidFill>
-              </a:defRPr>
-            </a:pPr>
-            <a:r>
-              <a:t>✓ 133 tệp trong manifest, hash khớp 100%</a:t>
-            </a:r>
-          </a:p>
-          <a:p>
-            <a:pPr>
-              <a:spcBef>
-                <a:spcPts val="1000"/>
-              </a:spcBef>
-              <a:defRPr sz="2200">
-                <a:solidFill>
-                  <a:srgbClr val="333333"/>
-                </a:solidFill>
-              </a:defRPr>
-            </a:pPr>
-            <a:r>
-              <a:t>✓ Chạy offline, không cần internet</a:t>
-            </a:r>
-          </a:p>
-          <a:p>
-            <a:pPr>
-              <a:spcBef>
-                <a:spcPts val="1000"/>
-              </a:spcBef>
-              <a:defRPr sz="2200">
-                <a:solidFill>
-                  <a:srgbClr val="333333"/>
-                </a:solidFill>
-              </a:defRPr>
-            </a:pPr>
-            <a:r>
-              <a:t>✓ Dữ liệu lưu cục bộ, ẩn danh</a:t>
+                <a:spcPts val="800"/>
+              </a:spcBef>
+              <a:spcAft>
+                <a:spcPts val="400"/>
+              </a:spcAft>
+              <a:defRPr sz="1500">
+                <a:solidFill>
+                  <a:srgbClr val="333333"/>
+                </a:solidFill>
+              </a:defRPr>
+            </a:pPr>
+            <a:r>
+              <a:t>• Tầng nội dung (data/):</a:t>
+            </a:r>
+          </a:p>
+          <a:p>
+            <a:pPr>
+              <a:spcBef>
+                <a:spcPts val="800"/>
+              </a:spcBef>
+              <a:spcAft>
+                <a:spcPts val="400"/>
+              </a:spcAft>
+              <a:defRPr sz="1500">
+                <a:solidFill>
+                  <a:srgbClr val="333333"/>
+                </a:solidFill>
+              </a:defRPr>
+            </a:pPr>
+            <a:r>
+              <a:t>  — Ngân hàng câu hỏi, 22 YCCĐ, metadata chủ đề, kiến thức nền</a:t>
+            </a:r>
+          </a:p>
+          <a:p>
+            <a:pPr>
+              <a:spcBef>
+                <a:spcPts val="800"/>
+              </a:spcBef>
+              <a:spcAft>
+                <a:spcPts val="400"/>
+              </a:spcAft>
+              <a:defRPr sz="1500">
+                <a:solidFill>
+                  <a:srgbClr val="333333"/>
+                </a:solidFill>
+              </a:defRPr>
+            </a:pPr>
+            <a:r>
+              <a:t>  — Nhúng dưới dạng biến toàn cục (tránh CORS khi mở file://)</a:t>
+            </a:r>
+          </a:p>
+          <a:p>
+            <a:pPr>
+              <a:spcBef>
+                <a:spcPts val="800"/>
+              </a:spcBef>
+              <a:spcAft>
+                <a:spcPts val="400"/>
+              </a:spcAft>
+              <a:defRPr sz="1500">
+                <a:solidFill>
+                  <a:srgbClr val="333333"/>
+                </a:solidFill>
+              </a:defRPr>
+            </a:pPr>
+            <a:r>
+              <a:t>• </a:t>
+            </a:r>
+          </a:p>
+          <a:p>
+            <a:pPr>
+              <a:spcBef>
+                <a:spcPts val="800"/>
+              </a:spcBef>
+              <a:spcAft>
+                <a:spcPts val="400"/>
+              </a:spcAft>
+              <a:defRPr sz="1500">
+                <a:solidFill>
+                  <a:srgbClr val="333333"/>
+                </a:solidFill>
+              </a:defRPr>
+            </a:pPr>
+            <a:r>
+              <a:t>• Tầng mô phỏng (js/):</a:t>
+            </a:r>
+          </a:p>
+          <a:p>
+            <a:pPr>
+              <a:spcBef>
+                <a:spcPts val="800"/>
+              </a:spcBef>
+              <a:spcAft>
+                <a:spcPts val="400"/>
+              </a:spcAft>
+              <a:defRPr sz="1500">
+                <a:solidFill>
+                  <a:srgbClr val="333333"/>
+                </a:solidFill>
+              </a:defRPr>
+            </a:pPr>
+            <a:r>
+              <a:t>  — Perceptron học thật với trọng số cập nhật theo lỗi</a:t>
+            </a:r>
+          </a:p>
+          <a:p>
+            <a:pPr>
+              <a:spcBef>
+                <a:spcPts val="800"/>
+              </a:spcBef>
+              <a:spcAft>
+                <a:spcPts val="400"/>
+              </a:spcAft>
+              <a:defRPr sz="1500">
+                <a:solidFill>
+                  <a:srgbClr val="333333"/>
+                </a:solidFill>
+              </a:defRPr>
+            </a:pPr>
+            <a:r>
+              <a:t>  — Bộ sinh ảnh tổng hợp bằng canvas, engine chấm tất định</a:t>
+            </a:r>
+          </a:p>
+          <a:p>
+            <a:pPr>
+              <a:spcBef>
+                <a:spcPts val="800"/>
+              </a:spcBef>
+              <a:spcAft>
+                <a:spcPts val="400"/>
+              </a:spcAft>
+              <a:defRPr sz="1500">
+                <a:solidFill>
+                  <a:srgbClr val="333333"/>
+                </a:solidFill>
+              </a:defRPr>
+            </a:pPr>
+            <a:r>
+              <a:t>  — Cảnh 3D dựng trên three.js r137.5 (UMD, lưu trong vendor/)</a:t>
+            </a:r>
+          </a:p>
+          <a:p>
+            <a:pPr>
+              <a:spcBef>
+                <a:spcPts val="800"/>
+              </a:spcBef>
+              <a:spcAft>
+                <a:spcPts val="400"/>
+              </a:spcAft>
+              <a:defRPr sz="1500">
+                <a:solidFill>
+                  <a:srgbClr val="333333"/>
+                </a:solidFill>
+              </a:defRPr>
+            </a:pPr>
+            <a:r>
+              <a:t>• </a:t>
+            </a:r>
+          </a:p>
+          <a:p>
+            <a:pPr>
+              <a:spcBef>
+                <a:spcPts val="800"/>
+              </a:spcBef>
+              <a:spcAft>
+                <a:spcPts val="400"/>
+              </a:spcAft>
+              <a:defRPr sz="1500">
+                <a:solidFill>
+                  <a:srgbClr val="333333"/>
+                </a:solidFill>
+              </a:defRPr>
+            </a:pPr>
+            <a:r>
+              <a:t>• Tầng giao diện (index.html + CSS):</a:t>
+            </a:r>
+          </a:p>
+          <a:p>
+            <a:pPr>
+              <a:spcBef>
+                <a:spcPts val="800"/>
+              </a:spcBef>
+              <a:spcAft>
+                <a:spcPts val="400"/>
+              </a:spcAft>
+              <a:defRPr sz="1500">
+                <a:solidFill>
+                  <a:srgbClr val="333333"/>
+                </a:solidFill>
+              </a:defRPr>
+            </a:pPr>
+            <a:r>
+              <a:t>  — Chuyển đổi khung nhìn bằng ẩn hiện, không dùng router</a:t>
+            </a:r>
+          </a:p>
+          <a:p>
+            <a:pPr>
+              <a:spcBef>
+                <a:spcPts val="800"/>
+              </a:spcBef>
+              <a:spcAft>
+                <a:spcPts val="400"/>
+              </a:spcAft>
+              <a:defRPr sz="1500">
+                <a:solidFill>
+                  <a:srgbClr val="333333"/>
+                </a:solidFill>
+              </a:defRPr>
+            </a:pPr>
+            <a:r>
+              <a:t>  — Hoạt động trên cả file:// và HTTPS</a:t>
             </a:r>
           </a:p>
         </p:txBody>
@@ -4782,14 +7071,14 @@
         </p:nvSpPr>
         <p:spPr>
           <a:xfrm>
-            <a:off x="0" y="0"/>
-            <a:ext cx="12191695" cy="731520"/>
+            <a:off x="457200" y="868680"/>
+            <a:ext cx="11247120" cy="12700"/>
           </a:xfrm>
           <a:prstGeom prst="rect">
             <a:avLst/>
           </a:prstGeom>
           <a:solidFill>
-            <a:srgbClr val="0078D7"/>
+            <a:srgbClr val="B4B4B4"/>
           </a:solidFill>
           <a:ln>
             <a:noFill/>
@@ -4833,8 +7122,8 @@
         </p:blipFill>
         <p:spPr>
           <a:xfrm>
-            <a:off x="274320" y="137160"/>
-            <a:ext cx="457200" cy="457200"/>
+            <a:off x="457200" y="137160"/>
+            <a:ext cx="548640" cy="548640"/>
           </a:xfrm>
           <a:prstGeom prst="rect">
             <a:avLst/>
@@ -4857,8 +7146,8 @@
         </p:blipFill>
         <p:spPr>
           <a:xfrm>
-            <a:off x="868680" y="137160"/>
-            <a:ext cx="457200" cy="457200"/>
+            <a:off x="1188720" y="137160"/>
+            <a:ext cx="548640" cy="548640"/>
           </a:xfrm>
           <a:prstGeom prst="rect">
             <a:avLst/>
@@ -4873,8 +7162,90 @@
         </p:nvSpPr>
         <p:spPr>
           <a:xfrm>
-            <a:off x="2011680" y="137160"/>
-            <a:ext cx="9144000" cy="457200"/>
+            <a:off x="1920240" y="137160"/>
+            <a:ext cx="3200400" cy="640080"/>
+          </a:xfrm>
+          <a:prstGeom prst="rect">
+            <a:avLst/>
+          </a:prstGeom>
+          <a:noFill/>
+        </p:spPr>
+        <p:txBody>
+          <a:bodyPr wrap="square">
+            <a:spAutoFit/>
+          </a:bodyPr>
+          <a:lstStyle/>
+          <a:p>
+            <a:pPr>
+              <a:defRPr sz="1100" b="1">
+                <a:solidFill>
+                  <a:srgbClr val="333333"/>
+                </a:solidFill>
+              </a:defRPr>
+            </a:pPr>
+            <a:r>
+              <a:t>TRƯỜNG THPT THUẬN HOÁ</a:t>
+            </a:r>
+          </a:p>
+          <a:p>
+            <a:pPr>
+              <a:defRPr sz="1000">
+                <a:solidFill>
+                  <a:srgbClr val="646464"/>
+                </a:solidFill>
+              </a:defRPr>
+            </a:pPr>
+            <a:r>
+              <a:t>Đại học Sư Phạm, Đại học Huế</a:t>
+            </a:r>
+          </a:p>
+        </p:txBody>
+      </p:sp>
+      <p:sp>
+        <p:nvSpPr>
+          <p:cNvPr id="6" name="TextBox 5"/>
+          <p:cNvSpPr txBox="1"/>
+          <p:nvPr/>
+        </p:nvSpPr>
+        <p:spPr>
+          <a:xfrm>
+            <a:off x="5303520" y="182880"/>
+            <a:ext cx="6400800" cy="640080"/>
+          </a:xfrm>
+          <a:prstGeom prst="rect">
+            <a:avLst/>
+          </a:prstGeom>
+          <a:noFill/>
+        </p:spPr>
+        <p:txBody>
+          <a:bodyPr wrap="square">
+            <a:spAutoFit/>
+          </a:bodyPr>
+          <a:lstStyle/>
+          <a:p>
+            <a:pPr algn="ctr">
+              <a:defRPr sz="1400" b="1">
+                <a:solidFill>
+                  <a:srgbClr val="333333"/>
+                </a:solidFill>
+              </a:defRPr>
+            </a:pPr>
+            <a:r>
+              <a:t>5. Các phân hệ chính</a:t>
+            </a:r>
+          </a:p>
+        </p:txBody>
+      </p:sp>
+      <p:sp>
+        <p:nvSpPr>
+          <p:cNvPr id="7" name="TextBox 6"/>
+          <p:cNvSpPr txBox="1"/>
+          <p:nvPr/>
+        </p:nvSpPr>
+        <p:spPr>
+          <a:xfrm>
+            <a:off x="457200" y="6400800"/>
+            <a:ext cx="10972800" cy="365760"/>
           </a:xfrm>
           <a:prstGeom prst="rect">
             <a:avLst/>
@@ -4888,28 +7259,28 @@
           <a:lstStyle/>
           <a:p>
             <a:pPr>
-              <a:defRPr sz="1600" b="1">
-                <a:solidFill>
-                  <a:srgbClr val="FFFFFF"/>
-                </a:solidFill>
-              </a:defRPr>
-            </a:pPr>
-            <a:r>
-              <a:t>AInatomy — Phòng thực hành AI</a:t>
-            </a:r>
-          </a:p>
-        </p:txBody>
-      </p:sp>
-      <p:sp>
-        <p:nvSpPr>
-          <p:cNvPr id="6" name="TextBox 5"/>
+              <a:defRPr sz="1000">
+                <a:solidFill>
+                  <a:srgbClr val="646464"/>
+                </a:solidFill>
+              </a:defRPr>
+            </a:pPr>
+            <a:r>
+              <a:t>GV hướng dẫn: Mai Xuân Văn                                                                                           6</a:t>
+            </a:r>
+          </a:p>
+        </p:txBody>
+      </p:sp>
+      <p:sp>
+        <p:nvSpPr>
+          <p:cNvPr id="8" name="TextBox 7"/>
           <p:cNvSpPr txBox="1"/>
           <p:nvPr/>
         </p:nvSpPr>
         <p:spPr>
           <a:xfrm>
-            <a:off x="457200" y="1005840"/>
-            <a:ext cx="10972800" cy="640080"/>
+            <a:off x="457200" y="1097280"/>
+            <a:ext cx="10972800" cy="548640"/>
           </a:xfrm>
           <a:prstGeom prst="rect">
             <a:avLst/>
@@ -4923,28 +7294,28 @@
           <a:lstStyle/>
           <a:p>
             <a:pPr>
-              <a:defRPr sz="3200" b="1">
-                <a:solidFill>
-                  <a:srgbClr val="333333"/>
-                </a:solidFill>
-              </a:defRPr>
-            </a:pPr>
-            <a:r>
-              <a:t>Demo trực tiếp</a:t>
-            </a:r>
-          </a:p>
-        </p:txBody>
-      </p:sp>
-      <p:sp>
-        <p:nvSpPr>
-          <p:cNvPr id="7" name="TextBox 6"/>
+              <a:defRPr sz="2800" b="1">
+                <a:solidFill>
+                  <a:srgbClr val="0066CC"/>
+                </a:solidFill>
+              </a:defRPr>
+            </a:pPr>
+            <a:r>
+              <a:t>5 phân hệ mô phỏng</a:t>
+            </a:r>
+          </a:p>
+        </p:txBody>
+      </p:sp>
+      <p:sp>
+        <p:nvSpPr>
+          <p:cNvPr id="9" name="TextBox 8"/>
           <p:cNvSpPr txBox="1"/>
           <p:nvPr/>
         </p:nvSpPr>
         <p:spPr>
           <a:xfrm>
-            <a:off x="457200" y="6309360"/>
-            <a:ext cx="10972800" cy="365760"/>
+            <a:off x="640080" y="1828800"/>
+            <a:ext cx="10515600" cy="4389120"/>
           </a:xfrm>
           <a:prstGeom prst="rect">
             <a:avLst/>
@@ -4952,90 +7323,134 @@
           <a:noFill/>
         </p:spPr>
         <p:txBody>
-          <a:bodyPr wrap="none">
+          <a:bodyPr wrap="square">
             <a:spAutoFit/>
           </a:bodyPr>
           <a:lstStyle/>
           <a:p>
-            <a:pPr algn="ctr">
-              <a:defRPr sz="1100">
-                <a:solidFill>
-                  <a:srgbClr val="C8C8C8"/>
-                </a:solidFill>
-              </a:defRPr>
-            </a:pPr>
-            <a:r>
-              <a:t>Trường THPT Thuận Hoá — ĐHSP Huế | GV: Mai Xuân Văn</a:t>
-            </a:r>
-          </a:p>
-        </p:txBody>
-      </p:sp>
-      <p:sp>
-        <p:nvSpPr>
-          <p:cNvPr id="8" name="TextBox 7"/>
-          <p:cNvSpPr txBox="1"/>
-          <p:nvPr/>
-        </p:nvSpPr>
-        <p:spPr>
-          <a:xfrm>
-            <a:off x="914400" y="2286000"/>
-            <a:ext cx="10058400" cy="2743200"/>
-          </a:xfrm>
-          <a:prstGeom prst="rect">
-            <a:avLst/>
-          </a:prstGeom>
-          <a:noFill/>
-        </p:spPr>
-        <p:txBody>
-          <a:bodyPr wrap="none">
-            <a:spAutoFit/>
-          </a:bodyPr>
-          <a:lstStyle/>
-          <a:p>
-            <a:pPr algn="ctr">
-              <a:defRPr sz="2800" b="1">
-                <a:solidFill>
-                  <a:srgbClr val="0078D7"/>
-                </a:solidFill>
-              </a:defRPr>
-            </a:pPr>
-            <a:r>
-              <a:t>https://mxuanvan02.github.io/ainatomy/</a:t>
-            </a:r>
-          </a:p>
-        </p:txBody>
-      </p:sp>
-      <p:sp>
-        <p:nvSpPr>
-          <p:cNvPr id="9" name="TextBox 8"/>
-          <p:cNvSpPr txBox="1"/>
-          <p:nvPr/>
-        </p:nvSpPr>
-        <p:spPr>
-          <a:xfrm>
-            <a:off x="914400" y="3657600"/>
-            <a:ext cx="10058400" cy="1828800"/>
-          </a:xfrm>
-          <a:prstGeom prst="rect">
-            <a:avLst/>
-          </a:prstGeom>
-          <a:noFill/>
-        </p:spPr>
-        <p:txBody>
-          <a:bodyPr wrap="none">
-            <a:spAutoFit/>
-          </a:bodyPr>
-          <a:lstStyle/>
-          <a:p>
-            <a:pPr algn="ctr">
-              <a:defRPr sz="1800">
-                <a:solidFill>
-                  <a:srgbClr val="333333"/>
-                </a:solidFill>
-              </a:defRPr>
-            </a:pPr>
-            <a:r>
-              <a:t>Mở trên trình duyệt — không cần cài đặt</a:t>
+            <a:pPr>
+              <a:spcBef>
+                <a:spcPts val="800"/>
+              </a:spcBef>
+              <a:spcAft>
+                <a:spcPts val="400"/>
+              </a:spcAft>
+              <a:defRPr sz="1500">
+                <a:solidFill>
+                  <a:srgbClr val="333333"/>
+                </a:solidFill>
+              </a:defRPr>
+            </a:pPr>
+            <a:r>
+              <a:t>• 1. Kịch bản 9 cảnh: Hành trình dữ liệu từ đầu vào đến đầu ra</a:t>
+            </a:r>
+          </a:p>
+          <a:p>
+            <a:pPr>
+              <a:spcBef>
+                <a:spcPts val="800"/>
+              </a:spcBef>
+              <a:spcAft>
+                <a:spcPts val="400"/>
+              </a:spcAft>
+              <a:defRPr sz="1500">
+                <a:solidFill>
+                  <a:srgbClr val="333333"/>
+                </a:solidFill>
+              </a:defRPr>
+            </a:pPr>
+            <a:r>
+              <a:t>• 2. Đấu trường bắt lỗi AI: 12 tình huống, 5 loại lỗi (bịa số liệu, nguồn giả, thiên kiến, suy luận sai, lộ dữ liệu)</a:t>
+            </a:r>
+          </a:p>
+          <a:p>
+            <a:pPr>
+              <a:spcBef>
+                <a:spcPts val="800"/>
+              </a:spcBef>
+              <a:spcAft>
+                <a:spcPts val="400"/>
+              </a:spcAft>
+              <a:defRPr sz="1500">
+                <a:solidFill>
+                  <a:srgbClr val="333333"/>
+                </a:solidFill>
+              </a:defRPr>
+            </a:pPr>
+            <a:r>
+              <a:t>• 3. Nhà máy AI 7 trạm: Từ nhập liệu → huấn luyện → đánh giá → triển khai</a:t>
+            </a:r>
+          </a:p>
+          <a:p>
+            <a:pPr>
+              <a:spcBef>
+                <a:spcPts val="800"/>
+              </a:spcBef>
+              <a:spcAft>
+                <a:spcPts val="400"/>
+              </a:spcAft>
+              <a:defRPr sz="1500">
+                <a:solidFill>
+                  <a:srgbClr val="333333"/>
+                </a:solidFill>
+              </a:defRPr>
+            </a:pPr>
+            <a:r>
+              <a:t>• 4. Xưởng huấn luyện 2 chiều: Perceptron học thật, phát hiện thiên kiến dữ liệu</a:t>
+            </a:r>
+          </a:p>
+          <a:p>
+            <a:pPr>
+              <a:spcBef>
+                <a:spcPts val="800"/>
+              </a:spcBef>
+              <a:spcAft>
+                <a:spcPts val="400"/>
+              </a:spcAft>
+              <a:defRPr sz="1500">
+                <a:solidFill>
+                  <a:srgbClr val="333333"/>
+                </a:solidFill>
+              </a:defRPr>
+            </a:pPr>
+            <a:r>
+              <a:t>• 5. Bản đồ năng lực: Theo dõi tiến bộ theo 13 chủ đề QĐ 2422 + 12 khối UNESCO</a:t>
+            </a:r>
+          </a:p>
+          <a:p>
+            <a:pPr>
+              <a:spcBef>
+                <a:spcPts val="800"/>
+              </a:spcBef>
+              <a:spcAft>
+                <a:spcPts val="400"/>
+              </a:spcAft>
+              <a:defRPr sz="1500">
+                <a:solidFill>
+                  <a:srgbClr val="333333"/>
+                </a:solidFill>
+              </a:defRPr>
+            </a:pPr>
+            <a:r>
+              <a:t>• </a:t>
+            </a:r>
+          </a:p>
+          <a:p>
+            <a:pPr>
+              <a:spcBef>
+                <a:spcPts val="800"/>
+              </a:spcBef>
+              <a:spcAft>
+                <a:spcPts val="400"/>
+              </a:spcAft>
+              <a:defRPr sz="1500">
+                <a:solidFill>
+                  <a:srgbClr val="333333"/>
+                </a:solidFill>
+              </a:defRPr>
+            </a:pPr>
+            <a:r>
+              <a:t>• Nguyên tắc: Lỗi do hệ cài sẵn → đáp án biết trước → chấm tất định, không cần LLM</a:t>
             </a:r>
           </a:p>
         </p:txBody>
@@ -5066,14 +7481,14 @@
         </p:nvSpPr>
         <p:spPr>
           <a:xfrm>
-            <a:off x="0" y="0"/>
-            <a:ext cx="12191695" cy="914400"/>
+            <a:off x="457200" y="868680"/>
+            <a:ext cx="11247120" cy="12700"/>
           </a:xfrm>
           <a:prstGeom prst="rect">
             <a:avLst/>
           </a:prstGeom>
           <a:solidFill>
-            <a:srgbClr val="0078D7"/>
+            <a:srgbClr val="B4B4B4"/>
           </a:solidFill>
           <a:ln>
             <a:noFill/>
@@ -5117,8 +7532,8 @@
         </p:blipFill>
         <p:spPr>
           <a:xfrm>
-            <a:off x="274320" y="137160"/>
-            <a:ext cx="640080" cy="640080"/>
+            <a:off x="457200" y="137160"/>
+            <a:ext cx="548640" cy="548640"/>
           </a:xfrm>
           <a:prstGeom prst="rect">
             <a:avLst/>
@@ -5141,8 +7556,8 @@
         </p:blipFill>
         <p:spPr>
           <a:xfrm>
-            <a:off x="1051560" y="137160"/>
-            <a:ext cx="640080" cy="640080"/>
+            <a:off x="1188720" y="137160"/>
+            <a:ext cx="548640" cy="548640"/>
           </a:xfrm>
           <a:prstGeom prst="rect">
             <a:avLst/>
@@ -5157,8 +7572,90 @@
         </p:nvSpPr>
         <p:spPr>
           <a:xfrm>
-            <a:off x="2011680" y="137160"/>
-            <a:ext cx="9144000" cy="457200"/>
+            <a:off x="1920240" y="137160"/>
+            <a:ext cx="3200400" cy="640080"/>
+          </a:xfrm>
+          <a:prstGeom prst="rect">
+            <a:avLst/>
+          </a:prstGeom>
+          <a:noFill/>
+        </p:spPr>
+        <p:txBody>
+          <a:bodyPr wrap="square">
+            <a:spAutoFit/>
+          </a:bodyPr>
+          <a:lstStyle/>
+          <a:p>
+            <a:pPr>
+              <a:defRPr sz="1100" b="1">
+                <a:solidFill>
+                  <a:srgbClr val="333333"/>
+                </a:solidFill>
+              </a:defRPr>
+            </a:pPr>
+            <a:r>
+              <a:t>TRƯỜNG THPT THUẬN HOÁ</a:t>
+            </a:r>
+          </a:p>
+          <a:p>
+            <a:pPr>
+              <a:defRPr sz="1000">
+                <a:solidFill>
+                  <a:srgbClr val="646464"/>
+                </a:solidFill>
+              </a:defRPr>
+            </a:pPr>
+            <a:r>
+              <a:t>Đại học Sư Phạm, Đại học Huế</a:t>
+            </a:r>
+          </a:p>
+        </p:txBody>
+      </p:sp>
+      <p:sp>
+        <p:nvSpPr>
+          <p:cNvPr id="6" name="TextBox 5"/>
+          <p:cNvSpPr txBox="1"/>
+          <p:nvPr/>
+        </p:nvSpPr>
+        <p:spPr>
+          <a:xfrm>
+            <a:off x="5303520" y="182880"/>
+            <a:ext cx="6400800" cy="640080"/>
+          </a:xfrm>
+          <a:prstGeom prst="rect">
+            <a:avLst/>
+          </a:prstGeom>
+          <a:noFill/>
+        </p:spPr>
+        <p:txBody>
+          <a:bodyPr wrap="square">
+            <a:spAutoFit/>
+          </a:bodyPr>
+          <a:lstStyle/>
+          <a:p>
+            <a:pPr algn="ctr">
+              <a:defRPr sz="1400" b="1">
+                <a:solidFill>
+                  <a:srgbClr val="333333"/>
+                </a:solidFill>
+              </a:defRPr>
+            </a:pPr>
+            <a:r>
+              <a:t>6. Tích hợp chương trình</a:t>
+            </a:r>
+          </a:p>
+        </p:txBody>
+      </p:sp>
+      <p:sp>
+        <p:nvSpPr>
+          <p:cNvPr id="7" name="TextBox 6"/>
+          <p:cNvSpPr txBox="1"/>
+          <p:nvPr/>
+        </p:nvSpPr>
+        <p:spPr>
+          <a:xfrm>
+            <a:off x="457200" y="6400800"/>
+            <a:ext cx="10972800" cy="365760"/>
           </a:xfrm>
           <a:prstGeom prst="rect">
             <a:avLst/>
@@ -5172,28 +7669,28 @@
           <a:lstStyle/>
           <a:p>
             <a:pPr>
-              <a:defRPr sz="2000" b="1">
-                <a:solidFill>
-                  <a:srgbClr val="FFFFFF"/>
-                </a:solidFill>
-              </a:defRPr>
-            </a:pPr>
-            <a:r>
-              <a:t>AInatomy — Phòng thực hành AI</a:t>
-            </a:r>
-          </a:p>
-        </p:txBody>
-      </p:sp>
-      <p:sp>
-        <p:nvSpPr>
-          <p:cNvPr id="6" name="TextBox 5"/>
+              <a:defRPr sz="1000">
+                <a:solidFill>
+                  <a:srgbClr val="646464"/>
+                </a:solidFill>
+              </a:defRPr>
+            </a:pPr>
+            <a:r>
+              <a:t>GV hướng dẫn: Mai Xuân Văn                                                                                           7</a:t>
+            </a:r>
+          </a:p>
+        </p:txBody>
+      </p:sp>
+      <p:sp>
+        <p:nvSpPr>
+          <p:cNvPr id="8" name="TextBox 7"/>
           <p:cNvSpPr txBox="1"/>
           <p:nvPr/>
         </p:nvSpPr>
         <p:spPr>
           <a:xfrm>
-            <a:off x="1371600" y="2560320"/>
-            <a:ext cx="9144000" cy="1371600"/>
+            <a:off x="457200" y="1097280"/>
+            <a:ext cx="10972800" cy="548640"/>
           </a:xfrm>
           <a:prstGeom prst="rect">
             <a:avLst/>
@@ -5206,15 +7703,456 @@
           </a:bodyPr>
           <a:lstStyle/>
           <a:p>
+            <a:pPr>
+              <a:defRPr sz="2800" b="1">
+                <a:solidFill>
+                  <a:srgbClr val="0066CC"/>
+                </a:solidFill>
+              </a:defRPr>
+            </a:pPr>
+            <a:r>
+              <a:t>Phủ 28 bài SGK Tin học 10</a:t>
+            </a:r>
+          </a:p>
+        </p:txBody>
+      </p:sp>
+      <p:sp>
+        <p:nvSpPr>
+          <p:cNvPr id="9" name="TextBox 8"/>
+          <p:cNvSpPr txBox="1"/>
+          <p:nvPr/>
+        </p:nvSpPr>
+        <p:spPr>
+          <a:xfrm>
+            <a:off x="640080" y="1828800"/>
+            <a:ext cx="5029200" cy="4389120"/>
+          </a:xfrm>
+          <a:prstGeom prst="rect">
+            <a:avLst/>
+          </a:prstGeom>
+          <a:noFill/>
+        </p:spPr>
+        <p:txBody>
+          <a:bodyPr wrap="square">
+            <a:spAutoFit/>
+          </a:bodyPr>
+          <a:lstStyle/>
+          <a:p>
+            <a:pPr>
+              <a:defRPr sz="1800" b="1">
+                <a:solidFill>
+                  <a:srgbClr val="0066CC"/>
+                </a:solidFill>
+              </a:defRPr>
+            </a:pPr>
+            <a:r>
+              <a:t>Chủ đề SGK → Mạch QĐ 2422</a:t>
+            </a:r>
+          </a:p>
+          <a:p>
+            <a:pPr>
+              <a:spcBef>
+                <a:spcPts val="600"/>
+              </a:spcBef>
+              <a:defRPr sz="1400">
+                <a:solidFill>
+                  <a:srgbClr val="333333"/>
+                </a:solidFill>
+              </a:defRPr>
+            </a:pPr>
+            <a:r>
+              <a:t>• A. Máy tính &amp; xã hội tri thức → Mạch A, B</a:t>
+            </a:r>
+          </a:p>
+          <a:p>
+            <a:pPr>
+              <a:spcBef>
+                <a:spcPts val="600"/>
+              </a:spcBef>
+              <a:defRPr sz="1400">
+                <a:solidFill>
+                  <a:srgbClr val="333333"/>
+                </a:solidFill>
+              </a:defRPr>
+            </a:pPr>
+            <a:r>
+              <a:t>• B. Mạng máy tính &amp; Internet → Mạch B, C</a:t>
+            </a:r>
+          </a:p>
+          <a:p>
+            <a:pPr>
+              <a:spcBef>
+                <a:spcPts val="600"/>
+              </a:spcBef>
+              <a:defRPr sz="1400">
+                <a:solidFill>
+                  <a:srgbClr val="333333"/>
+                </a:solidFill>
+              </a:defRPr>
+            </a:pPr>
+            <a:r>
+              <a:t>• D. Đạo đức, pháp luật số → Mạch A, B</a:t>
+            </a:r>
+          </a:p>
+          <a:p>
+            <a:pPr>
+              <a:spcBef>
+                <a:spcPts val="600"/>
+              </a:spcBef>
+              <a:defRPr sz="1400">
+                <a:solidFill>
+                  <a:srgbClr val="333333"/>
+                </a:solidFill>
+              </a:defRPr>
+            </a:pPr>
+            <a:r>
+              <a:t>• E. Thiết kế đồ họa (ICT) → Mạch C</a:t>
+            </a:r>
+          </a:p>
+          <a:p>
+            <a:pPr>
+              <a:spcBef>
+                <a:spcPts val="600"/>
+              </a:spcBef>
+              <a:defRPr sz="1400">
+                <a:solidFill>
+                  <a:srgbClr val="333333"/>
+                </a:solidFill>
+              </a:defRPr>
+            </a:pPr>
+            <a:r>
+              <a:t>• F. Giải quyết vấn đề → Mạch C, D</a:t>
+            </a:r>
+          </a:p>
+          <a:p>
+            <a:pPr>
+              <a:spcBef>
+                <a:spcPts val="600"/>
+              </a:spcBef>
+              <a:defRPr sz="1400">
+                <a:solidFill>
+                  <a:srgbClr val="333333"/>
+                </a:solidFill>
+              </a:defRPr>
+            </a:pPr>
+            <a:r>
+              <a:t>• G. Hướng nghiệp (CS) → Mạch A, C</a:t>
+            </a:r>
+          </a:p>
+        </p:txBody>
+      </p:sp>
+      <p:sp>
+        <p:nvSpPr>
+          <p:cNvPr id="10" name="TextBox 9"/>
+          <p:cNvSpPr txBox="1"/>
+          <p:nvPr/>
+        </p:nvSpPr>
+        <p:spPr>
+          <a:xfrm>
+            <a:off x="5943600" y="1828800"/>
+            <a:ext cx="5029200" cy="4389120"/>
+          </a:xfrm>
+          <a:prstGeom prst="rect">
+            <a:avLst/>
+          </a:prstGeom>
+          <a:noFill/>
+        </p:spPr>
+        <p:txBody>
+          <a:bodyPr wrap="square">
+            <a:spAutoFit/>
+          </a:bodyPr>
+          <a:lstStyle/>
+          <a:p>
+            <a:pPr>
+              <a:defRPr sz="1800" b="1">
+                <a:solidFill>
+                  <a:srgbClr val="0066CC"/>
+                </a:solidFill>
+              </a:defRPr>
+            </a:pPr>
+            <a:r>
+              <a:t>Phân phối 12 tiết đề xuất</a:t>
+            </a:r>
+          </a:p>
+          <a:p>
+            <a:pPr>
+              <a:spcBef>
+                <a:spcPts val="600"/>
+              </a:spcBef>
+              <a:defRPr sz="1400">
+                <a:solidFill>
+                  <a:srgbClr val="333333"/>
+                </a:solidFill>
+              </a:defRPr>
+            </a:pPr>
+            <a:r>
+              <a:t>• Tiết 1-3: Mạch A-B (Kịch bản + Đấu trường)</a:t>
+            </a:r>
+          </a:p>
+          <a:p>
+            <a:pPr>
+              <a:spcBef>
+                <a:spcPts val="600"/>
+              </a:spcBef>
+              <a:defRPr sz="1400">
+                <a:solidFill>
+                  <a:srgbClr val="333333"/>
+                </a:solidFill>
+              </a:defRPr>
+            </a:pPr>
+            <a:r>
+              <a:t>• Tiết 4-5: Mạch C (Nhà máy Trạm 0-1-5)</a:t>
+            </a:r>
+          </a:p>
+          <a:p>
+            <a:pPr>
+              <a:spcBef>
+                <a:spcPts val="600"/>
+              </a:spcBef>
+              <a:defRPr sz="1400">
+                <a:solidFill>
+                  <a:srgbClr val="333333"/>
+                </a:solidFill>
+              </a:defRPr>
+            </a:pPr>
+            <a:r>
+              <a:t>• Tiết 6-7: Mạch C (Xưởng huấn luyện)</a:t>
+            </a:r>
+          </a:p>
+          <a:p>
+            <a:pPr>
+              <a:spcBef>
+                <a:spcPts val="600"/>
+              </a:spcBef>
+              <a:defRPr sz="1400">
+                <a:solidFill>
+                  <a:srgbClr val="333333"/>
+                </a:solidFill>
+              </a:defRPr>
+            </a:pPr>
+            <a:r>
+              <a:t>• Tiết 8: Mạch D (Nhà máy 7 trạm)</a:t>
+            </a:r>
+          </a:p>
+          <a:p>
+            <a:pPr>
+              <a:spcBef>
+                <a:spcPts val="600"/>
+              </a:spcBef>
+              <a:defRPr sz="1400">
+                <a:solidFill>
+                  <a:srgbClr val="333333"/>
+                </a:solidFill>
+              </a:defRPr>
+            </a:pPr>
+            <a:r>
+              <a:t>• Tiết 9-10: Ôn tập + Kiểm tra</a:t>
+            </a:r>
+          </a:p>
+          <a:p>
+            <a:pPr>
+              <a:spcBef>
+                <a:spcPts val="600"/>
+              </a:spcBef>
+              <a:defRPr sz="1400">
+                <a:solidFill>
+                  <a:srgbClr val="333333"/>
+                </a:solidFill>
+              </a:defRPr>
+            </a:pPr>
+            <a:r>
+              <a:t>• Tiết 11-12: Dự án + Tổng kết</a:t>
+            </a:r>
+          </a:p>
+        </p:txBody>
+      </p:sp>
+    </p:spTree>
+  </p:cSld>
+  <p:clrMapOvr>
+    <a:masterClrMapping/>
+  </p:clrMapOvr>
+</p:sld>
+</file>
+
+<file path=ppt/slides/slide8.xml><?xml version="1.0" encoding="utf-8"?>
+<p:sld xmlns:a="http://schemas.openxmlformats.org/drawingml/2006/main" xmlns:p="http://schemas.openxmlformats.org/presentationml/2006/main" xmlns:r="http://schemas.openxmlformats.org/officeDocument/2006/relationships">
+  <p:cSld>
+    <p:spTree>
+      <p:nvGrpSpPr>
+        <p:cNvPr id="1" name=""/>
+        <p:cNvGrpSpPr/>
+        <p:nvPr/>
+      </p:nvGrpSpPr>
+      <p:grpSpPr/>
+      <p:sp>
+        <p:nvSpPr>
+          <p:cNvPr id="2" name="Rectangle 1"/>
+          <p:cNvSpPr/>
+          <p:nvPr/>
+        </p:nvSpPr>
+        <p:spPr>
+          <a:xfrm>
+            <a:off x="457200" y="868680"/>
+            <a:ext cx="11247120" cy="12700"/>
+          </a:xfrm>
+          <a:prstGeom prst="rect">
+            <a:avLst/>
+          </a:prstGeom>
+          <a:solidFill>
+            <a:srgbClr val="B4B4B4"/>
+          </a:solidFill>
+          <a:ln>
+            <a:noFill/>
+          </a:ln>
+        </p:spPr>
+        <p:style>
+          <a:lnRef idx="1">
+            <a:schemeClr val="accent1"/>
+          </a:lnRef>
+          <a:fillRef idx="3">
+            <a:schemeClr val="accent1"/>
+          </a:fillRef>
+          <a:effectRef idx="2">
+            <a:schemeClr val="accent1"/>
+          </a:effectRef>
+          <a:fontRef idx="minor">
+            <a:schemeClr val="lt1"/>
+          </a:fontRef>
+        </p:style>
+        <p:txBody>
+          <a:bodyPr rtlCol="0" anchor="ctr"/>
+          <a:lstStyle/>
+          <a:p>
+            <a:pPr algn="ctr"/>
+          </a:p>
+        </p:txBody>
+      </p:sp>
+      <p:pic>
+        <p:nvPicPr>
+          <p:cNvPr id="3" name="Picture 2" descr="logo_dhsp_hue.png"/>
+          <p:cNvPicPr>
+            <a:picLocks noChangeAspect="1"/>
+          </p:cNvPicPr>
+          <p:nvPr/>
+        </p:nvPicPr>
+        <p:blipFill>
+          <a:blip r:embed="rId2"/>
+          <a:stretch>
+            <a:fillRect/>
+          </a:stretch>
+        </p:blipFill>
+        <p:spPr>
+          <a:xfrm>
+            <a:off x="457200" y="137160"/>
+            <a:ext cx="548640" cy="548640"/>
+          </a:xfrm>
+          <a:prstGeom prst="rect">
+            <a:avLst/>
+          </a:prstGeom>
+        </p:spPr>
+      </p:pic>
+      <p:pic>
+        <p:nvPicPr>
+          <p:cNvPr id="4" name="Picture 3" descr="logo_thpt_thuan_hoa.jpg"/>
+          <p:cNvPicPr>
+            <a:picLocks noChangeAspect="1"/>
+          </p:cNvPicPr>
+          <p:nvPr/>
+        </p:nvPicPr>
+        <p:blipFill>
+          <a:blip r:embed="rId3"/>
+          <a:stretch>
+            <a:fillRect/>
+          </a:stretch>
+        </p:blipFill>
+        <p:spPr>
+          <a:xfrm>
+            <a:off x="1188720" y="137160"/>
+            <a:ext cx="548640" cy="548640"/>
+          </a:xfrm>
+          <a:prstGeom prst="rect">
+            <a:avLst/>
+          </a:prstGeom>
+        </p:spPr>
+      </p:pic>
+      <p:sp>
+        <p:nvSpPr>
+          <p:cNvPr id="5" name="TextBox 4"/>
+          <p:cNvSpPr txBox="1"/>
+          <p:nvPr/>
+        </p:nvSpPr>
+        <p:spPr>
+          <a:xfrm>
+            <a:off x="1920240" y="137160"/>
+            <a:ext cx="3200400" cy="640080"/>
+          </a:xfrm>
+          <a:prstGeom prst="rect">
+            <a:avLst/>
+          </a:prstGeom>
+          <a:noFill/>
+        </p:spPr>
+        <p:txBody>
+          <a:bodyPr wrap="square">
+            <a:spAutoFit/>
+          </a:bodyPr>
+          <a:lstStyle/>
+          <a:p>
+            <a:pPr>
+              <a:defRPr sz="1100" b="1">
+                <a:solidFill>
+                  <a:srgbClr val="333333"/>
+                </a:solidFill>
+              </a:defRPr>
+            </a:pPr>
+            <a:r>
+              <a:t>TRƯỜNG THPT THUẬN HOÁ</a:t>
+            </a:r>
+          </a:p>
+          <a:p>
+            <a:pPr>
+              <a:defRPr sz="1000">
+                <a:solidFill>
+                  <a:srgbClr val="646464"/>
+                </a:solidFill>
+              </a:defRPr>
+            </a:pPr>
+            <a:r>
+              <a:t>Đại học Sư Phạm, Đại học Huế</a:t>
+            </a:r>
+          </a:p>
+        </p:txBody>
+      </p:sp>
+      <p:sp>
+        <p:nvSpPr>
+          <p:cNvPr id="6" name="TextBox 5"/>
+          <p:cNvSpPr txBox="1"/>
+          <p:nvPr/>
+        </p:nvSpPr>
+        <p:spPr>
+          <a:xfrm>
+            <a:off x="5303520" y="182880"/>
+            <a:ext cx="6400800" cy="640080"/>
+          </a:xfrm>
+          <a:prstGeom prst="rect">
+            <a:avLst/>
+          </a:prstGeom>
+          <a:noFill/>
+        </p:spPr>
+        <p:txBody>
+          <a:bodyPr wrap="square">
+            <a:spAutoFit/>
+          </a:bodyPr>
+          <a:lstStyle/>
+          <a:p>
             <a:pPr algn="ctr">
-              <a:defRPr sz="5400" b="1">
-                <a:solidFill>
-                  <a:srgbClr val="333333"/>
-                </a:solidFill>
-              </a:defRPr>
-            </a:pPr>
-            <a:r>
-              <a:t>Cảm ơn</a:t>
+              <a:defRPr sz="1400" b="1">
+                <a:solidFill>
+                  <a:srgbClr val="333333"/>
+                </a:solidFill>
+              </a:defRPr>
+            </a:pPr>
+            <a:r>
+              <a:t>7. Kết quả nghiệm thu</a:t>
             </a:r>
           </a:p>
         </p:txBody>
@@ -5227,8 +8165,8 @@
         </p:nvSpPr>
         <p:spPr>
           <a:xfrm>
-            <a:off x="1371600" y="4114800"/>
-            <a:ext cx="9144000" cy="1371600"/>
+            <a:off x="457200" y="6400800"/>
+            <a:ext cx="10972800" cy="365760"/>
           </a:xfrm>
           <a:prstGeom prst="rect">
             <a:avLst/>
@@ -5241,23 +8179,789 @@
           </a:bodyPr>
           <a:lstStyle/>
           <a:p>
+            <a:pPr>
+              <a:defRPr sz="1000">
+                <a:solidFill>
+                  <a:srgbClr val="646464"/>
+                </a:solidFill>
+              </a:defRPr>
+            </a:pPr>
+            <a:r>
+              <a:t>GV hướng dẫn: Mai Xuân Văn                                                                                           8</a:t>
+            </a:r>
+          </a:p>
+        </p:txBody>
+      </p:sp>
+      <p:sp>
+        <p:nvSpPr>
+          <p:cNvPr id="8" name="TextBox 7"/>
+          <p:cNvSpPr txBox="1"/>
+          <p:nvPr/>
+        </p:nvSpPr>
+        <p:spPr>
+          <a:xfrm>
+            <a:off x="457200" y="1097280"/>
+            <a:ext cx="10972800" cy="548640"/>
+          </a:xfrm>
+          <a:prstGeom prst="rect">
+            <a:avLst/>
+          </a:prstGeom>
+          <a:noFill/>
+        </p:spPr>
+        <p:txBody>
+          <a:bodyPr wrap="none">
+            <a:spAutoFit/>
+          </a:bodyPr>
+          <a:lstStyle/>
+          <a:p>
+            <a:pPr>
+              <a:defRPr sz="2800" b="1">
+                <a:solidFill>
+                  <a:srgbClr val="0066CC"/>
+                </a:solidFill>
+              </a:defRPr>
+            </a:pPr>
+            <a:r>
+              <a:t>Hệ thống kiểm chứng tự động</a:t>
+            </a:r>
+          </a:p>
+        </p:txBody>
+      </p:sp>
+      <p:sp>
+        <p:nvSpPr>
+          <p:cNvPr id="9" name="TextBox 8"/>
+          <p:cNvSpPr txBox="1"/>
+          <p:nvPr/>
+        </p:nvSpPr>
+        <p:spPr>
+          <a:xfrm>
+            <a:off x="640080" y="1828800"/>
+            <a:ext cx="10515600" cy="4389120"/>
+          </a:xfrm>
+          <a:prstGeom prst="rect">
+            <a:avLst/>
+          </a:prstGeom>
+          <a:noFill/>
+        </p:spPr>
+        <p:txBody>
+          <a:bodyPr wrap="square">
+            <a:spAutoFit/>
+          </a:bodyPr>
+          <a:lstStyle/>
+          <a:p>
+            <a:pPr>
+              <a:spcBef>
+                <a:spcPts val="800"/>
+              </a:spcBef>
+              <a:spcAft>
+                <a:spcPts val="400"/>
+              </a:spcAft>
+              <a:defRPr sz="1500">
+                <a:solidFill>
+                  <a:srgbClr val="333333"/>
+                </a:solidFill>
+              </a:defRPr>
+            </a:pPr>
+            <a:r>
+              <a:t>• 97/97 tiêu chí nghiệm thu đạt (tools/nghiem_thu.py)</a:t>
+            </a:r>
+          </a:p>
+          <a:p>
+            <a:pPr>
+              <a:spcBef>
+                <a:spcPts val="800"/>
+              </a:spcBef>
+              <a:spcAft>
+                <a:spcPts val="400"/>
+              </a:spcAft>
+              <a:defRPr sz="1500">
+                <a:solidFill>
+                  <a:srgbClr val="333333"/>
+                </a:solidFill>
+              </a:defRPr>
+            </a:pPr>
+            <a:r>
+              <a:t>• 22/22 YCCĐ lớp 10 được phủ (tools/tinh_do_phu.py)</a:t>
+            </a:r>
+          </a:p>
+          <a:p>
+            <a:pPr>
+              <a:spcBef>
+                <a:spcPts val="800"/>
+              </a:spcBef>
+              <a:spcAft>
+                <a:spcPts val="400"/>
+              </a:spcAft>
+              <a:defRPr sz="1500">
+                <a:solidFill>
+                  <a:srgbClr val="333333"/>
+                </a:solidFill>
+              </a:defRPr>
+            </a:pPr>
+            <a:r>
+              <a:t>• 133 tệp trong manifest, hash khớp 100% (SHA256SUMS.txt)</a:t>
+            </a:r>
+          </a:p>
+          <a:p>
+            <a:pPr>
+              <a:spcBef>
+                <a:spcPts val="800"/>
+              </a:spcBef>
+              <a:spcAft>
+                <a:spcPts val="400"/>
+              </a:spcAft>
+              <a:defRPr sz="1500">
+                <a:solidFill>
+                  <a:srgbClr val="333333"/>
+                </a:solidFill>
+              </a:defRPr>
+            </a:pPr>
+            <a:r>
+              <a:t>• 0 lỗi nội dung (tools/kiem_noi_dung.py)</a:t>
+            </a:r>
+          </a:p>
+          <a:p>
+            <a:pPr>
+              <a:spcBef>
+                <a:spcPts val="800"/>
+              </a:spcBef>
+              <a:spcAft>
+                <a:spcPts val="400"/>
+              </a:spcAft>
+              <a:defRPr sz="1500">
+                <a:solidFill>
+                  <a:srgbClr val="333333"/>
+                </a:solidFill>
+              </a:defRPr>
+            </a:pPr>
+            <a:r>
+              <a:t>• </a:t>
+            </a:r>
+          </a:p>
+          <a:p>
+            <a:pPr>
+              <a:spcBef>
+                <a:spcPts val="800"/>
+              </a:spcBef>
+              <a:spcAft>
+                <a:spcPts val="400"/>
+              </a:spcAft>
+              <a:defRPr sz="1500">
+                <a:solidFill>
+                  <a:srgbClr val="333333"/>
+                </a:solidFill>
+              </a:defRPr>
+            </a:pPr>
+            <a:r>
+              <a:t>• Bộ mutation test chứng minh cổng có răng:</a:t>
+            </a:r>
+          </a:p>
+          <a:p>
+            <a:pPr>
+              <a:spcBef>
+                <a:spcPts val="800"/>
+              </a:spcBef>
+              <a:spcAft>
+                <a:spcPts val="400"/>
+              </a:spcAft>
+              <a:defRPr sz="1500">
+                <a:solidFill>
+                  <a:srgbClr val="333333"/>
+                </a:solidFill>
+              </a:defRPr>
+            </a:pPr>
+            <a:r>
+              <a:t>  — 48 ca phá được thiết kế để kiểm tra từng cổng</a:t>
+            </a:r>
+          </a:p>
+          <a:p>
+            <a:pPr>
+              <a:spcBef>
+                <a:spcPts val="800"/>
+              </a:spcBef>
+              <a:spcAft>
+                <a:spcPts val="400"/>
+              </a:spcAft>
+              <a:defRPr sz="1500">
+                <a:solidFill>
+                  <a:srgbClr val="333333"/>
+                </a:solidFill>
+              </a:defRPr>
+            </a:pPr>
+            <a:r>
+              <a:t>  — Phân biệt ca PHÁ với ca ĐỐI CHỨNG ÂM</a:t>
+            </a:r>
+          </a:p>
+          <a:p>
+            <a:pPr>
+              <a:spcBef>
+                <a:spcPts val="800"/>
+              </a:spcBef>
+              <a:spcAft>
+                <a:spcPts val="400"/>
+              </a:spcAft>
+              <a:defRPr sz="1500">
+                <a:solidFill>
+                  <a:srgbClr val="333333"/>
+                </a:solidFill>
+              </a:defRPr>
+            </a:pPr>
+            <a:r>
+              <a:t>  — Đếm theo CẤP CA, không đếm dòng</a:t>
+            </a:r>
+          </a:p>
+          <a:p>
+            <a:pPr>
+              <a:spcBef>
+                <a:spcPts val="800"/>
+              </a:spcBef>
+              <a:spcAft>
+                <a:spcPts val="400"/>
+              </a:spcAft>
+              <a:defRPr sz="1500">
+                <a:solidFill>
+                  <a:srgbClr val="333333"/>
+                </a:solidFill>
+              </a:defRPr>
+            </a:pPr>
+            <a:r>
+              <a:t>• </a:t>
+            </a:r>
+          </a:p>
+          <a:p>
+            <a:pPr>
+              <a:spcBef>
+                <a:spcPts val="800"/>
+              </a:spcBef>
+              <a:spcAft>
+                <a:spcPts val="400"/>
+              </a:spcAft>
+              <a:defRPr sz="1500">
+                <a:solidFill>
+                  <a:srgbClr val="333333"/>
+                </a:solidFill>
+              </a:defRPr>
+            </a:pPr>
+            <a:r>
+              <a:t>• Công cụ tự suy gốc repo, không ghi cứng đường dẫn máy tác giả</a:t>
+            </a:r>
+          </a:p>
+        </p:txBody>
+      </p:sp>
+    </p:spTree>
+  </p:cSld>
+  <p:clrMapOvr>
+    <a:masterClrMapping/>
+  </p:clrMapOvr>
+</p:sld>
+</file>
+
+<file path=ppt/slides/slide9.xml><?xml version="1.0" encoding="utf-8"?>
+<p:sld xmlns:a="http://schemas.openxmlformats.org/drawingml/2006/main" xmlns:p="http://schemas.openxmlformats.org/presentationml/2006/main" xmlns:r="http://schemas.openxmlformats.org/officeDocument/2006/relationships">
+  <p:cSld>
+    <p:spTree>
+      <p:nvGrpSpPr>
+        <p:cNvPr id="1" name=""/>
+        <p:cNvGrpSpPr/>
+        <p:nvPr/>
+      </p:nvGrpSpPr>
+      <p:grpSpPr/>
+      <p:sp>
+        <p:nvSpPr>
+          <p:cNvPr id="2" name="Rectangle 1"/>
+          <p:cNvSpPr/>
+          <p:nvPr/>
+        </p:nvSpPr>
+        <p:spPr>
+          <a:xfrm>
+            <a:off x="457200" y="868680"/>
+            <a:ext cx="11247120" cy="12700"/>
+          </a:xfrm>
+          <a:prstGeom prst="rect">
+            <a:avLst/>
+          </a:prstGeom>
+          <a:solidFill>
+            <a:srgbClr val="B4B4B4"/>
+          </a:solidFill>
+          <a:ln>
+            <a:noFill/>
+          </a:ln>
+        </p:spPr>
+        <p:style>
+          <a:lnRef idx="1">
+            <a:schemeClr val="accent1"/>
+          </a:lnRef>
+          <a:fillRef idx="3">
+            <a:schemeClr val="accent1"/>
+          </a:fillRef>
+          <a:effectRef idx="2">
+            <a:schemeClr val="accent1"/>
+          </a:effectRef>
+          <a:fontRef idx="minor">
+            <a:schemeClr val="lt1"/>
+          </a:fontRef>
+        </p:style>
+        <p:txBody>
+          <a:bodyPr rtlCol="0" anchor="ctr"/>
+          <a:lstStyle/>
+          <a:p>
+            <a:pPr algn="ctr"/>
+          </a:p>
+        </p:txBody>
+      </p:sp>
+      <p:pic>
+        <p:nvPicPr>
+          <p:cNvPr id="3" name="Picture 2" descr="logo_dhsp_hue.png"/>
+          <p:cNvPicPr>
+            <a:picLocks noChangeAspect="1"/>
+          </p:cNvPicPr>
+          <p:nvPr/>
+        </p:nvPicPr>
+        <p:blipFill>
+          <a:blip r:embed="rId2"/>
+          <a:stretch>
+            <a:fillRect/>
+          </a:stretch>
+        </p:blipFill>
+        <p:spPr>
+          <a:xfrm>
+            <a:off x="457200" y="137160"/>
+            <a:ext cx="548640" cy="548640"/>
+          </a:xfrm>
+          <a:prstGeom prst="rect">
+            <a:avLst/>
+          </a:prstGeom>
+        </p:spPr>
+      </p:pic>
+      <p:pic>
+        <p:nvPicPr>
+          <p:cNvPr id="4" name="Picture 3" descr="logo_thpt_thuan_hoa.jpg"/>
+          <p:cNvPicPr>
+            <a:picLocks noChangeAspect="1"/>
+          </p:cNvPicPr>
+          <p:nvPr/>
+        </p:nvPicPr>
+        <p:blipFill>
+          <a:blip r:embed="rId3"/>
+          <a:stretch>
+            <a:fillRect/>
+          </a:stretch>
+        </p:blipFill>
+        <p:spPr>
+          <a:xfrm>
+            <a:off x="1188720" y="137160"/>
+            <a:ext cx="548640" cy="548640"/>
+          </a:xfrm>
+          <a:prstGeom prst="rect">
+            <a:avLst/>
+          </a:prstGeom>
+        </p:spPr>
+      </p:pic>
+      <p:sp>
+        <p:nvSpPr>
+          <p:cNvPr id="5" name="TextBox 4"/>
+          <p:cNvSpPr txBox="1"/>
+          <p:nvPr/>
+        </p:nvSpPr>
+        <p:spPr>
+          <a:xfrm>
+            <a:off x="1920240" y="137160"/>
+            <a:ext cx="3200400" cy="640080"/>
+          </a:xfrm>
+          <a:prstGeom prst="rect">
+            <a:avLst/>
+          </a:prstGeom>
+          <a:noFill/>
+        </p:spPr>
+        <p:txBody>
+          <a:bodyPr wrap="square">
+            <a:spAutoFit/>
+          </a:bodyPr>
+          <a:lstStyle/>
+          <a:p>
+            <a:pPr>
+              <a:defRPr sz="1100" b="1">
+                <a:solidFill>
+                  <a:srgbClr val="333333"/>
+                </a:solidFill>
+              </a:defRPr>
+            </a:pPr>
+            <a:r>
+              <a:t>TRƯỜNG THPT THUẬN HOÁ</a:t>
+            </a:r>
+          </a:p>
+          <a:p>
+            <a:pPr>
+              <a:defRPr sz="1000">
+                <a:solidFill>
+                  <a:srgbClr val="646464"/>
+                </a:solidFill>
+              </a:defRPr>
+            </a:pPr>
+            <a:r>
+              <a:t>Đại học Sư Phạm, Đại học Huế</a:t>
+            </a:r>
+          </a:p>
+        </p:txBody>
+      </p:sp>
+      <p:sp>
+        <p:nvSpPr>
+          <p:cNvPr id="6" name="TextBox 5"/>
+          <p:cNvSpPr txBox="1"/>
+          <p:nvPr/>
+        </p:nvSpPr>
+        <p:spPr>
+          <a:xfrm>
+            <a:off x="5303520" y="182880"/>
+            <a:ext cx="6400800" cy="640080"/>
+          </a:xfrm>
+          <a:prstGeom prst="rect">
+            <a:avLst/>
+          </a:prstGeom>
+          <a:noFill/>
+        </p:spPr>
+        <p:txBody>
+          <a:bodyPr wrap="square">
+            <a:spAutoFit/>
+          </a:bodyPr>
+          <a:lstStyle/>
+          <a:p>
             <a:pPr algn="ctr">
-              <a:defRPr sz="2000">
-                <a:solidFill>
-                  <a:srgbClr val="333333"/>
-                </a:solidFill>
-              </a:defRPr>
-            </a:pPr>
-            <a:r>
-              <a:t>Trường THPT Thuận Hoá</a:t>
-            </a:r>
-            <a:br/>
-            <a:r>
-              <a:t>Đại học Sư Phạm, Đại học Huế</a:t>
-            </a:r>
-            <a:br/>
-            <a:r>
-              <a:t>GV: Mai Xuân Văn</a:t>
+              <a:defRPr sz="1400" b="1">
+                <a:solidFill>
+                  <a:srgbClr val="333333"/>
+                </a:solidFill>
+              </a:defRPr>
+            </a:pPr>
+            <a:r>
+              <a:t>8. Đổi mới sư phạm</a:t>
+            </a:r>
+          </a:p>
+        </p:txBody>
+      </p:sp>
+      <p:sp>
+        <p:nvSpPr>
+          <p:cNvPr id="7" name="TextBox 6"/>
+          <p:cNvSpPr txBox="1"/>
+          <p:nvPr/>
+        </p:nvSpPr>
+        <p:spPr>
+          <a:xfrm>
+            <a:off x="457200" y="6400800"/>
+            <a:ext cx="10972800" cy="365760"/>
+          </a:xfrm>
+          <a:prstGeom prst="rect">
+            <a:avLst/>
+          </a:prstGeom>
+          <a:noFill/>
+        </p:spPr>
+        <p:txBody>
+          <a:bodyPr wrap="none">
+            <a:spAutoFit/>
+          </a:bodyPr>
+          <a:lstStyle/>
+          <a:p>
+            <a:pPr>
+              <a:defRPr sz="1000">
+                <a:solidFill>
+                  <a:srgbClr val="646464"/>
+                </a:solidFill>
+              </a:defRPr>
+            </a:pPr>
+            <a:r>
+              <a:t>GV hướng dẫn: Mai Xuân Văn                                                                                           9</a:t>
+            </a:r>
+          </a:p>
+        </p:txBody>
+      </p:sp>
+      <p:sp>
+        <p:nvSpPr>
+          <p:cNvPr id="8" name="TextBox 7"/>
+          <p:cNvSpPr txBox="1"/>
+          <p:nvPr/>
+        </p:nvSpPr>
+        <p:spPr>
+          <a:xfrm>
+            <a:off x="457200" y="1097280"/>
+            <a:ext cx="10972800" cy="548640"/>
+          </a:xfrm>
+          <a:prstGeom prst="rect">
+            <a:avLst/>
+          </a:prstGeom>
+          <a:noFill/>
+        </p:spPr>
+        <p:txBody>
+          <a:bodyPr wrap="none">
+            <a:spAutoFit/>
+          </a:bodyPr>
+          <a:lstStyle/>
+          <a:p>
+            <a:pPr>
+              <a:defRPr sz="2800" b="1">
+                <a:solidFill>
+                  <a:srgbClr val="0066CC"/>
+                </a:solidFill>
+              </a:defRPr>
+            </a:pPr>
+            <a:r>
+              <a:t>Nguyên tắc thiết kế</a:t>
+            </a:r>
+          </a:p>
+        </p:txBody>
+      </p:sp>
+      <p:sp>
+        <p:nvSpPr>
+          <p:cNvPr id="9" name="TextBox 8"/>
+          <p:cNvSpPr txBox="1"/>
+          <p:nvPr/>
+        </p:nvSpPr>
+        <p:spPr>
+          <a:xfrm>
+            <a:off x="640080" y="1828800"/>
+            <a:ext cx="10515600" cy="4389120"/>
+          </a:xfrm>
+          <a:prstGeom prst="rect">
+            <a:avLst/>
+          </a:prstGeom>
+          <a:noFill/>
+        </p:spPr>
+        <p:txBody>
+          <a:bodyPr wrap="square">
+            <a:spAutoFit/>
+          </a:bodyPr>
+          <a:lstStyle/>
+          <a:p>
+            <a:pPr>
+              <a:spcBef>
+                <a:spcPts val="800"/>
+              </a:spcBef>
+              <a:spcAft>
+                <a:spcPts val="400"/>
+              </a:spcAft>
+              <a:defRPr sz="1500">
+                <a:solidFill>
+                  <a:srgbClr val="333333"/>
+                </a:solidFill>
+              </a:defRPr>
+            </a:pPr>
+            <a:r>
+              <a:t>• Học sinh bắt lỗi AI thay vì hỏi AI:</a:t>
+            </a:r>
+          </a:p>
+          <a:p>
+            <a:pPr>
+              <a:spcBef>
+                <a:spcPts val="800"/>
+              </a:spcBef>
+              <a:spcAft>
+                <a:spcPts val="400"/>
+              </a:spcAft>
+              <a:defRPr sz="1500">
+                <a:solidFill>
+                  <a:srgbClr val="333333"/>
+                </a:solidFill>
+              </a:defRPr>
+            </a:pPr>
+            <a:r>
+              <a:t>  — 78 câu trong ngân hàng, chia theo 5 nhóm lỗi</a:t>
+            </a:r>
+          </a:p>
+          <a:p>
+            <a:pPr>
+              <a:spcBef>
+                <a:spcPts val="800"/>
+              </a:spcBef>
+              <a:spcAft>
+                <a:spcPts val="400"/>
+              </a:spcAft>
+              <a:defRPr sz="1500">
+                <a:solidFill>
+                  <a:srgbClr val="333333"/>
+                </a:solidFill>
+              </a:defRPr>
+            </a:pPr>
+            <a:r>
+              <a:t>  — Chế độ luyện tập, tiền kiểm tra, hậu kiểm tra</a:t>
+            </a:r>
+          </a:p>
+          <a:p>
+            <a:pPr>
+              <a:spcBef>
+                <a:spcPts val="800"/>
+              </a:spcBef>
+              <a:spcAft>
+                <a:spcPts val="400"/>
+              </a:spcAft>
+              <a:defRPr sz="1500">
+                <a:solidFill>
+                  <a:srgbClr val="333333"/>
+                </a:solidFill>
+              </a:defRPr>
+            </a:pPr>
+            <a:r>
+              <a:t>  — So sánh tiến bộ qua các lần kiểm tra</a:t>
+            </a:r>
+          </a:p>
+          <a:p>
+            <a:pPr>
+              <a:spcBef>
+                <a:spcPts val="800"/>
+              </a:spcBef>
+              <a:spcAft>
+                <a:spcPts val="400"/>
+              </a:spcAft>
+              <a:defRPr sz="1500">
+                <a:solidFill>
+                  <a:srgbClr val="333333"/>
+                </a:solidFill>
+              </a:defRPr>
+            </a:pPr>
+            <a:r>
+              <a:t>• </a:t>
+            </a:r>
+          </a:p>
+          <a:p>
+            <a:pPr>
+              <a:spcBef>
+                <a:spcPts val="800"/>
+              </a:spcBef>
+              <a:spcAft>
+                <a:spcPts val="400"/>
+              </a:spcAft>
+              <a:defRPr sz="1500">
+                <a:solidFill>
+                  <a:srgbClr val="333333"/>
+                </a:solidFill>
+              </a:defRPr>
+            </a:pPr>
+            <a:r>
+              <a:t>• Mô phỏng thay vì lý thuyết:</a:t>
+            </a:r>
+          </a:p>
+          <a:p>
+            <a:pPr>
+              <a:spcBef>
+                <a:spcPts val="800"/>
+              </a:spcBef>
+              <a:spcAft>
+                <a:spcPts val="400"/>
+              </a:spcAft>
+              <a:defRPr sz="1500">
+                <a:solidFill>
+                  <a:srgbClr val="333333"/>
+                </a:solidFill>
+              </a:defRPr>
+            </a:pPr>
+            <a:r>
+              <a:t>  — Perceptron học thật, trọng số thay đổi theo lỗi</a:t>
+            </a:r>
+          </a:p>
+          <a:p>
+            <a:pPr>
+              <a:spcBef>
+                <a:spcPts val="800"/>
+              </a:spcBef>
+              <a:spcAft>
+                <a:spcPts val="400"/>
+              </a:spcAft>
+              <a:defRPr sz="1500">
+                <a:solidFill>
+                  <a:srgbClr val="333333"/>
+                </a:solidFill>
+              </a:defRPr>
+            </a:pPr>
+            <a:r>
+              <a:t>  — Thiên kiến dữ liệu: 92% ảnh ngày → 100% đúng ngày, 59% đúng đêm</a:t>
+            </a:r>
+          </a:p>
+          <a:p>
+            <a:pPr>
+              <a:spcBef>
+                <a:spcPts val="800"/>
+              </a:spcBef>
+              <a:spcAft>
+                <a:spcPts val="400"/>
+              </a:spcAft>
+              <a:defRPr sz="1500">
+                <a:solidFill>
+                  <a:srgbClr val="333333"/>
+                </a:solidFill>
+              </a:defRPr>
+            </a:pPr>
+            <a:r>
+              <a:t>  — Mặt phẳng quyết định trong không gian 3D</a:t>
+            </a:r>
+          </a:p>
+          <a:p>
+            <a:pPr>
+              <a:spcBef>
+                <a:spcPts val="800"/>
+              </a:spcBef>
+              <a:spcAft>
+                <a:spcPts val="400"/>
+              </a:spcAft>
+              <a:defRPr sz="1500">
+                <a:solidFill>
+                  <a:srgbClr val="333333"/>
+                </a:solidFill>
+              </a:defRPr>
+            </a:pPr>
+            <a:r>
+              <a:t>• </a:t>
+            </a:r>
+          </a:p>
+          <a:p>
+            <a:pPr>
+              <a:spcBef>
+                <a:spcPts val="800"/>
+              </a:spcBef>
+              <a:spcAft>
+                <a:spcPts val="400"/>
+              </a:spcAft>
+              <a:defRPr sz="1500">
+                <a:solidFill>
+                  <a:srgbClr val="333333"/>
+                </a:solidFill>
+              </a:defRPr>
+            </a:pPr>
+            <a:r>
+              <a:t>• Không điểm số, chỉ minh chứng:</a:t>
+            </a:r>
+          </a:p>
+          <a:p>
+            <a:pPr>
+              <a:spcBef>
+                <a:spcPts val="800"/>
+              </a:spcBef>
+              <a:spcAft>
+                <a:spcPts val="400"/>
+              </a:spcAft>
+              <a:defRPr sz="1500">
+                <a:solidFill>
+                  <a:srgbClr val="333333"/>
+                </a:solidFill>
+              </a:defRPr>
+            </a:pPr>
+            <a:r>
+              <a:t>  — Khung 2422 cấm đầu điểm riêng, cấm xếp loại</a:t>
+            </a:r>
+          </a:p>
+          <a:p>
+            <a:pPr>
+              <a:spcBef>
+                <a:spcPts val="800"/>
+              </a:spcBef>
+              <a:spcAft>
+                <a:spcPts val="400"/>
+              </a:spcAft>
+              <a:defRPr sz="1500">
+                <a:solidFill>
+                  <a:srgbClr val="333333"/>
+                </a:solidFill>
+              </a:defRPr>
+            </a:pPr>
+            <a:r>
+              <a:t>  — Hiển thị 'đáp ứng tốt', 'đáp ứng một phần', 'cần luyện thêm'</a:t>
             </a:r>
           </a:p>
         </p:txBody>

--- a/template_thuanhoa.pptx
+++ b/template_thuanhoa.pptx
@@ -18,6 +18,7 @@
     <p:sldId id="266" r:id="rId17"/>
     <p:sldId id="267" r:id="rId18"/>
     <p:sldId id="268" r:id="rId19"/>
+    <p:sldId id="269" r:id="rId20"/>
   </p:sldIdLst>
   <p:sldSz cx="12191695" cy="6858000" type="screen4x3"/>
   <p:notesSz cx="6858000" cy="9144000"/>
@@ -3108,7 +3109,7 @@
         </p:nvSpPr>
         <p:spPr>
           <a:xfrm>
-            <a:off x="457200" y="868680"/>
+            <a:off x="457200" y="1005840"/>
             <a:ext cx="11247120" cy="12700"/>
           </a:xfrm>
           <a:prstGeom prst="rect">
@@ -3160,7 +3161,7 @@
         <p:spPr>
           <a:xfrm>
             <a:off x="457200" y="137160"/>
-            <a:ext cx="640080" cy="640080"/>
+            <a:ext cx="731520" cy="731520"/>
           </a:xfrm>
           <a:prstGeom prst="rect">
             <a:avLst/>
@@ -3169,7 +3170,7 @@
       </p:pic>
       <p:pic>
         <p:nvPicPr>
-          <p:cNvPr id="4" name="Picture 3" descr="logo_thpt_thuan_hoa.jpg"/>
+          <p:cNvPr id="4" name="Picture 3" descr="logo_thpt_thuan_hoa.png"/>
           <p:cNvPicPr>
             <a:picLocks noChangeAspect="1"/>
           </p:cNvPicPr>
@@ -3183,8 +3184,8 @@
         </p:blipFill>
         <p:spPr>
           <a:xfrm>
-            <a:off x="1188720" y="137160"/>
-            <a:ext cx="640080" cy="640080"/>
+            <a:off x="1280160" y="137160"/>
+            <a:ext cx="731520" cy="731520"/>
           </a:xfrm>
           <a:prstGeom prst="rect">
             <a:avLst/>
@@ -3199,8 +3200,8 @@
         </p:nvSpPr>
         <p:spPr>
           <a:xfrm>
-            <a:off x="1920240" y="137160"/>
-            <a:ext cx="3200400" cy="640080"/>
+            <a:off x="2103120" y="182880"/>
+            <a:ext cx="3200400" cy="731520"/>
           </a:xfrm>
           <a:prstGeom prst="rect">
             <a:avLst/>
@@ -3214,26 +3215,26 @@
           <a:lstStyle/>
           <a:p>
             <a:pPr>
-              <a:defRPr sz="1100" b="1">
-                <a:solidFill>
-                  <a:srgbClr val="333333"/>
-                </a:solidFill>
-              </a:defRPr>
-            </a:pPr>
-            <a:r>
-              <a:t>TRƯỜNG THPT THUẬN HOÁ</a:t>
-            </a:r>
-          </a:p>
-          <a:p>
-            <a:pPr>
-              <a:defRPr sz="1000">
+              <a:defRPr sz="1300" b="1">
+                <a:solidFill>
+                  <a:srgbClr val="333333"/>
+                </a:solidFill>
+              </a:defRPr>
+            </a:pPr>
+            <a:r>
+              <a:t>Trường THPT Thuận Hoá</a:t>
+            </a:r>
+          </a:p>
+          <a:p>
+            <a:pPr>
+              <a:defRPr sz="1100">
                 <a:solidFill>
                   <a:srgbClr val="646464"/>
                 </a:solidFill>
               </a:defRPr>
             </a:pPr>
             <a:r>
-              <a:t>Đại học Sư Phạm, Đại học Huế</a:t>
+              <a:t>Trường Đại học Sư Phạm, Đại học Huế</a:t>
             </a:r>
           </a:p>
         </p:txBody>
@@ -3246,7 +3247,7 @@
         </p:nvSpPr>
         <p:spPr>
           <a:xfrm>
-            <a:off x="5303520" y="182880"/>
+            <a:off x="5486400" y="228600"/>
             <a:ext cx="6400800" cy="640080"/>
           </a:xfrm>
           <a:prstGeom prst="rect">
@@ -3261,14 +3262,14 @@
           <a:lstStyle/>
           <a:p>
             <a:pPr algn="ctr">
-              <a:defRPr sz="1600" b="1">
-                <a:solidFill>
-                  <a:srgbClr val="333333"/>
-                </a:solidFill>
-              </a:defRPr>
-            </a:pPr>
-            <a:r>
-              <a:t>THUYẾT MINH Ý TƯỞNG</a:t>
+              <a:defRPr sz="1800" b="1">
+                <a:solidFill>
+                  <a:srgbClr val="333333"/>
+                </a:solidFill>
+              </a:defRPr>
+            </a:pPr>
+            <a:r>
+              <a:t>BÁO CÁO SẢN PHẨM</a:t>
             </a:r>
           </a:p>
         </p:txBody>
@@ -3281,7 +3282,7 @@
         </p:nvSpPr>
         <p:spPr>
           <a:xfrm>
-            <a:off x="914400" y="2011680"/>
+            <a:off x="914400" y="2103120"/>
             <a:ext cx="10058400" cy="1371600"/>
           </a:xfrm>
           <a:prstGeom prst="rect">
@@ -3296,7 +3297,7 @@
           <a:lstStyle/>
           <a:p>
             <a:pPr algn="ctr">
-              <a:defRPr sz="5400" b="1">
+              <a:defRPr sz="6000" b="1">
                 <a:solidFill>
                   <a:srgbClr val="000000"/>
                 </a:solidFill>
@@ -3316,7 +3317,7 @@
         </p:nvSpPr>
         <p:spPr>
           <a:xfrm>
-            <a:off x="914400" y="3474720"/>
+            <a:off x="914400" y="3566160"/>
             <a:ext cx="10058400" cy="914400"/>
           </a:xfrm>
           <a:prstGeom prst="rect">
@@ -3331,7 +3332,7 @@
           <a:lstStyle/>
           <a:p>
             <a:pPr algn="ctr">
-              <a:defRPr sz="2400">
+              <a:defRPr sz="2600">
                 <a:solidFill>
                   <a:srgbClr val="333333"/>
                 </a:solidFill>
@@ -3351,7 +3352,7 @@
         </p:nvSpPr>
         <p:spPr>
           <a:xfrm>
-            <a:off x="914400" y="4754880"/>
+            <a:off x="914400" y="4846320"/>
             <a:ext cx="10058400" cy="1371600"/>
           </a:xfrm>
           <a:prstGeom prst="rect">
@@ -3366,7 +3367,7 @@
           <a:lstStyle/>
           <a:p>
             <a:pPr algn="ctr">
-              <a:defRPr sz="1400">
+              <a:defRPr sz="1600">
                 <a:solidFill>
                   <a:srgbClr val="646464"/>
                 </a:solidFill>
@@ -3378,7 +3379,7 @@
           </a:p>
           <a:p>
             <a:pPr algn="ctr">
-              <a:defRPr sz="1400">
+              <a:defRPr sz="1600">
                 <a:solidFill>
                   <a:srgbClr val="646464"/>
                 </a:solidFill>
@@ -3395,19 +3396,19 @@
           </a:p>
           <a:p>
             <a:pPr algn="ctr">
-              <a:defRPr sz="1600" b="1">
-                <a:solidFill>
-                  <a:srgbClr val="333333"/>
-                </a:solidFill>
-              </a:defRPr>
-            </a:pPr>
-            <a:r>
-              <a:t>Tác giả: GV Mai Xuân Văn</a:t>
+              <a:defRPr sz="1800" b="1">
+                <a:solidFill>
+                  <a:srgbClr val="333333"/>
+                </a:solidFill>
+              </a:defRPr>
+            </a:pPr>
+            <a:r>
+              <a:t>GV: Mai Xuân Văn</a:t>
             </a:r>
           </a:p>
           <a:p>
             <a:pPr algn="ctr">
-              <a:defRPr sz="1400">
+              <a:defRPr sz="1600">
                 <a:solidFill>
                   <a:srgbClr val="646464"/>
                 </a:solidFill>
@@ -3445,7 +3446,7 @@
         </p:nvSpPr>
         <p:spPr>
           <a:xfrm>
-            <a:off x="457200" y="868680"/>
+            <a:off x="457200" y="1005840"/>
             <a:ext cx="11247120" cy="12700"/>
           </a:xfrm>
           <a:prstGeom prst="rect">
@@ -3497,7 +3498,7 @@
         <p:spPr>
           <a:xfrm>
             <a:off x="457200" y="137160"/>
-            <a:ext cx="548640" cy="548640"/>
+            <a:ext cx="640080" cy="640080"/>
           </a:xfrm>
           <a:prstGeom prst="rect">
             <a:avLst/>
@@ -3506,7 +3507,7 @@
       </p:pic>
       <p:pic>
         <p:nvPicPr>
-          <p:cNvPr id="4" name="Picture 3" descr="logo_thpt_thuan_hoa.jpg"/>
+          <p:cNvPr id="4" name="Picture 3" descr="logo_thpt_thuan_hoa.png"/>
           <p:cNvPicPr>
             <a:picLocks noChangeAspect="1"/>
           </p:cNvPicPr>
@@ -3520,8 +3521,8 @@
         </p:blipFill>
         <p:spPr>
           <a:xfrm>
-            <a:off x="1188720" y="137160"/>
-            <a:ext cx="548640" cy="548640"/>
+            <a:off x="1280160" y="137160"/>
+            <a:ext cx="640080" cy="640080"/>
           </a:xfrm>
           <a:prstGeom prst="rect">
             <a:avLst/>
@@ -3536,8 +3537,8 @@
         </p:nvSpPr>
         <p:spPr>
           <a:xfrm>
-            <a:off x="1920240" y="137160"/>
-            <a:ext cx="3200400" cy="640080"/>
+            <a:off x="2103120" y="182880"/>
+            <a:ext cx="3200400" cy="731520"/>
           </a:xfrm>
           <a:prstGeom prst="rect">
             <a:avLst/>
@@ -3551,26 +3552,26 @@
           <a:lstStyle/>
           <a:p>
             <a:pPr>
-              <a:defRPr sz="1100" b="1">
-                <a:solidFill>
-                  <a:srgbClr val="333333"/>
-                </a:solidFill>
-              </a:defRPr>
-            </a:pPr>
-            <a:r>
-              <a:t>TRƯỜNG THPT THUẬN HOÁ</a:t>
-            </a:r>
-          </a:p>
-          <a:p>
-            <a:pPr>
-              <a:defRPr sz="1000">
+              <a:defRPr sz="1300" b="1">
+                <a:solidFill>
+                  <a:srgbClr val="333333"/>
+                </a:solidFill>
+              </a:defRPr>
+            </a:pPr>
+            <a:r>
+              <a:t>Trường THPT Thuận Hoá</a:t>
+            </a:r>
+          </a:p>
+          <a:p>
+            <a:pPr>
+              <a:defRPr sz="1100">
                 <a:solidFill>
                   <a:srgbClr val="646464"/>
                 </a:solidFill>
               </a:defRPr>
             </a:pPr>
             <a:r>
-              <a:t>Đại học Sư Phạm, Đại học Huế</a:t>
+              <a:t>Trường Đại học Sư Phạm, Đại học Huế</a:t>
             </a:r>
           </a:p>
         </p:txBody>
@@ -3583,7 +3584,7 @@
         </p:nvSpPr>
         <p:spPr>
           <a:xfrm>
-            <a:off x="5303520" y="182880"/>
+            <a:off x="5486400" y="228600"/>
             <a:ext cx="6400800" cy="640080"/>
           </a:xfrm>
           <a:prstGeom prst="rect">
@@ -3598,14 +3599,14 @@
           <a:lstStyle/>
           <a:p>
             <a:pPr algn="ctr">
-              <a:defRPr sz="1400" b="1">
-                <a:solidFill>
-                  <a:srgbClr val="333333"/>
-                </a:solidFill>
-              </a:defRPr>
-            </a:pPr>
-            <a:r>
-              <a:t>9. Khả năng nhân rộng</a:t>
+              <a:defRPr sz="1600" b="1">
+                <a:solidFill>
+                  <a:srgbClr val="333333"/>
+                </a:solidFill>
+              </a:defRPr>
+            </a:pPr>
+            <a:r>
+              <a:t>8. Đổi mới sư phạm</a:t>
             </a:r>
           </a:p>
         </p:txBody>
@@ -3633,14 +3634,14 @@
           <a:lstStyle/>
           <a:p>
             <a:pPr>
-              <a:defRPr sz="1000">
+              <a:defRPr sz="1100">
                 <a:solidFill>
                   <a:srgbClr val="646464"/>
                 </a:solidFill>
               </a:defRPr>
             </a:pPr>
             <a:r>
-              <a:t>GV hướng dẫn: Mai Xuân Văn                                                                                           10</a:t>
+              <a:t>GV: Mai Xuân Văn                                                                                           10</a:t>
             </a:r>
           </a:p>
         </p:txBody>
@@ -3653,8 +3654,8 @@
         </p:nvSpPr>
         <p:spPr>
           <a:xfrm>
-            <a:off x="457200" y="1097280"/>
-            <a:ext cx="10972800" cy="548640"/>
+            <a:off x="457200" y="1188720"/>
+            <a:ext cx="10972800" cy="640080"/>
           </a:xfrm>
           <a:prstGeom prst="rect">
             <a:avLst/>
@@ -3668,14 +3669,14 @@
           <a:lstStyle/>
           <a:p>
             <a:pPr>
-              <a:defRPr sz="2800" b="1">
+              <a:defRPr sz="3200" b="1">
                 <a:solidFill>
                   <a:srgbClr val="0066CC"/>
                 </a:solidFill>
               </a:defRPr>
             </a:pPr>
             <a:r>
-              <a:t>Triển khai thực tế</a:t>
+              <a:t>Nguyên tắc thiết kế</a:t>
             </a:r>
           </a:p>
         </p:txBody>
@@ -3688,8 +3689,8 @@
         </p:nvSpPr>
         <p:spPr>
           <a:xfrm>
-            <a:off x="640080" y="1828800"/>
-            <a:ext cx="10515600" cy="4389120"/>
+            <a:off x="640080" y="2011680"/>
+            <a:ext cx="10515600" cy="4114800"/>
           </a:xfrm>
           <a:prstGeom prst="rect">
             <a:avLst/>
@@ -3704,235 +3705,229 @@
           <a:p>
             <a:pPr>
               <a:spcBef>
-                <a:spcPts val="800"/>
-              </a:spcBef>
-              <a:spcAft>
-                <a:spcPts val="400"/>
-              </a:spcAft>
-              <a:defRPr sz="1500">
-                <a:solidFill>
-                  <a:srgbClr val="333333"/>
-                </a:solidFill>
-              </a:defRPr>
-            </a:pPr>
-            <a:r>
-              <a:t>• 3 cách chạy, không cần Internet:</a:t>
-            </a:r>
-          </a:p>
-          <a:p>
-            <a:pPr>
-              <a:spcBef>
-                <a:spcPts val="800"/>
-              </a:spcBef>
-              <a:spcAft>
-                <a:spcPts val="400"/>
-              </a:spcAft>
-              <a:defRPr sz="1500">
-                <a:solidFill>
-                  <a:srgbClr val="333333"/>
-                </a:solidFill>
-              </a:defRPr>
-            </a:pPr>
-            <a:r>
-              <a:t>  — USB: Chép thư mục → mở index.html</a:t>
-            </a:r>
-          </a:p>
-          <a:p>
-            <a:pPr>
-              <a:spcBef>
-                <a:spcPts val="800"/>
-              </a:spcBef>
-              <a:spcAft>
-                <a:spcPts val="400"/>
-              </a:spcAft>
-              <a:defRPr sz="1500">
-                <a:solidFill>
-                  <a:srgbClr val="333333"/>
-                </a:solidFill>
-              </a:defRPr>
-            </a:pPr>
-            <a:r>
-              <a:t>  — Máy chủ lớp: Chia sẻ qua mạng LAN</a:t>
-            </a:r>
-          </a:p>
-          <a:p>
-            <a:pPr>
-              <a:spcBef>
-                <a:spcPts val="800"/>
-              </a:spcBef>
-              <a:spcAft>
-                <a:spcPts val="400"/>
-              </a:spcAft>
-              <a:defRPr sz="1500">
-                <a:solidFill>
-                  <a:srgbClr val="333333"/>
-                </a:solidFill>
-              </a:defRPr>
-            </a:pPr>
-            <a:r>
-              <a:t>  — GitHub Pages: https://mxuanvan02.github.io/ainatomy/</a:t>
-            </a:r>
-          </a:p>
-          <a:p>
-            <a:pPr>
-              <a:spcBef>
-                <a:spcPts val="800"/>
-              </a:spcBef>
-              <a:spcAft>
-                <a:spcPts val="400"/>
-              </a:spcAft>
-              <a:defRPr sz="1500">
-                <a:solidFill>
-                  <a:srgbClr val="333333"/>
-                </a:solidFill>
-              </a:defRPr>
-            </a:pPr>
-            <a:r>
-              <a:t>• </a:t>
-            </a:r>
-          </a:p>
-          <a:p>
-            <a:pPr>
-              <a:spcBef>
-                <a:spcPts val="800"/>
-              </a:spcBef>
-              <a:spcAft>
-                <a:spcPts val="400"/>
-              </a:spcAft>
-              <a:defRPr sz="1500">
-                <a:solidFill>
-                  <a:srgbClr val="333333"/>
-                </a:solidFill>
-              </a:defRPr>
-            </a:pPr>
-            <a:r>
-              <a:t>• Yêu cầu tối thiểu:</a:t>
-            </a:r>
-          </a:p>
-          <a:p>
-            <a:pPr>
-              <a:spcBef>
-                <a:spcPts val="800"/>
-              </a:spcBef>
-              <a:spcAft>
-                <a:spcPts val="400"/>
-              </a:spcAft>
-              <a:defRPr sz="1500">
-                <a:solidFill>
-                  <a:srgbClr val="333333"/>
-                </a:solidFill>
-              </a:defRPr>
-            </a:pPr>
-            <a:r>
-              <a:t>  — Trình duyệt bất kỳ (Chrome, Edge, Firefox)</a:t>
-            </a:r>
-          </a:p>
-          <a:p>
-            <a:pPr>
-              <a:spcBef>
-                <a:spcPts val="800"/>
-              </a:spcBef>
-              <a:spcAft>
-                <a:spcPts val="400"/>
-              </a:spcAft>
-              <a:defRPr sz="1500">
-                <a:solidFill>
-                  <a:srgbClr val="333333"/>
-                </a:solidFill>
-              </a:defRPr>
-            </a:pPr>
-            <a:r>
-              <a:t>  — Python 3.8+ (chỉ cần cho công cụ kiểm tra)</a:t>
-            </a:r>
-          </a:p>
-          <a:p>
-            <a:pPr>
-              <a:spcBef>
-                <a:spcPts val="800"/>
-              </a:spcBef>
-              <a:spcAft>
-                <a:spcPts val="400"/>
-              </a:spcAft>
-              <a:defRPr sz="1500">
-                <a:solidFill>
-                  <a:srgbClr val="333333"/>
-                </a:solidFill>
-              </a:defRPr>
-            </a:pPr>
-            <a:r>
-              <a:t>  — Không cần card đồ họa rời</a:t>
-            </a:r>
-          </a:p>
-          <a:p>
-            <a:pPr>
-              <a:spcBef>
-                <a:spcPts val="800"/>
-              </a:spcBef>
-              <a:spcAft>
-                <a:spcPts val="400"/>
-              </a:spcAft>
-              <a:defRPr sz="1500">
-                <a:solidFill>
-                  <a:srgbClr val="333333"/>
-                </a:solidFill>
-              </a:defRPr>
-            </a:pPr>
-            <a:r>
-              <a:t>• </a:t>
-            </a:r>
-          </a:p>
-          <a:p>
-            <a:pPr>
-              <a:spcBef>
-                <a:spcPts val="800"/>
-              </a:spcBef>
-              <a:spcAft>
-                <a:spcPts val="400"/>
-              </a:spcAft>
-              <a:defRPr sz="1500">
-                <a:solidFill>
-                  <a:srgbClr val="333333"/>
-                </a:solidFill>
-              </a:defRPr>
-            </a:pPr>
-            <a:r>
-              <a:t>• Dữ liệu lưu cục bộ, ẩn danh theo mã học sinh:</a:t>
-            </a:r>
-          </a:p>
-          <a:p>
-            <a:pPr>
-              <a:spcBef>
-                <a:spcPts val="800"/>
-              </a:spcBef>
-              <a:spcAft>
-                <a:spcPts val="400"/>
-              </a:spcAft>
-              <a:defRPr sz="1500">
-                <a:solidFill>
-                  <a:srgbClr val="333333"/>
-                </a:solidFill>
-              </a:defRPr>
-            </a:pPr>
-            <a:r>
-              <a:t>  — Không thu thập họ tên, ảnh, định danh cá nhân</a:t>
-            </a:r>
-          </a:p>
-          <a:p>
-            <a:pPr>
-              <a:spcBef>
-                <a:spcPts val="800"/>
-              </a:spcBef>
-              <a:spcAft>
-                <a:spcPts val="400"/>
-              </a:spcAft>
-              <a:defRPr sz="1500">
-                <a:solidFill>
-                  <a:srgbClr val="333333"/>
-                </a:solidFill>
-              </a:defRPr>
-            </a:pPr>
-            <a:r>
-              <a:t>  — Xuất CSV/JSON làm minh chứng cuối kì</a:t>
+                <a:spcPts val="1000"/>
+              </a:spcBef>
+              <a:spcAft>
+                <a:spcPts val="600"/>
+              </a:spcAft>
+              <a:defRPr sz="1600">
+                <a:solidFill>
+                  <a:srgbClr val="333333"/>
+                </a:solidFill>
+              </a:defRPr>
+            </a:pPr>
+            <a:r>
+              <a:t>Học sinh bắt lỗi AI thay vì hỏi AI:</a:t>
+            </a:r>
+          </a:p>
+          <a:p>
+            <a:pPr>
+              <a:spcBef>
+                <a:spcPts val="1000"/>
+              </a:spcBef>
+              <a:spcAft>
+                <a:spcPts val="600"/>
+              </a:spcAft>
+              <a:defRPr sz="1600">
+                <a:solidFill>
+                  <a:srgbClr val="333333"/>
+                </a:solidFill>
+              </a:defRPr>
+            </a:pPr>
+            <a:r>
+              <a:t>    78 câu trong ngân hàng, chia theo 5 nhóm lỗi</a:t>
+            </a:r>
+          </a:p>
+          <a:p>
+            <a:pPr>
+              <a:spcBef>
+                <a:spcPts val="1000"/>
+              </a:spcBef>
+              <a:spcAft>
+                <a:spcPts val="600"/>
+              </a:spcAft>
+              <a:defRPr sz="1600">
+                <a:solidFill>
+                  <a:srgbClr val="333333"/>
+                </a:solidFill>
+              </a:defRPr>
+            </a:pPr>
+            <a:r>
+              <a:t>    Chế độ luyện tập, tiền kiểm tra, hậu kiểm tra</a:t>
+            </a:r>
+          </a:p>
+          <a:p>
+            <a:pPr>
+              <a:spcBef>
+                <a:spcPts val="1000"/>
+              </a:spcBef>
+              <a:spcAft>
+                <a:spcPts val="600"/>
+              </a:spcAft>
+              <a:defRPr sz="1600">
+                <a:solidFill>
+                  <a:srgbClr val="333333"/>
+                </a:solidFill>
+              </a:defRPr>
+            </a:pPr>
+            <a:r>
+              <a:t>    So sánh tiến bộ qua các lần kiểm tra</a:t>
+            </a:r>
+          </a:p>
+          <a:p>
+            <a:pPr>
+              <a:spcBef>
+                <a:spcPts val="1000"/>
+              </a:spcBef>
+              <a:spcAft>
+                <a:spcPts val="600"/>
+              </a:spcAft>
+              <a:defRPr sz="1600">
+                <a:solidFill>
+                  <a:srgbClr val="333333"/>
+                </a:solidFill>
+              </a:defRPr>
+            </a:pPr>
+          </a:p>
+          <a:p>
+            <a:pPr>
+              <a:spcBef>
+                <a:spcPts val="1000"/>
+              </a:spcBef>
+              <a:spcAft>
+                <a:spcPts val="600"/>
+              </a:spcAft>
+              <a:defRPr sz="1600">
+                <a:solidFill>
+                  <a:srgbClr val="333333"/>
+                </a:solidFill>
+              </a:defRPr>
+            </a:pPr>
+            <a:r>
+              <a:t>Mô phỏng thay vì lý thuyết:</a:t>
+            </a:r>
+          </a:p>
+          <a:p>
+            <a:pPr>
+              <a:spcBef>
+                <a:spcPts val="1000"/>
+              </a:spcBef>
+              <a:spcAft>
+                <a:spcPts val="600"/>
+              </a:spcAft>
+              <a:defRPr sz="1600">
+                <a:solidFill>
+                  <a:srgbClr val="333333"/>
+                </a:solidFill>
+              </a:defRPr>
+            </a:pPr>
+            <a:r>
+              <a:t>    Perceptron học thật, trọng số thay đổi theo lỗi</a:t>
+            </a:r>
+          </a:p>
+          <a:p>
+            <a:pPr>
+              <a:spcBef>
+                <a:spcPts val="1000"/>
+              </a:spcBef>
+              <a:spcAft>
+                <a:spcPts val="600"/>
+              </a:spcAft>
+              <a:defRPr sz="1600">
+                <a:solidFill>
+                  <a:srgbClr val="333333"/>
+                </a:solidFill>
+              </a:defRPr>
+            </a:pPr>
+            <a:r>
+              <a:t>    Thiên kiến dữ liệu: 92% ảnh ngày → 100% đúng ngày, 59% đúng đêm</a:t>
+            </a:r>
+          </a:p>
+          <a:p>
+            <a:pPr>
+              <a:spcBef>
+                <a:spcPts val="1000"/>
+              </a:spcBef>
+              <a:spcAft>
+                <a:spcPts val="600"/>
+              </a:spcAft>
+              <a:defRPr sz="1600">
+                <a:solidFill>
+                  <a:srgbClr val="333333"/>
+                </a:solidFill>
+              </a:defRPr>
+            </a:pPr>
+            <a:r>
+              <a:t>    Mặt phẳng quyết định trong không gian 3D</a:t>
+            </a:r>
+          </a:p>
+          <a:p>
+            <a:pPr>
+              <a:spcBef>
+                <a:spcPts val="1000"/>
+              </a:spcBef>
+              <a:spcAft>
+                <a:spcPts val="600"/>
+              </a:spcAft>
+              <a:defRPr sz="1600">
+                <a:solidFill>
+                  <a:srgbClr val="333333"/>
+                </a:solidFill>
+              </a:defRPr>
+            </a:pPr>
+          </a:p>
+          <a:p>
+            <a:pPr>
+              <a:spcBef>
+                <a:spcPts val="1000"/>
+              </a:spcBef>
+              <a:spcAft>
+                <a:spcPts val="600"/>
+              </a:spcAft>
+              <a:defRPr sz="1600">
+                <a:solidFill>
+                  <a:srgbClr val="333333"/>
+                </a:solidFill>
+              </a:defRPr>
+            </a:pPr>
+            <a:r>
+              <a:t>Không điểm số, chỉ minh chứng:</a:t>
+            </a:r>
+          </a:p>
+          <a:p>
+            <a:pPr>
+              <a:spcBef>
+                <a:spcPts val="1000"/>
+              </a:spcBef>
+              <a:spcAft>
+                <a:spcPts val="600"/>
+              </a:spcAft>
+              <a:defRPr sz="1600">
+                <a:solidFill>
+                  <a:srgbClr val="333333"/>
+                </a:solidFill>
+              </a:defRPr>
+            </a:pPr>
+            <a:r>
+              <a:t>    Khung 2422 cấm đầu điểm riêng, cấm xếp loại</a:t>
+            </a:r>
+          </a:p>
+          <a:p>
+            <a:pPr>
+              <a:spcBef>
+                <a:spcPts val="1000"/>
+              </a:spcBef>
+              <a:spcAft>
+                <a:spcPts val="600"/>
+              </a:spcAft>
+              <a:defRPr sz="1600">
+                <a:solidFill>
+                  <a:srgbClr val="333333"/>
+                </a:solidFill>
+              </a:defRPr>
+            </a:pPr>
+            <a:r>
+              <a:t>    Hiển thị 'đáp ứng tốt', 'đáp ứng một phần', 'cần luyện thêm'</a:t>
             </a:r>
           </a:p>
         </p:txBody>
@@ -3963,7 +3958,7 @@
         </p:nvSpPr>
         <p:spPr>
           <a:xfrm>
-            <a:off x="457200" y="868680"/>
+            <a:off x="457200" y="1005840"/>
             <a:ext cx="11247120" cy="12700"/>
           </a:xfrm>
           <a:prstGeom prst="rect">
@@ -4015,7 +4010,7 @@
         <p:spPr>
           <a:xfrm>
             <a:off x="457200" y="137160"/>
-            <a:ext cx="548640" cy="548640"/>
+            <a:ext cx="640080" cy="640080"/>
           </a:xfrm>
           <a:prstGeom prst="rect">
             <a:avLst/>
@@ -4024,7 +4019,7 @@
       </p:pic>
       <p:pic>
         <p:nvPicPr>
-          <p:cNvPr id="4" name="Picture 3" descr="logo_thpt_thuan_hoa.jpg"/>
+          <p:cNvPr id="4" name="Picture 3" descr="logo_thpt_thuan_hoa.png"/>
           <p:cNvPicPr>
             <a:picLocks noChangeAspect="1"/>
           </p:cNvPicPr>
@@ -4038,8 +4033,8 @@
         </p:blipFill>
         <p:spPr>
           <a:xfrm>
-            <a:off x="1188720" y="137160"/>
-            <a:ext cx="548640" cy="548640"/>
+            <a:off x="1280160" y="137160"/>
+            <a:ext cx="640080" cy="640080"/>
           </a:xfrm>
           <a:prstGeom prst="rect">
             <a:avLst/>
@@ -4054,8 +4049,8 @@
         </p:nvSpPr>
         <p:spPr>
           <a:xfrm>
-            <a:off x="1920240" y="137160"/>
-            <a:ext cx="3200400" cy="640080"/>
+            <a:off x="2103120" y="182880"/>
+            <a:ext cx="3200400" cy="731520"/>
           </a:xfrm>
           <a:prstGeom prst="rect">
             <a:avLst/>
@@ -4069,26 +4064,26 @@
           <a:lstStyle/>
           <a:p>
             <a:pPr>
-              <a:defRPr sz="1100" b="1">
-                <a:solidFill>
-                  <a:srgbClr val="333333"/>
-                </a:solidFill>
-              </a:defRPr>
-            </a:pPr>
-            <a:r>
-              <a:t>TRƯỜNG THPT THUẬN HOÁ</a:t>
-            </a:r>
-          </a:p>
-          <a:p>
-            <a:pPr>
-              <a:defRPr sz="1000">
+              <a:defRPr sz="1300" b="1">
+                <a:solidFill>
+                  <a:srgbClr val="333333"/>
+                </a:solidFill>
+              </a:defRPr>
+            </a:pPr>
+            <a:r>
+              <a:t>Trường THPT Thuận Hoá</a:t>
+            </a:r>
+          </a:p>
+          <a:p>
+            <a:pPr>
+              <a:defRPr sz="1100">
                 <a:solidFill>
                   <a:srgbClr val="646464"/>
                 </a:solidFill>
               </a:defRPr>
             </a:pPr>
             <a:r>
-              <a:t>Đại học Sư Phạm, Đại học Huế</a:t>
+              <a:t>Trường Đại học Sư Phạm, Đại học Huế</a:t>
             </a:r>
           </a:p>
         </p:txBody>
@@ -4101,7 +4096,7 @@
         </p:nvSpPr>
         <p:spPr>
           <a:xfrm>
-            <a:off x="5303520" y="182880"/>
+            <a:off x="5486400" y="228600"/>
             <a:ext cx="6400800" cy="640080"/>
           </a:xfrm>
           <a:prstGeom prst="rect">
@@ -4116,14 +4111,14 @@
           <a:lstStyle/>
           <a:p>
             <a:pPr algn="ctr">
-              <a:defRPr sz="1400" b="1">
-                <a:solidFill>
-                  <a:srgbClr val="333333"/>
-                </a:solidFill>
-              </a:defRPr>
-            </a:pPr>
-            <a:r>
-              <a:t>10. Kết luận</a:t>
+              <a:defRPr sz="1600" b="1">
+                <a:solidFill>
+                  <a:srgbClr val="333333"/>
+                </a:solidFill>
+              </a:defRPr>
+            </a:pPr>
+            <a:r>
+              <a:t>9. Khả năng nhân rộng</a:t>
             </a:r>
           </a:p>
         </p:txBody>
@@ -4151,14 +4146,14 @@
           <a:lstStyle/>
           <a:p>
             <a:pPr>
-              <a:defRPr sz="1000">
+              <a:defRPr sz="1100">
                 <a:solidFill>
                   <a:srgbClr val="646464"/>
                 </a:solidFill>
               </a:defRPr>
             </a:pPr>
             <a:r>
-              <a:t>GV hướng dẫn: Mai Xuân Văn                                                                                           11</a:t>
+              <a:t>GV: Mai Xuân Văn                                                                                           11</a:t>
             </a:r>
           </a:p>
         </p:txBody>
@@ -4171,8 +4166,8 @@
         </p:nvSpPr>
         <p:spPr>
           <a:xfrm>
-            <a:off x="457200" y="1097280"/>
-            <a:ext cx="10972800" cy="548640"/>
+            <a:off x="457200" y="1188720"/>
+            <a:ext cx="10972800" cy="640080"/>
           </a:xfrm>
           <a:prstGeom prst="rect">
             <a:avLst/>
@@ -4186,14 +4181,14 @@
           <a:lstStyle/>
           <a:p>
             <a:pPr>
-              <a:defRPr sz="2800" b="1">
+              <a:defRPr sz="3200" b="1">
                 <a:solidFill>
                   <a:srgbClr val="0066CC"/>
                 </a:solidFill>
               </a:defRPr>
             </a:pPr>
             <a:r>
-              <a:t>Đóng góp chính</a:t>
+              <a:t>Triển khai thực tế</a:t>
             </a:r>
           </a:p>
         </p:txBody>
@@ -4206,8 +4201,8 @@
         </p:nvSpPr>
         <p:spPr>
           <a:xfrm>
-            <a:off x="640080" y="1828800"/>
-            <a:ext cx="10515600" cy="4389120"/>
+            <a:off x="640080" y="2011680"/>
+            <a:ext cx="10515600" cy="4114800"/>
           </a:xfrm>
           <a:prstGeom prst="rect">
             <a:avLst/>
@@ -4222,10 +4217,10 @@
           <a:p>
             <a:pPr>
               <a:spcBef>
-                <a:spcPts val="800"/>
-              </a:spcBef>
-              <a:spcAft>
-                <a:spcPts val="400"/>
+                <a:spcPts val="1000"/>
+              </a:spcBef>
+              <a:spcAft>
+                <a:spcPts val="600"/>
               </a:spcAft>
               <a:defRPr sz="1600">
                 <a:solidFill>
@@ -4234,16 +4229,16 @@
               </a:defRPr>
             </a:pPr>
             <a:r>
-              <a:t>• 1. Công cụ offline tiếng Việt đầu tiên phủ 22/22 YCCĐ lớp 10 theo QĐ 2422</a:t>
-            </a:r>
-          </a:p>
-          <a:p>
-            <a:pPr>
-              <a:spcBef>
-                <a:spcPts val="800"/>
-              </a:spcBef>
-              <a:spcAft>
-                <a:spcPts val="400"/>
+              <a:t>3 cách chạy, không cần Internet:</a:t>
+            </a:r>
+          </a:p>
+          <a:p>
+            <a:pPr>
+              <a:spcBef>
+                <a:spcPts val="1000"/>
+              </a:spcBef>
+              <a:spcAft>
+                <a:spcPts val="600"/>
               </a:spcAft>
               <a:defRPr sz="1600">
                 <a:solidFill>
@@ -4252,16 +4247,16 @@
               </a:defRPr>
             </a:pPr>
             <a:r>
-              <a:t>• </a:t>
-            </a:r>
-          </a:p>
-          <a:p>
-            <a:pPr>
-              <a:spcBef>
-                <a:spcPts val="800"/>
-              </a:spcBef>
-              <a:spcAft>
-                <a:spcPts val="400"/>
+              <a:t>    USB: Chép thư mục → mở index.html</a:t>
+            </a:r>
+          </a:p>
+          <a:p>
+            <a:pPr>
+              <a:spcBef>
+                <a:spcPts val="1000"/>
+              </a:spcBef>
+              <a:spcAft>
+                <a:spcPts val="600"/>
               </a:spcAft>
               <a:defRPr sz="1600">
                 <a:solidFill>
@@ -4270,16 +4265,16 @@
               </a:defRPr>
             </a:pPr>
             <a:r>
-              <a:t>• 2. Kiến trúc 3 tầng chạy được trên file://, không phụ thuộc máy chủ</a:t>
-            </a:r>
-          </a:p>
-          <a:p>
-            <a:pPr>
-              <a:spcBef>
-                <a:spcPts val="800"/>
-              </a:spcBef>
-              <a:spcAft>
-                <a:spcPts val="400"/>
+              <a:t>    Máy chủ lớp: Chia sẻ qua mạng LAN</a:t>
+            </a:r>
+          </a:p>
+          <a:p>
+            <a:pPr>
+              <a:spcBef>
+                <a:spcPts val="1000"/>
+              </a:spcBef>
+              <a:spcAft>
+                <a:spcPts val="600"/>
               </a:spcAft>
               <a:defRPr sz="1600">
                 <a:solidFill>
@@ -4288,16 +4283,16 @@
               </a:defRPr>
             </a:pPr>
             <a:r>
-              <a:t>• </a:t>
-            </a:r>
-          </a:p>
-          <a:p>
-            <a:pPr>
-              <a:spcBef>
-                <a:spcPts val="800"/>
-              </a:spcBef>
-              <a:spcAft>
-                <a:spcPts val="400"/>
+              <a:t>    GitHub Pages: https://mxuanvan02.github.io/ainatomy/</a:t>
+            </a:r>
+          </a:p>
+          <a:p>
+            <a:pPr>
+              <a:spcBef>
+                <a:spcPts val="1000"/>
+              </a:spcBef>
+              <a:spcAft>
+                <a:spcPts val="600"/>
               </a:spcAft>
               <a:defRPr sz="1600">
                 <a:solidFill>
@@ -4305,17 +4300,14 @@
                 </a:solidFill>
               </a:defRPr>
             </a:pPr>
-            <a:r>
-              <a:t>• 3. 5 phân hệ mô phỏng với cơ chế tự chấm tất định</a:t>
-            </a:r>
-          </a:p>
-          <a:p>
-            <a:pPr>
-              <a:spcBef>
-                <a:spcPts val="800"/>
-              </a:spcBef>
-              <a:spcAft>
-                <a:spcPts val="400"/>
+          </a:p>
+          <a:p>
+            <a:pPr>
+              <a:spcBef>
+                <a:spcPts val="1000"/>
+              </a:spcBef>
+              <a:spcAft>
+                <a:spcPts val="600"/>
               </a:spcAft>
               <a:defRPr sz="1600">
                 <a:solidFill>
@@ -4324,16 +4316,16 @@
               </a:defRPr>
             </a:pPr>
             <a:r>
-              <a:t>• </a:t>
-            </a:r>
-          </a:p>
-          <a:p>
-            <a:pPr>
-              <a:spcBef>
-                <a:spcPts val="800"/>
-              </a:spcBef>
-              <a:spcAft>
-                <a:spcPts val="400"/>
+              <a:t>Yêu cầu tối thiểu:</a:t>
+            </a:r>
+          </a:p>
+          <a:p>
+            <a:pPr>
+              <a:spcBef>
+                <a:spcPts val="1000"/>
+              </a:spcBef>
+              <a:spcAft>
+                <a:spcPts val="600"/>
               </a:spcAft>
               <a:defRPr sz="1600">
                 <a:solidFill>
@@ -4342,16 +4334,16 @@
               </a:defRPr>
             </a:pPr>
             <a:r>
-              <a:t>• 4. Tích hợp vào 28 bài SGK Tin học 10 với phân phối 12 tiết</a:t>
-            </a:r>
-          </a:p>
-          <a:p>
-            <a:pPr>
-              <a:spcBef>
-                <a:spcPts val="800"/>
-              </a:spcBef>
-              <a:spcAft>
-                <a:spcPts val="400"/>
+              <a:t>    Trình duyệt bất kỳ (Chrome, Edge, Firefox)</a:t>
+            </a:r>
+          </a:p>
+          <a:p>
+            <a:pPr>
+              <a:spcBef>
+                <a:spcPts val="1000"/>
+              </a:spcBef>
+              <a:spcAft>
+                <a:spcPts val="600"/>
               </a:spcAft>
               <a:defRPr sz="1600">
                 <a:solidFill>
@@ -4360,16 +4352,16 @@
               </a:defRPr>
             </a:pPr>
             <a:r>
-              <a:t>• </a:t>
-            </a:r>
-          </a:p>
-          <a:p>
-            <a:pPr>
-              <a:spcBef>
-                <a:spcPts val="800"/>
-              </a:spcBef>
-              <a:spcAft>
-                <a:spcPts val="400"/>
+              <a:t>    Không cần card đồ họa rời</a:t>
+            </a:r>
+          </a:p>
+          <a:p>
+            <a:pPr>
+              <a:spcBef>
+                <a:spcPts val="1000"/>
+              </a:spcBef>
+              <a:spcAft>
+                <a:spcPts val="600"/>
               </a:spcAft>
               <a:defRPr sz="1600">
                 <a:solidFill>
@@ -4377,17 +4369,14 @@
                 </a:solidFill>
               </a:defRPr>
             </a:pPr>
-            <a:r>
-              <a:t>• 5. Hệ thống kiểm chứng tự động 97/97 tiêu chí, có mutation test</a:t>
-            </a:r>
-          </a:p>
-          <a:p>
-            <a:pPr>
-              <a:spcBef>
-                <a:spcPts val="800"/>
-              </a:spcBef>
-              <a:spcAft>
-                <a:spcPts val="400"/>
+          </a:p>
+          <a:p>
+            <a:pPr>
+              <a:spcBef>
+                <a:spcPts val="1000"/>
+              </a:spcBef>
+              <a:spcAft>
+                <a:spcPts val="600"/>
               </a:spcAft>
               <a:defRPr sz="1600">
                 <a:solidFill>
@@ -4396,16 +4385,16 @@
               </a:defRPr>
             </a:pPr>
             <a:r>
-              <a:t>• </a:t>
-            </a:r>
-          </a:p>
-          <a:p>
-            <a:pPr>
-              <a:spcBef>
-                <a:spcPts val="800"/>
-              </a:spcBef>
-              <a:spcAft>
-                <a:spcPts val="400"/>
+              <a:t>Dữ liệu lưu cục bộ, ẩn danh theo mã học sinh:</a:t>
+            </a:r>
+          </a:p>
+          <a:p>
+            <a:pPr>
+              <a:spcBef>
+                <a:spcPts val="1000"/>
+              </a:spcBef>
+              <a:spcAft>
+                <a:spcPts val="600"/>
               </a:spcAft>
               <a:defRPr sz="1600">
                 <a:solidFill>
@@ -4414,16 +4403,16 @@
               </a:defRPr>
             </a:pPr>
             <a:r>
-              <a:t>• 6. Tuân thủ CV 5588: không tài khoản, không phụ thuộc nhà cung cấp,</a:t>
-            </a:r>
-          </a:p>
-          <a:p>
-            <a:pPr>
-              <a:spcBef>
-                <a:spcPts val="800"/>
-              </a:spcBef>
-              <a:spcAft>
-                <a:spcPts val="400"/>
+              <a:t>    Không thu thập họ tên, ảnh, định danh cá nhân</a:t>
+            </a:r>
+          </a:p>
+          <a:p>
+            <a:pPr>
+              <a:spcBef>
+                <a:spcPts val="1000"/>
+              </a:spcBef>
+              <a:spcAft>
+                <a:spcPts val="600"/>
               </a:spcAft>
               <a:defRPr sz="1600">
                 <a:solidFill>
@@ -4432,7 +4421,7 @@
               </a:defRPr>
             </a:pPr>
             <a:r>
-              <a:t>    không buộc mua thiết bị, ưu tiên mã nguồn mở</a:t>
+              <a:t>    Xuất CSV/JSON làm minh chứng cuối kì</a:t>
             </a:r>
           </a:p>
         </p:txBody>
@@ -4463,7 +4452,7 @@
         </p:nvSpPr>
         <p:spPr>
           <a:xfrm>
-            <a:off x="457200" y="868680"/>
+            <a:off x="457200" y="1005840"/>
             <a:ext cx="11247120" cy="12700"/>
           </a:xfrm>
           <a:prstGeom prst="rect">
@@ -4515,7 +4504,7 @@
         <p:spPr>
           <a:xfrm>
             <a:off x="457200" y="137160"/>
-            <a:ext cx="548640" cy="548640"/>
+            <a:ext cx="640080" cy="640080"/>
           </a:xfrm>
           <a:prstGeom prst="rect">
             <a:avLst/>
@@ -4524,7 +4513,7 @@
       </p:pic>
       <p:pic>
         <p:nvPicPr>
-          <p:cNvPr id="4" name="Picture 3" descr="logo_thpt_thuan_hoa.jpg"/>
+          <p:cNvPr id="4" name="Picture 3" descr="logo_thpt_thuan_hoa.png"/>
           <p:cNvPicPr>
             <a:picLocks noChangeAspect="1"/>
           </p:cNvPicPr>
@@ -4538,8 +4527,8 @@
         </p:blipFill>
         <p:spPr>
           <a:xfrm>
-            <a:off x="1188720" y="137160"/>
-            <a:ext cx="548640" cy="548640"/>
+            <a:off x="1280160" y="137160"/>
+            <a:ext cx="640080" cy="640080"/>
           </a:xfrm>
           <a:prstGeom prst="rect">
             <a:avLst/>
@@ -4554,8 +4543,8 @@
         </p:nvSpPr>
         <p:spPr>
           <a:xfrm>
-            <a:off x="1920240" y="137160"/>
-            <a:ext cx="3200400" cy="640080"/>
+            <a:off x="2103120" y="182880"/>
+            <a:ext cx="3200400" cy="731520"/>
           </a:xfrm>
           <a:prstGeom prst="rect">
             <a:avLst/>
@@ -4569,26 +4558,26 @@
           <a:lstStyle/>
           <a:p>
             <a:pPr>
-              <a:defRPr sz="1100" b="1">
-                <a:solidFill>
-                  <a:srgbClr val="333333"/>
-                </a:solidFill>
-              </a:defRPr>
-            </a:pPr>
-            <a:r>
-              <a:t>TRƯỜNG THPT THUẬN HOÁ</a:t>
-            </a:r>
-          </a:p>
-          <a:p>
-            <a:pPr>
-              <a:defRPr sz="1000">
+              <a:defRPr sz="1300" b="1">
+                <a:solidFill>
+                  <a:srgbClr val="333333"/>
+                </a:solidFill>
+              </a:defRPr>
+            </a:pPr>
+            <a:r>
+              <a:t>Trường THPT Thuận Hoá</a:t>
+            </a:r>
+          </a:p>
+          <a:p>
+            <a:pPr>
+              <a:defRPr sz="1100">
                 <a:solidFill>
                   <a:srgbClr val="646464"/>
                 </a:solidFill>
               </a:defRPr>
             </a:pPr>
             <a:r>
-              <a:t>Đại học Sư Phạm, Đại học Huế</a:t>
+              <a:t>Trường Đại học Sư Phạm, Đại học Huế</a:t>
             </a:r>
           </a:p>
         </p:txBody>
@@ -4601,7 +4590,7 @@
         </p:nvSpPr>
         <p:spPr>
           <a:xfrm>
-            <a:off x="5303520" y="182880"/>
+            <a:off x="5486400" y="228600"/>
             <a:ext cx="6400800" cy="640080"/>
           </a:xfrm>
           <a:prstGeom prst="rect">
@@ -4616,14 +4605,14 @@
           <a:lstStyle/>
           <a:p>
             <a:pPr algn="ctr">
-              <a:defRPr sz="1400" b="1">
-                <a:solidFill>
-                  <a:srgbClr val="333333"/>
-                </a:solidFill>
-              </a:defRPr>
-            </a:pPr>
-            <a:r>
-              <a:t>Tài liệu tham khảo</a:t>
+              <a:defRPr sz="1600" b="1">
+                <a:solidFill>
+                  <a:srgbClr val="333333"/>
+                </a:solidFill>
+              </a:defRPr>
+            </a:pPr>
+            <a:r>
+              <a:t>10. Kết luận</a:t>
             </a:r>
           </a:p>
         </p:txBody>
@@ -4651,14 +4640,14 @@
           <a:lstStyle/>
           <a:p>
             <a:pPr>
-              <a:defRPr sz="1000">
+              <a:defRPr sz="1100">
                 <a:solidFill>
                   <a:srgbClr val="646464"/>
                 </a:solidFill>
               </a:defRPr>
             </a:pPr>
             <a:r>
-              <a:t>GV hướng dẫn: Mai Xuân Văn                                                                                           12</a:t>
+              <a:t>GV: Mai Xuân Văn                                                                                           12</a:t>
             </a:r>
           </a:p>
         </p:txBody>
@@ -4671,8 +4660,43 @@
         </p:nvSpPr>
         <p:spPr>
           <a:xfrm>
-            <a:off x="640080" y="1828800"/>
-            <a:ext cx="10515600" cy="4389120"/>
+            <a:off x="457200" y="1188720"/>
+            <a:ext cx="10972800" cy="640080"/>
+          </a:xfrm>
+          <a:prstGeom prst="rect">
+            <a:avLst/>
+          </a:prstGeom>
+          <a:noFill/>
+        </p:spPr>
+        <p:txBody>
+          <a:bodyPr wrap="none">
+            <a:spAutoFit/>
+          </a:bodyPr>
+          <a:lstStyle/>
+          <a:p>
+            <a:pPr>
+              <a:defRPr sz="3200" b="1">
+                <a:solidFill>
+                  <a:srgbClr val="0066CC"/>
+                </a:solidFill>
+              </a:defRPr>
+            </a:pPr>
+            <a:r>
+              <a:t>Đóng góp chính</a:t>
+            </a:r>
+          </a:p>
+        </p:txBody>
+      </p:sp>
+      <p:sp>
+        <p:nvSpPr>
+          <p:cNvPr id="9" name="TextBox 8"/>
+          <p:cNvSpPr txBox="1"/>
+          <p:nvPr/>
+        </p:nvSpPr>
+        <p:spPr>
+          <a:xfrm>
+            <a:off x="640080" y="2011680"/>
+            <a:ext cx="10515600" cy="4114800"/>
           </a:xfrm>
           <a:prstGeom prst="rect">
             <a:avLst/>
@@ -4687,217 +4711,202 @@
           <a:p>
             <a:pPr>
               <a:spcBef>
-                <a:spcPts val="800"/>
-              </a:spcBef>
-              <a:spcAft>
-                <a:spcPts val="400"/>
-              </a:spcAft>
-              <a:defRPr sz="1400">
-                <a:solidFill>
-                  <a:srgbClr val="333333"/>
-                </a:solidFill>
-              </a:defRPr>
-            </a:pPr>
-            <a:r>
-              <a:t>• [1] Bộ GD&amp;ĐT (2026). Quyết định 2422/QĐ-BGDĐT ban hành Khung nội dung</a:t>
-            </a:r>
-          </a:p>
-          <a:p>
-            <a:pPr>
-              <a:spcBef>
-                <a:spcPts val="800"/>
-              </a:spcBef>
-              <a:spcAft>
-                <a:spcPts val="400"/>
-              </a:spcAft>
-              <a:defRPr sz="1400">
-                <a:solidFill>
-                  <a:srgbClr val="333333"/>
-                </a:solidFill>
-              </a:defRPr>
-            </a:pPr>
-            <a:r>
-              <a:t>      giáo dục trí tuệ nhân tạo cho học sinh phổ thông.</a:t>
-            </a:r>
-          </a:p>
-          <a:p>
-            <a:pPr>
-              <a:spcBef>
-                <a:spcPts val="800"/>
-              </a:spcBef>
-              <a:spcAft>
-                <a:spcPts val="400"/>
-              </a:spcAft>
-              <a:defRPr sz="1400">
-                <a:solidFill>
-                  <a:srgbClr val="333333"/>
-                </a:solidFill>
-              </a:defRPr>
-            </a:pPr>
-            <a:r>
-              <a:t>• </a:t>
-            </a:r>
-          </a:p>
-          <a:p>
-            <a:pPr>
-              <a:spcBef>
-                <a:spcPts val="800"/>
-              </a:spcBef>
-              <a:spcAft>
-                <a:spcPts val="400"/>
-              </a:spcAft>
-              <a:defRPr sz="1400">
-                <a:solidFill>
-                  <a:srgbClr val="333333"/>
-                </a:solidFill>
-              </a:defRPr>
-            </a:pPr>
-            <a:r>
-              <a:t>• [2] Bộ GD&amp;ĐT (2026). Công văn 5588/BGDĐT-GDPT về triển khai thực hiện</a:t>
-            </a:r>
-          </a:p>
-          <a:p>
-            <a:pPr>
-              <a:spcBef>
-                <a:spcPts val="800"/>
-              </a:spcBef>
-              <a:spcAft>
-                <a:spcPts val="400"/>
-              </a:spcAft>
-              <a:defRPr sz="1400">
-                <a:solidFill>
-                  <a:srgbClr val="333333"/>
-                </a:solidFill>
-              </a:defRPr>
-            </a:pPr>
-            <a:r>
-              <a:t>      Khung nội dung giáo dục AI năm học 2026-2027.</a:t>
-            </a:r>
-          </a:p>
-          <a:p>
-            <a:pPr>
-              <a:spcBef>
-                <a:spcPts val="800"/>
-              </a:spcBef>
-              <a:spcAft>
-                <a:spcPts val="400"/>
-              </a:spcAft>
-              <a:defRPr sz="1400">
-                <a:solidFill>
-                  <a:srgbClr val="333333"/>
-                </a:solidFill>
-              </a:defRPr>
-            </a:pPr>
-            <a:r>
-              <a:t>• </a:t>
-            </a:r>
-          </a:p>
-          <a:p>
-            <a:pPr>
-              <a:spcBef>
-                <a:spcPts val="800"/>
-              </a:spcBef>
-              <a:spcAft>
-                <a:spcPts val="400"/>
-              </a:spcAft>
-              <a:defRPr sz="1400">
-                <a:solidFill>
-                  <a:srgbClr val="333333"/>
-                </a:solidFill>
-              </a:defRPr>
-            </a:pPr>
-            <a:r>
-              <a:t>• [3] Quốc hội (2025). Luật Trí tuệ nhân tạo 134/2025/QH15.</a:t>
-            </a:r>
-          </a:p>
-          <a:p>
-            <a:pPr>
-              <a:spcBef>
-                <a:spcPts val="800"/>
-              </a:spcBef>
-              <a:spcAft>
-                <a:spcPts val="400"/>
-              </a:spcAft>
-              <a:defRPr sz="1400">
-                <a:solidFill>
-                  <a:srgbClr val="333333"/>
-                </a:solidFill>
-              </a:defRPr>
-            </a:pPr>
-            <a:r>
-              <a:t>• </a:t>
-            </a:r>
-          </a:p>
-          <a:p>
-            <a:pPr>
-              <a:spcBef>
-                <a:spcPts val="800"/>
-              </a:spcBef>
-              <a:spcAft>
-                <a:spcPts val="400"/>
-              </a:spcAft>
-              <a:defRPr sz="1400">
-                <a:solidFill>
-                  <a:srgbClr val="333333"/>
-                </a:solidFill>
-              </a:defRPr>
-            </a:pPr>
-            <a:r>
-              <a:t>• [4] Quốc hội (2025). Luật Bảo vệ dữ liệu cá nhân 91/2025/QH15.</a:t>
-            </a:r>
-          </a:p>
-          <a:p>
-            <a:pPr>
-              <a:spcBef>
-                <a:spcPts val="800"/>
-              </a:spcBef>
-              <a:spcAft>
-                <a:spcPts val="400"/>
-              </a:spcAft>
-              <a:defRPr sz="1400">
-                <a:solidFill>
-                  <a:srgbClr val="333333"/>
-                </a:solidFill>
-              </a:defRPr>
-            </a:pPr>
-            <a:r>
-              <a:t>• </a:t>
-            </a:r>
-          </a:p>
-          <a:p>
-            <a:pPr>
-              <a:spcBef>
-                <a:spcPts val="800"/>
-              </a:spcBef>
-              <a:spcAft>
-                <a:spcPts val="400"/>
-              </a:spcAft>
-              <a:defRPr sz="1400">
-                <a:solidFill>
-                  <a:srgbClr val="333333"/>
-                </a:solidFill>
-              </a:defRPr>
-            </a:pPr>
-            <a:r>
-              <a:t>• [5] UNESCO (2022). K-12 AI curricula: a snapshot of AI curricula for</a:t>
-            </a:r>
-          </a:p>
-          <a:p>
-            <a:pPr>
-              <a:spcBef>
-                <a:spcPts val="800"/>
-              </a:spcBef>
-              <a:spcAft>
-                <a:spcPts val="400"/>
-              </a:spcAft>
-              <a:defRPr sz="1400">
-                <a:solidFill>
-                  <a:srgbClr val="333333"/>
-                </a:solidFill>
-              </a:defRPr>
-            </a:pPr>
-            <a:r>
-              <a:t>      primary and secondary schools.</a:t>
+                <a:spcPts val="1000"/>
+              </a:spcBef>
+              <a:spcAft>
+                <a:spcPts val="600"/>
+              </a:spcAft>
+              <a:defRPr sz="1700">
+                <a:solidFill>
+                  <a:srgbClr val="333333"/>
+                </a:solidFill>
+              </a:defRPr>
+            </a:pPr>
+            <a:r>
+              <a:t>1. Công cụ offline tiếng Việt đầu tiên phủ 22/22 yêu cầu cần đạt lớp 10 theo QĐ 2422</a:t>
+            </a:r>
+          </a:p>
+          <a:p>
+            <a:pPr>
+              <a:spcBef>
+                <a:spcPts val="1000"/>
+              </a:spcBef>
+              <a:spcAft>
+                <a:spcPts val="600"/>
+              </a:spcAft>
+              <a:defRPr sz="1700">
+                <a:solidFill>
+                  <a:srgbClr val="333333"/>
+                </a:solidFill>
+              </a:defRPr>
+            </a:pPr>
+          </a:p>
+          <a:p>
+            <a:pPr>
+              <a:spcBef>
+                <a:spcPts val="1000"/>
+              </a:spcBef>
+              <a:spcAft>
+                <a:spcPts val="600"/>
+              </a:spcAft>
+              <a:defRPr sz="1700">
+                <a:solidFill>
+                  <a:srgbClr val="333333"/>
+                </a:solidFill>
+              </a:defRPr>
+            </a:pPr>
+            <a:r>
+              <a:t>2. Kiến trúc 3 tầng chạy được trên file://, không phụ thuộc máy chủ</a:t>
+            </a:r>
+          </a:p>
+          <a:p>
+            <a:pPr>
+              <a:spcBef>
+                <a:spcPts val="1000"/>
+              </a:spcBef>
+              <a:spcAft>
+                <a:spcPts val="600"/>
+              </a:spcAft>
+              <a:defRPr sz="1700">
+                <a:solidFill>
+                  <a:srgbClr val="333333"/>
+                </a:solidFill>
+              </a:defRPr>
+            </a:pPr>
+          </a:p>
+          <a:p>
+            <a:pPr>
+              <a:spcBef>
+                <a:spcPts val="1000"/>
+              </a:spcBef>
+              <a:spcAft>
+                <a:spcPts val="600"/>
+              </a:spcAft>
+              <a:defRPr sz="1700">
+                <a:solidFill>
+                  <a:srgbClr val="333333"/>
+                </a:solidFill>
+              </a:defRPr>
+            </a:pPr>
+            <a:r>
+              <a:t>3. 5 phân hệ mô phỏng với cơ chế tự chấm tất định</a:t>
+            </a:r>
+          </a:p>
+          <a:p>
+            <a:pPr>
+              <a:spcBef>
+                <a:spcPts val="1000"/>
+              </a:spcBef>
+              <a:spcAft>
+                <a:spcPts val="600"/>
+              </a:spcAft>
+              <a:defRPr sz="1700">
+                <a:solidFill>
+                  <a:srgbClr val="333333"/>
+                </a:solidFill>
+              </a:defRPr>
+            </a:pPr>
+          </a:p>
+          <a:p>
+            <a:pPr>
+              <a:spcBef>
+                <a:spcPts val="1000"/>
+              </a:spcBef>
+              <a:spcAft>
+                <a:spcPts val="600"/>
+              </a:spcAft>
+              <a:defRPr sz="1700">
+                <a:solidFill>
+                  <a:srgbClr val="333333"/>
+                </a:solidFill>
+              </a:defRPr>
+            </a:pPr>
+            <a:r>
+              <a:t>4. Tích hợp vào 28 bài SGK Tin học 10 với phân phối 12 tiết</a:t>
+            </a:r>
+          </a:p>
+          <a:p>
+            <a:pPr>
+              <a:spcBef>
+                <a:spcPts val="1000"/>
+              </a:spcBef>
+              <a:spcAft>
+                <a:spcPts val="600"/>
+              </a:spcAft>
+              <a:defRPr sz="1700">
+                <a:solidFill>
+                  <a:srgbClr val="333333"/>
+                </a:solidFill>
+              </a:defRPr>
+            </a:pPr>
+          </a:p>
+          <a:p>
+            <a:pPr>
+              <a:spcBef>
+                <a:spcPts val="1000"/>
+              </a:spcBef>
+              <a:spcAft>
+                <a:spcPts val="600"/>
+              </a:spcAft>
+              <a:defRPr sz="1700">
+                <a:solidFill>
+                  <a:srgbClr val="333333"/>
+                </a:solidFill>
+              </a:defRPr>
+            </a:pPr>
+            <a:r>
+              <a:t>5. Hệ thống kiểm chứng tự động 97/97 tiêu chí, có bộ mutation test</a:t>
+            </a:r>
+          </a:p>
+          <a:p>
+            <a:pPr>
+              <a:spcBef>
+                <a:spcPts val="1000"/>
+              </a:spcBef>
+              <a:spcAft>
+                <a:spcPts val="600"/>
+              </a:spcAft>
+              <a:defRPr sz="1700">
+                <a:solidFill>
+                  <a:srgbClr val="333333"/>
+                </a:solidFill>
+              </a:defRPr>
+            </a:pPr>
+          </a:p>
+          <a:p>
+            <a:pPr>
+              <a:spcBef>
+                <a:spcPts val="1000"/>
+              </a:spcBef>
+              <a:spcAft>
+                <a:spcPts val="600"/>
+              </a:spcAft>
+              <a:defRPr sz="1700">
+                <a:solidFill>
+                  <a:srgbClr val="333333"/>
+                </a:solidFill>
+              </a:defRPr>
+            </a:pPr>
+            <a:r>
+              <a:t>6. Tuân thủ CV 5588: không tài khoản, không phụ thuộc nhà cung cấp,</a:t>
+            </a:r>
+          </a:p>
+          <a:p>
+            <a:pPr>
+              <a:spcBef>
+                <a:spcPts val="1000"/>
+              </a:spcBef>
+              <a:spcAft>
+                <a:spcPts val="600"/>
+              </a:spcAft>
+              <a:defRPr sz="1700">
+                <a:solidFill>
+                  <a:srgbClr val="333333"/>
+                </a:solidFill>
+              </a:defRPr>
+            </a:pPr>
+            <a:r>
+              <a:t>    không buộc mua thiết bị, ưu tiên mã nguồn mở</a:t>
             </a:r>
           </a:p>
         </p:txBody>
@@ -4928,7 +4937,7 @@
         </p:nvSpPr>
         <p:spPr>
           <a:xfrm>
-            <a:off x="457200" y="868680"/>
+            <a:off x="457200" y="1005840"/>
             <a:ext cx="11247120" cy="12700"/>
           </a:xfrm>
           <a:prstGeom prst="rect">
@@ -4989,7 +4998,7 @@
       </p:pic>
       <p:pic>
         <p:nvPicPr>
-          <p:cNvPr id="4" name="Picture 3" descr="logo_thpt_thuan_hoa.jpg"/>
+          <p:cNvPr id="4" name="Picture 3" descr="logo_thpt_thuan_hoa.png"/>
           <p:cNvPicPr>
             <a:picLocks noChangeAspect="1"/>
           </p:cNvPicPr>
@@ -5003,7 +5012,7 @@
         </p:blipFill>
         <p:spPr>
           <a:xfrm>
-            <a:off x="1188720" y="137160"/>
+            <a:off x="1280160" y="137160"/>
             <a:ext cx="640080" cy="640080"/>
           </a:xfrm>
           <a:prstGeom prst="rect">
@@ -5019,8 +5028,8 @@
         </p:nvSpPr>
         <p:spPr>
           <a:xfrm>
-            <a:off x="1920240" y="137160"/>
-            <a:ext cx="3200400" cy="640080"/>
+            <a:off x="2103120" y="182880"/>
+            <a:ext cx="3200400" cy="731520"/>
           </a:xfrm>
           <a:prstGeom prst="rect">
             <a:avLst/>
@@ -5034,26 +5043,26 @@
           <a:lstStyle/>
           <a:p>
             <a:pPr>
-              <a:defRPr sz="1100" b="1">
-                <a:solidFill>
-                  <a:srgbClr val="333333"/>
-                </a:solidFill>
-              </a:defRPr>
-            </a:pPr>
-            <a:r>
-              <a:t>TRƯỜNG THPT THUẬN HOÁ</a:t>
-            </a:r>
-          </a:p>
-          <a:p>
-            <a:pPr>
-              <a:defRPr sz="1000">
+              <a:defRPr sz="1300" b="1">
+                <a:solidFill>
+                  <a:srgbClr val="333333"/>
+                </a:solidFill>
+              </a:defRPr>
+            </a:pPr>
+            <a:r>
+              <a:t>Trường THPT Thuận Hoá</a:t>
+            </a:r>
+          </a:p>
+          <a:p>
+            <a:pPr>
+              <a:defRPr sz="1100">
                 <a:solidFill>
                   <a:srgbClr val="646464"/>
                 </a:solidFill>
               </a:defRPr>
             </a:pPr>
             <a:r>
-              <a:t>Đại học Sư Phạm, Đại học Huế</a:t>
+              <a:t>Trường Đại học Sư Phạm, Đại học Huế</a:t>
             </a:r>
           </a:p>
         </p:txBody>
@@ -5066,7 +5075,7 @@
         </p:nvSpPr>
         <p:spPr>
           <a:xfrm>
-            <a:off x="5303520" y="182880"/>
+            <a:off x="5486400" y="228600"/>
             <a:ext cx="6400800" cy="640080"/>
           </a:xfrm>
           <a:prstGeom prst="rect">
@@ -5087,6 +5096,9 @@
                 </a:solidFill>
               </a:defRPr>
             </a:pPr>
+            <a:r>
+              <a:t>11. Tài liệu tham khảo</a:t>
+            </a:r>
           </a:p>
         </p:txBody>
       </p:sp>
@@ -5098,8 +5110,8 @@
         </p:nvSpPr>
         <p:spPr>
           <a:xfrm>
-            <a:off x="914400" y="2286000"/>
-            <a:ext cx="10058400" cy="1371600"/>
+            <a:off x="457200" y="6400800"/>
+            <a:ext cx="10972800" cy="365760"/>
           </a:xfrm>
           <a:prstGeom prst="rect">
             <a:avLst/>
@@ -5112,15 +5124,15 @@
           </a:bodyPr>
           <a:lstStyle/>
           <a:p>
-            <a:pPr algn="ctr">
-              <a:defRPr sz="5400" b="1">
-                <a:solidFill>
-                  <a:srgbClr val="000000"/>
-                </a:solidFill>
-              </a:defRPr>
-            </a:pPr>
-            <a:r>
-              <a:t>Cảm ơn</a:t>
+            <a:pPr>
+              <a:defRPr sz="1100">
+                <a:solidFill>
+                  <a:srgbClr val="646464"/>
+                </a:solidFill>
+              </a:defRPr>
+            </a:pPr>
+            <a:r>
+              <a:t>GV: Mai Xuân Văn                                                                                           13</a:t>
             </a:r>
           </a:p>
         </p:txBody>
@@ -5133,8 +5145,8 @@
         </p:nvSpPr>
         <p:spPr>
           <a:xfrm>
-            <a:off x="914400" y="3840480"/>
-            <a:ext cx="10058400" cy="1828800"/>
+            <a:off x="640080" y="1828800"/>
+            <a:ext cx="10515600" cy="4114800"/>
           </a:xfrm>
           <a:prstGeom prst="rect">
             <a:avLst/>
@@ -5147,37 +5159,487 @@
           </a:bodyPr>
           <a:lstStyle/>
           <a:p>
+            <a:pPr>
+              <a:spcBef>
+                <a:spcPts val="1000"/>
+              </a:spcBef>
+              <a:spcAft>
+                <a:spcPts val="600"/>
+              </a:spcAft>
+              <a:defRPr sz="1500">
+                <a:solidFill>
+                  <a:srgbClr val="333333"/>
+                </a:solidFill>
+              </a:defRPr>
+            </a:pPr>
+            <a:r>
+              <a:t>[1] Bộ GD&amp;ĐT (2026). Quyết định 2422/QĐ-BGDĐT ban hành Khung nội dung</a:t>
+            </a:r>
+          </a:p>
+          <a:p>
+            <a:pPr>
+              <a:spcBef>
+                <a:spcPts val="1000"/>
+              </a:spcBef>
+              <a:spcAft>
+                <a:spcPts val="600"/>
+              </a:spcAft>
+              <a:defRPr sz="1500">
+                <a:solidFill>
+                  <a:srgbClr val="333333"/>
+                </a:solidFill>
+              </a:defRPr>
+            </a:pPr>
+            <a:r>
+              <a:t>      giáo dục trí tuệ nhân tạo cho học sinh phổ thông.</a:t>
+            </a:r>
+          </a:p>
+          <a:p>
+            <a:pPr>
+              <a:spcBef>
+                <a:spcPts val="1000"/>
+              </a:spcBef>
+              <a:spcAft>
+                <a:spcPts val="600"/>
+              </a:spcAft>
+              <a:defRPr sz="1500">
+                <a:solidFill>
+                  <a:srgbClr val="333333"/>
+                </a:solidFill>
+              </a:defRPr>
+            </a:pPr>
+          </a:p>
+          <a:p>
+            <a:pPr>
+              <a:spcBef>
+                <a:spcPts val="1000"/>
+              </a:spcBef>
+              <a:spcAft>
+                <a:spcPts val="600"/>
+              </a:spcAft>
+              <a:defRPr sz="1500">
+                <a:solidFill>
+                  <a:srgbClr val="333333"/>
+                </a:solidFill>
+              </a:defRPr>
+            </a:pPr>
+            <a:r>
+              <a:t>[2] Bộ GD&amp;ĐT (2026). Công văn 5588/BGDĐT-GDPT về triển khai thực hiện</a:t>
+            </a:r>
+          </a:p>
+          <a:p>
+            <a:pPr>
+              <a:spcBef>
+                <a:spcPts val="1000"/>
+              </a:spcBef>
+              <a:spcAft>
+                <a:spcPts val="600"/>
+              </a:spcAft>
+              <a:defRPr sz="1500">
+                <a:solidFill>
+                  <a:srgbClr val="333333"/>
+                </a:solidFill>
+              </a:defRPr>
+            </a:pPr>
+            <a:r>
+              <a:t>      Khung nội dung giáo dục AI năm học 2026-2027.</a:t>
+            </a:r>
+          </a:p>
+          <a:p>
+            <a:pPr>
+              <a:spcBef>
+                <a:spcPts val="1000"/>
+              </a:spcBef>
+              <a:spcAft>
+                <a:spcPts val="600"/>
+              </a:spcAft>
+              <a:defRPr sz="1500">
+                <a:solidFill>
+                  <a:srgbClr val="333333"/>
+                </a:solidFill>
+              </a:defRPr>
+            </a:pPr>
+          </a:p>
+          <a:p>
+            <a:pPr>
+              <a:spcBef>
+                <a:spcPts val="1000"/>
+              </a:spcBef>
+              <a:spcAft>
+                <a:spcPts val="600"/>
+              </a:spcAft>
+              <a:defRPr sz="1500">
+                <a:solidFill>
+                  <a:srgbClr val="333333"/>
+                </a:solidFill>
+              </a:defRPr>
+            </a:pPr>
+            <a:r>
+              <a:t>[3] Quốc hội (2025). Luật Trí tuệ nhân tạo 134/2025/QH15.</a:t>
+            </a:r>
+          </a:p>
+          <a:p>
+            <a:pPr>
+              <a:spcBef>
+                <a:spcPts val="1000"/>
+              </a:spcBef>
+              <a:spcAft>
+                <a:spcPts val="600"/>
+              </a:spcAft>
+              <a:defRPr sz="1500">
+                <a:solidFill>
+                  <a:srgbClr val="333333"/>
+                </a:solidFill>
+              </a:defRPr>
+            </a:pPr>
+          </a:p>
+          <a:p>
+            <a:pPr>
+              <a:spcBef>
+                <a:spcPts val="1000"/>
+              </a:spcBef>
+              <a:spcAft>
+                <a:spcPts val="600"/>
+              </a:spcAft>
+              <a:defRPr sz="1500">
+                <a:solidFill>
+                  <a:srgbClr val="333333"/>
+                </a:solidFill>
+              </a:defRPr>
+            </a:pPr>
+            <a:r>
+              <a:t>[4] Quốc hội (2025). Luật Bảo vệ dữ liệu cá nhân 91/2025/QH15.</a:t>
+            </a:r>
+          </a:p>
+          <a:p>
+            <a:pPr>
+              <a:spcBef>
+                <a:spcPts val="1000"/>
+              </a:spcBef>
+              <a:spcAft>
+                <a:spcPts val="600"/>
+              </a:spcAft>
+              <a:defRPr sz="1500">
+                <a:solidFill>
+                  <a:srgbClr val="333333"/>
+                </a:solidFill>
+              </a:defRPr>
+            </a:pPr>
+          </a:p>
+          <a:p>
+            <a:pPr>
+              <a:spcBef>
+                <a:spcPts val="1000"/>
+              </a:spcBef>
+              <a:spcAft>
+                <a:spcPts val="600"/>
+              </a:spcAft>
+              <a:defRPr sz="1500">
+                <a:solidFill>
+                  <a:srgbClr val="333333"/>
+                </a:solidFill>
+              </a:defRPr>
+            </a:pPr>
+            <a:r>
+              <a:t>[5] UNESCO (2022). K-12 AI curricula: a snapshot of AI curricula for</a:t>
+            </a:r>
+          </a:p>
+          <a:p>
+            <a:pPr>
+              <a:spcBef>
+                <a:spcPts val="1000"/>
+              </a:spcBef>
+              <a:spcAft>
+                <a:spcPts val="600"/>
+              </a:spcAft>
+              <a:defRPr sz="1500">
+                <a:solidFill>
+                  <a:srgbClr val="333333"/>
+                </a:solidFill>
+              </a:defRPr>
+            </a:pPr>
+            <a:r>
+              <a:t>      primary and secondary schools.</a:t>
+            </a:r>
+          </a:p>
+        </p:txBody>
+      </p:sp>
+    </p:spTree>
+  </p:cSld>
+  <p:clrMapOvr>
+    <a:masterClrMapping/>
+  </p:clrMapOvr>
+</p:sld>
+</file>
+
+<file path=ppt/slides/slide14.xml><?xml version="1.0" encoding="utf-8"?>
+<p:sld xmlns:a="http://schemas.openxmlformats.org/drawingml/2006/main" xmlns:p="http://schemas.openxmlformats.org/presentationml/2006/main" xmlns:r="http://schemas.openxmlformats.org/officeDocument/2006/relationships">
+  <p:cSld>
+    <p:spTree>
+      <p:nvGrpSpPr>
+        <p:cNvPr id="1" name=""/>
+        <p:cNvGrpSpPr/>
+        <p:nvPr/>
+      </p:nvGrpSpPr>
+      <p:grpSpPr/>
+      <p:sp>
+        <p:nvSpPr>
+          <p:cNvPr id="2" name="Rectangle 1"/>
+          <p:cNvSpPr/>
+          <p:nvPr/>
+        </p:nvSpPr>
+        <p:spPr>
+          <a:xfrm>
+            <a:off x="457200" y="1005840"/>
+            <a:ext cx="11247120" cy="12700"/>
+          </a:xfrm>
+          <a:prstGeom prst="rect">
+            <a:avLst/>
+          </a:prstGeom>
+          <a:solidFill>
+            <a:srgbClr val="B4B4B4"/>
+          </a:solidFill>
+          <a:ln>
+            <a:noFill/>
+          </a:ln>
+        </p:spPr>
+        <p:style>
+          <a:lnRef idx="1">
+            <a:schemeClr val="accent1"/>
+          </a:lnRef>
+          <a:fillRef idx="3">
+            <a:schemeClr val="accent1"/>
+          </a:fillRef>
+          <a:effectRef idx="2">
+            <a:schemeClr val="accent1"/>
+          </a:effectRef>
+          <a:fontRef idx="minor">
+            <a:schemeClr val="lt1"/>
+          </a:fontRef>
+        </p:style>
+        <p:txBody>
+          <a:bodyPr rtlCol="0" anchor="ctr"/>
+          <a:lstStyle/>
+          <a:p>
+            <a:pPr algn="ctr"/>
+          </a:p>
+        </p:txBody>
+      </p:sp>
+      <p:pic>
+        <p:nvPicPr>
+          <p:cNvPr id="3" name="Picture 2" descr="logo_dhsp_hue.png"/>
+          <p:cNvPicPr>
+            <a:picLocks noChangeAspect="1"/>
+          </p:cNvPicPr>
+          <p:nvPr/>
+        </p:nvPicPr>
+        <p:blipFill>
+          <a:blip r:embed="rId2"/>
+          <a:stretch>
+            <a:fillRect/>
+          </a:stretch>
+        </p:blipFill>
+        <p:spPr>
+          <a:xfrm>
+            <a:off x="457200" y="137160"/>
+            <a:ext cx="731520" cy="731520"/>
+          </a:xfrm>
+          <a:prstGeom prst="rect">
+            <a:avLst/>
+          </a:prstGeom>
+        </p:spPr>
+      </p:pic>
+      <p:pic>
+        <p:nvPicPr>
+          <p:cNvPr id="4" name="Picture 3" descr="logo_thpt_thuan_hoa.png"/>
+          <p:cNvPicPr>
+            <a:picLocks noChangeAspect="1"/>
+          </p:cNvPicPr>
+          <p:nvPr/>
+        </p:nvPicPr>
+        <p:blipFill>
+          <a:blip r:embed="rId3"/>
+          <a:stretch>
+            <a:fillRect/>
+          </a:stretch>
+        </p:blipFill>
+        <p:spPr>
+          <a:xfrm>
+            <a:off x="1280160" y="137160"/>
+            <a:ext cx="731520" cy="731520"/>
+          </a:xfrm>
+          <a:prstGeom prst="rect">
+            <a:avLst/>
+          </a:prstGeom>
+        </p:spPr>
+      </p:pic>
+      <p:sp>
+        <p:nvSpPr>
+          <p:cNvPr id="5" name="TextBox 4"/>
+          <p:cNvSpPr txBox="1"/>
+          <p:nvPr/>
+        </p:nvSpPr>
+        <p:spPr>
+          <a:xfrm>
+            <a:off x="2103120" y="182880"/>
+            <a:ext cx="3200400" cy="731520"/>
+          </a:xfrm>
+          <a:prstGeom prst="rect">
+            <a:avLst/>
+          </a:prstGeom>
+          <a:noFill/>
+        </p:spPr>
+        <p:txBody>
+          <a:bodyPr wrap="square">
+            <a:spAutoFit/>
+          </a:bodyPr>
+          <a:lstStyle/>
+          <a:p>
+            <a:pPr>
+              <a:defRPr sz="1300" b="1">
+                <a:solidFill>
+                  <a:srgbClr val="333333"/>
+                </a:solidFill>
+              </a:defRPr>
+            </a:pPr>
+            <a:r>
+              <a:t>Trường THPT Thuận Hoá</a:t>
+            </a:r>
+          </a:p>
+          <a:p>
+            <a:pPr>
+              <a:defRPr sz="1100">
+                <a:solidFill>
+                  <a:srgbClr val="646464"/>
+                </a:solidFill>
+              </a:defRPr>
+            </a:pPr>
+            <a:r>
+              <a:t>Trường Đại học Sư Phạm, Đại học Huế</a:t>
+            </a:r>
+          </a:p>
+        </p:txBody>
+      </p:sp>
+      <p:sp>
+        <p:nvSpPr>
+          <p:cNvPr id="6" name="TextBox 5"/>
+          <p:cNvSpPr txBox="1"/>
+          <p:nvPr/>
+        </p:nvSpPr>
+        <p:spPr>
+          <a:xfrm>
+            <a:off x="5486400" y="228600"/>
+            <a:ext cx="6400800" cy="640080"/>
+          </a:xfrm>
+          <a:prstGeom prst="rect">
+            <a:avLst/>
+          </a:prstGeom>
+          <a:noFill/>
+        </p:spPr>
+        <p:txBody>
+          <a:bodyPr wrap="square">
+            <a:spAutoFit/>
+          </a:bodyPr>
+          <a:lstStyle/>
+          <a:p>
             <a:pPr algn="ctr">
-              <a:defRPr sz="2200" b="1">
-                <a:solidFill>
-                  <a:srgbClr val="333333"/>
-                </a:solidFill>
-              </a:defRPr>
-            </a:pPr>
-            <a:r>
-              <a:t>GV Mai Xuân Văn</a:t>
-            </a:r>
+              <a:defRPr sz="1800" b="1">
+                <a:solidFill>
+                  <a:srgbClr val="333333"/>
+                </a:solidFill>
+              </a:defRPr>
+            </a:pPr>
+          </a:p>
+        </p:txBody>
+      </p:sp>
+      <p:sp>
+        <p:nvSpPr>
+          <p:cNvPr id="7" name="TextBox 6"/>
+          <p:cNvSpPr txBox="1"/>
+          <p:nvPr/>
+        </p:nvSpPr>
+        <p:spPr>
+          <a:xfrm>
+            <a:off x="914400" y="2286000"/>
+            <a:ext cx="10058400" cy="1371600"/>
+          </a:xfrm>
+          <a:prstGeom prst="rect">
+            <a:avLst/>
+          </a:prstGeom>
+          <a:noFill/>
+        </p:spPr>
+        <p:txBody>
+          <a:bodyPr wrap="none">
+            <a:spAutoFit/>
+          </a:bodyPr>
+          <a:lstStyle/>
+          <a:p>
+            <a:pPr algn="ctr">
+              <a:defRPr sz="6000" b="1">
+                <a:solidFill>
+                  <a:srgbClr val="000000"/>
+                </a:solidFill>
+              </a:defRPr>
+            </a:pPr>
+            <a:r>
+              <a:t>Cảm ơn</a:t>
+            </a:r>
+          </a:p>
+        </p:txBody>
+      </p:sp>
+      <p:sp>
+        <p:nvSpPr>
+          <p:cNvPr id="8" name="TextBox 7"/>
+          <p:cNvSpPr txBox="1"/>
+          <p:nvPr/>
+        </p:nvSpPr>
+        <p:spPr>
+          <a:xfrm>
+            <a:off x="914400" y="3931920"/>
+            <a:ext cx="10058400" cy="1828800"/>
+          </a:xfrm>
+          <a:prstGeom prst="rect">
+            <a:avLst/>
+          </a:prstGeom>
+          <a:noFill/>
+        </p:spPr>
+        <p:txBody>
+          <a:bodyPr wrap="square">
+            <a:spAutoFit/>
+          </a:bodyPr>
+          <a:lstStyle/>
+          <a:p>
+            <a:pPr algn="ctr">
+              <a:defRPr sz="2400" b="1">
+                <a:solidFill>
+                  <a:srgbClr val="333333"/>
+                </a:solidFill>
+              </a:defRPr>
+            </a:pPr>
+            <a:r>
+              <a:t>GV: Mai Xuân Văn</a:t>
+            </a:r>
+          </a:p>
+          <a:p>
+            <a:pPr algn="ctr">
+              <a:defRPr sz="1800">
+                <a:solidFill>
+                  <a:srgbClr val="646464"/>
+                </a:solidFill>
+              </a:defRPr>
+            </a:pPr>
+            <a:r>
+              <a:t>Trường THPT Thuận Hoá — Đại học Sư Phạm, Đại học Huế</a:t>
+            </a:r>
+          </a:p>
+          <a:p>
+            <a:pPr>
+              <a:defRPr sz="1200"/>
+            </a:pPr>
           </a:p>
           <a:p>
             <a:pPr algn="ctr">
               <a:defRPr sz="1600">
-                <a:solidFill>
-                  <a:srgbClr val="646464"/>
-                </a:solidFill>
-              </a:defRPr>
-            </a:pPr>
-            <a:r>
-              <a:t>Trường THPT Thuận Hoá — Đại học Sư Phạm, Đại học Huế</a:t>
-            </a:r>
-          </a:p>
-          <a:p>
-            <a:pPr>
-              <a:defRPr sz="1200"/>
-            </a:pPr>
-          </a:p>
-          <a:p>
-            <a:pPr algn="ctr">
-              <a:defRPr sz="1400">
                 <a:solidFill>
                   <a:srgbClr val="0066CC"/>
                 </a:solidFill>
@@ -5215,7 +5677,7 @@
         </p:nvSpPr>
         <p:spPr>
           <a:xfrm>
-            <a:off x="457200" y="868680"/>
+            <a:off x="457200" y="1005840"/>
             <a:ext cx="11247120" cy="12700"/>
           </a:xfrm>
           <a:prstGeom prst="rect">
@@ -5267,7 +5729,7 @@
         <p:spPr>
           <a:xfrm>
             <a:off x="457200" y="137160"/>
-            <a:ext cx="548640" cy="548640"/>
+            <a:ext cx="640080" cy="640080"/>
           </a:xfrm>
           <a:prstGeom prst="rect">
             <a:avLst/>
@@ -5276,7 +5738,7 @@
       </p:pic>
       <p:pic>
         <p:nvPicPr>
-          <p:cNvPr id="4" name="Picture 3" descr="logo_thpt_thuan_hoa.jpg"/>
+          <p:cNvPr id="4" name="Picture 3" descr="logo_thpt_thuan_hoa.png"/>
           <p:cNvPicPr>
             <a:picLocks noChangeAspect="1"/>
           </p:cNvPicPr>
@@ -5290,8 +5752,8 @@
         </p:blipFill>
         <p:spPr>
           <a:xfrm>
-            <a:off x="1188720" y="137160"/>
-            <a:ext cx="548640" cy="548640"/>
+            <a:off x="1280160" y="137160"/>
+            <a:ext cx="640080" cy="640080"/>
           </a:xfrm>
           <a:prstGeom prst="rect">
             <a:avLst/>
@@ -5306,8 +5768,8 @@
         </p:nvSpPr>
         <p:spPr>
           <a:xfrm>
-            <a:off x="1920240" y="137160"/>
-            <a:ext cx="3200400" cy="640080"/>
+            <a:off x="2103120" y="182880"/>
+            <a:ext cx="3200400" cy="731520"/>
           </a:xfrm>
           <a:prstGeom prst="rect">
             <a:avLst/>
@@ -5321,26 +5783,26 @@
           <a:lstStyle/>
           <a:p>
             <a:pPr>
-              <a:defRPr sz="1100" b="1">
-                <a:solidFill>
-                  <a:srgbClr val="333333"/>
-                </a:solidFill>
-              </a:defRPr>
-            </a:pPr>
-            <a:r>
-              <a:t>TRƯỜNG THPT THUẬN HOÁ</a:t>
-            </a:r>
-          </a:p>
-          <a:p>
-            <a:pPr>
-              <a:defRPr sz="1000">
+              <a:defRPr sz="1300" b="1">
+                <a:solidFill>
+                  <a:srgbClr val="333333"/>
+                </a:solidFill>
+              </a:defRPr>
+            </a:pPr>
+            <a:r>
+              <a:t>Trường THPT Thuận Hoá</a:t>
+            </a:r>
+          </a:p>
+          <a:p>
+            <a:pPr>
+              <a:defRPr sz="1100">
                 <a:solidFill>
                   <a:srgbClr val="646464"/>
                 </a:solidFill>
               </a:defRPr>
             </a:pPr>
             <a:r>
-              <a:t>Đại học Sư Phạm, Đại học Huế</a:t>
+              <a:t>Trường Đại học Sư Phạm, Đại học Huế</a:t>
             </a:r>
           </a:p>
         </p:txBody>
@@ -5353,7 +5815,7 @@
         </p:nvSpPr>
         <p:spPr>
           <a:xfrm>
-            <a:off x="5303520" y="182880"/>
+            <a:off x="5486400" y="228600"/>
             <a:ext cx="6400800" cy="640080"/>
           </a:xfrm>
           <a:prstGeom prst="rect">
@@ -5368,14 +5830,14 @@
           <a:lstStyle/>
           <a:p>
             <a:pPr algn="ctr">
-              <a:defRPr sz="1400" b="1">
-                <a:solidFill>
-                  <a:srgbClr val="333333"/>
-                </a:solidFill>
-              </a:defRPr>
-            </a:pPr>
-            <a:r>
-              <a:t>1. Đặt vấn đề</a:t>
+              <a:defRPr sz="1600" b="1">
+                <a:solidFill>
+                  <a:srgbClr val="333333"/>
+                </a:solidFill>
+              </a:defRPr>
+            </a:pPr>
+            <a:r>
+              <a:t>Mục lục</a:t>
             </a:r>
           </a:p>
         </p:txBody>
@@ -5403,14 +5865,14 @@
           <a:lstStyle/>
           <a:p>
             <a:pPr>
-              <a:defRPr sz="1000">
+              <a:defRPr sz="1100">
                 <a:solidFill>
                   <a:srgbClr val="646464"/>
                 </a:solidFill>
               </a:defRPr>
             </a:pPr>
             <a:r>
-              <a:t>GV hướng dẫn: Mai Xuân Văn                                                                                           2</a:t>
+              <a:t>GV: Mai Xuân Văn                                                                                           2</a:t>
             </a:r>
           </a:p>
         </p:txBody>
@@ -5423,8 +5885,8 @@
         </p:nvSpPr>
         <p:spPr>
           <a:xfrm>
-            <a:off x="457200" y="1097280"/>
-            <a:ext cx="10972800" cy="548640"/>
+            <a:off x="457200" y="1188720"/>
+            <a:ext cx="10972800" cy="640080"/>
           </a:xfrm>
           <a:prstGeom prst="rect">
             <a:avLst/>
@@ -5438,14 +5900,14 @@
           <a:lstStyle/>
           <a:p>
             <a:pPr>
-              <a:defRPr sz="2800" b="1">
+              <a:defRPr sz="3200" b="1">
                 <a:solidFill>
                   <a:srgbClr val="0066CC"/>
                 </a:solidFill>
               </a:defRPr>
             </a:pPr>
             <a:r>
-              <a:t>Bối cảnh và thách thức</a:t>
+              <a:t>Nội dung báo cáo</a:t>
             </a:r>
           </a:p>
         </p:txBody>
@@ -5458,8 +5920,8 @@
         </p:nvSpPr>
         <p:spPr>
           <a:xfrm>
-            <a:off x="640080" y="1828800"/>
-            <a:ext cx="10515600" cy="4389120"/>
+            <a:off x="1371600" y="2011680"/>
+            <a:ext cx="9144000" cy="4114800"/>
           </a:xfrm>
           <a:prstGeom prst="rect">
             <a:avLst/>
@@ -5474,145 +5936,166 @@
           <a:p>
             <a:pPr>
               <a:spcBef>
-                <a:spcPts val="800"/>
-              </a:spcBef>
-              <a:spcAft>
-                <a:spcPts val="400"/>
-              </a:spcAft>
-              <a:defRPr sz="1600">
-                <a:solidFill>
-                  <a:srgbClr val="333333"/>
-                </a:solidFill>
-              </a:defRPr>
-            </a:pPr>
-            <a:r>
-              <a:t>• Quyết định 2422/QĐ-BGDĐT (18/8/2026) ban hành Khung nội dung giáo dục AI với 22 YCCĐ lớp 10</a:t>
-            </a:r>
-          </a:p>
-          <a:p>
-            <a:pPr>
-              <a:spcBef>
-                <a:spcPts val="800"/>
-              </a:spcBef>
-              <a:spcAft>
-                <a:spcPts val="400"/>
-              </a:spcAft>
-              <a:defRPr sz="1600">
-                <a:solidFill>
-                  <a:srgbClr val="333333"/>
-                </a:solidFill>
-              </a:defRPr>
-            </a:pPr>
-            <a:r>
-              <a:t>• Công văn 5588/BGDĐT-GDPT yêu cầu: không tài khoản, không phụ thuộc nhà cung cấp, ưu tiên mã nguồn mở</a:t>
-            </a:r>
-          </a:p>
-          <a:p>
-            <a:pPr>
-              <a:spcBef>
-                <a:spcPts val="800"/>
-              </a:spcBef>
-              <a:spcAft>
-                <a:spcPts val="400"/>
-              </a:spcAft>
-              <a:defRPr sz="1600">
-                <a:solidFill>
-                  <a:srgbClr val="333333"/>
-                </a:solidFill>
-              </a:defRPr>
-            </a:pPr>
-            <a:r>
-              <a:t>• Thực tế phòng lab trường phổ thông: cấu hình thấp, Internet không ổn định</a:t>
-            </a:r>
-          </a:p>
-          <a:p>
-            <a:pPr>
-              <a:spcBef>
-                <a:spcPts val="800"/>
-              </a:spcBef>
-              <a:spcAft>
-                <a:spcPts val="400"/>
-              </a:spcAft>
-              <a:defRPr sz="1600">
-                <a:solidFill>
-                  <a:srgbClr val="333333"/>
-                </a:solidFill>
-              </a:defRPr>
-            </a:pPr>
-            <a:r>
-              <a:t>• </a:t>
-            </a:r>
-          </a:p>
-          <a:p>
-            <a:pPr>
-              <a:spcBef>
-                <a:spcPts val="800"/>
-              </a:spcBef>
-              <a:spcAft>
-                <a:spcPts val="400"/>
-              </a:spcAft>
-              <a:defRPr sz="1600">
-                <a:solidFill>
-                  <a:srgbClr val="333333"/>
-                </a:solidFill>
-              </a:defRPr>
-            </a:pPr>
-            <a:r>
-              <a:t>• Khoảng trống:</a:t>
-            </a:r>
-          </a:p>
-          <a:p>
-            <a:pPr>
-              <a:spcBef>
-                <a:spcPts val="800"/>
-              </a:spcBef>
-              <a:spcAft>
-                <a:spcPts val="400"/>
-              </a:spcAft>
-              <a:defRPr sz="1600">
-                <a:solidFill>
-                  <a:srgbClr val="333333"/>
-                </a:solidFill>
-              </a:defRPr>
-            </a:pPr>
-            <a:r>
-              <a:t>  — Chưa có công cụ offline tiếng Việt phủ đủ 22 YCCĐ</a:t>
-            </a:r>
-          </a:p>
-          <a:p>
-            <a:pPr>
-              <a:spcBef>
-                <a:spcPts val="800"/>
-              </a:spcBef>
-              <a:spcAft>
-                <a:spcPts val="400"/>
-              </a:spcAft>
-              <a:defRPr sz="1600">
-                <a:solidFill>
-                  <a:srgbClr val="333333"/>
-                </a:solidFill>
-              </a:defRPr>
-            </a:pPr>
-            <a:r>
-              <a:t>  — Học sinh học AI thụ động: hỏi → nhận đáp án → không hiểu bản chất</a:t>
-            </a:r>
-          </a:p>
-          <a:p>
-            <a:pPr>
-              <a:spcBef>
-                <a:spcPts val="800"/>
-              </a:spcBef>
-              <a:spcAft>
-                <a:spcPts val="400"/>
-              </a:spcAft>
-              <a:defRPr sz="1600">
-                <a:solidFill>
-                  <a:srgbClr val="333333"/>
-                </a:solidFill>
-              </a:defRPr>
-            </a:pPr>
-            <a:r>
-              <a:t>  — Thiếu công cụ trực quan để giáo viên dạy khái niệm AI</a:t>
+                <a:spcPts val="1200"/>
+              </a:spcBef>
+              <a:defRPr sz="2000">
+                <a:solidFill>
+                  <a:srgbClr val="333333"/>
+                </a:solidFill>
+              </a:defRPr>
+            </a:pPr>
+            <a:r>
+              <a:t>1. Đặt vấn đề</a:t>
+            </a:r>
+          </a:p>
+          <a:p>
+            <a:pPr>
+              <a:spcBef>
+                <a:spcPts val="1200"/>
+              </a:spcBef>
+              <a:defRPr sz="2000">
+                <a:solidFill>
+                  <a:srgbClr val="333333"/>
+                </a:solidFill>
+              </a:defRPr>
+            </a:pPr>
+            <a:r>
+              <a:t>2. Mục tiêu nghiên cứu</a:t>
+            </a:r>
+          </a:p>
+          <a:p>
+            <a:pPr>
+              <a:spcBef>
+                <a:spcPts val="1200"/>
+              </a:spcBef>
+              <a:defRPr sz="2000">
+                <a:solidFill>
+                  <a:srgbClr val="333333"/>
+                </a:solidFill>
+              </a:defRPr>
+            </a:pPr>
+            <a:r>
+              <a:t>3. Cơ sở lý thuyết</a:t>
+            </a:r>
+          </a:p>
+          <a:p>
+            <a:pPr>
+              <a:spcBef>
+                <a:spcPts val="1200"/>
+              </a:spcBef>
+              <a:defRPr sz="2000">
+                <a:solidFill>
+                  <a:srgbClr val="333333"/>
+                </a:solidFill>
+              </a:defRPr>
+            </a:pPr>
+            <a:r>
+              <a:t>4. Kiến trúc hệ thống</a:t>
+            </a:r>
+          </a:p>
+          <a:p>
+            <a:pPr>
+              <a:spcBef>
+                <a:spcPts val="1200"/>
+              </a:spcBef>
+              <a:defRPr sz="2000">
+                <a:solidFill>
+                  <a:srgbClr val="333333"/>
+                </a:solidFill>
+              </a:defRPr>
+            </a:pPr>
+            <a:r>
+              <a:t>5. Các phân hệ chính</a:t>
+            </a:r>
+          </a:p>
+          <a:p>
+            <a:pPr>
+              <a:spcBef>
+                <a:spcPts val="1200"/>
+              </a:spcBef>
+              <a:defRPr sz="2000">
+                <a:solidFill>
+                  <a:srgbClr val="333333"/>
+                </a:solidFill>
+              </a:defRPr>
+            </a:pPr>
+            <a:r>
+              <a:t>6. Tích hợp chương trình</a:t>
+            </a:r>
+          </a:p>
+          <a:p>
+            <a:pPr>
+              <a:spcBef>
+                <a:spcPts val="1200"/>
+              </a:spcBef>
+              <a:defRPr sz="2000">
+                <a:solidFill>
+                  <a:srgbClr val="333333"/>
+                </a:solidFill>
+              </a:defRPr>
+            </a:pPr>
+            <a:r>
+              <a:t>7. Kết quả nghiệm thu</a:t>
+            </a:r>
+          </a:p>
+          <a:p>
+            <a:pPr>
+              <a:spcBef>
+                <a:spcPts val="1200"/>
+              </a:spcBef>
+              <a:defRPr sz="2000">
+                <a:solidFill>
+                  <a:srgbClr val="333333"/>
+                </a:solidFill>
+              </a:defRPr>
+            </a:pPr>
+            <a:r>
+              <a:t>8. Đổi mới sư phạm</a:t>
+            </a:r>
+          </a:p>
+          <a:p>
+            <a:pPr>
+              <a:spcBef>
+                <a:spcPts val="1200"/>
+              </a:spcBef>
+              <a:defRPr sz="2000">
+                <a:solidFill>
+                  <a:srgbClr val="333333"/>
+                </a:solidFill>
+              </a:defRPr>
+            </a:pPr>
+            <a:r>
+              <a:t>9. Khả năng nhân rộng</a:t>
+            </a:r>
+          </a:p>
+          <a:p>
+            <a:pPr>
+              <a:spcBef>
+                <a:spcPts val="1200"/>
+              </a:spcBef>
+              <a:defRPr sz="2000">
+                <a:solidFill>
+                  <a:srgbClr val="333333"/>
+                </a:solidFill>
+              </a:defRPr>
+            </a:pPr>
+            <a:r>
+              <a:t>10. Kết luận</a:t>
+            </a:r>
+          </a:p>
+          <a:p>
+            <a:pPr>
+              <a:spcBef>
+                <a:spcPts val="1200"/>
+              </a:spcBef>
+              <a:defRPr sz="2000">
+                <a:solidFill>
+                  <a:srgbClr val="333333"/>
+                </a:solidFill>
+              </a:defRPr>
+            </a:pPr>
+            <a:r>
+              <a:t>11. Tài liệu tham khảo</a:t>
             </a:r>
           </a:p>
         </p:txBody>
@@ -5643,7 +6126,7 @@
         </p:nvSpPr>
         <p:spPr>
           <a:xfrm>
-            <a:off x="457200" y="868680"/>
+            <a:off x="457200" y="1005840"/>
             <a:ext cx="11247120" cy="12700"/>
           </a:xfrm>
           <a:prstGeom prst="rect">
@@ -5695,7 +6178,7 @@
         <p:spPr>
           <a:xfrm>
             <a:off x="457200" y="137160"/>
-            <a:ext cx="548640" cy="548640"/>
+            <a:ext cx="640080" cy="640080"/>
           </a:xfrm>
           <a:prstGeom prst="rect">
             <a:avLst/>
@@ -5704,7 +6187,7 @@
       </p:pic>
       <p:pic>
         <p:nvPicPr>
-          <p:cNvPr id="4" name="Picture 3" descr="logo_thpt_thuan_hoa.jpg"/>
+          <p:cNvPr id="4" name="Picture 3" descr="logo_thpt_thuan_hoa.png"/>
           <p:cNvPicPr>
             <a:picLocks noChangeAspect="1"/>
           </p:cNvPicPr>
@@ -5718,8 +6201,8 @@
         </p:blipFill>
         <p:spPr>
           <a:xfrm>
-            <a:off x="1188720" y="137160"/>
-            <a:ext cx="548640" cy="548640"/>
+            <a:off x="1280160" y="137160"/>
+            <a:ext cx="640080" cy="640080"/>
           </a:xfrm>
           <a:prstGeom prst="rect">
             <a:avLst/>
@@ -5734,8 +6217,8 @@
         </p:nvSpPr>
         <p:spPr>
           <a:xfrm>
-            <a:off x="1920240" y="137160"/>
-            <a:ext cx="3200400" cy="640080"/>
+            <a:off x="2103120" y="182880"/>
+            <a:ext cx="3200400" cy="731520"/>
           </a:xfrm>
           <a:prstGeom prst="rect">
             <a:avLst/>
@@ -5749,26 +6232,26 @@
           <a:lstStyle/>
           <a:p>
             <a:pPr>
-              <a:defRPr sz="1100" b="1">
-                <a:solidFill>
-                  <a:srgbClr val="333333"/>
-                </a:solidFill>
-              </a:defRPr>
-            </a:pPr>
-            <a:r>
-              <a:t>TRƯỜNG THPT THUẬN HOÁ</a:t>
-            </a:r>
-          </a:p>
-          <a:p>
-            <a:pPr>
-              <a:defRPr sz="1000">
+              <a:defRPr sz="1300" b="1">
+                <a:solidFill>
+                  <a:srgbClr val="333333"/>
+                </a:solidFill>
+              </a:defRPr>
+            </a:pPr>
+            <a:r>
+              <a:t>Trường THPT Thuận Hoá</a:t>
+            </a:r>
+          </a:p>
+          <a:p>
+            <a:pPr>
+              <a:defRPr sz="1100">
                 <a:solidFill>
                   <a:srgbClr val="646464"/>
                 </a:solidFill>
               </a:defRPr>
             </a:pPr>
             <a:r>
-              <a:t>Đại học Sư Phạm, Đại học Huế</a:t>
+              <a:t>Trường Đại học Sư Phạm, Đại học Huế</a:t>
             </a:r>
           </a:p>
         </p:txBody>
@@ -5781,7 +6264,7 @@
         </p:nvSpPr>
         <p:spPr>
           <a:xfrm>
-            <a:off x="5303520" y="182880"/>
+            <a:off x="5486400" y="228600"/>
             <a:ext cx="6400800" cy="640080"/>
           </a:xfrm>
           <a:prstGeom prst="rect">
@@ -5796,14 +6279,14 @@
           <a:lstStyle/>
           <a:p>
             <a:pPr algn="ctr">
-              <a:defRPr sz="1400" b="1">
-                <a:solidFill>
-                  <a:srgbClr val="333333"/>
-                </a:solidFill>
-              </a:defRPr>
-            </a:pPr>
-            <a:r>
-              <a:t>2. Mục tiêu nghiên cứu</a:t>
+              <a:defRPr sz="1600" b="1">
+                <a:solidFill>
+                  <a:srgbClr val="333333"/>
+                </a:solidFill>
+              </a:defRPr>
+            </a:pPr>
+            <a:r>
+              <a:t>1. Đặt vấn đề</a:t>
             </a:r>
           </a:p>
         </p:txBody>
@@ -5831,14 +6314,14 @@
           <a:lstStyle/>
           <a:p>
             <a:pPr>
-              <a:defRPr sz="1000">
+              <a:defRPr sz="1100">
                 <a:solidFill>
                   <a:srgbClr val="646464"/>
                 </a:solidFill>
               </a:defRPr>
             </a:pPr>
             <a:r>
-              <a:t>GV hướng dẫn: Mai Xuân Văn                                                                                           3</a:t>
+              <a:t>GV: Mai Xuân Văn                                                                                           3</a:t>
             </a:r>
           </a:p>
         </p:txBody>
@@ -5851,8 +6334,8 @@
         </p:nvSpPr>
         <p:spPr>
           <a:xfrm>
-            <a:off x="457200" y="1097280"/>
-            <a:ext cx="10972800" cy="548640"/>
+            <a:off x="457200" y="1188720"/>
+            <a:ext cx="10972800" cy="640080"/>
           </a:xfrm>
           <a:prstGeom prst="rect">
             <a:avLst/>
@@ -5866,14 +6349,14 @@
           <a:lstStyle/>
           <a:p>
             <a:pPr>
-              <a:defRPr sz="2800" b="1">
+              <a:defRPr sz="3200" b="1">
                 <a:solidFill>
                   <a:srgbClr val="0066CC"/>
                 </a:solidFill>
               </a:defRPr>
             </a:pPr>
             <a:r>
-              <a:t>Mục tiêu tổng quát</a:t>
+              <a:t>Bối cảnh và thách thức</a:t>
             </a:r>
           </a:p>
         </p:txBody>
@@ -5886,8 +6369,8 @@
         </p:nvSpPr>
         <p:spPr>
           <a:xfrm>
-            <a:off x="640080" y="1828800"/>
-            <a:ext cx="10515600" cy="4389120"/>
+            <a:off x="640080" y="2011680"/>
+            <a:ext cx="10515600" cy="4114800"/>
           </a:xfrm>
           <a:prstGeom prst="rect">
             <a:avLst/>
@@ -5902,163 +6385,172 @@
           <a:p>
             <a:pPr>
               <a:spcBef>
-                <a:spcPts val="800"/>
-              </a:spcBef>
-              <a:spcAft>
-                <a:spcPts val="400"/>
-              </a:spcAft>
-              <a:defRPr sz="1600">
-                <a:solidFill>
-                  <a:srgbClr val="333333"/>
-                </a:solidFill>
-              </a:defRPr>
-            </a:pPr>
-            <a:r>
-              <a:t>• Xây dựng phòng thí nghiệm AI offline, tiếng Việt, không tài khoản,</a:t>
-            </a:r>
-          </a:p>
-          <a:p>
-            <a:pPr>
-              <a:spcBef>
-                <a:spcPts val="800"/>
-              </a:spcBef>
-              <a:spcAft>
-                <a:spcPts val="400"/>
-              </a:spcAft>
-              <a:defRPr sz="1600">
-                <a:solidFill>
-                  <a:srgbClr val="333333"/>
-                </a:solidFill>
-              </a:defRPr>
-            </a:pPr>
-            <a:r>
-              <a:t>• cho phép học sinh phổ thông học về AI thông qua việc bắt lỗi AI,</a:t>
-            </a:r>
-          </a:p>
-          <a:p>
-            <a:pPr>
-              <a:spcBef>
-                <a:spcPts val="800"/>
-              </a:spcBef>
-              <a:spcAft>
-                <a:spcPts val="400"/>
-              </a:spcAft>
-              <a:defRPr sz="1600">
-                <a:solidFill>
-                  <a:srgbClr val="333333"/>
-                </a:solidFill>
-              </a:defRPr>
-            </a:pPr>
-            <a:r>
-              <a:t>• phủ 22/22 YCCĐ lớp 10 theo QĐ 2422/QĐ-BGDĐT.</a:t>
-            </a:r>
-          </a:p>
-          <a:p>
-            <a:pPr>
-              <a:spcBef>
-                <a:spcPts val="800"/>
-              </a:spcBef>
-              <a:spcAft>
-                <a:spcPts val="400"/>
-              </a:spcAft>
-              <a:defRPr sz="1600">
-                <a:solidFill>
-                  <a:srgbClr val="333333"/>
-                </a:solidFill>
-              </a:defRPr>
-            </a:pPr>
-            <a:r>
-              <a:t>• </a:t>
-            </a:r>
-          </a:p>
-          <a:p>
-            <a:pPr>
-              <a:spcBef>
-                <a:spcPts val="800"/>
-              </a:spcBef>
-              <a:spcAft>
-                <a:spcPts val="400"/>
-              </a:spcAft>
-              <a:defRPr sz="1600">
-                <a:solidFill>
-                  <a:srgbClr val="333333"/>
-                </a:solidFill>
-              </a:defRPr>
-            </a:pPr>
-            <a:r>
-              <a:t>• Mục tiêu cụ thể:</a:t>
-            </a:r>
-          </a:p>
-          <a:p>
-            <a:pPr>
-              <a:spcBef>
-                <a:spcPts val="800"/>
-              </a:spcBef>
-              <a:spcAft>
-                <a:spcPts val="400"/>
-              </a:spcAft>
-              <a:defRPr sz="1600">
-                <a:solidFill>
-                  <a:srgbClr val="333333"/>
-                </a:solidFill>
-              </a:defRPr>
-            </a:pPr>
-            <a:r>
-              <a:t>  1. Thiết kế kiến trúc 3 tầng chạy được trên file:// không cần máy chủ</a:t>
-            </a:r>
-          </a:p>
-          <a:p>
-            <a:pPr>
-              <a:spcBef>
-                <a:spcPts val="800"/>
-              </a:spcBef>
-              <a:spcAft>
-                <a:spcPts val="400"/>
-              </a:spcAft>
-              <a:defRPr sz="1600">
-                <a:solidFill>
-                  <a:srgbClr val="333333"/>
-                </a:solidFill>
-              </a:defRPr>
-            </a:pPr>
-            <a:r>
-              <a:t>  2. Xây dựng 5 phân hệ mô phỏng: Kịch bản, Đấu trường, Nhà máy, Xưởng huấn luyện, Bản đồ năng lực</a:t>
-            </a:r>
-          </a:p>
-          <a:p>
-            <a:pPr>
-              <a:spcBef>
-                <a:spcPts val="800"/>
-              </a:spcBef>
-              <a:spcAft>
-                <a:spcPts val="400"/>
-              </a:spcAft>
-              <a:defRPr sz="1600">
-                <a:solidFill>
-                  <a:srgbClr val="333333"/>
-                </a:solidFill>
-              </a:defRPr>
-            </a:pPr>
-            <a:r>
-              <a:t>  3. Tích hợp vào 28 bài SGK Tin học 10 với phân phối 12 tiết đề xuất</a:t>
-            </a:r>
-          </a:p>
-          <a:p>
-            <a:pPr>
-              <a:spcBef>
-                <a:spcPts val="800"/>
-              </a:spcBef>
-              <a:spcAft>
-                <a:spcPts val="400"/>
-              </a:spcAft>
-              <a:defRPr sz="1600">
-                <a:solidFill>
-                  <a:srgbClr val="333333"/>
-                </a:solidFill>
-              </a:defRPr>
-            </a:pPr>
-            <a:r>
-              <a:t>  4. Đảm bảo tự chấm 100% bằng nhãn đúng có sẵn, không cần giáo viên</a:t>
+                <a:spcPts val="1000"/>
+              </a:spcBef>
+              <a:spcAft>
+                <a:spcPts val="600"/>
+              </a:spcAft>
+              <a:defRPr sz="1700">
+                <a:solidFill>
+                  <a:srgbClr val="333333"/>
+                </a:solidFill>
+              </a:defRPr>
+            </a:pPr>
+            <a:r>
+              <a:t>Quyết định 2422/QĐ-BGDĐT (18/8/2026) ban hành Khung nội dung giáo dục AI với 22 yêu cầu cần đạt lớp 10</a:t>
+            </a:r>
+          </a:p>
+          <a:p>
+            <a:pPr>
+              <a:spcBef>
+                <a:spcPts val="1000"/>
+              </a:spcBef>
+              <a:spcAft>
+                <a:spcPts val="600"/>
+              </a:spcAft>
+              <a:defRPr sz="1700">
+                <a:solidFill>
+                  <a:srgbClr val="333333"/>
+                </a:solidFill>
+              </a:defRPr>
+            </a:pPr>
+          </a:p>
+          <a:p>
+            <a:pPr>
+              <a:spcBef>
+                <a:spcPts val="1000"/>
+              </a:spcBef>
+              <a:spcAft>
+                <a:spcPts val="600"/>
+              </a:spcAft>
+              <a:defRPr sz="1700">
+                <a:solidFill>
+                  <a:srgbClr val="333333"/>
+                </a:solidFill>
+              </a:defRPr>
+            </a:pPr>
+            <a:r>
+              <a:t>Công văn 5588/BGDĐT-GDPT yêu cầu công cụ không tài khoản, không phụ thuộc nhà cung cấp, ưu tiên mã nguồn mở</a:t>
+            </a:r>
+          </a:p>
+          <a:p>
+            <a:pPr>
+              <a:spcBef>
+                <a:spcPts val="1000"/>
+              </a:spcBef>
+              <a:spcAft>
+                <a:spcPts val="600"/>
+              </a:spcAft>
+              <a:defRPr sz="1700">
+                <a:solidFill>
+                  <a:srgbClr val="333333"/>
+                </a:solidFill>
+              </a:defRPr>
+            </a:pPr>
+          </a:p>
+          <a:p>
+            <a:pPr>
+              <a:spcBef>
+                <a:spcPts val="1000"/>
+              </a:spcBef>
+              <a:spcAft>
+                <a:spcPts val="600"/>
+              </a:spcAft>
+              <a:defRPr sz="1700">
+                <a:solidFill>
+                  <a:srgbClr val="333333"/>
+                </a:solidFill>
+              </a:defRPr>
+            </a:pPr>
+            <a:r>
+              <a:t>Thực tế phòng lab trường phổ thông: cấu hình thấp, Internet không ổn định</a:t>
+            </a:r>
+          </a:p>
+          <a:p>
+            <a:pPr>
+              <a:spcBef>
+                <a:spcPts val="1000"/>
+              </a:spcBef>
+              <a:spcAft>
+                <a:spcPts val="600"/>
+              </a:spcAft>
+              <a:defRPr sz="1700">
+                <a:solidFill>
+                  <a:srgbClr val="333333"/>
+                </a:solidFill>
+              </a:defRPr>
+            </a:pPr>
+          </a:p>
+          <a:p>
+            <a:pPr>
+              <a:spcBef>
+                <a:spcPts val="1000"/>
+              </a:spcBef>
+              <a:spcAft>
+                <a:spcPts val="600"/>
+              </a:spcAft>
+              <a:defRPr sz="1700">
+                <a:solidFill>
+                  <a:srgbClr val="333333"/>
+                </a:solidFill>
+              </a:defRPr>
+            </a:pPr>
+            <a:r>
+              <a:t>Khoảng trống cần giải quyết:</a:t>
+            </a:r>
+          </a:p>
+          <a:p>
+            <a:pPr>
+              <a:spcBef>
+                <a:spcPts val="1000"/>
+              </a:spcBef>
+              <a:spcAft>
+                <a:spcPts val="600"/>
+              </a:spcAft>
+              <a:defRPr sz="1700">
+                <a:solidFill>
+                  <a:srgbClr val="333333"/>
+                </a:solidFill>
+              </a:defRPr>
+            </a:pPr>
+            <a:r>
+              <a:t>    Chưa có công cụ offline tiếng Việt phủ đủ 22 yêu cầu cần đạt</a:t>
+            </a:r>
+          </a:p>
+          <a:p>
+            <a:pPr>
+              <a:spcBef>
+                <a:spcPts val="1000"/>
+              </a:spcBef>
+              <a:spcAft>
+                <a:spcPts val="600"/>
+              </a:spcAft>
+              <a:defRPr sz="1700">
+                <a:solidFill>
+                  <a:srgbClr val="333333"/>
+                </a:solidFill>
+              </a:defRPr>
+            </a:pPr>
+            <a:r>
+              <a:t>    Học sinh học AI thụ động: hỏi rồi nhận đáp án, không hiểu bản chất</a:t>
+            </a:r>
+          </a:p>
+          <a:p>
+            <a:pPr>
+              <a:spcBef>
+                <a:spcPts val="1000"/>
+              </a:spcBef>
+              <a:spcAft>
+                <a:spcPts val="600"/>
+              </a:spcAft>
+              <a:defRPr sz="1700">
+                <a:solidFill>
+                  <a:srgbClr val="333333"/>
+                </a:solidFill>
+              </a:defRPr>
+            </a:pPr>
+            <a:r>
+              <a:t>    Thiếu công cụ trực quan để giáo viên dạy khái niệm AI</a:t>
             </a:r>
           </a:p>
         </p:txBody>
@@ -6089,7 +6581,7 @@
         </p:nvSpPr>
         <p:spPr>
           <a:xfrm>
-            <a:off x="457200" y="868680"/>
+            <a:off x="457200" y="1005840"/>
             <a:ext cx="11247120" cy="12700"/>
           </a:xfrm>
           <a:prstGeom prst="rect">
@@ -6141,7 +6633,7 @@
         <p:spPr>
           <a:xfrm>
             <a:off x="457200" y="137160"/>
-            <a:ext cx="548640" cy="548640"/>
+            <a:ext cx="640080" cy="640080"/>
           </a:xfrm>
           <a:prstGeom prst="rect">
             <a:avLst/>
@@ -6150,7 +6642,7 @@
       </p:pic>
       <p:pic>
         <p:nvPicPr>
-          <p:cNvPr id="4" name="Picture 3" descr="logo_thpt_thuan_hoa.jpg"/>
+          <p:cNvPr id="4" name="Picture 3" descr="logo_thpt_thuan_hoa.png"/>
           <p:cNvPicPr>
             <a:picLocks noChangeAspect="1"/>
           </p:cNvPicPr>
@@ -6164,8 +6656,8 @@
         </p:blipFill>
         <p:spPr>
           <a:xfrm>
-            <a:off x="1188720" y="137160"/>
-            <a:ext cx="548640" cy="548640"/>
+            <a:off x="1280160" y="137160"/>
+            <a:ext cx="640080" cy="640080"/>
           </a:xfrm>
           <a:prstGeom prst="rect">
             <a:avLst/>
@@ -6180,8 +6672,8 @@
         </p:nvSpPr>
         <p:spPr>
           <a:xfrm>
-            <a:off x="1920240" y="137160"/>
-            <a:ext cx="3200400" cy="640080"/>
+            <a:off x="2103120" y="182880"/>
+            <a:ext cx="3200400" cy="731520"/>
           </a:xfrm>
           <a:prstGeom prst="rect">
             <a:avLst/>
@@ -6195,26 +6687,26 @@
           <a:lstStyle/>
           <a:p>
             <a:pPr>
-              <a:defRPr sz="1100" b="1">
-                <a:solidFill>
-                  <a:srgbClr val="333333"/>
-                </a:solidFill>
-              </a:defRPr>
-            </a:pPr>
-            <a:r>
-              <a:t>TRƯỜNG THPT THUẬN HOÁ</a:t>
-            </a:r>
-          </a:p>
-          <a:p>
-            <a:pPr>
-              <a:defRPr sz="1000">
+              <a:defRPr sz="1300" b="1">
+                <a:solidFill>
+                  <a:srgbClr val="333333"/>
+                </a:solidFill>
+              </a:defRPr>
+            </a:pPr>
+            <a:r>
+              <a:t>Trường THPT Thuận Hoá</a:t>
+            </a:r>
+          </a:p>
+          <a:p>
+            <a:pPr>
+              <a:defRPr sz="1100">
                 <a:solidFill>
                   <a:srgbClr val="646464"/>
                 </a:solidFill>
               </a:defRPr>
             </a:pPr>
             <a:r>
-              <a:t>Đại học Sư Phạm, Đại học Huế</a:t>
+              <a:t>Trường Đại học Sư Phạm, Đại học Huế</a:t>
             </a:r>
           </a:p>
         </p:txBody>
@@ -6227,7 +6719,7 @@
         </p:nvSpPr>
         <p:spPr>
           <a:xfrm>
-            <a:off x="5303520" y="182880"/>
+            <a:off x="5486400" y="228600"/>
             <a:ext cx="6400800" cy="640080"/>
           </a:xfrm>
           <a:prstGeom prst="rect">
@@ -6242,14 +6734,14 @@
           <a:lstStyle/>
           <a:p>
             <a:pPr algn="ctr">
-              <a:defRPr sz="1400" b="1">
-                <a:solidFill>
-                  <a:srgbClr val="333333"/>
-                </a:solidFill>
-              </a:defRPr>
-            </a:pPr>
-            <a:r>
-              <a:t>3. Cơ sở lý thuyết</a:t>
+              <a:defRPr sz="1600" b="1">
+                <a:solidFill>
+                  <a:srgbClr val="333333"/>
+                </a:solidFill>
+              </a:defRPr>
+            </a:pPr>
+            <a:r>
+              <a:t>2. Mục tiêu nghiên cứu</a:t>
             </a:r>
           </a:p>
         </p:txBody>
@@ -6277,14 +6769,14 @@
           <a:lstStyle/>
           <a:p>
             <a:pPr>
-              <a:defRPr sz="1000">
+              <a:defRPr sz="1100">
                 <a:solidFill>
                   <a:srgbClr val="646464"/>
                 </a:solidFill>
               </a:defRPr>
             </a:pPr>
             <a:r>
-              <a:t>GV hướng dẫn: Mai Xuân Văn                                                                                           4</a:t>
+              <a:t>GV: Mai Xuân Văn                                                                                           4</a:t>
             </a:r>
           </a:p>
         </p:txBody>
@@ -6297,8 +6789,8 @@
         </p:nvSpPr>
         <p:spPr>
           <a:xfrm>
-            <a:off x="457200" y="1097280"/>
-            <a:ext cx="10972800" cy="548640"/>
+            <a:off x="457200" y="1188720"/>
+            <a:ext cx="10972800" cy="640080"/>
           </a:xfrm>
           <a:prstGeom prst="rect">
             <a:avLst/>
@@ -6312,14 +6804,14 @@
           <a:lstStyle/>
           <a:p>
             <a:pPr>
-              <a:defRPr sz="2800" b="1">
+              <a:defRPr sz="3200" b="1">
                 <a:solidFill>
                   <a:srgbClr val="0066CC"/>
                 </a:solidFill>
               </a:defRPr>
             </a:pPr>
             <a:r>
-              <a:t>Căn cứ pháp lý và khung năng lực</a:t>
+              <a:t>Mục tiêu tổng quát và cụ thể</a:t>
             </a:r>
           </a:p>
         </p:txBody>
@@ -6332,8 +6824,8 @@
         </p:nvSpPr>
         <p:spPr>
           <a:xfrm>
-            <a:off x="640080" y="1828800"/>
-            <a:ext cx="10515600" cy="4389120"/>
+            <a:off x="640080" y="2011680"/>
+            <a:ext cx="10515600" cy="4114800"/>
           </a:xfrm>
           <a:prstGeom prst="rect">
             <a:avLst/>
@@ -6348,199 +6840,160 @@
           <a:p>
             <a:pPr>
               <a:spcBef>
-                <a:spcPts val="800"/>
-              </a:spcBef>
-              <a:spcAft>
-                <a:spcPts val="400"/>
-              </a:spcAft>
-              <a:defRPr sz="1500">
-                <a:solidFill>
-                  <a:srgbClr val="333333"/>
-                </a:solidFill>
-              </a:defRPr>
-            </a:pPr>
-            <a:r>
-              <a:t>• QĐ 2422/QĐ-BGDĐT (18/8/2026): 4 mạch nội dung × 13 chủ đề × 22 YCCĐ lớp 10</a:t>
-            </a:r>
-          </a:p>
-          <a:p>
-            <a:pPr>
-              <a:spcBef>
-                <a:spcPts val="800"/>
-              </a:spcBef>
-              <a:spcAft>
-                <a:spcPts val="400"/>
-              </a:spcAft>
-              <a:defRPr sz="1500">
-                <a:solidFill>
-                  <a:srgbClr val="333333"/>
-                </a:solidFill>
-              </a:defRPr>
-            </a:pPr>
-            <a:r>
-              <a:t>  — Mạch A: Tư duy lấy con người làm trung tâm (5 YCCĐ)</a:t>
-            </a:r>
-          </a:p>
-          <a:p>
-            <a:pPr>
-              <a:spcBef>
-                <a:spcPts val="800"/>
-              </a:spcBef>
-              <a:spcAft>
-                <a:spcPts val="400"/>
-              </a:spcAft>
-              <a:defRPr sz="1500">
-                <a:solidFill>
-                  <a:srgbClr val="333333"/>
-                </a:solidFill>
-              </a:defRPr>
-            </a:pPr>
-            <a:r>
-              <a:t>  — Mạch B: Đạo đức AI (3 YCCĐ)</a:t>
-            </a:r>
-          </a:p>
-          <a:p>
-            <a:pPr>
-              <a:spcBef>
-                <a:spcPts val="800"/>
-              </a:spcBef>
-              <a:spcAft>
-                <a:spcPts val="400"/>
-              </a:spcAft>
-              <a:defRPr sz="1500">
-                <a:solidFill>
-                  <a:srgbClr val="333333"/>
-                </a:solidFill>
-              </a:defRPr>
-            </a:pPr>
-            <a:r>
-              <a:t>  — Mạch C: Các kỹ thuật và ứng dụng AI (11 YCCĐ)</a:t>
-            </a:r>
-          </a:p>
-          <a:p>
-            <a:pPr>
-              <a:spcBef>
-                <a:spcPts val="800"/>
-              </a:spcBef>
-              <a:spcAft>
-                <a:spcPts val="400"/>
-              </a:spcAft>
-              <a:defRPr sz="1500">
-                <a:solidFill>
-                  <a:srgbClr val="333333"/>
-                </a:solidFill>
-              </a:defRPr>
-            </a:pPr>
-            <a:r>
-              <a:t>  — Mạch D: Thiết kế hệ thống AI (3 YCCĐ)</a:t>
-            </a:r>
-          </a:p>
-          <a:p>
-            <a:pPr>
-              <a:spcBef>
-                <a:spcPts val="800"/>
-              </a:spcBef>
-              <a:spcAft>
-                <a:spcPts val="400"/>
-              </a:spcAft>
-              <a:defRPr sz="1500">
-                <a:solidFill>
-                  <a:srgbClr val="333333"/>
-                </a:solidFill>
-              </a:defRPr>
-            </a:pPr>
-            <a:r>
-              <a:t>• </a:t>
-            </a:r>
-          </a:p>
-          <a:p>
-            <a:pPr>
-              <a:spcBef>
-                <a:spcPts val="800"/>
-              </a:spcBef>
-              <a:spcAft>
-                <a:spcPts val="400"/>
-              </a:spcAft>
-              <a:defRPr sz="1500">
-                <a:solidFill>
-                  <a:srgbClr val="333333"/>
-                </a:solidFill>
-              </a:defRPr>
-            </a:pPr>
-            <a:r>
-              <a:t>• CV 5588/BGDĐT-GDPT (19/8/2026): 4 điều kiện bắt buộc</a:t>
-            </a:r>
-          </a:p>
-          <a:p>
-            <a:pPr>
-              <a:spcBef>
-                <a:spcPts val="800"/>
-              </a:spcBef>
-              <a:spcAft>
-                <a:spcPts val="400"/>
-              </a:spcAft>
-              <a:defRPr sz="1500">
-                <a:solidFill>
-                  <a:srgbClr val="333333"/>
-                </a:solidFill>
-              </a:defRPr>
-            </a:pPr>
-            <a:r>
-              <a:t>  — Không yêu cầu tài khoản cá nhân</a:t>
-            </a:r>
-          </a:p>
-          <a:p>
-            <a:pPr>
-              <a:spcBef>
-                <a:spcPts val="800"/>
-              </a:spcBef>
-              <a:spcAft>
-                <a:spcPts val="400"/>
-              </a:spcAft>
-              <a:defRPr sz="1500">
-                <a:solidFill>
-                  <a:srgbClr val="333333"/>
-                </a:solidFill>
-              </a:defRPr>
-            </a:pPr>
-            <a:r>
-              <a:t>  — Không phụ thuộc nhà cung cấp</a:t>
-            </a:r>
-          </a:p>
-          <a:p>
-            <a:pPr>
-              <a:spcBef>
-                <a:spcPts val="800"/>
-              </a:spcBef>
-              <a:spcAft>
-                <a:spcPts val="400"/>
-              </a:spcAft>
-              <a:defRPr sz="1500">
-                <a:solidFill>
-                  <a:srgbClr val="333333"/>
-                </a:solidFill>
-              </a:defRPr>
-            </a:pPr>
-            <a:r>
-              <a:t>  — Không buộc mua tài khoản/thiết bị/dịch vụ</a:t>
-            </a:r>
-          </a:p>
-          <a:p>
-            <a:pPr>
-              <a:spcBef>
-                <a:spcPts val="800"/>
-              </a:spcBef>
-              <a:spcAft>
-                <a:spcPts val="400"/>
-              </a:spcAft>
-              <a:defRPr sz="1500">
-                <a:solidFill>
-                  <a:srgbClr val="333333"/>
-                </a:solidFill>
-              </a:defRPr>
-            </a:pPr>
-            <a:r>
-              <a:t>  — Ưu tiên mã nguồn mở, có phiên bản ngoại tuyến</a:t>
+                <a:spcPts val="1000"/>
+              </a:spcBef>
+              <a:spcAft>
+                <a:spcPts val="600"/>
+              </a:spcAft>
+              <a:defRPr sz="1700">
+                <a:solidFill>
+                  <a:srgbClr val="333333"/>
+                </a:solidFill>
+              </a:defRPr>
+            </a:pPr>
+            <a:r>
+              <a:t>Xây dựng phòng thí nghiệm AI offline, tiếng Việt, không tài khoản,</a:t>
+            </a:r>
+          </a:p>
+          <a:p>
+            <a:pPr>
+              <a:spcBef>
+                <a:spcPts val="1000"/>
+              </a:spcBef>
+              <a:spcAft>
+                <a:spcPts val="600"/>
+              </a:spcAft>
+              <a:defRPr sz="1700">
+                <a:solidFill>
+                  <a:srgbClr val="333333"/>
+                </a:solidFill>
+              </a:defRPr>
+            </a:pPr>
+            <a:r>
+              <a:t>cho phép học sinh phổ thông học về AI thông qua việc bắt lỗi AI,</a:t>
+            </a:r>
+          </a:p>
+          <a:p>
+            <a:pPr>
+              <a:spcBef>
+                <a:spcPts val="1000"/>
+              </a:spcBef>
+              <a:spcAft>
+                <a:spcPts val="600"/>
+              </a:spcAft>
+              <a:defRPr sz="1700">
+                <a:solidFill>
+                  <a:srgbClr val="333333"/>
+                </a:solidFill>
+              </a:defRPr>
+            </a:pPr>
+            <a:r>
+              <a:t>phủ 22/22 yêu cầu cần đạt lớp 10 theo QĐ 2422/QĐ-BGDĐT.</a:t>
+            </a:r>
+          </a:p>
+          <a:p>
+            <a:pPr>
+              <a:spcBef>
+                <a:spcPts val="1000"/>
+              </a:spcBef>
+              <a:spcAft>
+                <a:spcPts val="600"/>
+              </a:spcAft>
+              <a:defRPr sz="1700">
+                <a:solidFill>
+                  <a:srgbClr val="333333"/>
+                </a:solidFill>
+              </a:defRPr>
+            </a:pPr>
+          </a:p>
+          <a:p>
+            <a:pPr>
+              <a:spcBef>
+                <a:spcPts val="1000"/>
+              </a:spcBef>
+              <a:spcAft>
+                <a:spcPts val="600"/>
+              </a:spcAft>
+              <a:defRPr sz="1700">
+                <a:solidFill>
+                  <a:srgbClr val="333333"/>
+                </a:solidFill>
+              </a:defRPr>
+            </a:pPr>
+            <a:r>
+              <a:t>Mục tiêu cụ thể:</a:t>
+            </a:r>
+          </a:p>
+          <a:p>
+            <a:pPr>
+              <a:spcBef>
+                <a:spcPts val="1000"/>
+              </a:spcBef>
+              <a:spcAft>
+                <a:spcPts val="600"/>
+              </a:spcAft>
+              <a:defRPr sz="1700">
+                <a:solidFill>
+                  <a:srgbClr val="333333"/>
+                </a:solidFill>
+              </a:defRPr>
+            </a:pPr>
+            <a:r>
+              <a:t>    Thiết kế kiến trúc 3 tầng chạy được trên file:// không cần máy chủ</a:t>
+            </a:r>
+          </a:p>
+          <a:p>
+            <a:pPr>
+              <a:spcBef>
+                <a:spcPts val="1000"/>
+              </a:spcBef>
+              <a:spcAft>
+                <a:spcPts val="600"/>
+              </a:spcAft>
+              <a:defRPr sz="1700">
+                <a:solidFill>
+                  <a:srgbClr val="333333"/>
+                </a:solidFill>
+              </a:defRPr>
+            </a:pPr>
+            <a:r>
+              <a:t>    Xây dựng 5 phân hệ mô phỏng: Kịch bản, Đấu trường, Nhà máy, Xưởng huấn luyện, Bản đồ năng lực</a:t>
+            </a:r>
+          </a:p>
+          <a:p>
+            <a:pPr>
+              <a:spcBef>
+                <a:spcPts val="1000"/>
+              </a:spcBef>
+              <a:spcAft>
+                <a:spcPts val="600"/>
+              </a:spcAft>
+              <a:defRPr sz="1700">
+                <a:solidFill>
+                  <a:srgbClr val="333333"/>
+                </a:solidFill>
+              </a:defRPr>
+            </a:pPr>
+            <a:r>
+              <a:t>    Tích hợp vào 28 bài SGK Tin học 10 với phân phối 12 tiết đề xuất</a:t>
+            </a:r>
+          </a:p>
+          <a:p>
+            <a:pPr>
+              <a:spcBef>
+                <a:spcPts val="1000"/>
+              </a:spcBef>
+              <a:spcAft>
+                <a:spcPts val="600"/>
+              </a:spcAft>
+              <a:defRPr sz="1700">
+                <a:solidFill>
+                  <a:srgbClr val="333333"/>
+                </a:solidFill>
+              </a:defRPr>
+            </a:pPr>
+            <a:r>
+              <a:t>    Đảm bảo tự chấm 100% bằng nhãn đúng có sẵn, không cần giáo viên</a:t>
             </a:r>
           </a:p>
         </p:txBody>
@@ -6571,7 +7024,7 @@
         </p:nvSpPr>
         <p:spPr>
           <a:xfrm>
-            <a:off x="457200" y="868680"/>
+            <a:off x="457200" y="1005840"/>
             <a:ext cx="11247120" cy="12700"/>
           </a:xfrm>
           <a:prstGeom prst="rect">
@@ -6623,7 +7076,7 @@
         <p:spPr>
           <a:xfrm>
             <a:off x="457200" y="137160"/>
-            <a:ext cx="548640" cy="548640"/>
+            <a:ext cx="640080" cy="640080"/>
           </a:xfrm>
           <a:prstGeom prst="rect">
             <a:avLst/>
@@ -6632,7 +7085,7 @@
       </p:pic>
       <p:pic>
         <p:nvPicPr>
-          <p:cNvPr id="4" name="Picture 3" descr="logo_thpt_thuan_hoa.jpg"/>
+          <p:cNvPr id="4" name="Picture 3" descr="logo_thpt_thuan_hoa.png"/>
           <p:cNvPicPr>
             <a:picLocks noChangeAspect="1"/>
           </p:cNvPicPr>
@@ -6646,8 +7099,8 @@
         </p:blipFill>
         <p:spPr>
           <a:xfrm>
-            <a:off x="1188720" y="137160"/>
-            <a:ext cx="548640" cy="548640"/>
+            <a:off x="1280160" y="137160"/>
+            <a:ext cx="640080" cy="640080"/>
           </a:xfrm>
           <a:prstGeom prst="rect">
             <a:avLst/>
@@ -6662,8 +7115,8 @@
         </p:nvSpPr>
         <p:spPr>
           <a:xfrm>
-            <a:off x="1920240" y="137160"/>
-            <a:ext cx="3200400" cy="640080"/>
+            <a:off x="2103120" y="182880"/>
+            <a:ext cx="3200400" cy="731520"/>
           </a:xfrm>
           <a:prstGeom prst="rect">
             <a:avLst/>
@@ -6677,26 +7130,26 @@
           <a:lstStyle/>
           <a:p>
             <a:pPr>
-              <a:defRPr sz="1100" b="1">
-                <a:solidFill>
-                  <a:srgbClr val="333333"/>
-                </a:solidFill>
-              </a:defRPr>
-            </a:pPr>
-            <a:r>
-              <a:t>TRƯỜNG THPT THUẬN HOÁ</a:t>
-            </a:r>
-          </a:p>
-          <a:p>
-            <a:pPr>
-              <a:defRPr sz="1000">
+              <a:defRPr sz="1300" b="1">
+                <a:solidFill>
+                  <a:srgbClr val="333333"/>
+                </a:solidFill>
+              </a:defRPr>
+            </a:pPr>
+            <a:r>
+              <a:t>Trường THPT Thuận Hoá</a:t>
+            </a:r>
+          </a:p>
+          <a:p>
+            <a:pPr>
+              <a:defRPr sz="1100">
                 <a:solidFill>
                   <a:srgbClr val="646464"/>
                 </a:solidFill>
               </a:defRPr>
             </a:pPr>
             <a:r>
-              <a:t>Đại học Sư Phạm, Đại học Huế</a:t>
+              <a:t>Trường Đại học Sư Phạm, Đại học Huế</a:t>
             </a:r>
           </a:p>
         </p:txBody>
@@ -6709,7 +7162,7 @@
         </p:nvSpPr>
         <p:spPr>
           <a:xfrm>
-            <a:off x="5303520" y="182880"/>
+            <a:off x="5486400" y="228600"/>
             <a:ext cx="6400800" cy="640080"/>
           </a:xfrm>
           <a:prstGeom prst="rect">
@@ -6724,14 +7177,14 @@
           <a:lstStyle/>
           <a:p>
             <a:pPr algn="ctr">
-              <a:defRPr sz="1400" b="1">
-                <a:solidFill>
-                  <a:srgbClr val="333333"/>
-                </a:solidFill>
-              </a:defRPr>
-            </a:pPr>
-            <a:r>
-              <a:t>4. Kiến trúc hệ thống</a:t>
+              <a:defRPr sz="1600" b="1">
+                <a:solidFill>
+                  <a:srgbClr val="333333"/>
+                </a:solidFill>
+              </a:defRPr>
+            </a:pPr>
+            <a:r>
+              <a:t>3. Cơ sở lý thuyết</a:t>
             </a:r>
           </a:p>
         </p:txBody>
@@ -6759,14 +7212,14 @@
           <a:lstStyle/>
           <a:p>
             <a:pPr>
-              <a:defRPr sz="1000">
+              <a:defRPr sz="1100">
                 <a:solidFill>
                   <a:srgbClr val="646464"/>
                 </a:solidFill>
               </a:defRPr>
             </a:pPr>
             <a:r>
-              <a:t>GV hướng dẫn: Mai Xuân Văn                                                                                           5</a:t>
+              <a:t>GV: Mai Xuân Văn                                                                                           5</a:t>
             </a:r>
           </a:p>
         </p:txBody>
@@ -6779,8 +7232,8 @@
         </p:nvSpPr>
         <p:spPr>
           <a:xfrm>
-            <a:off x="457200" y="1097280"/>
-            <a:ext cx="10972800" cy="548640"/>
+            <a:off x="457200" y="1188720"/>
+            <a:ext cx="10972800" cy="640080"/>
           </a:xfrm>
           <a:prstGeom prst="rect">
             <a:avLst/>
@@ -6794,14 +7247,14 @@
           <a:lstStyle/>
           <a:p>
             <a:pPr>
-              <a:defRPr sz="2800" b="1">
+              <a:defRPr sz="3200" b="1">
                 <a:solidFill>
                   <a:srgbClr val="0066CC"/>
                 </a:solidFill>
               </a:defRPr>
             </a:pPr>
             <a:r>
-              <a:t>Mô hình 3 tầng</a:t>
+              <a:t>Căn cứ pháp lý và khung năng lực</a:t>
             </a:r>
           </a:p>
         </p:txBody>
@@ -6814,8 +7267,8 @@
         </p:nvSpPr>
         <p:spPr>
           <a:xfrm>
-            <a:off x="640080" y="1828800"/>
-            <a:ext cx="10515600" cy="4389120"/>
+            <a:off x="640080" y="2011680"/>
+            <a:ext cx="10515600" cy="4114800"/>
           </a:xfrm>
           <a:prstGeom prst="rect">
             <a:avLst/>
@@ -6830,217 +7283,196 @@
           <a:p>
             <a:pPr>
               <a:spcBef>
-                <a:spcPts val="800"/>
-              </a:spcBef>
-              <a:spcAft>
-                <a:spcPts val="400"/>
-              </a:spcAft>
-              <a:defRPr sz="1500">
-                <a:solidFill>
-                  <a:srgbClr val="333333"/>
-                </a:solidFill>
-              </a:defRPr>
-            </a:pPr>
-            <a:r>
-              <a:t>• Tầng nội dung (data/):</a:t>
-            </a:r>
-          </a:p>
-          <a:p>
-            <a:pPr>
-              <a:spcBef>
-                <a:spcPts val="800"/>
-              </a:spcBef>
-              <a:spcAft>
-                <a:spcPts val="400"/>
-              </a:spcAft>
-              <a:defRPr sz="1500">
-                <a:solidFill>
-                  <a:srgbClr val="333333"/>
-                </a:solidFill>
-              </a:defRPr>
-            </a:pPr>
-            <a:r>
-              <a:t>  — Ngân hàng câu hỏi, 22 YCCĐ, metadata chủ đề, kiến thức nền</a:t>
-            </a:r>
-          </a:p>
-          <a:p>
-            <a:pPr>
-              <a:spcBef>
-                <a:spcPts val="800"/>
-              </a:spcBef>
-              <a:spcAft>
-                <a:spcPts val="400"/>
-              </a:spcAft>
-              <a:defRPr sz="1500">
-                <a:solidFill>
-                  <a:srgbClr val="333333"/>
-                </a:solidFill>
-              </a:defRPr>
-            </a:pPr>
-            <a:r>
-              <a:t>  — Nhúng dưới dạng biến toàn cục (tránh CORS khi mở file://)</a:t>
-            </a:r>
-          </a:p>
-          <a:p>
-            <a:pPr>
-              <a:spcBef>
-                <a:spcPts val="800"/>
-              </a:spcBef>
-              <a:spcAft>
-                <a:spcPts val="400"/>
-              </a:spcAft>
-              <a:defRPr sz="1500">
-                <a:solidFill>
-                  <a:srgbClr val="333333"/>
-                </a:solidFill>
-              </a:defRPr>
-            </a:pPr>
-            <a:r>
-              <a:t>• </a:t>
-            </a:r>
-          </a:p>
-          <a:p>
-            <a:pPr>
-              <a:spcBef>
-                <a:spcPts val="800"/>
-              </a:spcBef>
-              <a:spcAft>
-                <a:spcPts val="400"/>
-              </a:spcAft>
-              <a:defRPr sz="1500">
-                <a:solidFill>
-                  <a:srgbClr val="333333"/>
-                </a:solidFill>
-              </a:defRPr>
-            </a:pPr>
-            <a:r>
-              <a:t>• Tầng mô phỏng (js/):</a:t>
-            </a:r>
-          </a:p>
-          <a:p>
-            <a:pPr>
-              <a:spcBef>
-                <a:spcPts val="800"/>
-              </a:spcBef>
-              <a:spcAft>
-                <a:spcPts val="400"/>
-              </a:spcAft>
-              <a:defRPr sz="1500">
-                <a:solidFill>
-                  <a:srgbClr val="333333"/>
-                </a:solidFill>
-              </a:defRPr>
-            </a:pPr>
-            <a:r>
-              <a:t>  — Perceptron học thật với trọng số cập nhật theo lỗi</a:t>
-            </a:r>
-          </a:p>
-          <a:p>
-            <a:pPr>
-              <a:spcBef>
-                <a:spcPts val="800"/>
-              </a:spcBef>
-              <a:spcAft>
-                <a:spcPts val="400"/>
-              </a:spcAft>
-              <a:defRPr sz="1500">
-                <a:solidFill>
-                  <a:srgbClr val="333333"/>
-                </a:solidFill>
-              </a:defRPr>
-            </a:pPr>
-            <a:r>
-              <a:t>  — Bộ sinh ảnh tổng hợp bằng canvas, engine chấm tất định</a:t>
-            </a:r>
-          </a:p>
-          <a:p>
-            <a:pPr>
-              <a:spcBef>
-                <a:spcPts val="800"/>
-              </a:spcBef>
-              <a:spcAft>
-                <a:spcPts val="400"/>
-              </a:spcAft>
-              <a:defRPr sz="1500">
-                <a:solidFill>
-                  <a:srgbClr val="333333"/>
-                </a:solidFill>
-              </a:defRPr>
-            </a:pPr>
-            <a:r>
-              <a:t>  — Cảnh 3D dựng trên three.js r137.5 (UMD, lưu trong vendor/)</a:t>
-            </a:r>
-          </a:p>
-          <a:p>
-            <a:pPr>
-              <a:spcBef>
-                <a:spcPts val="800"/>
-              </a:spcBef>
-              <a:spcAft>
-                <a:spcPts val="400"/>
-              </a:spcAft>
-              <a:defRPr sz="1500">
-                <a:solidFill>
-                  <a:srgbClr val="333333"/>
-                </a:solidFill>
-              </a:defRPr>
-            </a:pPr>
-            <a:r>
-              <a:t>• </a:t>
-            </a:r>
-          </a:p>
-          <a:p>
-            <a:pPr>
-              <a:spcBef>
-                <a:spcPts val="800"/>
-              </a:spcBef>
-              <a:spcAft>
-                <a:spcPts val="400"/>
-              </a:spcAft>
-              <a:defRPr sz="1500">
-                <a:solidFill>
-                  <a:srgbClr val="333333"/>
-                </a:solidFill>
-              </a:defRPr>
-            </a:pPr>
-            <a:r>
-              <a:t>• Tầng giao diện (index.html + CSS):</a:t>
-            </a:r>
-          </a:p>
-          <a:p>
-            <a:pPr>
-              <a:spcBef>
-                <a:spcPts val="800"/>
-              </a:spcBef>
-              <a:spcAft>
-                <a:spcPts val="400"/>
-              </a:spcAft>
-              <a:defRPr sz="1500">
-                <a:solidFill>
-                  <a:srgbClr val="333333"/>
-                </a:solidFill>
-              </a:defRPr>
-            </a:pPr>
-            <a:r>
-              <a:t>  — Chuyển đổi khung nhìn bằng ẩn hiện, không dùng router</a:t>
-            </a:r>
-          </a:p>
-          <a:p>
-            <a:pPr>
-              <a:spcBef>
-                <a:spcPts val="800"/>
-              </a:spcBef>
-              <a:spcAft>
-                <a:spcPts val="400"/>
-              </a:spcAft>
-              <a:defRPr sz="1500">
-                <a:solidFill>
-                  <a:srgbClr val="333333"/>
-                </a:solidFill>
-              </a:defRPr>
-            </a:pPr>
-            <a:r>
-              <a:t>  — Hoạt động trên cả file:// và HTTPS</a:t>
+                <a:spcPts val="1000"/>
+              </a:spcBef>
+              <a:spcAft>
+                <a:spcPts val="600"/>
+              </a:spcAft>
+              <a:defRPr sz="1600">
+                <a:solidFill>
+                  <a:srgbClr val="333333"/>
+                </a:solidFill>
+              </a:defRPr>
+            </a:pPr>
+            <a:r>
+              <a:t>Quyết định 2422/QĐ-BGDĐT: 4 mạch nội dung × 13 chủ đề × 22 yêu cầu cần đạt lớp 10</a:t>
+            </a:r>
+          </a:p>
+          <a:p>
+            <a:pPr>
+              <a:spcBef>
+                <a:spcPts val="1000"/>
+              </a:spcBef>
+              <a:spcAft>
+                <a:spcPts val="600"/>
+              </a:spcAft>
+              <a:defRPr sz="1600">
+                <a:solidFill>
+                  <a:srgbClr val="333333"/>
+                </a:solidFill>
+              </a:defRPr>
+            </a:pPr>
+            <a:r>
+              <a:t>    Mạch A: Tư duy lấy con người làm trung tâm (5 yêu cầu)</a:t>
+            </a:r>
+          </a:p>
+          <a:p>
+            <a:pPr>
+              <a:spcBef>
+                <a:spcPts val="1000"/>
+              </a:spcBef>
+              <a:spcAft>
+                <a:spcPts val="600"/>
+              </a:spcAft>
+              <a:defRPr sz="1600">
+                <a:solidFill>
+                  <a:srgbClr val="333333"/>
+                </a:solidFill>
+              </a:defRPr>
+            </a:pPr>
+            <a:r>
+              <a:t>    Mạch B: Đạo đức AI (3 yêu cầu)</a:t>
+            </a:r>
+          </a:p>
+          <a:p>
+            <a:pPr>
+              <a:spcBef>
+                <a:spcPts val="1000"/>
+              </a:spcBef>
+              <a:spcAft>
+                <a:spcPts val="600"/>
+              </a:spcAft>
+              <a:defRPr sz="1600">
+                <a:solidFill>
+                  <a:srgbClr val="333333"/>
+                </a:solidFill>
+              </a:defRPr>
+            </a:pPr>
+            <a:r>
+              <a:t>    Mạch C: Các kỹ thuật và ứng dụng AI (11 yêu cầu)</a:t>
+            </a:r>
+          </a:p>
+          <a:p>
+            <a:pPr>
+              <a:spcBef>
+                <a:spcPts val="1000"/>
+              </a:spcBef>
+              <a:spcAft>
+                <a:spcPts val="600"/>
+              </a:spcAft>
+              <a:defRPr sz="1600">
+                <a:solidFill>
+                  <a:srgbClr val="333333"/>
+                </a:solidFill>
+              </a:defRPr>
+            </a:pPr>
+            <a:r>
+              <a:t>    Mạch D: Thiết kế hệ thống AI (3 yêu cầu)</a:t>
+            </a:r>
+          </a:p>
+          <a:p>
+            <a:pPr>
+              <a:spcBef>
+                <a:spcPts val="1000"/>
+              </a:spcBef>
+              <a:spcAft>
+                <a:spcPts val="600"/>
+              </a:spcAft>
+              <a:defRPr sz="1600">
+                <a:solidFill>
+                  <a:srgbClr val="333333"/>
+                </a:solidFill>
+              </a:defRPr>
+            </a:pPr>
+          </a:p>
+          <a:p>
+            <a:pPr>
+              <a:spcBef>
+                <a:spcPts val="1000"/>
+              </a:spcBef>
+              <a:spcAft>
+                <a:spcPts val="600"/>
+              </a:spcAft>
+              <a:defRPr sz="1600">
+                <a:solidFill>
+                  <a:srgbClr val="333333"/>
+                </a:solidFill>
+              </a:defRPr>
+            </a:pPr>
+            <a:r>
+              <a:t>Công văn 5588/BGDĐT-GDPT: 4 điều kiện bắt buộc</a:t>
+            </a:r>
+          </a:p>
+          <a:p>
+            <a:pPr>
+              <a:spcBef>
+                <a:spcPts val="1000"/>
+              </a:spcBef>
+              <a:spcAft>
+                <a:spcPts val="600"/>
+              </a:spcAft>
+              <a:defRPr sz="1600">
+                <a:solidFill>
+                  <a:srgbClr val="333333"/>
+                </a:solidFill>
+              </a:defRPr>
+            </a:pPr>
+            <a:r>
+              <a:t>    Không yêu cầu tài khoản cá nhân</a:t>
+            </a:r>
+          </a:p>
+          <a:p>
+            <a:pPr>
+              <a:spcBef>
+                <a:spcPts val="1000"/>
+              </a:spcBef>
+              <a:spcAft>
+                <a:spcPts val="600"/>
+              </a:spcAft>
+              <a:defRPr sz="1600">
+                <a:solidFill>
+                  <a:srgbClr val="333333"/>
+                </a:solidFill>
+              </a:defRPr>
+            </a:pPr>
+            <a:r>
+              <a:t>    Không phụ thuộc nhà cung cấp</a:t>
+            </a:r>
+          </a:p>
+          <a:p>
+            <a:pPr>
+              <a:spcBef>
+                <a:spcPts val="1000"/>
+              </a:spcBef>
+              <a:spcAft>
+                <a:spcPts val="600"/>
+              </a:spcAft>
+              <a:defRPr sz="1600">
+                <a:solidFill>
+                  <a:srgbClr val="333333"/>
+                </a:solidFill>
+              </a:defRPr>
+            </a:pPr>
+            <a:r>
+              <a:t>    Không buộc mua tài khoản, thiết bị, dịch vụ</a:t>
+            </a:r>
+          </a:p>
+          <a:p>
+            <a:pPr>
+              <a:spcBef>
+                <a:spcPts val="1000"/>
+              </a:spcBef>
+              <a:spcAft>
+                <a:spcPts val="600"/>
+              </a:spcAft>
+              <a:defRPr sz="1600">
+                <a:solidFill>
+                  <a:srgbClr val="333333"/>
+                </a:solidFill>
+              </a:defRPr>
+            </a:pPr>
+            <a:r>
+              <a:t>    Ưu tiên mã nguồn mở, có phiên bản ngoại tuyến</a:t>
             </a:r>
           </a:p>
         </p:txBody>
@@ -7071,7 +7503,7 @@
         </p:nvSpPr>
         <p:spPr>
           <a:xfrm>
-            <a:off x="457200" y="868680"/>
+            <a:off x="457200" y="1005840"/>
             <a:ext cx="11247120" cy="12700"/>
           </a:xfrm>
           <a:prstGeom prst="rect">
@@ -7123,7 +7555,7 @@
         <p:spPr>
           <a:xfrm>
             <a:off x="457200" y="137160"/>
-            <a:ext cx="548640" cy="548640"/>
+            <a:ext cx="640080" cy="640080"/>
           </a:xfrm>
           <a:prstGeom prst="rect">
             <a:avLst/>
@@ -7132,7 +7564,7 @@
       </p:pic>
       <p:pic>
         <p:nvPicPr>
-          <p:cNvPr id="4" name="Picture 3" descr="logo_thpt_thuan_hoa.jpg"/>
+          <p:cNvPr id="4" name="Picture 3" descr="logo_thpt_thuan_hoa.png"/>
           <p:cNvPicPr>
             <a:picLocks noChangeAspect="1"/>
           </p:cNvPicPr>
@@ -7146,8 +7578,8 @@
         </p:blipFill>
         <p:spPr>
           <a:xfrm>
-            <a:off x="1188720" y="137160"/>
-            <a:ext cx="548640" cy="548640"/>
+            <a:off x="1280160" y="137160"/>
+            <a:ext cx="640080" cy="640080"/>
           </a:xfrm>
           <a:prstGeom prst="rect">
             <a:avLst/>
@@ -7162,8 +7594,8 @@
         </p:nvSpPr>
         <p:spPr>
           <a:xfrm>
-            <a:off x="1920240" y="137160"/>
-            <a:ext cx="3200400" cy="640080"/>
+            <a:off x="2103120" y="182880"/>
+            <a:ext cx="3200400" cy="731520"/>
           </a:xfrm>
           <a:prstGeom prst="rect">
             <a:avLst/>
@@ -7177,26 +7609,26 @@
           <a:lstStyle/>
           <a:p>
             <a:pPr>
-              <a:defRPr sz="1100" b="1">
-                <a:solidFill>
-                  <a:srgbClr val="333333"/>
-                </a:solidFill>
-              </a:defRPr>
-            </a:pPr>
-            <a:r>
-              <a:t>TRƯỜNG THPT THUẬN HOÁ</a:t>
-            </a:r>
-          </a:p>
-          <a:p>
-            <a:pPr>
-              <a:defRPr sz="1000">
+              <a:defRPr sz="1300" b="1">
+                <a:solidFill>
+                  <a:srgbClr val="333333"/>
+                </a:solidFill>
+              </a:defRPr>
+            </a:pPr>
+            <a:r>
+              <a:t>Trường THPT Thuận Hoá</a:t>
+            </a:r>
+          </a:p>
+          <a:p>
+            <a:pPr>
+              <a:defRPr sz="1100">
                 <a:solidFill>
                   <a:srgbClr val="646464"/>
                 </a:solidFill>
               </a:defRPr>
             </a:pPr>
             <a:r>
-              <a:t>Đại học Sư Phạm, Đại học Huế</a:t>
+              <a:t>Trường Đại học Sư Phạm, Đại học Huế</a:t>
             </a:r>
           </a:p>
         </p:txBody>
@@ -7209,7 +7641,7 @@
         </p:nvSpPr>
         <p:spPr>
           <a:xfrm>
-            <a:off x="5303520" y="182880"/>
+            <a:off x="5486400" y="228600"/>
             <a:ext cx="6400800" cy="640080"/>
           </a:xfrm>
           <a:prstGeom prst="rect">
@@ -7224,14 +7656,14 @@
           <a:lstStyle/>
           <a:p>
             <a:pPr algn="ctr">
-              <a:defRPr sz="1400" b="1">
-                <a:solidFill>
-                  <a:srgbClr val="333333"/>
-                </a:solidFill>
-              </a:defRPr>
-            </a:pPr>
-            <a:r>
-              <a:t>5. Các phân hệ chính</a:t>
+              <a:defRPr sz="1600" b="1">
+                <a:solidFill>
+                  <a:srgbClr val="333333"/>
+                </a:solidFill>
+              </a:defRPr>
+            </a:pPr>
+            <a:r>
+              <a:t>4. Kiến trúc hệ thống</a:t>
             </a:r>
           </a:p>
         </p:txBody>
@@ -7259,14 +7691,14 @@
           <a:lstStyle/>
           <a:p>
             <a:pPr>
-              <a:defRPr sz="1000">
+              <a:defRPr sz="1100">
                 <a:solidFill>
                   <a:srgbClr val="646464"/>
                 </a:solidFill>
               </a:defRPr>
             </a:pPr>
             <a:r>
-              <a:t>GV hướng dẫn: Mai Xuân Văn                                                                                           6</a:t>
+              <a:t>GV: Mai Xuân Văn                                                                                           6</a:t>
             </a:r>
           </a:p>
         </p:txBody>
@@ -7279,8 +7711,8 @@
         </p:nvSpPr>
         <p:spPr>
           <a:xfrm>
-            <a:off x="457200" y="1097280"/>
-            <a:ext cx="10972800" cy="548640"/>
+            <a:off x="457200" y="1188720"/>
+            <a:ext cx="10972800" cy="640080"/>
           </a:xfrm>
           <a:prstGeom prst="rect">
             <a:avLst/>
@@ -7294,14 +7726,14 @@
           <a:lstStyle/>
           <a:p>
             <a:pPr>
-              <a:defRPr sz="2800" b="1">
+              <a:defRPr sz="3200" b="1">
                 <a:solidFill>
                   <a:srgbClr val="0066CC"/>
                 </a:solidFill>
               </a:defRPr>
             </a:pPr>
             <a:r>
-              <a:t>5 phân hệ mô phỏng</a:t>
+              <a:t>Mô hình 3 tầng</a:t>
             </a:r>
           </a:p>
         </p:txBody>
@@ -7314,8 +7746,8 @@
         </p:nvSpPr>
         <p:spPr>
           <a:xfrm>
-            <a:off x="640080" y="1828800"/>
-            <a:ext cx="10515600" cy="4389120"/>
+            <a:off x="640080" y="2011680"/>
+            <a:ext cx="10515600" cy="4114800"/>
           </a:xfrm>
           <a:prstGeom prst="rect">
             <a:avLst/>
@@ -7330,127 +7762,211 @@
           <a:p>
             <a:pPr>
               <a:spcBef>
-                <a:spcPts val="800"/>
-              </a:spcBef>
-              <a:spcAft>
-                <a:spcPts val="400"/>
-              </a:spcAft>
-              <a:defRPr sz="1500">
-                <a:solidFill>
-                  <a:srgbClr val="333333"/>
-                </a:solidFill>
-              </a:defRPr>
-            </a:pPr>
-            <a:r>
-              <a:t>• 1. Kịch bản 9 cảnh: Hành trình dữ liệu từ đầu vào đến đầu ra</a:t>
-            </a:r>
-          </a:p>
-          <a:p>
-            <a:pPr>
-              <a:spcBef>
-                <a:spcPts val="800"/>
-              </a:spcBef>
-              <a:spcAft>
-                <a:spcPts val="400"/>
-              </a:spcAft>
-              <a:defRPr sz="1500">
-                <a:solidFill>
-                  <a:srgbClr val="333333"/>
-                </a:solidFill>
-              </a:defRPr>
-            </a:pPr>
-            <a:r>
-              <a:t>• 2. Đấu trường bắt lỗi AI: 12 tình huống, 5 loại lỗi (bịa số liệu, nguồn giả, thiên kiến, suy luận sai, lộ dữ liệu)</a:t>
-            </a:r>
-          </a:p>
-          <a:p>
-            <a:pPr>
-              <a:spcBef>
-                <a:spcPts val="800"/>
-              </a:spcBef>
-              <a:spcAft>
-                <a:spcPts val="400"/>
-              </a:spcAft>
-              <a:defRPr sz="1500">
-                <a:solidFill>
-                  <a:srgbClr val="333333"/>
-                </a:solidFill>
-              </a:defRPr>
-            </a:pPr>
-            <a:r>
-              <a:t>• 3. Nhà máy AI 7 trạm: Từ nhập liệu → huấn luyện → đánh giá → triển khai</a:t>
-            </a:r>
-          </a:p>
-          <a:p>
-            <a:pPr>
-              <a:spcBef>
-                <a:spcPts val="800"/>
-              </a:spcBef>
-              <a:spcAft>
-                <a:spcPts val="400"/>
-              </a:spcAft>
-              <a:defRPr sz="1500">
-                <a:solidFill>
-                  <a:srgbClr val="333333"/>
-                </a:solidFill>
-              </a:defRPr>
-            </a:pPr>
-            <a:r>
-              <a:t>• 4. Xưởng huấn luyện 2 chiều: Perceptron học thật, phát hiện thiên kiến dữ liệu</a:t>
-            </a:r>
-          </a:p>
-          <a:p>
-            <a:pPr>
-              <a:spcBef>
-                <a:spcPts val="800"/>
-              </a:spcBef>
-              <a:spcAft>
-                <a:spcPts val="400"/>
-              </a:spcAft>
-              <a:defRPr sz="1500">
-                <a:solidFill>
-                  <a:srgbClr val="333333"/>
-                </a:solidFill>
-              </a:defRPr>
-            </a:pPr>
-            <a:r>
-              <a:t>• 5. Bản đồ năng lực: Theo dõi tiến bộ theo 13 chủ đề QĐ 2422 + 12 khối UNESCO</a:t>
-            </a:r>
-          </a:p>
-          <a:p>
-            <a:pPr>
-              <a:spcBef>
-                <a:spcPts val="800"/>
-              </a:spcBef>
-              <a:spcAft>
-                <a:spcPts val="400"/>
-              </a:spcAft>
-              <a:defRPr sz="1500">
-                <a:solidFill>
-                  <a:srgbClr val="333333"/>
-                </a:solidFill>
-              </a:defRPr>
-            </a:pPr>
-            <a:r>
-              <a:t>• </a:t>
-            </a:r>
-          </a:p>
-          <a:p>
-            <a:pPr>
-              <a:spcBef>
-                <a:spcPts val="800"/>
-              </a:spcBef>
-              <a:spcAft>
-                <a:spcPts val="400"/>
-              </a:spcAft>
-              <a:defRPr sz="1500">
-                <a:solidFill>
-                  <a:srgbClr val="333333"/>
-                </a:solidFill>
-              </a:defRPr>
-            </a:pPr>
-            <a:r>
-              <a:t>• Nguyên tắc: Lỗi do hệ cài sẵn → đáp án biết trước → chấm tất định, không cần LLM</a:t>
+                <a:spcPts val="1000"/>
+              </a:spcBef>
+              <a:spcAft>
+                <a:spcPts val="600"/>
+              </a:spcAft>
+              <a:defRPr sz="1600">
+                <a:solidFill>
+                  <a:srgbClr val="333333"/>
+                </a:solidFill>
+              </a:defRPr>
+            </a:pPr>
+            <a:r>
+              <a:t>Tầng nội dung:</a:t>
+            </a:r>
+          </a:p>
+          <a:p>
+            <a:pPr>
+              <a:spcBef>
+                <a:spcPts val="1000"/>
+              </a:spcBef>
+              <a:spcAft>
+                <a:spcPts val="600"/>
+              </a:spcAft>
+              <a:defRPr sz="1600">
+                <a:solidFill>
+                  <a:srgbClr val="333333"/>
+                </a:solidFill>
+              </a:defRPr>
+            </a:pPr>
+            <a:r>
+              <a:t>    Ngân hàng câu hỏi, 22 yêu cầu cần đạt, metadata chủ đề, kiến thức nền</a:t>
+            </a:r>
+          </a:p>
+          <a:p>
+            <a:pPr>
+              <a:spcBef>
+                <a:spcPts val="1000"/>
+              </a:spcBef>
+              <a:spcAft>
+                <a:spcPts val="600"/>
+              </a:spcAft>
+              <a:defRPr sz="1600">
+                <a:solidFill>
+                  <a:srgbClr val="333333"/>
+                </a:solidFill>
+              </a:defRPr>
+            </a:pPr>
+            <a:r>
+              <a:t>    Dữ liệu tĩnh, không cần kết nối mạng</a:t>
+            </a:r>
+          </a:p>
+          <a:p>
+            <a:pPr>
+              <a:spcBef>
+                <a:spcPts val="1000"/>
+              </a:spcBef>
+              <a:spcAft>
+                <a:spcPts val="600"/>
+              </a:spcAft>
+              <a:defRPr sz="1600">
+                <a:solidFill>
+                  <a:srgbClr val="333333"/>
+                </a:solidFill>
+              </a:defRPr>
+            </a:pPr>
+          </a:p>
+          <a:p>
+            <a:pPr>
+              <a:spcBef>
+                <a:spcPts val="1000"/>
+              </a:spcBef>
+              <a:spcAft>
+                <a:spcPts val="600"/>
+              </a:spcAft>
+              <a:defRPr sz="1600">
+                <a:solidFill>
+                  <a:srgbClr val="333333"/>
+                </a:solidFill>
+              </a:defRPr>
+            </a:pPr>
+            <a:r>
+              <a:t>Tầng mô phỏng:</a:t>
+            </a:r>
+          </a:p>
+          <a:p>
+            <a:pPr>
+              <a:spcBef>
+                <a:spcPts val="1000"/>
+              </a:spcBef>
+              <a:spcAft>
+                <a:spcPts val="600"/>
+              </a:spcAft>
+              <a:defRPr sz="1600">
+                <a:solidFill>
+                  <a:srgbClr val="333333"/>
+                </a:solidFill>
+              </a:defRPr>
+            </a:pPr>
+            <a:r>
+              <a:t>    Perceptron học thật với trọng số cập nhật theo lỗi</a:t>
+            </a:r>
+          </a:p>
+          <a:p>
+            <a:pPr>
+              <a:spcBef>
+                <a:spcPts val="1000"/>
+              </a:spcBef>
+              <a:spcAft>
+                <a:spcPts val="600"/>
+              </a:spcAft>
+              <a:defRPr sz="1600">
+                <a:solidFill>
+                  <a:srgbClr val="333333"/>
+                </a:solidFill>
+              </a:defRPr>
+            </a:pPr>
+            <a:r>
+              <a:t>    Bộ sinh ảnh tổng hợp, engine chấm tất định</a:t>
+            </a:r>
+          </a:p>
+          <a:p>
+            <a:pPr>
+              <a:spcBef>
+                <a:spcPts val="1000"/>
+              </a:spcBef>
+              <a:spcAft>
+                <a:spcPts val="600"/>
+              </a:spcAft>
+              <a:defRPr sz="1600">
+                <a:solidFill>
+                  <a:srgbClr val="333333"/>
+                </a:solidFill>
+              </a:defRPr>
+            </a:pPr>
+            <a:r>
+              <a:t>    Cảnh 3D minh họa không gian quyết định</a:t>
+            </a:r>
+          </a:p>
+          <a:p>
+            <a:pPr>
+              <a:spcBef>
+                <a:spcPts val="1000"/>
+              </a:spcBef>
+              <a:spcAft>
+                <a:spcPts val="600"/>
+              </a:spcAft>
+              <a:defRPr sz="1600">
+                <a:solidFill>
+                  <a:srgbClr val="333333"/>
+                </a:solidFill>
+              </a:defRPr>
+            </a:pPr>
+          </a:p>
+          <a:p>
+            <a:pPr>
+              <a:spcBef>
+                <a:spcPts val="1000"/>
+              </a:spcBef>
+              <a:spcAft>
+                <a:spcPts val="600"/>
+              </a:spcAft>
+              <a:defRPr sz="1600">
+                <a:solidFill>
+                  <a:srgbClr val="333333"/>
+                </a:solidFill>
+              </a:defRPr>
+            </a:pPr>
+            <a:r>
+              <a:t>Tầng giao diện:</a:t>
+            </a:r>
+          </a:p>
+          <a:p>
+            <a:pPr>
+              <a:spcBef>
+                <a:spcPts val="1000"/>
+              </a:spcBef>
+              <a:spcAft>
+                <a:spcPts val="600"/>
+              </a:spcAft>
+              <a:defRPr sz="1600">
+                <a:solidFill>
+                  <a:srgbClr val="333333"/>
+                </a:solidFill>
+              </a:defRPr>
+            </a:pPr>
+            <a:r>
+              <a:t>    Chuyển đổi khung nhìn bằng ẩn hiện, không dùng router</a:t>
+            </a:r>
+          </a:p>
+          <a:p>
+            <a:pPr>
+              <a:spcBef>
+                <a:spcPts val="1000"/>
+              </a:spcBef>
+              <a:spcAft>
+                <a:spcPts val="600"/>
+              </a:spcAft>
+              <a:defRPr sz="1600">
+                <a:solidFill>
+                  <a:srgbClr val="333333"/>
+                </a:solidFill>
+              </a:defRPr>
+            </a:pPr>
+            <a:r>
+              <a:t>    Hoạt động trên cả file:// và HTTPS</a:t>
             </a:r>
           </a:p>
         </p:txBody>
@@ -7481,7 +7997,7 @@
         </p:nvSpPr>
         <p:spPr>
           <a:xfrm>
-            <a:off x="457200" y="868680"/>
+            <a:off x="457200" y="1005840"/>
             <a:ext cx="11247120" cy="12700"/>
           </a:xfrm>
           <a:prstGeom prst="rect">
@@ -7533,7 +8049,7 @@
         <p:spPr>
           <a:xfrm>
             <a:off x="457200" y="137160"/>
-            <a:ext cx="548640" cy="548640"/>
+            <a:ext cx="640080" cy="640080"/>
           </a:xfrm>
           <a:prstGeom prst="rect">
             <a:avLst/>
@@ -7542,7 +8058,7 @@
       </p:pic>
       <p:pic>
         <p:nvPicPr>
-          <p:cNvPr id="4" name="Picture 3" descr="logo_thpt_thuan_hoa.jpg"/>
+          <p:cNvPr id="4" name="Picture 3" descr="logo_thpt_thuan_hoa.png"/>
           <p:cNvPicPr>
             <a:picLocks noChangeAspect="1"/>
           </p:cNvPicPr>
@@ -7556,8 +8072,8 @@
         </p:blipFill>
         <p:spPr>
           <a:xfrm>
-            <a:off x="1188720" y="137160"/>
-            <a:ext cx="548640" cy="548640"/>
+            <a:off x="1280160" y="137160"/>
+            <a:ext cx="640080" cy="640080"/>
           </a:xfrm>
           <a:prstGeom prst="rect">
             <a:avLst/>
@@ -7572,8 +8088,8 @@
         </p:nvSpPr>
         <p:spPr>
           <a:xfrm>
-            <a:off x="1920240" y="137160"/>
-            <a:ext cx="3200400" cy="640080"/>
+            <a:off x="2103120" y="182880"/>
+            <a:ext cx="3200400" cy="731520"/>
           </a:xfrm>
           <a:prstGeom prst="rect">
             <a:avLst/>
@@ -7587,26 +8103,26 @@
           <a:lstStyle/>
           <a:p>
             <a:pPr>
-              <a:defRPr sz="1100" b="1">
-                <a:solidFill>
-                  <a:srgbClr val="333333"/>
-                </a:solidFill>
-              </a:defRPr>
-            </a:pPr>
-            <a:r>
-              <a:t>TRƯỜNG THPT THUẬN HOÁ</a:t>
-            </a:r>
-          </a:p>
-          <a:p>
-            <a:pPr>
-              <a:defRPr sz="1000">
+              <a:defRPr sz="1300" b="1">
+                <a:solidFill>
+                  <a:srgbClr val="333333"/>
+                </a:solidFill>
+              </a:defRPr>
+            </a:pPr>
+            <a:r>
+              <a:t>Trường THPT Thuận Hoá</a:t>
+            </a:r>
+          </a:p>
+          <a:p>
+            <a:pPr>
+              <a:defRPr sz="1100">
                 <a:solidFill>
                   <a:srgbClr val="646464"/>
                 </a:solidFill>
               </a:defRPr>
             </a:pPr>
             <a:r>
-              <a:t>Đại học Sư Phạm, Đại học Huế</a:t>
+              <a:t>Trường Đại học Sư Phạm, Đại học Huế</a:t>
             </a:r>
           </a:p>
         </p:txBody>
@@ -7619,7 +8135,7 @@
         </p:nvSpPr>
         <p:spPr>
           <a:xfrm>
-            <a:off x="5303520" y="182880"/>
+            <a:off x="5486400" y="228600"/>
             <a:ext cx="6400800" cy="640080"/>
           </a:xfrm>
           <a:prstGeom prst="rect">
@@ -7634,14 +8150,14 @@
           <a:lstStyle/>
           <a:p>
             <a:pPr algn="ctr">
-              <a:defRPr sz="1400" b="1">
-                <a:solidFill>
-                  <a:srgbClr val="333333"/>
-                </a:solidFill>
-              </a:defRPr>
-            </a:pPr>
-            <a:r>
-              <a:t>6. Tích hợp chương trình</a:t>
+              <a:defRPr sz="1600" b="1">
+                <a:solidFill>
+                  <a:srgbClr val="333333"/>
+                </a:solidFill>
+              </a:defRPr>
+            </a:pPr>
+            <a:r>
+              <a:t>5. Các phân hệ chính</a:t>
             </a:r>
           </a:p>
         </p:txBody>
@@ -7669,14 +8185,14 @@
           <a:lstStyle/>
           <a:p>
             <a:pPr>
-              <a:defRPr sz="1000">
+              <a:defRPr sz="1100">
                 <a:solidFill>
                   <a:srgbClr val="646464"/>
                 </a:solidFill>
               </a:defRPr>
             </a:pPr>
             <a:r>
-              <a:t>GV hướng dẫn: Mai Xuân Văn                                                                                           7</a:t>
+              <a:t>GV: Mai Xuân Văn                                                                                           7</a:t>
             </a:r>
           </a:p>
         </p:txBody>
@@ -7689,8 +8205,8 @@
         </p:nvSpPr>
         <p:spPr>
           <a:xfrm>
-            <a:off x="457200" y="1097280"/>
-            <a:ext cx="10972800" cy="548640"/>
+            <a:off x="457200" y="1188720"/>
+            <a:ext cx="10972800" cy="640080"/>
           </a:xfrm>
           <a:prstGeom prst="rect">
             <a:avLst/>
@@ -7704,14 +8220,14 @@
           <a:lstStyle/>
           <a:p>
             <a:pPr>
-              <a:defRPr sz="2800" b="1">
+              <a:defRPr sz="3200" b="1">
                 <a:solidFill>
                   <a:srgbClr val="0066CC"/>
                 </a:solidFill>
               </a:defRPr>
             </a:pPr>
             <a:r>
-              <a:t>Phủ 28 bài SGK Tin học 10</a:t>
+              <a:t>5 phân hệ mô phỏng</a:t>
             </a:r>
           </a:p>
         </p:txBody>
@@ -7724,8 +8240,8 @@
         </p:nvSpPr>
         <p:spPr>
           <a:xfrm>
-            <a:off x="640080" y="1828800"/>
-            <a:ext cx="5029200" cy="4389120"/>
+            <a:off x="640080" y="2011680"/>
+            <a:ext cx="10515600" cy="4114800"/>
           </a:xfrm>
           <a:prstGeom prst="rect">
             <a:avLst/>
@@ -7739,229 +8255,203 @@
           <a:lstStyle/>
           <a:p>
             <a:pPr>
-              <a:defRPr sz="1800" b="1">
-                <a:solidFill>
-                  <a:srgbClr val="0066CC"/>
-                </a:solidFill>
-              </a:defRPr>
-            </a:pPr>
-            <a:r>
-              <a:t>Chủ đề SGK → Mạch QĐ 2422</a:t>
-            </a:r>
-          </a:p>
-          <a:p>
-            <a:pPr>
-              <a:spcBef>
-                <a:spcPts val="600"/>
-              </a:spcBef>
-              <a:defRPr sz="1400">
-                <a:solidFill>
-                  <a:srgbClr val="333333"/>
-                </a:solidFill>
-              </a:defRPr>
-            </a:pPr>
-            <a:r>
-              <a:t>• A. Máy tính &amp; xã hội tri thức → Mạch A, B</a:t>
-            </a:r>
-          </a:p>
-          <a:p>
-            <a:pPr>
-              <a:spcBef>
-                <a:spcPts val="600"/>
-              </a:spcBef>
-              <a:defRPr sz="1400">
-                <a:solidFill>
-                  <a:srgbClr val="333333"/>
-                </a:solidFill>
-              </a:defRPr>
-            </a:pPr>
-            <a:r>
-              <a:t>• B. Mạng máy tính &amp; Internet → Mạch B, C</a:t>
-            </a:r>
-          </a:p>
-          <a:p>
-            <a:pPr>
-              <a:spcBef>
-                <a:spcPts val="600"/>
-              </a:spcBef>
-              <a:defRPr sz="1400">
-                <a:solidFill>
-                  <a:srgbClr val="333333"/>
-                </a:solidFill>
-              </a:defRPr>
-            </a:pPr>
-            <a:r>
-              <a:t>• D. Đạo đức, pháp luật số → Mạch A, B</a:t>
-            </a:r>
-          </a:p>
-          <a:p>
-            <a:pPr>
-              <a:spcBef>
-                <a:spcPts val="600"/>
-              </a:spcBef>
-              <a:defRPr sz="1400">
-                <a:solidFill>
-                  <a:srgbClr val="333333"/>
-                </a:solidFill>
-              </a:defRPr>
-            </a:pPr>
-            <a:r>
-              <a:t>• E. Thiết kế đồ họa (ICT) → Mạch C</a:t>
-            </a:r>
-          </a:p>
-          <a:p>
-            <a:pPr>
-              <a:spcBef>
-                <a:spcPts val="600"/>
-              </a:spcBef>
-              <a:defRPr sz="1400">
-                <a:solidFill>
-                  <a:srgbClr val="333333"/>
-                </a:solidFill>
-              </a:defRPr>
-            </a:pPr>
-            <a:r>
-              <a:t>• F. Giải quyết vấn đề → Mạch C, D</a:t>
-            </a:r>
-          </a:p>
-          <a:p>
-            <a:pPr>
-              <a:spcBef>
-                <a:spcPts val="600"/>
-              </a:spcBef>
-              <a:defRPr sz="1400">
-                <a:solidFill>
-                  <a:srgbClr val="333333"/>
-                </a:solidFill>
-              </a:defRPr>
-            </a:pPr>
-            <a:r>
-              <a:t>• G. Hướng nghiệp (CS) → Mạch A, C</a:t>
-            </a:r>
-          </a:p>
-        </p:txBody>
-      </p:sp>
-      <p:sp>
-        <p:nvSpPr>
-          <p:cNvPr id="10" name="TextBox 9"/>
-          <p:cNvSpPr txBox="1"/>
-          <p:nvPr/>
-        </p:nvSpPr>
-        <p:spPr>
-          <a:xfrm>
-            <a:off x="5943600" y="1828800"/>
-            <a:ext cx="5029200" cy="4389120"/>
-          </a:xfrm>
-          <a:prstGeom prst="rect">
-            <a:avLst/>
-          </a:prstGeom>
-          <a:noFill/>
-        </p:spPr>
-        <p:txBody>
-          <a:bodyPr wrap="square">
-            <a:spAutoFit/>
-          </a:bodyPr>
-          <a:lstStyle/>
-          <a:p>
-            <a:pPr>
-              <a:defRPr sz="1800" b="1">
-                <a:solidFill>
-                  <a:srgbClr val="0066CC"/>
-                </a:solidFill>
-              </a:defRPr>
-            </a:pPr>
-            <a:r>
-              <a:t>Phân phối 12 tiết đề xuất</a:t>
-            </a:r>
-          </a:p>
-          <a:p>
-            <a:pPr>
-              <a:spcBef>
-                <a:spcPts val="600"/>
-              </a:spcBef>
-              <a:defRPr sz="1400">
-                <a:solidFill>
-                  <a:srgbClr val="333333"/>
-                </a:solidFill>
-              </a:defRPr>
-            </a:pPr>
-            <a:r>
-              <a:t>• Tiết 1-3: Mạch A-B (Kịch bản + Đấu trường)</a:t>
-            </a:r>
-          </a:p>
-          <a:p>
-            <a:pPr>
-              <a:spcBef>
-                <a:spcPts val="600"/>
-              </a:spcBef>
-              <a:defRPr sz="1400">
-                <a:solidFill>
-                  <a:srgbClr val="333333"/>
-                </a:solidFill>
-              </a:defRPr>
-            </a:pPr>
-            <a:r>
-              <a:t>• Tiết 4-5: Mạch C (Nhà máy Trạm 0-1-5)</a:t>
-            </a:r>
-          </a:p>
-          <a:p>
-            <a:pPr>
-              <a:spcBef>
-                <a:spcPts val="600"/>
-              </a:spcBef>
-              <a:defRPr sz="1400">
-                <a:solidFill>
-                  <a:srgbClr val="333333"/>
-                </a:solidFill>
-              </a:defRPr>
-            </a:pPr>
-            <a:r>
-              <a:t>• Tiết 6-7: Mạch C (Xưởng huấn luyện)</a:t>
-            </a:r>
-          </a:p>
-          <a:p>
-            <a:pPr>
-              <a:spcBef>
-                <a:spcPts val="600"/>
-              </a:spcBef>
-              <a:defRPr sz="1400">
-                <a:solidFill>
-                  <a:srgbClr val="333333"/>
-                </a:solidFill>
-              </a:defRPr>
-            </a:pPr>
-            <a:r>
-              <a:t>• Tiết 8: Mạch D (Nhà máy 7 trạm)</a:t>
-            </a:r>
-          </a:p>
-          <a:p>
-            <a:pPr>
-              <a:spcBef>
-                <a:spcPts val="600"/>
-              </a:spcBef>
-              <a:defRPr sz="1400">
-                <a:solidFill>
-                  <a:srgbClr val="333333"/>
-                </a:solidFill>
-              </a:defRPr>
-            </a:pPr>
-            <a:r>
-              <a:t>• Tiết 9-10: Ôn tập + Kiểm tra</a:t>
-            </a:r>
-          </a:p>
-          <a:p>
-            <a:pPr>
-              <a:spcBef>
-                <a:spcPts val="600"/>
-              </a:spcBef>
-              <a:defRPr sz="1400">
-                <a:solidFill>
-                  <a:srgbClr val="333333"/>
-                </a:solidFill>
-              </a:defRPr>
-            </a:pPr>
-            <a:r>
-              <a:t>• Tiết 11-12: Dự án + Tổng kết</a:t>
+              <a:spcBef>
+                <a:spcPts val="1000"/>
+              </a:spcBef>
+              <a:spcAft>
+                <a:spcPts val="600"/>
+              </a:spcAft>
+              <a:defRPr sz="1600">
+                <a:solidFill>
+                  <a:srgbClr val="333333"/>
+                </a:solidFill>
+              </a:defRPr>
+            </a:pPr>
+            <a:r>
+              <a:t>1. Kịch bản 9 cảnh: Hành trình dữ liệu từ đầu vào đến đầu ra</a:t>
+            </a:r>
+          </a:p>
+          <a:p>
+            <a:pPr>
+              <a:spcBef>
+                <a:spcPts val="1000"/>
+              </a:spcBef>
+              <a:spcAft>
+                <a:spcPts val="600"/>
+              </a:spcAft>
+              <a:defRPr sz="1600">
+                <a:solidFill>
+                  <a:srgbClr val="333333"/>
+                </a:solidFill>
+              </a:defRPr>
+            </a:pPr>
+          </a:p>
+          <a:p>
+            <a:pPr>
+              <a:spcBef>
+                <a:spcPts val="1000"/>
+              </a:spcBef>
+              <a:spcAft>
+                <a:spcPts val="600"/>
+              </a:spcAft>
+              <a:defRPr sz="1600">
+                <a:solidFill>
+                  <a:srgbClr val="333333"/>
+                </a:solidFill>
+              </a:defRPr>
+            </a:pPr>
+            <a:r>
+              <a:t>2. Đấu trường bắt lỗi AI: 12 tình huống, 5 loại lỗi</a:t>
+            </a:r>
+          </a:p>
+          <a:p>
+            <a:pPr>
+              <a:spcBef>
+                <a:spcPts val="1000"/>
+              </a:spcBef>
+              <a:spcAft>
+                <a:spcPts val="600"/>
+              </a:spcAft>
+              <a:defRPr sz="1600">
+                <a:solidFill>
+                  <a:srgbClr val="333333"/>
+                </a:solidFill>
+              </a:defRPr>
+            </a:pPr>
+            <a:r>
+              <a:t>    (bịa số liệu, nguồn giả, thiên kiến, suy luận sai, lộ dữ liệu)</a:t>
+            </a:r>
+          </a:p>
+          <a:p>
+            <a:pPr>
+              <a:spcBef>
+                <a:spcPts val="1000"/>
+              </a:spcBef>
+              <a:spcAft>
+                <a:spcPts val="600"/>
+              </a:spcAft>
+              <a:defRPr sz="1600">
+                <a:solidFill>
+                  <a:srgbClr val="333333"/>
+                </a:solidFill>
+              </a:defRPr>
+            </a:pPr>
+          </a:p>
+          <a:p>
+            <a:pPr>
+              <a:spcBef>
+                <a:spcPts val="1000"/>
+              </a:spcBef>
+              <a:spcAft>
+                <a:spcPts val="600"/>
+              </a:spcAft>
+              <a:defRPr sz="1600">
+                <a:solidFill>
+                  <a:srgbClr val="333333"/>
+                </a:solidFill>
+              </a:defRPr>
+            </a:pPr>
+            <a:r>
+              <a:t>3. Nhà máy AI 7 trạm: Từ nhập liệu → huấn luyện → đánh giá → triển khai</a:t>
+            </a:r>
+          </a:p>
+          <a:p>
+            <a:pPr>
+              <a:spcBef>
+                <a:spcPts val="1000"/>
+              </a:spcBef>
+              <a:spcAft>
+                <a:spcPts val="600"/>
+              </a:spcAft>
+              <a:defRPr sz="1600">
+                <a:solidFill>
+                  <a:srgbClr val="333333"/>
+                </a:solidFill>
+              </a:defRPr>
+            </a:pPr>
+          </a:p>
+          <a:p>
+            <a:pPr>
+              <a:spcBef>
+                <a:spcPts val="1000"/>
+              </a:spcBef>
+              <a:spcAft>
+                <a:spcPts val="600"/>
+              </a:spcAft>
+              <a:defRPr sz="1600">
+                <a:solidFill>
+                  <a:srgbClr val="333333"/>
+                </a:solidFill>
+              </a:defRPr>
+            </a:pPr>
+            <a:r>
+              <a:t>4. Xưởng huấn luyện 2 chiều: Perceptron học thật, phát hiện thiên kiến dữ liệu</a:t>
+            </a:r>
+          </a:p>
+          <a:p>
+            <a:pPr>
+              <a:spcBef>
+                <a:spcPts val="1000"/>
+              </a:spcBef>
+              <a:spcAft>
+                <a:spcPts val="600"/>
+              </a:spcAft>
+              <a:defRPr sz="1600">
+                <a:solidFill>
+                  <a:srgbClr val="333333"/>
+                </a:solidFill>
+              </a:defRPr>
+            </a:pPr>
+          </a:p>
+          <a:p>
+            <a:pPr>
+              <a:spcBef>
+                <a:spcPts val="1000"/>
+              </a:spcBef>
+              <a:spcAft>
+                <a:spcPts val="600"/>
+              </a:spcAft>
+              <a:defRPr sz="1600">
+                <a:solidFill>
+                  <a:srgbClr val="333333"/>
+                </a:solidFill>
+              </a:defRPr>
+            </a:pPr>
+            <a:r>
+              <a:t>5. Bản đồ năng lực: Theo dõi tiến bộ theo 13 chủ đề QĐ 2422 + 12 khối UNESCO</a:t>
+            </a:r>
+          </a:p>
+          <a:p>
+            <a:pPr>
+              <a:spcBef>
+                <a:spcPts val="1000"/>
+              </a:spcBef>
+              <a:spcAft>
+                <a:spcPts val="600"/>
+              </a:spcAft>
+              <a:defRPr sz="1600">
+                <a:solidFill>
+                  <a:srgbClr val="333333"/>
+                </a:solidFill>
+              </a:defRPr>
+            </a:pPr>
+          </a:p>
+          <a:p>
+            <a:pPr>
+              <a:spcBef>
+                <a:spcPts val="1000"/>
+              </a:spcBef>
+              <a:spcAft>
+                <a:spcPts val="600"/>
+              </a:spcAft>
+              <a:defRPr sz="1600">
+                <a:solidFill>
+                  <a:srgbClr val="333333"/>
+                </a:solidFill>
+              </a:defRPr>
+            </a:pPr>
+            <a:r>
+              <a:t>Nguyên tắc: Lỗi do hệ cài sẵn → đáp án biết trước → chấm tất định</a:t>
             </a:r>
           </a:p>
         </p:txBody>
@@ -7992,7 +8482,7 @@
         </p:nvSpPr>
         <p:spPr>
           <a:xfrm>
-            <a:off x="457200" y="868680"/>
+            <a:off x="457200" y="1005840"/>
             <a:ext cx="11247120" cy="12700"/>
           </a:xfrm>
           <a:prstGeom prst="rect">
@@ -8044,7 +8534,7 @@
         <p:spPr>
           <a:xfrm>
             <a:off x="457200" y="137160"/>
-            <a:ext cx="548640" cy="548640"/>
+            <a:ext cx="640080" cy="640080"/>
           </a:xfrm>
           <a:prstGeom prst="rect">
             <a:avLst/>
@@ -8053,7 +8543,7 @@
       </p:pic>
       <p:pic>
         <p:nvPicPr>
-          <p:cNvPr id="4" name="Picture 3" descr="logo_thpt_thuan_hoa.jpg"/>
+          <p:cNvPr id="4" name="Picture 3" descr="logo_thpt_thuan_hoa.png"/>
           <p:cNvPicPr>
             <a:picLocks noChangeAspect="1"/>
           </p:cNvPicPr>
@@ -8067,8 +8557,8 @@
         </p:blipFill>
         <p:spPr>
           <a:xfrm>
-            <a:off x="1188720" y="137160"/>
-            <a:ext cx="548640" cy="548640"/>
+            <a:off x="1280160" y="137160"/>
+            <a:ext cx="640080" cy="640080"/>
           </a:xfrm>
           <a:prstGeom prst="rect">
             <a:avLst/>
@@ -8083,8 +8573,8 @@
         </p:nvSpPr>
         <p:spPr>
           <a:xfrm>
-            <a:off x="1920240" y="137160"/>
-            <a:ext cx="3200400" cy="640080"/>
+            <a:off x="2103120" y="182880"/>
+            <a:ext cx="3200400" cy="731520"/>
           </a:xfrm>
           <a:prstGeom prst="rect">
             <a:avLst/>
@@ -8098,26 +8588,26 @@
           <a:lstStyle/>
           <a:p>
             <a:pPr>
-              <a:defRPr sz="1100" b="1">
-                <a:solidFill>
-                  <a:srgbClr val="333333"/>
-                </a:solidFill>
-              </a:defRPr>
-            </a:pPr>
-            <a:r>
-              <a:t>TRƯỜNG THPT THUẬN HOÁ</a:t>
-            </a:r>
-          </a:p>
-          <a:p>
-            <a:pPr>
-              <a:defRPr sz="1000">
+              <a:defRPr sz="1300" b="1">
+                <a:solidFill>
+                  <a:srgbClr val="333333"/>
+                </a:solidFill>
+              </a:defRPr>
+            </a:pPr>
+            <a:r>
+              <a:t>Trường THPT Thuận Hoá</a:t>
+            </a:r>
+          </a:p>
+          <a:p>
+            <a:pPr>
+              <a:defRPr sz="1100">
                 <a:solidFill>
                   <a:srgbClr val="646464"/>
                 </a:solidFill>
               </a:defRPr>
             </a:pPr>
             <a:r>
-              <a:t>Đại học Sư Phạm, Đại học Huế</a:t>
+              <a:t>Trường Đại học Sư Phạm, Đại học Huế</a:t>
             </a:r>
           </a:p>
         </p:txBody>
@@ -8130,7 +8620,7 @@
         </p:nvSpPr>
         <p:spPr>
           <a:xfrm>
-            <a:off x="5303520" y="182880"/>
+            <a:off x="5486400" y="228600"/>
             <a:ext cx="6400800" cy="640080"/>
           </a:xfrm>
           <a:prstGeom prst="rect">
@@ -8145,14 +8635,14 @@
           <a:lstStyle/>
           <a:p>
             <a:pPr algn="ctr">
-              <a:defRPr sz="1400" b="1">
-                <a:solidFill>
-                  <a:srgbClr val="333333"/>
-                </a:solidFill>
-              </a:defRPr>
-            </a:pPr>
-            <a:r>
-              <a:t>7. Kết quả nghiệm thu</a:t>
+              <a:defRPr sz="1600" b="1">
+                <a:solidFill>
+                  <a:srgbClr val="333333"/>
+                </a:solidFill>
+              </a:defRPr>
+            </a:pPr>
+            <a:r>
+              <a:t>6. Tích hợp chương trình</a:t>
             </a:r>
           </a:p>
         </p:txBody>
@@ -8180,14 +8670,14 @@
           <a:lstStyle/>
           <a:p>
             <a:pPr>
-              <a:defRPr sz="1000">
+              <a:defRPr sz="1100">
                 <a:solidFill>
                   <a:srgbClr val="646464"/>
                 </a:solidFill>
               </a:defRPr>
             </a:pPr>
             <a:r>
-              <a:t>GV hướng dẫn: Mai Xuân Văn                                                                                           8</a:t>
+              <a:t>GV: Mai Xuân Văn                                                                                           8</a:t>
             </a:r>
           </a:p>
         </p:txBody>
@@ -8200,8 +8690,8 @@
         </p:nvSpPr>
         <p:spPr>
           <a:xfrm>
-            <a:off x="457200" y="1097280"/>
-            <a:ext cx="10972800" cy="548640"/>
+            <a:off x="457200" y="1188720"/>
+            <a:ext cx="10972800" cy="640080"/>
           </a:xfrm>
           <a:prstGeom prst="rect">
             <a:avLst/>
@@ -8215,14 +8705,14 @@
           <a:lstStyle/>
           <a:p>
             <a:pPr>
-              <a:defRPr sz="2800" b="1">
+              <a:defRPr sz="3200" b="1">
                 <a:solidFill>
                   <a:srgbClr val="0066CC"/>
                 </a:solidFill>
               </a:defRPr>
             </a:pPr>
             <a:r>
-              <a:t>Hệ thống kiểm chứng tự động</a:t>
+              <a:t>Phủ 28 bài SGK Tin học 10</a:t>
             </a:r>
           </a:p>
         </p:txBody>
@@ -8235,8 +8725,8 @@
         </p:nvSpPr>
         <p:spPr>
           <a:xfrm>
-            <a:off x="640080" y="1828800"/>
-            <a:ext cx="10515600" cy="4389120"/>
+            <a:off x="640080" y="2011680"/>
+            <a:ext cx="5029200" cy="4114800"/>
           </a:xfrm>
           <a:prstGeom prst="rect">
             <a:avLst/>
@@ -8250,20 +8740,32 @@
           <a:lstStyle/>
           <a:p>
             <a:pPr>
+              <a:spcAft>
+                <a:spcPts val="1200"/>
+              </a:spcAft>
+              <a:defRPr sz="2000" b="1">
+                <a:solidFill>
+                  <a:srgbClr val="0066CC"/>
+                </a:solidFill>
+              </a:defRPr>
+            </a:pPr>
+            <a:r>
+              <a:t>Chủ đề SGK → Mạch QĐ 2422</a:t>
+            </a:r>
+          </a:p>
+          <a:p>
+            <a:pPr>
               <a:spcBef>
                 <a:spcPts val="800"/>
               </a:spcBef>
-              <a:spcAft>
-                <a:spcPts val="400"/>
-              </a:spcAft>
-              <a:defRPr sz="1500">
-                <a:solidFill>
-                  <a:srgbClr val="333333"/>
-                </a:solidFill>
-              </a:defRPr>
-            </a:pPr>
-            <a:r>
-              <a:t>• 97/97 tiêu chí nghiệm thu đạt (tools/nghiem_thu.py)</a:t>
+              <a:defRPr sz="1600">
+                <a:solidFill>
+                  <a:srgbClr val="333333"/>
+                </a:solidFill>
+              </a:defRPr>
+            </a:pPr>
+            <a:r>
+              <a:t>A. Máy tính &amp; xã hội tri thức → Mạch A, B</a:t>
             </a:r>
           </a:p>
           <a:p>
@@ -8271,17 +8773,14 @@
               <a:spcBef>
                 <a:spcPts val="800"/>
               </a:spcBef>
-              <a:spcAft>
-                <a:spcPts val="400"/>
-              </a:spcAft>
-              <a:defRPr sz="1500">
-                <a:solidFill>
-                  <a:srgbClr val="333333"/>
-                </a:solidFill>
-              </a:defRPr>
-            </a:pPr>
-            <a:r>
-              <a:t>• 22/22 YCCĐ lớp 10 được phủ (tools/tinh_do_phu.py)</a:t>
+              <a:defRPr sz="1600">
+                <a:solidFill>
+                  <a:srgbClr val="333333"/>
+                </a:solidFill>
+              </a:defRPr>
+            </a:pPr>
+            <a:r>
+              <a:t>B. Mạng máy tính &amp; Internet → Mạch B, C</a:t>
             </a:r>
           </a:p>
           <a:p>
@@ -8289,17 +8788,14 @@
               <a:spcBef>
                 <a:spcPts val="800"/>
               </a:spcBef>
-              <a:spcAft>
-                <a:spcPts val="400"/>
-              </a:spcAft>
-              <a:defRPr sz="1500">
-                <a:solidFill>
-                  <a:srgbClr val="333333"/>
-                </a:solidFill>
-              </a:defRPr>
-            </a:pPr>
-            <a:r>
-              <a:t>• 133 tệp trong manifest, hash khớp 100% (SHA256SUMS.txt)</a:t>
+              <a:defRPr sz="1600">
+                <a:solidFill>
+                  <a:srgbClr val="333333"/>
+                </a:solidFill>
+              </a:defRPr>
+            </a:pPr>
+            <a:r>
+              <a:t>D. Đạo đức, pháp luật số → Mạch A, B</a:t>
             </a:r>
           </a:p>
           <a:p>
@@ -8307,17 +8803,14 @@
               <a:spcBef>
                 <a:spcPts val="800"/>
               </a:spcBef>
-              <a:spcAft>
-                <a:spcPts val="400"/>
-              </a:spcAft>
-              <a:defRPr sz="1500">
-                <a:solidFill>
-                  <a:srgbClr val="333333"/>
-                </a:solidFill>
-              </a:defRPr>
-            </a:pPr>
-            <a:r>
-              <a:t>• 0 lỗi nội dung (tools/kiem_noi_dung.py)</a:t>
+              <a:defRPr sz="1600">
+                <a:solidFill>
+                  <a:srgbClr val="333333"/>
+                </a:solidFill>
+              </a:defRPr>
+            </a:pPr>
+            <a:r>
+              <a:t>E. Thiết kế đồ họa (ICT) → Mạch C</a:t>
             </a:r>
           </a:p>
           <a:p>
@@ -8325,17 +8818,14 @@
               <a:spcBef>
                 <a:spcPts val="800"/>
               </a:spcBef>
-              <a:spcAft>
-                <a:spcPts val="400"/>
-              </a:spcAft>
-              <a:defRPr sz="1500">
-                <a:solidFill>
-                  <a:srgbClr val="333333"/>
-                </a:solidFill>
-              </a:defRPr>
-            </a:pPr>
-            <a:r>
-              <a:t>• </a:t>
+              <a:defRPr sz="1600">
+                <a:solidFill>
+                  <a:srgbClr val="333333"/>
+                </a:solidFill>
+              </a:defRPr>
+            </a:pPr>
+            <a:r>
+              <a:t>F. Giải quyết vấn đề → Mạch C, D</a:t>
             </a:r>
           </a:p>
           <a:p>
@@ -8343,17 +8833,52 @@
               <a:spcBef>
                 <a:spcPts val="800"/>
               </a:spcBef>
-              <a:spcAft>
-                <a:spcPts val="400"/>
-              </a:spcAft>
-              <a:defRPr sz="1500">
-                <a:solidFill>
-                  <a:srgbClr val="333333"/>
-                </a:solidFill>
-              </a:defRPr>
-            </a:pPr>
-            <a:r>
-              <a:t>• Bộ mutation test chứng minh cổng có răng:</a:t>
+              <a:defRPr sz="1600">
+                <a:solidFill>
+                  <a:srgbClr val="333333"/>
+                </a:solidFill>
+              </a:defRPr>
+            </a:pPr>
+            <a:r>
+              <a:t>G. Hướng nghiệp (CS) → Mạch A, C</a:t>
+            </a:r>
+          </a:p>
+        </p:txBody>
+      </p:sp>
+      <p:sp>
+        <p:nvSpPr>
+          <p:cNvPr id="10" name="TextBox 9"/>
+          <p:cNvSpPr txBox="1"/>
+          <p:nvPr/>
+        </p:nvSpPr>
+        <p:spPr>
+          <a:xfrm>
+            <a:off x="5943600" y="2011680"/>
+            <a:ext cx="5029200" cy="4114800"/>
+          </a:xfrm>
+          <a:prstGeom prst="rect">
+            <a:avLst/>
+          </a:prstGeom>
+          <a:noFill/>
+        </p:spPr>
+        <p:txBody>
+          <a:bodyPr wrap="square">
+            <a:spAutoFit/>
+          </a:bodyPr>
+          <a:lstStyle/>
+          <a:p>
+            <a:pPr>
+              <a:spcAft>
+                <a:spcPts val="1200"/>
+              </a:spcAft>
+              <a:defRPr sz="2000" b="1">
+                <a:solidFill>
+                  <a:srgbClr val="0066CC"/>
+                </a:solidFill>
+              </a:defRPr>
+            </a:pPr>
+            <a:r>
+              <a:t>Phân phối 12 tiết đề xuất</a:t>
             </a:r>
           </a:p>
           <a:p>
@@ -8361,17 +8886,14 @@
               <a:spcBef>
                 <a:spcPts val="800"/>
               </a:spcBef>
-              <a:spcAft>
-                <a:spcPts val="400"/>
-              </a:spcAft>
-              <a:defRPr sz="1500">
-                <a:solidFill>
-                  <a:srgbClr val="333333"/>
-                </a:solidFill>
-              </a:defRPr>
-            </a:pPr>
-            <a:r>
-              <a:t>  — 48 ca phá được thiết kế để kiểm tra từng cổng</a:t>
+              <a:defRPr sz="1600">
+                <a:solidFill>
+                  <a:srgbClr val="333333"/>
+                </a:solidFill>
+              </a:defRPr>
+            </a:pPr>
+            <a:r>
+              <a:t>Tiết 1-3: Mạch A-B (Kịch bản + Đấu trường)</a:t>
             </a:r>
           </a:p>
           <a:p>
@@ -8379,17 +8901,14 @@
               <a:spcBef>
                 <a:spcPts val="800"/>
               </a:spcBef>
-              <a:spcAft>
-                <a:spcPts val="400"/>
-              </a:spcAft>
-              <a:defRPr sz="1500">
-                <a:solidFill>
-                  <a:srgbClr val="333333"/>
-                </a:solidFill>
-              </a:defRPr>
-            </a:pPr>
-            <a:r>
-              <a:t>  — Phân biệt ca PHÁ với ca ĐỐI CHỨNG ÂM</a:t>
+              <a:defRPr sz="1600">
+                <a:solidFill>
+                  <a:srgbClr val="333333"/>
+                </a:solidFill>
+              </a:defRPr>
+            </a:pPr>
+            <a:r>
+              <a:t>Tiết 4-5: Mạch C (Nhà máy Trạm 0-1-5)</a:t>
             </a:r>
           </a:p>
           <a:p>
@@ -8397,17 +8916,14 @@
               <a:spcBef>
                 <a:spcPts val="800"/>
               </a:spcBef>
-              <a:spcAft>
-                <a:spcPts val="400"/>
-              </a:spcAft>
-              <a:defRPr sz="1500">
-                <a:solidFill>
-                  <a:srgbClr val="333333"/>
-                </a:solidFill>
-              </a:defRPr>
-            </a:pPr>
-            <a:r>
-              <a:t>  — Đếm theo CẤP CA, không đếm dòng</a:t>
+              <a:defRPr sz="1600">
+                <a:solidFill>
+                  <a:srgbClr val="333333"/>
+                </a:solidFill>
+              </a:defRPr>
+            </a:pPr>
+            <a:r>
+              <a:t>Tiết 6-7: Mạch C (Xưởng huấn luyện)</a:t>
             </a:r>
           </a:p>
           <a:p>
@@ -8415,17 +8931,14 @@
               <a:spcBef>
                 <a:spcPts val="800"/>
               </a:spcBef>
-              <a:spcAft>
-                <a:spcPts val="400"/>
-              </a:spcAft>
-              <a:defRPr sz="1500">
-                <a:solidFill>
-                  <a:srgbClr val="333333"/>
-                </a:solidFill>
-              </a:defRPr>
-            </a:pPr>
-            <a:r>
-              <a:t>• </a:t>
+              <a:defRPr sz="1600">
+                <a:solidFill>
+                  <a:srgbClr val="333333"/>
+                </a:solidFill>
+              </a:defRPr>
+            </a:pPr>
+            <a:r>
+              <a:t>Tiết 8: Mạch D (Nhà máy 7 trạm)</a:t>
             </a:r>
           </a:p>
           <a:p>
@@ -8433,17 +8946,29 @@
               <a:spcBef>
                 <a:spcPts val="800"/>
               </a:spcBef>
-              <a:spcAft>
-                <a:spcPts val="400"/>
-              </a:spcAft>
-              <a:defRPr sz="1500">
-                <a:solidFill>
-                  <a:srgbClr val="333333"/>
-                </a:solidFill>
-              </a:defRPr>
-            </a:pPr>
-            <a:r>
-              <a:t>• Công cụ tự suy gốc repo, không ghi cứng đường dẫn máy tác giả</a:t>
+              <a:defRPr sz="1600">
+                <a:solidFill>
+                  <a:srgbClr val="333333"/>
+                </a:solidFill>
+              </a:defRPr>
+            </a:pPr>
+            <a:r>
+              <a:t>Tiết 9-10: Ôn tập + Kiểm tra</a:t>
+            </a:r>
+          </a:p>
+          <a:p>
+            <a:pPr>
+              <a:spcBef>
+                <a:spcPts val="800"/>
+              </a:spcBef>
+              <a:defRPr sz="1600">
+                <a:solidFill>
+                  <a:srgbClr val="333333"/>
+                </a:solidFill>
+              </a:defRPr>
+            </a:pPr>
+            <a:r>
+              <a:t>Tiết 11-12: Dự án + Tổng kết</a:t>
             </a:r>
           </a:p>
         </p:txBody>
@@ -8474,7 +8999,7 @@
         </p:nvSpPr>
         <p:spPr>
           <a:xfrm>
-            <a:off x="457200" y="868680"/>
+            <a:off x="457200" y="1005840"/>
             <a:ext cx="11247120" cy="12700"/>
           </a:xfrm>
           <a:prstGeom prst="rect">
@@ -8526,7 +9051,7 @@
         <p:spPr>
           <a:xfrm>
             <a:off x="457200" y="137160"/>
-            <a:ext cx="548640" cy="548640"/>
+            <a:ext cx="640080" cy="640080"/>
           </a:xfrm>
           <a:prstGeom prst="rect">
             <a:avLst/>
@@ -8535,7 +9060,7 @@
       </p:pic>
       <p:pic>
         <p:nvPicPr>
-          <p:cNvPr id="4" name="Picture 3" descr="logo_thpt_thuan_hoa.jpg"/>
+          <p:cNvPr id="4" name="Picture 3" descr="logo_thpt_thuan_hoa.png"/>
           <p:cNvPicPr>
             <a:picLocks noChangeAspect="1"/>
           </p:cNvPicPr>
@@ -8549,8 +9074,8 @@
         </p:blipFill>
         <p:spPr>
           <a:xfrm>
-            <a:off x="1188720" y="137160"/>
-            <a:ext cx="548640" cy="548640"/>
+            <a:off x="1280160" y="137160"/>
+            <a:ext cx="640080" cy="640080"/>
           </a:xfrm>
           <a:prstGeom prst="rect">
             <a:avLst/>
@@ -8565,8 +9090,8 @@
         </p:nvSpPr>
         <p:spPr>
           <a:xfrm>
-            <a:off x="1920240" y="137160"/>
-            <a:ext cx="3200400" cy="640080"/>
+            <a:off x="2103120" y="182880"/>
+            <a:ext cx="3200400" cy="731520"/>
           </a:xfrm>
           <a:prstGeom prst="rect">
             <a:avLst/>
@@ -8580,26 +9105,26 @@
           <a:lstStyle/>
           <a:p>
             <a:pPr>
-              <a:defRPr sz="1100" b="1">
-                <a:solidFill>
-                  <a:srgbClr val="333333"/>
-                </a:solidFill>
-              </a:defRPr>
-            </a:pPr>
-            <a:r>
-              <a:t>TRƯỜNG THPT THUẬN HOÁ</a:t>
-            </a:r>
-          </a:p>
-          <a:p>
-            <a:pPr>
-              <a:defRPr sz="1000">
+              <a:defRPr sz="1300" b="1">
+                <a:solidFill>
+                  <a:srgbClr val="333333"/>
+                </a:solidFill>
+              </a:defRPr>
+            </a:pPr>
+            <a:r>
+              <a:t>Trường THPT Thuận Hoá</a:t>
+            </a:r>
+          </a:p>
+          <a:p>
+            <a:pPr>
+              <a:defRPr sz="1100">
                 <a:solidFill>
                   <a:srgbClr val="646464"/>
                 </a:solidFill>
               </a:defRPr>
             </a:pPr>
             <a:r>
-              <a:t>Đại học Sư Phạm, Đại học Huế</a:t>
+              <a:t>Trường Đại học Sư Phạm, Đại học Huế</a:t>
             </a:r>
           </a:p>
         </p:txBody>
@@ -8612,7 +9137,7 @@
         </p:nvSpPr>
         <p:spPr>
           <a:xfrm>
-            <a:off x="5303520" y="182880"/>
+            <a:off x="5486400" y="228600"/>
             <a:ext cx="6400800" cy="640080"/>
           </a:xfrm>
           <a:prstGeom prst="rect">
@@ -8627,14 +9152,14 @@
           <a:lstStyle/>
           <a:p>
             <a:pPr algn="ctr">
-              <a:defRPr sz="1400" b="1">
-                <a:solidFill>
-                  <a:srgbClr val="333333"/>
-                </a:solidFill>
-              </a:defRPr>
-            </a:pPr>
-            <a:r>
-              <a:t>8. Đổi mới sư phạm</a:t>
+              <a:defRPr sz="1600" b="1">
+                <a:solidFill>
+                  <a:srgbClr val="333333"/>
+                </a:solidFill>
+              </a:defRPr>
+            </a:pPr>
+            <a:r>
+              <a:t>7. Kết quả nghiệm thu</a:t>
             </a:r>
           </a:p>
         </p:txBody>
@@ -8662,14 +9187,14 @@
           <a:lstStyle/>
           <a:p>
             <a:pPr>
-              <a:defRPr sz="1000">
+              <a:defRPr sz="1100">
                 <a:solidFill>
                   <a:srgbClr val="646464"/>
                 </a:solidFill>
               </a:defRPr>
             </a:pPr>
             <a:r>
-              <a:t>GV hướng dẫn: Mai Xuân Văn                                                                                           9</a:t>
+              <a:t>GV: Mai Xuân Văn                                                                                           9</a:t>
             </a:r>
           </a:p>
         </p:txBody>
@@ -8682,8 +9207,8 @@
         </p:nvSpPr>
         <p:spPr>
           <a:xfrm>
-            <a:off x="457200" y="1097280"/>
-            <a:ext cx="10972800" cy="548640"/>
+            <a:off x="457200" y="1188720"/>
+            <a:ext cx="10972800" cy="640080"/>
           </a:xfrm>
           <a:prstGeom prst="rect">
             <a:avLst/>
@@ -8697,14 +9222,14 @@
           <a:lstStyle/>
           <a:p>
             <a:pPr>
-              <a:defRPr sz="2800" b="1">
+              <a:defRPr sz="3200" b="1">
                 <a:solidFill>
                   <a:srgbClr val="0066CC"/>
                 </a:solidFill>
               </a:defRPr>
             </a:pPr>
             <a:r>
-              <a:t>Nguyên tắc thiết kế</a:t>
+              <a:t>Hệ thống kiểm chứng tự động</a:t>
             </a:r>
           </a:p>
         </p:txBody>
@@ -8717,8 +9242,8 @@
         </p:nvSpPr>
         <p:spPr>
           <a:xfrm>
-            <a:off x="640080" y="1828800"/>
-            <a:ext cx="10515600" cy="4389120"/>
+            <a:off x="640080" y="2011680"/>
+            <a:ext cx="10515600" cy="4114800"/>
           </a:xfrm>
           <a:prstGeom prst="rect">
             <a:avLst/>
@@ -8733,235 +9258,238 @@
           <a:p>
             <a:pPr>
               <a:spcBef>
-                <a:spcPts val="800"/>
-              </a:spcBef>
-              <a:spcAft>
-                <a:spcPts val="400"/>
-              </a:spcAft>
-              <a:defRPr sz="1500">
-                <a:solidFill>
-                  <a:srgbClr val="333333"/>
-                </a:solidFill>
-              </a:defRPr>
-            </a:pPr>
-            <a:r>
-              <a:t>• Học sinh bắt lỗi AI thay vì hỏi AI:</a:t>
-            </a:r>
-          </a:p>
-          <a:p>
-            <a:pPr>
-              <a:spcBef>
-                <a:spcPts val="800"/>
-              </a:spcBef>
-              <a:spcAft>
-                <a:spcPts val="400"/>
-              </a:spcAft>
-              <a:defRPr sz="1500">
-                <a:solidFill>
-                  <a:srgbClr val="333333"/>
-                </a:solidFill>
-              </a:defRPr>
-            </a:pPr>
-            <a:r>
-              <a:t>  — 78 câu trong ngân hàng, chia theo 5 nhóm lỗi</a:t>
-            </a:r>
-          </a:p>
-          <a:p>
-            <a:pPr>
-              <a:spcBef>
-                <a:spcPts val="800"/>
-              </a:spcBef>
-              <a:spcAft>
-                <a:spcPts val="400"/>
-              </a:spcAft>
-              <a:defRPr sz="1500">
-                <a:solidFill>
-                  <a:srgbClr val="333333"/>
-                </a:solidFill>
-              </a:defRPr>
-            </a:pPr>
-            <a:r>
-              <a:t>  — Chế độ luyện tập, tiền kiểm tra, hậu kiểm tra</a:t>
-            </a:r>
-          </a:p>
-          <a:p>
-            <a:pPr>
-              <a:spcBef>
-                <a:spcPts val="800"/>
-              </a:spcBef>
-              <a:spcAft>
-                <a:spcPts val="400"/>
-              </a:spcAft>
-              <a:defRPr sz="1500">
-                <a:solidFill>
-                  <a:srgbClr val="333333"/>
-                </a:solidFill>
-              </a:defRPr>
-            </a:pPr>
-            <a:r>
-              <a:t>  — So sánh tiến bộ qua các lần kiểm tra</a:t>
-            </a:r>
-          </a:p>
-          <a:p>
-            <a:pPr>
-              <a:spcBef>
-                <a:spcPts val="800"/>
-              </a:spcBef>
-              <a:spcAft>
-                <a:spcPts val="400"/>
-              </a:spcAft>
-              <a:defRPr sz="1500">
-                <a:solidFill>
-                  <a:srgbClr val="333333"/>
-                </a:solidFill>
-              </a:defRPr>
-            </a:pPr>
-            <a:r>
-              <a:t>• </a:t>
-            </a:r>
-          </a:p>
-          <a:p>
-            <a:pPr>
-              <a:spcBef>
-                <a:spcPts val="800"/>
-              </a:spcBef>
-              <a:spcAft>
-                <a:spcPts val="400"/>
-              </a:spcAft>
-              <a:defRPr sz="1500">
-                <a:solidFill>
-                  <a:srgbClr val="333333"/>
-                </a:solidFill>
-              </a:defRPr>
-            </a:pPr>
-            <a:r>
-              <a:t>• Mô phỏng thay vì lý thuyết:</a:t>
-            </a:r>
-          </a:p>
-          <a:p>
-            <a:pPr>
-              <a:spcBef>
-                <a:spcPts val="800"/>
-              </a:spcBef>
-              <a:spcAft>
-                <a:spcPts val="400"/>
-              </a:spcAft>
-              <a:defRPr sz="1500">
-                <a:solidFill>
-                  <a:srgbClr val="333333"/>
-                </a:solidFill>
-              </a:defRPr>
-            </a:pPr>
-            <a:r>
-              <a:t>  — Perceptron học thật, trọng số thay đổi theo lỗi</a:t>
-            </a:r>
-          </a:p>
-          <a:p>
-            <a:pPr>
-              <a:spcBef>
-                <a:spcPts val="800"/>
-              </a:spcBef>
-              <a:spcAft>
-                <a:spcPts val="400"/>
-              </a:spcAft>
-              <a:defRPr sz="1500">
-                <a:solidFill>
-                  <a:srgbClr val="333333"/>
-                </a:solidFill>
-              </a:defRPr>
-            </a:pPr>
-            <a:r>
-              <a:t>  — Thiên kiến dữ liệu: 92% ảnh ngày → 100% đúng ngày, 59% đúng đêm</a:t>
-            </a:r>
-          </a:p>
-          <a:p>
-            <a:pPr>
-              <a:spcBef>
-                <a:spcPts val="800"/>
-              </a:spcBef>
-              <a:spcAft>
-                <a:spcPts val="400"/>
-              </a:spcAft>
-              <a:defRPr sz="1500">
-                <a:solidFill>
-                  <a:srgbClr val="333333"/>
-                </a:solidFill>
-              </a:defRPr>
-            </a:pPr>
-            <a:r>
-              <a:t>  — Mặt phẳng quyết định trong không gian 3D</a:t>
-            </a:r>
-          </a:p>
-          <a:p>
-            <a:pPr>
-              <a:spcBef>
-                <a:spcPts val="800"/>
-              </a:spcBef>
-              <a:spcAft>
-                <a:spcPts val="400"/>
-              </a:spcAft>
-              <a:defRPr sz="1500">
-                <a:solidFill>
-                  <a:srgbClr val="333333"/>
-                </a:solidFill>
-              </a:defRPr>
-            </a:pPr>
-            <a:r>
-              <a:t>• </a:t>
-            </a:r>
-          </a:p>
-          <a:p>
-            <a:pPr>
-              <a:spcBef>
-                <a:spcPts val="800"/>
-              </a:spcBef>
-              <a:spcAft>
-                <a:spcPts val="400"/>
-              </a:spcAft>
-              <a:defRPr sz="1500">
-                <a:solidFill>
-                  <a:srgbClr val="333333"/>
-                </a:solidFill>
-              </a:defRPr>
-            </a:pPr>
-            <a:r>
-              <a:t>• Không điểm số, chỉ minh chứng:</a:t>
-            </a:r>
-          </a:p>
-          <a:p>
-            <a:pPr>
-              <a:spcBef>
-                <a:spcPts val="800"/>
-              </a:spcBef>
-              <a:spcAft>
-                <a:spcPts val="400"/>
-              </a:spcAft>
-              <a:defRPr sz="1500">
-                <a:solidFill>
-                  <a:srgbClr val="333333"/>
-                </a:solidFill>
-              </a:defRPr>
-            </a:pPr>
-            <a:r>
-              <a:t>  — Khung 2422 cấm đầu điểm riêng, cấm xếp loại</a:t>
-            </a:r>
-          </a:p>
-          <a:p>
-            <a:pPr>
-              <a:spcBef>
-                <a:spcPts val="800"/>
-              </a:spcBef>
-              <a:spcAft>
-                <a:spcPts val="400"/>
-              </a:spcAft>
-              <a:defRPr sz="1500">
-                <a:solidFill>
-                  <a:srgbClr val="333333"/>
-                </a:solidFill>
-              </a:defRPr>
-            </a:pPr>
-            <a:r>
-              <a:t>  — Hiển thị 'đáp ứng tốt', 'đáp ứng một phần', 'cần luyện thêm'</a:t>
+                <a:spcPts val="1000"/>
+              </a:spcBef>
+              <a:spcAft>
+                <a:spcPts val="600"/>
+              </a:spcAft>
+              <a:defRPr sz="1600">
+                <a:solidFill>
+                  <a:srgbClr val="333333"/>
+                </a:solidFill>
+              </a:defRPr>
+            </a:pPr>
+            <a:r>
+              <a:t>97/97 tiêu chí nghiệm thu đạt</a:t>
+            </a:r>
+          </a:p>
+          <a:p>
+            <a:pPr>
+              <a:spcBef>
+                <a:spcPts val="1000"/>
+              </a:spcBef>
+              <a:spcAft>
+                <a:spcPts val="600"/>
+              </a:spcAft>
+              <a:defRPr sz="1600">
+                <a:solidFill>
+                  <a:srgbClr val="333333"/>
+                </a:solidFill>
+              </a:defRPr>
+            </a:pPr>
+          </a:p>
+          <a:p>
+            <a:pPr>
+              <a:spcBef>
+                <a:spcPts val="1000"/>
+              </a:spcBef>
+              <a:spcAft>
+                <a:spcPts val="600"/>
+              </a:spcAft>
+              <a:defRPr sz="1600">
+                <a:solidFill>
+                  <a:srgbClr val="333333"/>
+                </a:solidFill>
+              </a:defRPr>
+            </a:pPr>
+            <a:r>
+              <a:t>22/22 yêu cầu cần đạt lớp 10 được phủ</a:t>
+            </a:r>
+          </a:p>
+          <a:p>
+            <a:pPr>
+              <a:spcBef>
+                <a:spcPts val="1000"/>
+              </a:spcBef>
+              <a:spcAft>
+                <a:spcPts val="600"/>
+              </a:spcAft>
+              <a:defRPr sz="1600">
+                <a:solidFill>
+                  <a:srgbClr val="333333"/>
+                </a:solidFill>
+              </a:defRPr>
+            </a:pPr>
+          </a:p>
+          <a:p>
+            <a:pPr>
+              <a:spcBef>
+                <a:spcPts val="1000"/>
+              </a:spcBef>
+              <a:spcAft>
+                <a:spcPts val="600"/>
+              </a:spcAft>
+              <a:defRPr sz="1600">
+                <a:solidFill>
+                  <a:srgbClr val="333333"/>
+                </a:solidFill>
+              </a:defRPr>
+            </a:pPr>
+            <a:r>
+              <a:t>133 tệp trong manifest, hash khớp 100%</a:t>
+            </a:r>
+          </a:p>
+          <a:p>
+            <a:pPr>
+              <a:spcBef>
+                <a:spcPts val="1000"/>
+              </a:spcBef>
+              <a:spcAft>
+                <a:spcPts val="600"/>
+              </a:spcAft>
+              <a:defRPr sz="1600">
+                <a:solidFill>
+                  <a:srgbClr val="333333"/>
+                </a:solidFill>
+              </a:defRPr>
+            </a:pPr>
+          </a:p>
+          <a:p>
+            <a:pPr>
+              <a:spcBef>
+                <a:spcPts val="1000"/>
+              </a:spcBef>
+              <a:spcAft>
+                <a:spcPts val="600"/>
+              </a:spcAft>
+              <a:defRPr sz="1600">
+                <a:solidFill>
+                  <a:srgbClr val="333333"/>
+                </a:solidFill>
+              </a:defRPr>
+            </a:pPr>
+            <a:r>
+              <a:t>0 lỗi nội dung</a:t>
+            </a:r>
+          </a:p>
+          <a:p>
+            <a:pPr>
+              <a:spcBef>
+                <a:spcPts val="1000"/>
+              </a:spcBef>
+              <a:spcAft>
+                <a:spcPts val="600"/>
+              </a:spcAft>
+              <a:defRPr sz="1600">
+                <a:solidFill>
+                  <a:srgbClr val="333333"/>
+                </a:solidFill>
+              </a:defRPr>
+            </a:pPr>
+          </a:p>
+          <a:p>
+            <a:pPr>
+              <a:spcBef>
+                <a:spcPts val="1000"/>
+              </a:spcBef>
+              <a:spcAft>
+                <a:spcPts val="600"/>
+              </a:spcAft>
+              <a:defRPr sz="1600">
+                <a:solidFill>
+                  <a:srgbClr val="333333"/>
+                </a:solidFill>
+              </a:defRPr>
+            </a:pPr>
+            <a:r>
+              <a:t>Bộ kiểm tra mutation chứng minh cổng có răng:</a:t>
+            </a:r>
+          </a:p>
+          <a:p>
+            <a:pPr>
+              <a:spcBef>
+                <a:spcPts val="1000"/>
+              </a:spcBef>
+              <a:spcAft>
+                <a:spcPts val="600"/>
+              </a:spcAft>
+              <a:defRPr sz="1600">
+                <a:solidFill>
+                  <a:srgbClr val="333333"/>
+                </a:solidFill>
+              </a:defRPr>
+            </a:pPr>
+            <a:r>
+              <a:t>    48 ca phá được thiết kế để kiểm tra từng cổng</a:t>
+            </a:r>
+          </a:p>
+          <a:p>
+            <a:pPr>
+              <a:spcBef>
+                <a:spcPts val="1000"/>
+              </a:spcBef>
+              <a:spcAft>
+                <a:spcPts val="600"/>
+              </a:spcAft>
+              <a:defRPr sz="1600">
+                <a:solidFill>
+                  <a:srgbClr val="333333"/>
+                </a:solidFill>
+              </a:defRPr>
+            </a:pPr>
+            <a:r>
+              <a:t>    Phân biệt ca phá với ca đối chứng âm</a:t>
+            </a:r>
+          </a:p>
+          <a:p>
+            <a:pPr>
+              <a:spcBef>
+                <a:spcPts val="1000"/>
+              </a:spcBef>
+              <a:spcAft>
+                <a:spcPts val="600"/>
+              </a:spcAft>
+              <a:defRPr sz="1600">
+                <a:solidFill>
+                  <a:srgbClr val="333333"/>
+                </a:solidFill>
+              </a:defRPr>
+            </a:pPr>
+            <a:r>
+              <a:t>    Đếm theo cấp ca, không đếm dòng</a:t>
+            </a:r>
+          </a:p>
+          <a:p>
+            <a:pPr>
+              <a:spcBef>
+                <a:spcPts val="1000"/>
+              </a:spcBef>
+              <a:spcAft>
+                <a:spcPts val="600"/>
+              </a:spcAft>
+              <a:defRPr sz="1600">
+                <a:solidFill>
+                  <a:srgbClr val="333333"/>
+                </a:solidFill>
+              </a:defRPr>
+            </a:pPr>
+          </a:p>
+          <a:p>
+            <a:pPr>
+              <a:spcBef>
+                <a:spcPts val="1000"/>
+              </a:spcBef>
+              <a:spcAft>
+                <a:spcPts val="600"/>
+              </a:spcAft>
+              <a:defRPr sz="1600">
+                <a:solidFill>
+                  <a:srgbClr val="333333"/>
+                </a:solidFill>
+              </a:defRPr>
+            </a:pPr>
+            <a:r>
+              <a:t>Công cụ tự suy gốc repo, không ghi cứng đường dẫn máy tác giả</a:t>
             </a:r>
           </a:p>
         </p:txBody>

--- a/template_thuanhoa.pptx
+++ b/template_thuanhoa.pptx
@@ -3429,7 +3429,7 @@
             <a:avLst/>
           </a:prstGeom>
           <a:solidFill>
-            <a:srgbClr val="FFFFFF"/>
+            <a:srgbClr val="F2F7FC"/>
           </a:solidFill>
           <a:ln w="10160">
             <a:solidFill>
@@ -3475,8 +3475,8 @@
         </p:blipFill>
         <p:spPr>
           <a:xfrm>
-            <a:off x="640080" y="1234440"/>
-            <a:ext cx="10927080" cy="4206240"/>
+            <a:off x="3112516" y="1234440"/>
+            <a:ext cx="5982208" cy="4206240"/>
           </a:xfrm>
           <a:prstGeom prst="rect">
             <a:avLst/>
@@ -4451,7 +4451,7 @@
             <a:avLst/>
           </a:prstGeom>
           <a:solidFill>
-            <a:srgbClr val="FFFFFF"/>
+            <a:srgbClr val="F2F7FC"/>
           </a:solidFill>
           <a:ln w="10160">
             <a:solidFill>
@@ -4497,8 +4497,8 @@
         </p:blipFill>
         <p:spPr>
           <a:xfrm>
-            <a:off x="777240" y="3794760"/>
-            <a:ext cx="3749039" cy="1828800"/>
+            <a:off x="1351279" y="3794760"/>
+            <a:ext cx="2600960" cy="1828800"/>
           </a:xfrm>
           <a:prstGeom prst="rect">
             <a:avLst/>
@@ -4520,7 +4520,7 @@
             <a:avLst/>
           </a:prstGeom>
           <a:solidFill>
-            <a:srgbClr val="FFFFFF"/>
+            <a:srgbClr val="F2F7FC"/>
           </a:solidFill>
           <a:ln w="10160">
             <a:solidFill>
@@ -4566,8 +4566,8 @@
         </p:blipFill>
         <p:spPr>
           <a:xfrm>
-            <a:off x="4800600" y="3794760"/>
-            <a:ext cx="2743200" cy="1828800"/>
+            <a:off x="5749412" y="3794760"/>
+            <a:ext cx="845574" cy="1828800"/>
           </a:xfrm>
           <a:prstGeom prst="rect">
             <a:avLst/>
@@ -4589,7 +4589,7 @@
             <a:avLst/>
           </a:prstGeom>
           <a:solidFill>
-            <a:srgbClr val="FFFFFF"/>
+            <a:srgbClr val="F2F7FC"/>
           </a:solidFill>
           <a:ln w="10160">
             <a:solidFill>
@@ -4635,8 +4635,8 @@
         </p:blipFill>
         <p:spPr>
           <a:xfrm>
-            <a:off x="7818120" y="3794760"/>
-            <a:ext cx="3474720" cy="1828800"/>
+            <a:off x="9132692" y="3794760"/>
+            <a:ext cx="845574" cy="1828800"/>
           </a:xfrm>
           <a:prstGeom prst="rect">
             <a:avLst/>
@@ -6254,7 +6254,7 @@
             <a:avLst/>
           </a:prstGeom>
           <a:solidFill>
-            <a:srgbClr val="FFFFFF"/>
+            <a:srgbClr val="F2F7FC"/>
           </a:solidFill>
           <a:ln w="10160">
             <a:solidFill>
@@ -6300,8 +6300,8 @@
         </p:blipFill>
         <p:spPr>
           <a:xfrm>
-            <a:off x="1051560" y="4709160"/>
-            <a:ext cx="1828800" cy="1325880"/>
+            <a:off x="1659439" y="4709160"/>
+            <a:ext cx="613041" cy="1325880"/>
           </a:xfrm>
           <a:prstGeom prst="rect">
             <a:avLst/>
@@ -6323,7 +6323,7 @@
             <a:avLst/>
           </a:prstGeom>
           <a:solidFill>
-            <a:srgbClr val="FFFFFF"/>
+            <a:srgbClr val="F2F7FC"/>
           </a:solidFill>
           <a:ln w="10160">
             <a:solidFill>
@@ -6369,8 +6369,8 @@
         </p:blipFill>
         <p:spPr>
           <a:xfrm>
-            <a:off x="4526280" y="4709160"/>
-            <a:ext cx="1828800" cy="1325880"/>
+            <a:off x="4526280" y="4729162"/>
+            <a:ext cx="1828800" cy="1285875"/>
           </a:xfrm>
           <a:prstGeom prst="rect">
             <a:avLst/>
@@ -6392,7 +6392,7 @@
             <a:avLst/>
           </a:prstGeom>
           <a:solidFill>
-            <a:srgbClr val="FFFFFF"/>
+            <a:srgbClr val="F2F7FC"/>
           </a:solidFill>
           <a:ln w="10160">
             <a:solidFill>
@@ -6438,8 +6438,8 @@
         </p:blipFill>
         <p:spPr>
           <a:xfrm>
-            <a:off x="8001000" y="4709160"/>
-            <a:ext cx="1828800" cy="1325880"/>
+            <a:off x="8608879" y="4709160"/>
+            <a:ext cx="613041" cy="1325880"/>
           </a:xfrm>
           <a:prstGeom prst="rect">
             <a:avLst/>
@@ -6829,7 +6829,7 @@
             <a:avLst/>
           </a:prstGeom>
           <a:solidFill>
-            <a:srgbClr val="FFFFFF"/>
+            <a:srgbClr val="F2F7FC"/>
           </a:solidFill>
           <a:ln w="10160">
             <a:solidFill>
@@ -6875,8 +6875,8 @@
         </p:blipFill>
         <p:spPr>
           <a:xfrm>
-            <a:off x="640080" y="1828800"/>
-            <a:ext cx="5760720" cy="3566160"/>
+            <a:off x="984503" y="1828800"/>
+            <a:ext cx="5071872" cy="3566160"/>
           </a:xfrm>
           <a:prstGeom prst="rect">
             <a:avLst/>
@@ -8298,7 +8298,7 @@
             <a:avLst/>
           </a:prstGeom>
           <a:solidFill>
-            <a:srgbClr val="FFFFFF"/>
+            <a:srgbClr val="F2F7FC"/>
           </a:solidFill>
           <a:ln w="10160">
             <a:solidFill>
@@ -8344,8 +8344,8 @@
         </p:blipFill>
         <p:spPr>
           <a:xfrm>
-            <a:off x="822960" y="4343400"/>
-            <a:ext cx="1920240" cy="1691640"/>
+            <a:off x="1392001" y="4343400"/>
+            <a:ext cx="782156" cy="1691640"/>
           </a:xfrm>
           <a:prstGeom prst="rect">
             <a:avLst/>
@@ -8367,7 +8367,7 @@
             <a:avLst/>
           </a:prstGeom>
           <a:solidFill>
-            <a:srgbClr val="FFFFFF"/>
+            <a:srgbClr val="F2F7FC"/>
           </a:solidFill>
           <a:ln w="10160">
             <a:solidFill>
@@ -8413,8 +8413,8 @@
         </p:blipFill>
         <p:spPr>
           <a:xfrm>
-            <a:off x="3063240" y="4343400"/>
-            <a:ext cx="3749039" cy="1691640"/>
+            <a:off x="3734816" y="4343400"/>
+            <a:ext cx="2405888" cy="1691640"/>
           </a:xfrm>
           <a:prstGeom prst="rect">
             <a:avLst/>
@@ -8436,7 +8436,7 @@
             <a:avLst/>
           </a:prstGeom>
           <a:solidFill>
-            <a:srgbClr val="FFFFFF"/>
+            <a:srgbClr val="F2F7FC"/>
           </a:solidFill>
           <a:ln w="10160">
             <a:solidFill>
@@ -8482,8 +8482,8 @@
         </p:blipFill>
         <p:spPr>
           <a:xfrm>
-            <a:off x="7315200" y="4343400"/>
-            <a:ext cx="3566160" cy="1691640"/>
+            <a:off x="8707201" y="4343400"/>
+            <a:ext cx="782156" cy="1691640"/>
           </a:xfrm>
           <a:prstGeom prst="rect">
             <a:avLst/>
@@ -9449,7 +9449,7 @@
             <a:avLst/>
           </a:prstGeom>
           <a:solidFill>
-            <a:srgbClr val="FFFFFF"/>
+            <a:srgbClr val="F2F7FC"/>
           </a:solidFill>
           <a:ln w="10160">
             <a:solidFill>
@@ -9495,8 +9495,8 @@
         </p:blipFill>
         <p:spPr>
           <a:xfrm>
-            <a:off x="777240" y="3703320"/>
-            <a:ext cx="2240280" cy="1965960"/>
+            <a:off x="1442883" y="3703320"/>
+            <a:ext cx="908992" cy="1965960"/>
           </a:xfrm>
           <a:prstGeom prst="rect">
             <a:avLst/>
@@ -9518,7 +9518,7 @@
             <a:avLst/>
           </a:prstGeom>
           <a:solidFill>
-            <a:srgbClr val="FFFFFF"/>
+            <a:srgbClr val="F2F7FC"/>
           </a:solidFill>
           <a:ln w="10160">
             <a:solidFill>
@@ -9564,8 +9564,8 @@
         </p:blipFill>
         <p:spPr>
           <a:xfrm>
-            <a:off x="3566160" y="3703320"/>
-            <a:ext cx="2240280" cy="1965960"/>
+            <a:off x="4231803" y="3703320"/>
+            <a:ext cx="908992" cy="1965960"/>
           </a:xfrm>
           <a:prstGeom prst="rect">
             <a:avLst/>
@@ -9587,7 +9587,7 @@
             <a:avLst/>
           </a:prstGeom>
           <a:solidFill>
-            <a:srgbClr val="FFFFFF"/>
+            <a:srgbClr val="F2F7FC"/>
           </a:solidFill>
           <a:ln w="10160">
             <a:solidFill>
@@ -9633,8 +9633,8 @@
         </p:blipFill>
         <p:spPr>
           <a:xfrm>
-            <a:off x="6355079" y="3703320"/>
-            <a:ext cx="2240280" cy="1965960"/>
+            <a:off x="7020723" y="3703320"/>
+            <a:ext cx="908992" cy="1965960"/>
           </a:xfrm>
           <a:prstGeom prst="rect">
             <a:avLst/>
@@ -9656,7 +9656,7 @@
             <a:avLst/>
           </a:prstGeom>
           <a:solidFill>
-            <a:srgbClr val="FFFFFF"/>
+            <a:srgbClr val="F2F7FC"/>
           </a:solidFill>
           <a:ln w="10160">
             <a:solidFill>
@@ -9702,8 +9702,8 @@
         </p:blipFill>
         <p:spPr>
           <a:xfrm>
-            <a:off x="9143999" y="3703320"/>
-            <a:ext cx="2240280" cy="1965960"/>
+            <a:off x="9809643" y="3703320"/>
+            <a:ext cx="908992" cy="1965960"/>
           </a:xfrm>
           <a:prstGeom prst="rect">
             <a:avLst/>
@@ -10165,7 +10165,7 @@
             <a:avLst/>
           </a:prstGeom>
           <a:solidFill>
-            <a:srgbClr val="FFFFFF"/>
+            <a:srgbClr val="F2F7FC"/>
           </a:solidFill>
           <a:ln w="10160">
             <a:solidFill>
@@ -10211,8 +10211,8 @@
         </p:blipFill>
         <p:spPr>
           <a:xfrm>
-            <a:off x="685800" y="1828800"/>
-            <a:ext cx="2331720" cy="3611880"/>
+            <a:off x="1016655" y="1828800"/>
+            <a:ext cx="1670009" cy="3611880"/>
           </a:xfrm>
           <a:prstGeom prst="rect">
             <a:avLst/>
@@ -10270,7 +10270,7 @@
             <a:avLst/>
           </a:prstGeom>
           <a:solidFill>
-            <a:srgbClr val="FFFFFF"/>
+            <a:srgbClr val="F2F7FC"/>
           </a:solidFill>
           <a:ln w="10160">
             <a:solidFill>
@@ -10316,8 +10316,8 @@
         </p:blipFill>
         <p:spPr>
           <a:xfrm>
-            <a:off x="3474720" y="1828800"/>
-            <a:ext cx="2331720" cy="3611880"/>
+            <a:off x="3805575" y="1828800"/>
+            <a:ext cx="1670009" cy="3611880"/>
           </a:xfrm>
           <a:prstGeom prst="rect">
             <a:avLst/>
@@ -10375,7 +10375,7 @@
             <a:avLst/>
           </a:prstGeom>
           <a:solidFill>
-            <a:srgbClr val="FFFFFF"/>
+            <a:srgbClr val="F2F7FC"/>
           </a:solidFill>
           <a:ln w="10160">
             <a:solidFill>
@@ -10421,8 +10421,8 @@
         </p:blipFill>
         <p:spPr>
           <a:xfrm>
-            <a:off x="6263640" y="1828800"/>
-            <a:ext cx="2331720" cy="3611880"/>
+            <a:off x="6594495" y="1828800"/>
+            <a:ext cx="1670009" cy="3611880"/>
           </a:xfrm>
           <a:prstGeom prst="rect">
             <a:avLst/>
@@ -10480,7 +10480,7 @@
             <a:avLst/>
           </a:prstGeom>
           <a:solidFill>
-            <a:srgbClr val="FFFFFF"/>
+            <a:srgbClr val="F2F7FC"/>
           </a:solidFill>
           <a:ln w="10160">
             <a:solidFill>
@@ -10526,8 +10526,8 @@
         </p:blipFill>
         <p:spPr>
           <a:xfrm>
-            <a:off x="9052559" y="1828800"/>
-            <a:ext cx="2331720" cy="3611880"/>
+            <a:off x="9383415" y="1828800"/>
+            <a:ext cx="1670009" cy="3611880"/>
           </a:xfrm>
           <a:prstGeom prst="rect">
             <a:avLst/>
@@ -11025,7 +11025,7 @@
             <a:avLst/>
           </a:prstGeom>
           <a:solidFill>
-            <a:srgbClr val="FFFFFF"/>
+            <a:srgbClr val="F2F7FC"/>
           </a:solidFill>
           <a:ln w="10160">
             <a:solidFill>
@@ -11071,8 +11071,8 @@
         </p:blipFill>
         <p:spPr>
           <a:xfrm>
-            <a:off x="640080" y="1828800"/>
-            <a:ext cx="5760720" cy="3977639"/>
+            <a:off x="691895" y="1828800"/>
+            <a:ext cx="5657088" cy="3977639"/>
           </a:xfrm>
           <a:prstGeom prst="rect">
             <a:avLst/>
@@ -11942,7 +11942,7 @@
             <a:avLst/>
           </a:prstGeom>
           <a:solidFill>
-            <a:srgbClr val="FFFFFF"/>
+            <a:srgbClr val="F2F7FC"/>
           </a:solidFill>
           <a:ln w="10160">
             <a:solidFill>
@@ -11988,8 +11988,8 @@
         </p:blipFill>
         <p:spPr>
           <a:xfrm>
-            <a:off x="594360" y="1828800"/>
-            <a:ext cx="5394960" cy="3840480"/>
+            <a:off x="594360" y="1852374"/>
+            <a:ext cx="5394960" cy="3793331"/>
           </a:xfrm>
           <a:prstGeom prst="rect">
             <a:avLst/>
@@ -12011,7 +12011,7 @@
             <a:avLst/>
           </a:prstGeom>
           <a:solidFill>
-            <a:srgbClr val="FFFFFF"/>
+            <a:srgbClr val="F2F7FC"/>
           </a:solidFill>
           <a:ln w="10160">
             <a:solidFill>
@@ -12057,8 +12057,8 @@
         </p:blipFill>
         <p:spPr>
           <a:xfrm>
-            <a:off x="6217920" y="1828800"/>
-            <a:ext cx="5394960" cy="3840480"/>
+            <a:off x="6217920" y="1852374"/>
+            <a:ext cx="5394960" cy="3793331"/>
           </a:xfrm>
           <a:prstGeom prst="rect">
             <a:avLst/>
@@ -12529,7 +12529,7 @@
             <a:avLst/>
           </a:prstGeom>
           <a:solidFill>
-            <a:srgbClr val="FFFFFF"/>
+            <a:srgbClr val="F2F7FC"/>
           </a:solidFill>
           <a:ln w="10160">
             <a:solidFill>
@@ -12575,8 +12575,8 @@
         </p:blipFill>
         <p:spPr>
           <a:xfrm>
-            <a:off x="640080" y="1828800"/>
-            <a:ext cx="5486400" cy="3429000"/>
+            <a:off x="944879" y="1828800"/>
+            <a:ext cx="4876800" cy="3429000"/>
           </a:xfrm>
           <a:prstGeom prst="rect">
             <a:avLst/>
@@ -13950,7 +13950,7 @@
             <a:avLst/>
           </a:prstGeom>
           <a:solidFill>
-            <a:srgbClr val="FFFFFF"/>
+            <a:srgbClr val="F2F7FC"/>
           </a:solidFill>
           <a:ln w="10160">
             <a:solidFill>
@@ -13996,8 +13996,8 @@
         </p:blipFill>
         <p:spPr>
           <a:xfrm>
-            <a:off x="777240" y="3657600"/>
-            <a:ext cx="3291840" cy="2057400"/>
+            <a:off x="960119" y="3657600"/>
+            <a:ext cx="2926080" cy="2057400"/>
           </a:xfrm>
           <a:prstGeom prst="rect">
             <a:avLst/>
@@ -14019,7 +14019,7 @@
             <a:avLst/>
           </a:prstGeom>
           <a:solidFill>
-            <a:srgbClr val="FFFFFF"/>
+            <a:srgbClr val="F2F7FC"/>
           </a:solidFill>
           <a:ln w="10160">
             <a:solidFill>
@@ -14065,8 +14065,8 @@
         </p:blipFill>
         <p:spPr>
           <a:xfrm>
-            <a:off x="4434840" y="3657600"/>
-            <a:ext cx="3291840" cy="2057400"/>
+            <a:off x="4617720" y="3657600"/>
+            <a:ext cx="2926080" cy="2057400"/>
           </a:xfrm>
           <a:prstGeom prst="rect">
             <a:avLst/>
@@ -14088,7 +14088,7 @@
             <a:avLst/>
           </a:prstGeom>
           <a:solidFill>
-            <a:srgbClr val="FFFFFF"/>
+            <a:srgbClr val="F2F7FC"/>
           </a:solidFill>
           <a:ln w="10160">
             <a:solidFill>
@@ -14134,8 +14134,8 @@
         </p:blipFill>
         <p:spPr>
           <a:xfrm>
-            <a:off x="8092440" y="3657600"/>
-            <a:ext cx="3291840" cy="2057400"/>
+            <a:off x="9262724" y="3657600"/>
+            <a:ext cx="951270" cy="2057400"/>
           </a:xfrm>
           <a:prstGeom prst="rect">
             <a:avLst/>
@@ -14525,7 +14525,7 @@
             <a:avLst/>
           </a:prstGeom>
           <a:solidFill>
-            <a:srgbClr val="FFFFFF"/>
+            <a:srgbClr val="F2F7FC"/>
           </a:solidFill>
           <a:ln w="10160">
             <a:solidFill>
@@ -14571,8 +14571,8 @@
         </p:blipFill>
         <p:spPr>
           <a:xfrm>
-            <a:off x="685800" y="1828800"/>
-            <a:ext cx="4023360" cy="3931920"/>
+            <a:off x="1788487" y="1828800"/>
+            <a:ext cx="1817984" cy="3931920"/>
           </a:xfrm>
           <a:prstGeom prst="rect">
             <a:avLst/>
